--- a/submission/AI_Capstone_발표.pptx
+++ b/submission/AI_Capstone_발표.pptx
@@ -14,9 +14,10 @@
     <p:sldId id="262" r:id="rId8"/>
     <p:sldId id="263" r:id="rId9"/>
     <p:sldId id="264" r:id="rId10"/>
+    <p:sldId id="265" r:id="rId11"/>
   </p:sldIdLst>
   <p:notesMasterIdLst>
-    <p:notesMasterId r:id="rId11"/>
+    <p:notesMasterId r:id="rId12"/>
   </p:notesMasterIdLst>
   <p:sldSz cx="12192000" cy="6858000"/>
   <p:notesSz cx="6858000" cy="12192000"/>
@@ -534,6 +535,94 @@
             <a:fld id="{F7021451-1387-4CA6-816F-3879F97B5CBC}" type="slidenum">
               <a:rPr lang="en-US"/>
               <a:t>1</a:t>
+            </a:fld>
+            <a:endParaRPr lang="en-US"/>
+          </a:p>
+        </p:txBody>
+      </p:sp>
+    </p:spTree>
+    <p:extLst>
+      <p:ext uri="{BB962C8B-B14F-4D97-AF65-F5344CB8AC3E}">
+        <p14:creationId xmlns:p14="http://schemas.microsoft.com/office/powerpoint/2010/main" val="1024086991"/>
+      </p:ext>
+    </p:extLst>
+  </p:cSld>
+  <p:clrMapOvr>
+    <a:masterClrMapping/>
+  </p:clrMapOvr>
+</p:notes>
+</file>
+
+<file path=ppt/notesSlides/notesSlide10.xml><?xml version="1.0" encoding="utf-8"?>
+<p:notes xmlns:a="http://schemas.openxmlformats.org/drawingml/2006/main" xmlns:r="http://schemas.openxmlformats.org/officeDocument/2006/relationships" xmlns:p="http://schemas.openxmlformats.org/presentationml/2006/main">
+  <p:cSld>
+    <p:spTree>
+      <p:nvGrpSpPr>
+        <p:cNvPr id="1" name=""/>
+        <p:cNvGrpSpPr/>
+        <p:nvPr/>
+      </p:nvGrpSpPr>
+      <p:grpSpPr>
+        <a:xfrm>
+          <a:off x="0" y="0"/>
+          <a:ext cx="0" cy="0"/>
+          <a:chOff x="0" y="0"/>
+          <a:chExt cx="0" cy="0"/>
+        </a:xfrm>
+      </p:grpSpPr>
+      <p:sp>
+        <p:nvSpPr>
+          <p:cNvPr id="2" name="Slide Image Placeholder 1"/>
+          <p:cNvSpPr>
+            <a:spLocks noGrp="1" noRot="1" noChangeAspect="1"/>
+          </p:cNvSpPr>
+          <p:nvPr>
+            <p:ph type="sldImg"/>
+          </p:nvPr>
+        </p:nvSpPr>
+        <p:spPr/>
+      </p:sp>
+      <p:sp>
+        <p:nvSpPr>
+          <p:cNvPr id="3" name="Notes Placeholder 2"/>
+          <p:cNvSpPr>
+            <a:spLocks noGrp="1"/>
+          </p:cNvSpPr>
+          <p:nvPr>
+            <p:ph type="body" idx="1"/>
+          </p:nvPr>
+        </p:nvSpPr>
+        <p:spPr/>
+        <p:txBody>
+          <a:bodyPr/>
+          <a:lstStyle/>
+          <a:p>
+            <a:r>
+              <a:rPr lang="en-US" dirty="0"/>
+              <a:t>undefined</a:t>
+            </a:r>
+            <a:endParaRPr lang="en-US" dirty="0"/>
+          </a:p>
+        </p:txBody>
+      </p:sp>
+      <p:sp>
+        <p:nvSpPr>
+          <p:cNvPr id="4" name="Slide Number Placeholder 3"/>
+          <p:cNvSpPr>
+            <a:spLocks noGrp="1"/>
+          </p:cNvSpPr>
+          <p:nvPr>
+            <p:ph type="sldNum" sz="quarter" idx="10"/>
+          </p:nvPr>
+        </p:nvSpPr>
+        <p:spPr/>
+        <p:txBody>
+          <a:bodyPr/>
+          <a:lstStyle/>
+          <a:p>
+            <a:fld id="{F7021451-1387-4CA6-816F-3879F97B5CBC}" type="slidenum">
+              <a:rPr lang="en-US"/>
+              <a:t>10</a:t>
             </a:fld>
             <a:endParaRPr lang="en-US"/>
           </a:p>
@@ -2173,6 +2262,618 @@
 </p:sld>
 </file>
 
+<file path=ppt/slides/slide10.xml><?xml version="1.0" encoding="utf-8"?>
+<p:sld xmlns:a="http://schemas.openxmlformats.org/drawingml/2006/main" xmlns:r="http://schemas.openxmlformats.org/officeDocument/2006/relationships" xmlns:p="http://schemas.openxmlformats.org/presentationml/2006/main">
+  <p:cSld name="Slide 10">
+    <p:bg>
+      <p:bgPr>
+        <a:solidFill>
+          <a:srgbClr val="FFFFFF"/>
+        </a:solidFill>
+      </p:bgPr>
+    </p:bg>
+    <p:spTree>
+      <p:nvGrpSpPr>
+        <p:cNvPr id="1" name=""/>
+        <p:cNvGrpSpPr/>
+        <p:nvPr/>
+      </p:nvGrpSpPr>
+      <p:grpSpPr>
+        <a:xfrm>
+          <a:off x="0" y="0"/>
+          <a:ext cx="0" cy="0"/>
+          <a:chOff x="0" y="0"/>
+          <a:chExt cx="0" cy="0"/>
+        </a:xfrm>
+      </p:grpSpPr>
+      <p:sp>
+        <p:nvSpPr>
+          <p:cNvPr id="2" name="Text 0"/>
+          <p:cNvSpPr txBox="1"/>
+          <p:nvPr/>
+        </p:nvSpPr>
+        <p:spPr>
+          <a:xfrm>
+            <a:off x="594360" y="411480"/>
+            <a:ext cx="10972800" cy="868680"/>
+          </a:xfrm>
+          <a:prstGeom prst="rect">
+            <a:avLst/>
+          </a:prstGeom>
+          <a:noFill/>
+          <a:ln/>
+        </p:spPr>
+        <p:txBody>
+          <a:bodyPr wrap="square" lIns="0" tIns="0" rIns="0" bIns="0" rtlCol="0" anchor="ctr"/>
+          <a:lstStyle/>
+          <a:p>
+            <a:pPr indent="0" marL="0">
+              <a:buNone/>
+            </a:pPr>
+            <a:r>
+              <a:rPr lang="en-US" sz="3000" b="1" dirty="0">
+                <a:solidFill>
+                  <a:srgbClr val="203136"/>
+                </a:solidFill>
+                <a:latin typeface="Apple SD Gothic Neo" pitchFamily="34" charset="0"/>
+                <a:ea typeface="Apple SD Gothic Neo" pitchFamily="34" charset="-122"/>
+                <a:cs typeface="Apple SD Gothic Neo" pitchFamily="34" charset="-120"/>
+              </a:rPr>
+              <a:t>한계와 트레이드오프</a:t>
+            </a:r>
+            <a:endParaRPr lang="en-US" sz="3000" dirty="0"/>
+          </a:p>
+        </p:txBody>
+      </p:sp>
+      <p:sp>
+        <p:nvSpPr>
+          <p:cNvPr id="3" name="Text 1"/>
+          <p:cNvSpPr txBox="1"/>
+          <p:nvPr/>
+        </p:nvSpPr>
+        <p:spPr>
+          <a:xfrm>
+            <a:off x="612648" y="1280160"/>
+            <a:ext cx="10972800" cy="411480"/>
+          </a:xfrm>
+          <a:prstGeom prst="rect">
+            <a:avLst/>
+          </a:prstGeom>
+          <a:noFill/>
+          <a:ln/>
+        </p:spPr>
+        <p:txBody>
+          <a:bodyPr wrap="square" lIns="0" tIns="0" rIns="0" bIns="0" rtlCol="0" anchor="ctr"/>
+          <a:lstStyle/>
+          <a:p>
+            <a:pPr indent="0" marL="0">
+              <a:buNone/>
+            </a:pPr>
+            <a:r>
+              <a:rPr lang="en-US" sz="1500" dirty="0">
+                <a:solidFill>
+                  <a:srgbClr val="597078"/>
+                </a:solidFill>
+                <a:latin typeface="Apple SD Gothic Neo" pitchFamily="34" charset="0"/>
+                <a:ea typeface="Apple SD Gothic Neo" pitchFamily="34" charset="-122"/>
+                <a:cs typeface="Apple SD Gothic Neo" pitchFamily="34" charset="-120"/>
+              </a:rPr>
+              <a:t>10 한계 · 마무리 · 35초</a:t>
+            </a:r>
+            <a:endParaRPr lang="en-US" sz="1500" dirty="0"/>
+          </a:p>
+        </p:txBody>
+      </p:sp>
+      <p:sp>
+        <p:nvSpPr>
+          <p:cNvPr id="4" name="Text 2"/>
+          <p:cNvSpPr txBox="1"/>
+          <p:nvPr/>
+        </p:nvSpPr>
+        <p:spPr>
+          <a:xfrm>
+            <a:off x="612648" y="6446520"/>
+            <a:ext cx="9144000" cy="182880"/>
+          </a:xfrm>
+          <a:prstGeom prst="rect">
+            <a:avLst/>
+          </a:prstGeom>
+          <a:noFill/>
+          <a:ln/>
+        </p:spPr>
+        <p:txBody>
+          <a:bodyPr wrap="square" lIns="0" tIns="0" rIns="0" bIns="0" rtlCol="0" anchor="ctr"/>
+          <a:lstStyle/>
+          <a:p>
+            <a:pPr indent="0" marL="0">
+              <a:buNone/>
+            </a:pPr>
+            <a:r>
+              <a:rPr lang="en-US" sz="1000" dirty="0">
+                <a:solidFill>
+                  <a:srgbClr val="597078"/>
+                </a:solidFill>
+                <a:latin typeface="Apple SD Gothic Neo" pitchFamily="34" charset="0"/>
+                <a:ea typeface="Apple SD Gothic Neo" pitchFamily="34" charset="-122"/>
+                <a:cs typeface="Apple SD Gothic Neo" pitchFamily="34" charset="-120"/>
+              </a:rPr>
+              <a:t>AI CAPSTONE  /  개인과제</a:t>
+            </a:r>
+            <a:endParaRPr lang="en-US" sz="1000" dirty="0"/>
+          </a:p>
+        </p:txBody>
+      </p:sp>
+      <p:sp>
+        <p:nvSpPr>
+          <p:cNvPr id="5" name="Text 3"/>
+          <p:cNvSpPr txBox="1"/>
+          <p:nvPr/>
+        </p:nvSpPr>
+        <p:spPr>
+          <a:xfrm>
+            <a:off x="10972800" y="6446520"/>
+            <a:ext cx="548640" cy="182880"/>
+          </a:xfrm>
+          <a:prstGeom prst="rect">
+            <a:avLst/>
+          </a:prstGeom>
+          <a:noFill/>
+          <a:ln/>
+        </p:spPr>
+        <p:txBody>
+          <a:bodyPr wrap="square" lIns="0" tIns="0" rIns="0" bIns="0" rtlCol="0" anchor="ctr"/>
+          <a:lstStyle/>
+          <a:p>
+            <a:pPr indent="0" marL="0">
+              <a:buNone/>
+            </a:pPr>
+            <a:r>
+              <a:rPr lang="en-US" sz="1000" dirty="0">
+                <a:solidFill>
+                  <a:srgbClr val="597078"/>
+                </a:solidFill>
+                <a:latin typeface="Apple SD Gothic Neo" pitchFamily="34" charset="0"/>
+                <a:ea typeface="Apple SD Gothic Neo" pitchFamily="34" charset="-122"/>
+                <a:cs typeface="Apple SD Gothic Neo" pitchFamily="34" charset="-120"/>
+              </a:rPr>
+              <a:t>10</a:t>
+            </a:r>
+            <a:endParaRPr lang="en-US" sz="1000" dirty="0"/>
+          </a:p>
+        </p:txBody>
+      </p:sp>
+      <p:sp>
+        <p:nvSpPr>
+          <p:cNvPr id="7" name="Shape 4"/>
+          <p:cNvSpPr/>
+          <p:nvPr/>
+        </p:nvSpPr>
+        <p:spPr>
+          <a:xfrm>
+            <a:off x="640080" y="1920240"/>
+            <a:ext cx="5303520" cy="3200400"/>
+          </a:xfrm>
+          <a:prstGeom prst="roundRect">
+            <a:avLst>
+              <a:gd name="adj" fmla="val 4286"/>
+            </a:avLst>
+          </a:prstGeom>
+          <a:solidFill>
+            <a:srgbClr val="F7E8D7"/>
+          </a:solidFill>
+          <a:ln w="12700">
+            <a:solidFill>
+              <a:srgbClr val="F7E8D7"/>
+            </a:solidFill>
+            <a:prstDash val="solid"/>
+          </a:ln>
+        </p:spPr>
+      </p:sp>
+      <p:sp>
+        <p:nvSpPr>
+          <p:cNvPr id="8" name="Text 5"/>
+          <p:cNvSpPr txBox="1"/>
+          <p:nvPr/>
+        </p:nvSpPr>
+        <p:spPr>
+          <a:xfrm>
+            <a:off x="868680" y="2103120"/>
+            <a:ext cx="4846320" cy="502920"/>
+          </a:xfrm>
+          <a:prstGeom prst="rect">
+            <a:avLst/>
+          </a:prstGeom>
+          <a:noFill/>
+          <a:ln/>
+        </p:spPr>
+        <p:txBody>
+          <a:bodyPr wrap="square" lIns="0" tIns="0" rIns="0" bIns="0" rtlCol="0" anchor="ctr"/>
+          <a:lstStyle/>
+          <a:p>
+            <a:pPr indent="0" marL="0">
+              <a:buNone/>
+            </a:pPr>
+            <a:r>
+              <a:rPr lang="en-US" sz="2000" b="1" dirty="0">
+                <a:solidFill>
+                  <a:srgbClr val="AD453F"/>
+                </a:solidFill>
+                <a:latin typeface="Apple SD Gothic Neo" pitchFamily="34" charset="0"/>
+                <a:ea typeface="Apple SD Gothic Neo" pitchFamily="34" charset="-122"/>
+                <a:cs typeface="Apple SD Gothic Neo" pitchFamily="34" charset="-120"/>
+              </a:rPr>
+              <a:t>남은 한계</a:t>
+            </a:r>
+            <a:endParaRPr lang="en-US" sz="2000" dirty="0"/>
+          </a:p>
+        </p:txBody>
+      </p:sp>
+      <p:sp>
+        <p:nvSpPr>
+          <p:cNvPr id="9" name="Text 6"/>
+          <p:cNvSpPr txBox="1"/>
+          <p:nvPr/>
+        </p:nvSpPr>
+        <p:spPr>
+          <a:xfrm>
+            <a:off x="868680" y="2697480"/>
+            <a:ext cx="4846320" cy="2286000"/>
+          </a:xfrm>
+          <a:prstGeom prst="rect">
+            <a:avLst/>
+          </a:prstGeom>
+          <a:noFill/>
+          <a:ln/>
+        </p:spPr>
+        <p:txBody>
+          <a:bodyPr wrap="square" lIns="0" tIns="0" rIns="0" bIns="0" rtlCol="0" anchor="t"/>
+          <a:lstStyle/>
+          <a:p>
+            <a:pPr indent="0" marL="0">
+              <a:buNone/>
+            </a:pPr>
+            <a:r>
+              <a:rPr lang="en-US" sz="1500" dirty="0">
+                <a:solidFill>
+                  <a:srgbClr val="203136"/>
+                </a:solidFill>
+                <a:latin typeface="Apple SD Gothic Neo" pitchFamily="34" charset="0"/>
+                <a:ea typeface="Apple SD Gothic Neo" pitchFamily="34" charset="-122"/>
+                <a:cs typeface="Apple SD Gothic Neo" pitchFamily="34" charset="-120"/>
+              </a:rPr>
+              <a:t>표현 변화 → 누락·오탐 (규칙이</a:t>
+            </a:r>
+            <a:endParaRPr lang="en-US" sz="1500" dirty="0"/>
+          </a:p>
+          <a:p>
+            <a:pPr indent="0" marL="0">
+              <a:buNone/>
+            </a:pPr>
+            <a:r>
+              <a:rPr lang="en-US" sz="1500" dirty="0">
+                <a:solidFill>
+                  <a:srgbClr val="203136"/>
+                </a:solidFill>
+                <a:latin typeface="Apple SD Gothic Neo" pitchFamily="34" charset="0"/>
+                <a:ea typeface="Apple SD Gothic Neo" pitchFamily="34" charset="-122"/>
+                <a:cs typeface="Apple SD Gothic Neo" pitchFamily="34" charset="-120"/>
+              </a:rPr>
+              <a:t>틀린 값을 통과시킨 적 2회)</a:t>
+            </a:r>
+            <a:endParaRPr lang="en-US" sz="1500" dirty="0"/>
+          </a:p>
+          <a:p>
+            <a:pPr indent="0" marL="0">
+              <a:buNone/>
+            </a:pPr>
+            <a:r>
+              <a:rPr lang="en-US" sz="1500" dirty="0">
+                <a:solidFill>
+                  <a:srgbClr val="203136"/>
+                </a:solidFill>
+                <a:latin typeface="Apple SD Gothic Neo" pitchFamily="34" charset="0"/>
+                <a:ea typeface="Apple SD Gothic Neo" pitchFamily="34" charset="-122"/>
+                <a:cs typeface="Apple SD Gothic Neo" pitchFamily="34" charset="-120"/>
+              </a:rPr>
+              <a:t>원인 설명·알림 인용 미검증</a:t>
+            </a:r>
+            <a:endParaRPr lang="en-US" sz="1500" dirty="0"/>
+          </a:p>
+          <a:p>
+            <a:pPr indent="0" marL="0">
+              <a:buNone/>
+            </a:pPr>
+            <a:r>
+              <a:rPr lang="en-US" sz="1500" dirty="0">
+                <a:solidFill>
+                  <a:srgbClr val="203136"/>
+                </a:solidFill>
+                <a:latin typeface="Apple SD Gothic Neo" pitchFamily="34" charset="0"/>
+                <a:ea typeface="Apple SD Gothic Neo" pitchFamily="34" charset="-122"/>
+                <a:cs typeface="Apple SD Gothic Neo" pitchFamily="34" charset="-120"/>
+              </a:rPr>
+              <a:t>서브에이전트: LLM 판단 없음</a:t>
+            </a:r>
+            <a:endParaRPr lang="en-US" sz="1500" dirty="0"/>
+          </a:p>
+          <a:p>
+            <a:pPr indent="0" marL="0">
+              <a:buNone/>
+            </a:pPr>
+            <a:r>
+              <a:rPr lang="en-US" sz="1500" dirty="0">
+                <a:solidFill>
+                  <a:srgbClr val="203136"/>
+                </a:solidFill>
+                <a:latin typeface="Apple SD Gothic Neo" pitchFamily="34" charset="0"/>
+                <a:ea typeface="Apple SD Gothic Neo" pitchFamily="34" charset="-122"/>
+                <a:cs typeface="Apple SD Gothic Neo" pitchFamily="34" charset="-120"/>
+              </a:rPr>
+              <a:t>소규모 자체 평가 · OpenAI 미검증</a:t>
+            </a:r>
+            <a:endParaRPr lang="en-US" sz="1500" dirty="0"/>
+          </a:p>
+        </p:txBody>
+      </p:sp>
+      <p:sp>
+        <p:nvSpPr>
+          <p:cNvPr id="10" name="Shape 7"/>
+          <p:cNvSpPr/>
+          <p:nvPr/>
+        </p:nvSpPr>
+        <p:spPr>
+          <a:xfrm>
+            <a:off x="6217920" y="1920240"/>
+            <a:ext cx="5303520" cy="3200400"/>
+          </a:xfrm>
+          <a:prstGeom prst="roundRect">
+            <a:avLst>
+              <a:gd name="adj" fmla="val 4286"/>
+            </a:avLst>
+          </a:prstGeom>
+          <a:solidFill>
+            <a:srgbClr val="EDF5F3"/>
+          </a:solidFill>
+          <a:ln w="12700">
+            <a:solidFill>
+              <a:srgbClr val="EDF5F3"/>
+            </a:solidFill>
+            <a:prstDash val="solid"/>
+          </a:ln>
+        </p:spPr>
+      </p:sp>
+      <p:sp>
+        <p:nvSpPr>
+          <p:cNvPr id="11" name="Text 8"/>
+          <p:cNvSpPr txBox="1"/>
+          <p:nvPr/>
+        </p:nvSpPr>
+        <p:spPr>
+          <a:xfrm>
+            <a:off x="6446520" y="2103120"/>
+            <a:ext cx="4846320" cy="502920"/>
+          </a:xfrm>
+          <a:prstGeom prst="rect">
+            <a:avLst/>
+          </a:prstGeom>
+          <a:noFill/>
+          <a:ln/>
+        </p:spPr>
+        <p:txBody>
+          <a:bodyPr wrap="square" lIns="0" tIns="0" rIns="0" bIns="0" rtlCol="0" anchor="ctr"/>
+          <a:lstStyle/>
+          <a:p>
+            <a:pPr indent="0" marL="0">
+              <a:buNone/>
+            </a:pPr>
+            <a:r>
+              <a:rPr lang="en-US" sz="2000" b="1" dirty="0">
+                <a:solidFill>
+                  <a:srgbClr val="087F73"/>
+                </a:solidFill>
+                <a:latin typeface="Apple SD Gothic Neo" pitchFamily="34" charset="0"/>
+                <a:ea typeface="Apple SD Gothic Neo" pitchFamily="34" charset="-122"/>
+                <a:cs typeface="Apple SD Gothic Neo" pitchFamily="34" charset="-120"/>
+              </a:rPr>
+              <a:t>트레이드오프</a:t>
+            </a:r>
+            <a:endParaRPr lang="en-US" sz="2000" dirty="0"/>
+          </a:p>
+        </p:txBody>
+      </p:sp>
+      <p:sp>
+        <p:nvSpPr>
+          <p:cNvPr id="12" name="Text 9"/>
+          <p:cNvSpPr txBox="1"/>
+          <p:nvPr/>
+        </p:nvSpPr>
+        <p:spPr>
+          <a:xfrm>
+            <a:off x="6446520" y="2697480"/>
+            <a:ext cx="4846320" cy="2286000"/>
+          </a:xfrm>
+          <a:prstGeom prst="rect">
+            <a:avLst/>
+          </a:prstGeom>
+          <a:noFill/>
+          <a:ln/>
+        </p:spPr>
+        <p:txBody>
+          <a:bodyPr wrap="square" lIns="0" tIns="0" rIns="0" bIns="0" rtlCol="0" anchor="t"/>
+          <a:lstStyle/>
+          <a:p>
+            <a:pPr indent="0" marL="0">
+              <a:buNone/>
+            </a:pPr>
+            <a:r>
+              <a:rPr lang="en-US" sz="1500" dirty="0">
+                <a:solidFill>
+                  <a:srgbClr val="203136"/>
+                </a:solidFill>
+                <a:latin typeface="Apple SD Gothic Neo" pitchFamily="34" charset="0"/>
+                <a:ea typeface="Apple SD Gothic Neo" pitchFamily="34" charset="-122"/>
+                <a:cs typeface="Apple SD Gothic Neo" pitchFamily="34" charset="-120"/>
+              </a:rPr>
+              <a:t>시스템명 요구 완화 ↔ 수치 없는</a:t>
+            </a:r>
+            <a:endParaRPr lang="en-US" sz="1500" dirty="0"/>
+          </a:p>
+          <a:p>
+            <a:pPr indent="0" marL="0">
+              <a:buNone/>
+            </a:pPr>
+            <a:r>
+              <a:rPr lang="en-US" sz="1500" dirty="0">
+                <a:solidFill>
+                  <a:srgbClr val="203136"/>
+                </a:solidFill>
+                <a:latin typeface="Apple SD Gothic Neo" pitchFamily="34" charset="0"/>
+                <a:ea typeface="Apple SD Gothic Neo" pitchFamily="34" charset="-122"/>
+                <a:cs typeface="Apple SD Gothic Neo" pitchFamily="34" charset="-120"/>
+              </a:rPr>
+              <a:t>답변은 대조 없이 통과</a:t>
+            </a:r>
+            <a:endParaRPr lang="en-US" sz="1500" dirty="0"/>
+          </a:p>
+          <a:p>
+            <a:pPr indent="0" marL="0">
+              <a:buNone/>
+            </a:pPr>
+            <a:r>
+              <a:rPr lang="en-US" sz="1500" dirty="0">
+                <a:solidFill>
+                  <a:srgbClr val="203136"/>
+                </a:solidFill>
+                <a:latin typeface="Apple SD Gothic Neo" pitchFamily="34" charset="0"/>
+                <a:ea typeface="Apple SD Gothic Neo" pitchFamily="34" charset="-122"/>
+                <a:cs typeface="Apple SD Gothic Neo" pitchFamily="34" charset="-120"/>
+              </a:rPr>
+              <a:t>초안 비공개 ↔ 토큰 스트리밍 포기</a:t>
+            </a:r>
+            <a:endParaRPr lang="en-US" sz="1500" dirty="0"/>
+          </a:p>
+          <a:p>
+            <a:pPr indent="0" marL="0">
+              <a:buNone/>
+            </a:pPr>
+            <a:r>
+              <a:rPr lang="en-US" sz="1500" dirty="0">
+                <a:solidFill>
+                  <a:srgbClr val="203136"/>
+                </a:solidFill>
+                <a:latin typeface="Apple SD Gothic Neo" pitchFamily="34" charset="0"/>
+                <a:ea typeface="Apple SD Gothic Neo" pitchFamily="34" charset="-122"/>
+                <a:cs typeface="Apple SD Gothic Neo" pitchFamily="34" charset="-120"/>
+              </a:rPr>
+              <a:t>부분 자료 진행 ↔ 한계 표시 필요</a:t>
+            </a:r>
+            <a:endParaRPr lang="en-US" sz="1500" dirty="0"/>
+          </a:p>
+          <a:p>
+            <a:pPr indent="0" marL="0">
+              <a:buNone/>
+            </a:pPr>
+            <a:r>
+              <a:rPr lang="en-US" sz="1500" dirty="0">
+                <a:solidFill>
+                  <a:srgbClr val="203136"/>
+                </a:solidFill>
+                <a:latin typeface="Apple SD Gothic Neo" pitchFamily="34" charset="0"/>
+                <a:ea typeface="Apple SD Gothic Neo" pitchFamily="34" charset="-122"/>
+                <a:cs typeface="Apple SD Gothic Neo" pitchFamily="34" charset="-120"/>
+              </a:rPr>
+              <a:t>모듈화 ↔ 성능 이득 없음</a:t>
+            </a:r>
+            <a:endParaRPr lang="en-US" sz="1500" dirty="0"/>
+          </a:p>
+        </p:txBody>
+      </p:sp>
+      <p:sp>
+        <p:nvSpPr>
+          <p:cNvPr id="13" name="Text 10"/>
+          <p:cNvSpPr txBox="1"/>
+          <p:nvPr/>
+        </p:nvSpPr>
+        <p:spPr>
+          <a:xfrm>
+            <a:off x="640080" y="5257800"/>
+            <a:ext cx="10881360" cy="457200"/>
+          </a:xfrm>
+          <a:prstGeom prst="rect">
+            <a:avLst/>
+          </a:prstGeom>
+          <a:noFill/>
+          <a:ln/>
+        </p:spPr>
+        <p:txBody>
+          <a:bodyPr wrap="square" lIns="0" tIns="0" rIns="0" bIns="0" rtlCol="0" anchor="ctr"/>
+          <a:lstStyle/>
+          <a:p>
+            <a:pPr indent="0" marL="0">
+              <a:buNone/>
+            </a:pPr>
+            <a:r>
+              <a:rPr lang="en-US" sz="1800" b="1" dirty="0">
+                <a:solidFill>
+                  <a:srgbClr val="087F73"/>
+                </a:solidFill>
+                <a:latin typeface="Apple SD Gothic Neo" pitchFamily="34" charset="0"/>
+                <a:ea typeface="Apple SD Gothic Neo" pitchFamily="34" charset="-122"/>
+                <a:cs typeface="Apple SD Gothic Neo" pitchFamily="34" charset="-120"/>
+              </a:rPr>
+              <a:t>검사 통과 = 추출한 수치의 대조 결과 ≠ 답변 전체가 사실이라는 보장</a:t>
+            </a:r>
+            <a:endParaRPr lang="en-US" sz="1800" dirty="0"/>
+          </a:p>
+        </p:txBody>
+      </p:sp>
+      <p:sp>
+        <p:nvSpPr>
+          <p:cNvPr id="14" name="Text 11"/>
+          <p:cNvSpPr txBox="1"/>
+          <p:nvPr/>
+        </p:nvSpPr>
+        <p:spPr>
+          <a:xfrm>
+            <a:off x="640080" y="5760720"/>
+            <a:ext cx="10881360" cy="457200"/>
+          </a:xfrm>
+          <a:prstGeom prst="rect">
+            <a:avLst/>
+          </a:prstGeom>
+          <a:noFill/>
+          <a:ln/>
+        </p:spPr>
+        <p:txBody>
+          <a:bodyPr wrap="square" lIns="0" tIns="0" rIns="0" bIns="0" rtlCol="0" anchor="ctr"/>
+          <a:lstStyle/>
+          <a:p>
+            <a:pPr indent="0" marL="0">
+              <a:buNone/>
+            </a:pPr>
+            <a:r>
+              <a:rPr lang="en-US" sz="1400" dirty="0">
+                <a:solidFill>
+                  <a:srgbClr val="597078"/>
+                </a:solidFill>
+                <a:latin typeface="Apple SD Gothic Neo" pitchFamily="34" charset="0"/>
+                <a:ea typeface="Apple SD Gothic Neo" pitchFamily="34" charset="-122"/>
+                <a:cs typeface="Apple SD Gothic Neo" pitchFamily="34" charset="-120"/>
+              </a:rPr>
+              <a:t>향후 개선: 사용자에게 되묻는 대상 확인 · 독립 평가셋 · LLM 판정 병행 · LangSmith 기반 평가 · 임베딩 검색 확장(문서 증가 시 인덱스 전략)</a:t>
+            </a:r>
+            <a:endParaRPr lang="en-US" sz="1400" dirty="0"/>
+          </a:p>
+        </p:txBody>
+      </p:sp>
+    </p:spTree>
+  </p:cSld>
+  <p:clrMapOvr>
+    <a:masterClrMapping/>
+  </p:clrMapOvr>
+</p:sld>
+</file>
+
 <file path=ppt/slides/slide2.xml><?xml version="1.0" encoding="utf-8"?>
 <p:sld xmlns:a="http://schemas.openxmlformats.org/drawingml/2006/main" xmlns:r="http://schemas.openxmlformats.org/officeDocument/2006/relationships" xmlns:p="http://schemas.openxmlformats.org/presentationml/2006/main">
   <p:cSld name="Slide 2">
@@ -5139,7 +5840,7 @@
                 <a:ea typeface="Apple SD Gothic Neo" pitchFamily="34" charset="-122"/>
                 <a:cs typeface="Apple SD Gothic Neo" pitchFamily="34" charset="-120"/>
               </a:rPr>
-              <a:t>05 실행 캡처 · 25초</a:t>
+              <a:t>05 최종 실행 · 10초</a:t>
             </a:r>
             <a:endParaRPr lang="en-US" sz="1500" dirty="0"/>
           </a:p>
@@ -5507,7 +6208,7 @@
                 <a:ea typeface="Apple SD Gothic Neo" pitchFamily="34" charset="-122"/>
                 <a:cs typeface="Apple SD Gothic Neo" pitchFamily="34" charset="-120"/>
               </a:rPr>
-              <a:t>선택 전후 비교 화면</a:t>
+              <a:t>화면 개선: 검증 근거를 확인할 수 있게</a:t>
             </a:r>
             <a:endParaRPr lang="en-US" sz="3000" dirty="0"/>
           </a:p>
@@ -5546,7 +6247,7 @@
                 <a:ea typeface="Apple SD Gothic Neo" pitchFamily="34" charset="-122"/>
                 <a:cs typeface="Apple SD Gothic Neo" pitchFamily="34" charset="-120"/>
               </a:rPr>
-              <a:t>06 같은 틀린 답변, 같은 질문 · 35초</a:t>
+              <a:t>06 화면 설계 의도 · 제공받은 Vue 화면을 근거 확인 중심으로 개선 · 35초</a:t>
             </a:r>
             <a:endParaRPr lang="en-US" sz="1500" dirty="0"/>
           </a:p>
@@ -5630,48 +6331,9 @@
           </a:p>
         </p:txBody>
       </p:sp>
-      <p:sp>
-        <p:nvSpPr>
-          <p:cNvPr id="7" name="Text 4"/>
-          <p:cNvSpPr txBox="1"/>
-          <p:nvPr/>
-        </p:nvSpPr>
-        <p:spPr>
-          <a:xfrm>
-            <a:off x="640080" y="1783080"/>
-            <a:ext cx="4206240" cy="365760"/>
-          </a:xfrm>
-          <a:prstGeom prst="rect">
-            <a:avLst/>
-          </a:prstGeom>
-          <a:noFill/>
-          <a:ln/>
-        </p:spPr>
-        <p:txBody>
-          <a:bodyPr wrap="square" lIns="0" tIns="0" rIns="0" bIns="0" rtlCol="0" anchor="ctr"/>
-          <a:lstStyle/>
-          <a:p>
-            <a:pPr indent="0" marL="0">
-              <a:buNone/>
-            </a:pPr>
-            <a:r>
-              <a:rPr lang="en-US" sz="1600" b="1" dirty="0">
-                <a:solidFill>
-                  <a:srgbClr val="AD453F"/>
-                </a:solidFill>
-                <a:latin typeface="Apple SD Gothic Neo" pitchFamily="34" charset="0"/>
-                <a:ea typeface="Apple SD Gothic Neo" pitchFamily="34" charset="-122"/>
-                <a:cs typeface="Apple SD Gothic Neo" pitchFamily="34" charset="-120"/>
-              </a:rPr>
-              <a:t>개선 전 (legacy 검증)</a:t>
-            </a:r>
-            <a:endParaRPr lang="en-US" sz="1600" dirty="0"/>
-          </a:p>
-        </p:txBody>
-      </p:sp>
       <p:pic>
         <p:nvPicPr>
-          <p:cNvPr id="8" name="Image 0" descr="개선전_답변_확대.png">    </p:cNvPr>
+          <p:cNvPr id="7" name="Image 0" descr="화면설명_주석.png">    </p:cNvPr>
           <p:cNvPicPr>
             <a:picLocks noChangeAspect="1"/>
           </p:cNvPicPr>
@@ -5685,8 +6347,8 @@
         </p:blipFill>
         <p:spPr>
           <a:xfrm>
-            <a:off x="640080" y="2194560"/>
-            <a:ext cx="3931920" cy="1572768"/>
+            <a:off x="548640" y="1737360"/>
+            <a:ext cx="4389120" cy="4617720"/>
           </a:xfrm>
           <a:prstGeom prst="rect">
             <a:avLst/>
@@ -5695,30 +6357,740 @@
       </p:pic>
       <p:sp>
         <p:nvSpPr>
+          <p:cNvPr id="8" name="Shape 4"/>
+          <p:cNvSpPr/>
+          <p:nvPr/>
+        </p:nvSpPr>
+        <p:spPr>
+          <a:xfrm>
+            <a:off x="5257800" y="1819656"/>
+            <a:ext cx="384048" cy="384048"/>
+          </a:xfrm>
+          <a:prstGeom prst="ellipse">
+            <a:avLst/>
+          </a:prstGeom>
+          <a:solidFill>
+            <a:srgbClr val="087F73"/>
+          </a:solidFill>
+          <a:ln w="12700">
+            <a:solidFill>
+              <a:srgbClr val="087F73"/>
+            </a:solidFill>
+            <a:prstDash val="solid"/>
+          </a:ln>
+        </p:spPr>
+      </p:sp>
+      <p:sp>
+        <p:nvSpPr>
           <p:cNvPr id="9" name="Text 5"/>
-          <p:cNvSpPr txBox="1"/>
-          <p:nvPr/>
-        </p:nvSpPr>
-        <p:spPr>
-          <a:xfrm>
-            <a:off x="640080" y="3886200"/>
-            <a:ext cx="3931920" cy="731520"/>
-          </a:xfrm>
-          <a:prstGeom prst="rect">
-            <a:avLst/>
-          </a:prstGeom>
-          <a:noFill/>
-          <a:ln/>
-        </p:spPr>
-        <p:txBody>
-          <a:bodyPr wrap="square" lIns="0" tIns="0" rIns="0" bIns="0" rtlCol="0" anchor="t"/>
-          <a:lstStyle/>
-          <a:p>
-            <a:pPr indent="0" marL="0">
-              <a:buNone/>
-            </a:pPr>
-            <a:r>
-              <a:rPr lang="en-US" sz="1400" dirty="0">
+          <p:cNvSpPr/>
+          <p:nvPr/>
+        </p:nvSpPr>
+        <p:spPr>
+          <a:xfrm>
+            <a:off x="5257800" y="1819656"/>
+            <a:ext cx="384048" cy="384048"/>
+          </a:xfrm>
+          <a:prstGeom prst="rect">
+            <a:avLst/>
+          </a:prstGeom>
+          <a:noFill/>
+          <a:ln/>
+        </p:spPr>
+        <p:txBody>
+          <a:bodyPr wrap="square" lIns="0" tIns="0" rIns="0" bIns="0" rtlCol="0" anchor="ctr"/>
+          <a:lstStyle/>
+          <a:p>
+            <a:pPr algn="ctr" indent="0" marL="0">
+              <a:buNone/>
+            </a:pPr>
+            <a:r>
+              <a:rPr lang="en-US" sz="1400" b="1" dirty="0">
+                <a:solidFill>
+                  <a:srgbClr val="FFFFFF"/>
+                </a:solidFill>
+                <a:latin typeface="Apple SD Gothic Neo" pitchFamily="34" charset="0"/>
+                <a:ea typeface="Apple SD Gothic Neo" pitchFamily="34" charset="-122"/>
+                <a:cs typeface="Apple SD Gothic Neo" pitchFamily="34" charset="-120"/>
+              </a:rPr>
+              <a:t>1</a:t>
+            </a:r>
+            <a:endParaRPr lang="en-US" sz="1400" dirty="0"/>
+          </a:p>
+        </p:txBody>
+      </p:sp>
+      <p:sp>
+        <p:nvSpPr>
+          <p:cNvPr id="10" name="Text 6"/>
+          <p:cNvSpPr txBox="1"/>
+          <p:nvPr/>
+        </p:nvSpPr>
+        <p:spPr>
+          <a:xfrm>
+            <a:off x="5806440" y="1764792"/>
+            <a:ext cx="5852160" cy="274320"/>
+          </a:xfrm>
+          <a:prstGeom prst="rect">
+            <a:avLst/>
+          </a:prstGeom>
+          <a:noFill/>
+          <a:ln/>
+        </p:spPr>
+        <p:txBody>
+          <a:bodyPr wrap="square" lIns="0" tIns="0" rIns="0" bIns="0" rtlCol="0" anchor="ctr"/>
+          <a:lstStyle/>
+          <a:p>
+            <a:pPr indent="0" marL="0">
+              <a:buNone/>
+            </a:pPr>
+            <a:r>
+              <a:rPr lang="en-US" sz="1600" b="1" dirty="0">
+                <a:solidFill>
+                  <a:srgbClr val="087F73"/>
+                </a:solidFill>
+                <a:latin typeface="Apple SD Gothic Neo" pitchFamily="34" charset="0"/>
+                <a:ea typeface="Apple SD Gothic Neo" pitchFamily="34" charset="-122"/>
+                <a:cs typeface="Apple SD Gothic Neo" pitchFamily="34" charset="-120"/>
+              </a:rPr>
+              <a:t>진행 단계</a:t>
+            </a:r>
+            <a:endParaRPr lang="en-US" sz="1600" dirty="0"/>
+          </a:p>
+        </p:txBody>
+      </p:sp>
+      <p:sp>
+        <p:nvSpPr>
+          <p:cNvPr id="11" name="Text 7"/>
+          <p:cNvSpPr txBox="1"/>
+          <p:nvPr/>
+        </p:nvSpPr>
+        <p:spPr>
+          <a:xfrm>
+            <a:off x="5806440" y="2039112"/>
+            <a:ext cx="5852160" cy="256032"/>
+          </a:xfrm>
+          <a:prstGeom prst="rect">
+            <a:avLst/>
+          </a:prstGeom>
+          <a:noFill/>
+          <a:ln/>
+        </p:spPr>
+        <p:txBody>
+          <a:bodyPr wrap="square" lIns="0" tIns="0" rIns="0" bIns="0" rtlCol="0" anchor="ctr"/>
+          <a:lstStyle/>
+          <a:p>
+            <a:pPr indent="0" marL="0">
+              <a:buNone/>
+            </a:pPr>
+            <a:r>
+              <a:rPr lang="en-US" sz="1300" dirty="0">
+                <a:solidFill>
+                  <a:srgbClr val="597078"/>
+                </a:solidFill>
+                <a:latin typeface="Apple SD Gothic Neo" pitchFamily="34" charset="0"/>
+                <a:ea typeface="Apple SD Gothic Neo" pitchFamily="34" charset="-122"/>
+                <a:cs typeface="Apple SD Gothic Neo" pitchFamily="34" charset="-120"/>
+              </a:rPr>
+              <a:t>기다리는 동안 무엇을 하는지 보인다</a:t>
+            </a:r>
+            <a:endParaRPr lang="en-US" sz="1300" dirty="0"/>
+          </a:p>
+        </p:txBody>
+      </p:sp>
+      <p:sp>
+        <p:nvSpPr>
+          <p:cNvPr id="12" name="Shape 8"/>
+          <p:cNvSpPr/>
+          <p:nvPr/>
+        </p:nvSpPr>
+        <p:spPr>
+          <a:xfrm>
+            <a:off x="5257800" y="2404872"/>
+            <a:ext cx="384048" cy="384048"/>
+          </a:xfrm>
+          <a:prstGeom prst="ellipse">
+            <a:avLst/>
+          </a:prstGeom>
+          <a:solidFill>
+            <a:srgbClr val="087F73"/>
+          </a:solidFill>
+          <a:ln w="12700">
+            <a:solidFill>
+              <a:srgbClr val="087F73"/>
+            </a:solidFill>
+            <a:prstDash val="solid"/>
+          </a:ln>
+        </p:spPr>
+      </p:sp>
+      <p:sp>
+        <p:nvSpPr>
+          <p:cNvPr id="13" name="Text 9"/>
+          <p:cNvSpPr/>
+          <p:nvPr/>
+        </p:nvSpPr>
+        <p:spPr>
+          <a:xfrm>
+            <a:off x="5257800" y="2404872"/>
+            <a:ext cx="384048" cy="384048"/>
+          </a:xfrm>
+          <a:prstGeom prst="rect">
+            <a:avLst/>
+          </a:prstGeom>
+          <a:noFill/>
+          <a:ln/>
+        </p:spPr>
+        <p:txBody>
+          <a:bodyPr wrap="square" lIns="0" tIns="0" rIns="0" bIns="0" rtlCol="0" anchor="ctr"/>
+          <a:lstStyle/>
+          <a:p>
+            <a:pPr algn="ctr" indent="0" marL="0">
+              <a:buNone/>
+            </a:pPr>
+            <a:r>
+              <a:rPr lang="en-US" sz="1400" b="1" dirty="0">
+                <a:solidFill>
+                  <a:srgbClr val="FFFFFF"/>
+                </a:solidFill>
+                <a:latin typeface="Apple SD Gothic Neo" pitchFamily="34" charset="0"/>
+                <a:ea typeface="Apple SD Gothic Neo" pitchFamily="34" charset="-122"/>
+                <a:cs typeface="Apple SD Gothic Neo" pitchFamily="34" charset="-120"/>
+              </a:rPr>
+              <a:t>2</a:t>
+            </a:r>
+            <a:endParaRPr lang="en-US" sz="1400" dirty="0"/>
+          </a:p>
+        </p:txBody>
+      </p:sp>
+      <p:sp>
+        <p:nvSpPr>
+          <p:cNvPr id="14" name="Text 10"/>
+          <p:cNvSpPr txBox="1"/>
+          <p:nvPr/>
+        </p:nvSpPr>
+        <p:spPr>
+          <a:xfrm>
+            <a:off x="5806440" y="2350008"/>
+            <a:ext cx="5852160" cy="274320"/>
+          </a:xfrm>
+          <a:prstGeom prst="rect">
+            <a:avLst/>
+          </a:prstGeom>
+          <a:noFill/>
+          <a:ln/>
+        </p:spPr>
+        <p:txBody>
+          <a:bodyPr wrap="square" lIns="0" tIns="0" rIns="0" bIns="0" rtlCol="0" anchor="ctr"/>
+          <a:lstStyle/>
+          <a:p>
+            <a:pPr indent="0" marL="0">
+              <a:buNone/>
+            </a:pPr>
+            <a:r>
+              <a:rPr lang="en-US" sz="1600" b="1" dirty="0">
+                <a:solidFill>
+                  <a:srgbClr val="087F73"/>
+                </a:solidFill>
+                <a:latin typeface="Apple SD Gothic Neo" pitchFamily="34" charset="0"/>
+                <a:ea typeface="Apple SD Gothic Neo" pitchFamily="34" charset="-122"/>
+                <a:cs typeface="Apple SD Gothic Neo" pitchFamily="34" charset="-120"/>
+              </a:rPr>
+              <a:t>수집값 ↔ 답변값 비교표</a:t>
+            </a:r>
+            <a:endParaRPr lang="en-US" sz="1600" dirty="0"/>
+          </a:p>
+        </p:txBody>
+      </p:sp>
+      <p:sp>
+        <p:nvSpPr>
+          <p:cNvPr id="15" name="Text 11"/>
+          <p:cNvSpPr txBox="1"/>
+          <p:nvPr/>
+        </p:nvSpPr>
+        <p:spPr>
+          <a:xfrm>
+            <a:off x="5806440" y="2624328"/>
+            <a:ext cx="5852160" cy="256032"/>
+          </a:xfrm>
+          <a:prstGeom prst="rect">
+            <a:avLst/>
+          </a:prstGeom>
+          <a:noFill/>
+          <a:ln/>
+        </p:spPr>
+        <p:txBody>
+          <a:bodyPr wrap="square" lIns="0" tIns="0" rIns="0" bIns="0" rtlCol="0" anchor="ctr"/>
+          <a:lstStyle/>
+          <a:p>
+            <a:pPr indent="0" marL="0">
+              <a:buNone/>
+            </a:pPr>
+            <a:r>
+              <a:rPr lang="en-US" sz="1300" dirty="0">
+                <a:solidFill>
+                  <a:srgbClr val="597078"/>
+                </a:solidFill>
+                <a:latin typeface="Apple SD Gothic Neo" pitchFamily="34" charset="0"/>
+                <a:ea typeface="Apple SD Gothic Neo" pitchFamily="34" charset="-122"/>
+                <a:cs typeface="Apple SD Gothic Neo" pitchFamily="34" charset="-120"/>
+              </a:rPr>
+              <a:t>통과했다는 말만 믿지 않고 직접 비교한다</a:t>
+            </a:r>
+            <a:endParaRPr lang="en-US" sz="1300" dirty="0"/>
+          </a:p>
+        </p:txBody>
+      </p:sp>
+      <p:sp>
+        <p:nvSpPr>
+          <p:cNvPr id="16" name="Shape 12"/>
+          <p:cNvSpPr/>
+          <p:nvPr/>
+        </p:nvSpPr>
+        <p:spPr>
+          <a:xfrm>
+            <a:off x="5257800" y="2990088"/>
+            <a:ext cx="384048" cy="384048"/>
+          </a:xfrm>
+          <a:prstGeom prst="ellipse">
+            <a:avLst/>
+          </a:prstGeom>
+          <a:solidFill>
+            <a:srgbClr val="087F73"/>
+          </a:solidFill>
+          <a:ln w="12700">
+            <a:solidFill>
+              <a:srgbClr val="087F73"/>
+            </a:solidFill>
+            <a:prstDash val="solid"/>
+          </a:ln>
+        </p:spPr>
+      </p:sp>
+      <p:sp>
+        <p:nvSpPr>
+          <p:cNvPr id="17" name="Text 13"/>
+          <p:cNvSpPr/>
+          <p:nvPr/>
+        </p:nvSpPr>
+        <p:spPr>
+          <a:xfrm>
+            <a:off x="5257800" y="2990088"/>
+            <a:ext cx="384048" cy="384048"/>
+          </a:xfrm>
+          <a:prstGeom prst="rect">
+            <a:avLst/>
+          </a:prstGeom>
+          <a:noFill/>
+          <a:ln/>
+        </p:spPr>
+        <p:txBody>
+          <a:bodyPr wrap="square" lIns="0" tIns="0" rIns="0" bIns="0" rtlCol="0" anchor="ctr"/>
+          <a:lstStyle/>
+          <a:p>
+            <a:pPr algn="ctr" indent="0" marL="0">
+              <a:buNone/>
+            </a:pPr>
+            <a:r>
+              <a:rPr lang="en-US" sz="1400" b="1" dirty="0">
+                <a:solidFill>
+                  <a:srgbClr val="FFFFFF"/>
+                </a:solidFill>
+                <a:latin typeface="Apple SD Gothic Neo" pitchFamily="34" charset="0"/>
+                <a:ea typeface="Apple SD Gothic Neo" pitchFamily="34" charset="-122"/>
+                <a:cs typeface="Apple SD Gothic Neo" pitchFamily="34" charset="-120"/>
+              </a:rPr>
+              <a:t>3</a:t>
+            </a:r>
+            <a:endParaRPr lang="en-US" sz="1400" dirty="0"/>
+          </a:p>
+        </p:txBody>
+      </p:sp>
+      <p:sp>
+        <p:nvSpPr>
+          <p:cNvPr id="18" name="Text 14"/>
+          <p:cNvSpPr txBox="1"/>
+          <p:nvPr/>
+        </p:nvSpPr>
+        <p:spPr>
+          <a:xfrm>
+            <a:off x="5806440" y="2935224"/>
+            <a:ext cx="5852160" cy="274320"/>
+          </a:xfrm>
+          <a:prstGeom prst="rect">
+            <a:avLst/>
+          </a:prstGeom>
+          <a:noFill/>
+          <a:ln/>
+        </p:spPr>
+        <p:txBody>
+          <a:bodyPr wrap="square" lIns="0" tIns="0" rIns="0" bIns="0" rtlCol="0" anchor="ctr"/>
+          <a:lstStyle/>
+          <a:p>
+            <a:pPr indent="0" marL="0">
+              <a:buNone/>
+            </a:pPr>
+            <a:r>
+              <a:rPr lang="en-US" sz="1600" b="1" dirty="0">
+                <a:solidFill>
+                  <a:srgbClr val="087F73"/>
+                </a:solidFill>
+                <a:latin typeface="Apple SD Gothic Neo" pitchFamily="34" charset="0"/>
+                <a:ea typeface="Apple SD Gothic Neo" pitchFamily="34" charset="-122"/>
+                <a:cs typeface="Apple SD Gothic Neo" pitchFamily="34" charset="-120"/>
+              </a:rPr>
+              <a:t>검색 후보와 유사도</a:t>
+            </a:r>
+            <a:endParaRPr lang="en-US" sz="1600" dirty="0"/>
+          </a:p>
+        </p:txBody>
+      </p:sp>
+      <p:sp>
+        <p:nvSpPr>
+          <p:cNvPr id="19" name="Text 15"/>
+          <p:cNvSpPr txBox="1"/>
+          <p:nvPr/>
+        </p:nvSpPr>
+        <p:spPr>
+          <a:xfrm>
+            <a:off x="5806440" y="3209544"/>
+            <a:ext cx="5852160" cy="256032"/>
+          </a:xfrm>
+          <a:prstGeom prst="rect">
+            <a:avLst/>
+          </a:prstGeom>
+          <a:noFill/>
+          <a:ln/>
+        </p:spPr>
+        <p:txBody>
+          <a:bodyPr wrap="square" lIns="0" tIns="0" rIns="0" bIns="0" rtlCol="0" anchor="ctr"/>
+          <a:lstStyle/>
+          <a:p>
+            <a:pPr indent="0" marL="0">
+              <a:buNone/>
+            </a:pPr>
+            <a:r>
+              <a:rPr lang="en-US" sz="1300" dirty="0">
+                <a:solidFill>
+                  <a:srgbClr val="597078"/>
+                </a:solidFill>
+                <a:latin typeface="Apple SD Gothic Neo" pitchFamily="34" charset="0"/>
+                <a:ea typeface="Apple SD Gothic Neo" pitchFamily="34" charset="-122"/>
+                <a:cs typeface="Apple SD Gothic Neo" pitchFamily="34" charset="-120"/>
+              </a:rPr>
+              <a:t>어떤 매뉴얼이 선택됐는지 확인한다 (점수는 확률이 아님)</a:t>
+            </a:r>
+            <a:endParaRPr lang="en-US" sz="1300" dirty="0"/>
+          </a:p>
+        </p:txBody>
+      </p:sp>
+      <p:sp>
+        <p:nvSpPr>
+          <p:cNvPr id="20" name="Shape 16"/>
+          <p:cNvSpPr/>
+          <p:nvPr/>
+        </p:nvSpPr>
+        <p:spPr>
+          <a:xfrm>
+            <a:off x="5257800" y="3575304"/>
+            <a:ext cx="384048" cy="384048"/>
+          </a:xfrm>
+          <a:prstGeom prst="ellipse">
+            <a:avLst/>
+          </a:prstGeom>
+          <a:solidFill>
+            <a:srgbClr val="087F73"/>
+          </a:solidFill>
+          <a:ln w="12700">
+            <a:solidFill>
+              <a:srgbClr val="087F73"/>
+            </a:solidFill>
+            <a:prstDash val="solid"/>
+          </a:ln>
+        </p:spPr>
+      </p:sp>
+      <p:sp>
+        <p:nvSpPr>
+          <p:cNvPr id="21" name="Text 17"/>
+          <p:cNvSpPr/>
+          <p:nvPr/>
+        </p:nvSpPr>
+        <p:spPr>
+          <a:xfrm>
+            <a:off x="5257800" y="3575304"/>
+            <a:ext cx="384048" cy="384048"/>
+          </a:xfrm>
+          <a:prstGeom prst="rect">
+            <a:avLst/>
+          </a:prstGeom>
+          <a:noFill/>
+          <a:ln/>
+        </p:spPr>
+        <p:txBody>
+          <a:bodyPr wrap="square" lIns="0" tIns="0" rIns="0" bIns="0" rtlCol="0" anchor="ctr"/>
+          <a:lstStyle/>
+          <a:p>
+            <a:pPr algn="ctr" indent="0" marL="0">
+              <a:buNone/>
+            </a:pPr>
+            <a:r>
+              <a:rPr lang="en-US" sz="1400" b="1" dirty="0">
+                <a:solidFill>
+                  <a:srgbClr val="FFFFFF"/>
+                </a:solidFill>
+                <a:latin typeface="Apple SD Gothic Neo" pitchFamily="34" charset="0"/>
+                <a:ea typeface="Apple SD Gothic Neo" pitchFamily="34" charset="-122"/>
+                <a:cs typeface="Apple SD Gothic Neo" pitchFamily="34" charset="-120"/>
+              </a:rPr>
+              <a:t>4</a:t>
+            </a:r>
+            <a:endParaRPr lang="en-US" sz="1400" dirty="0"/>
+          </a:p>
+        </p:txBody>
+      </p:sp>
+      <p:sp>
+        <p:nvSpPr>
+          <p:cNvPr id="22" name="Text 18"/>
+          <p:cNvSpPr txBox="1"/>
+          <p:nvPr/>
+        </p:nvSpPr>
+        <p:spPr>
+          <a:xfrm>
+            <a:off x="5806440" y="3520440"/>
+            <a:ext cx="5852160" cy="274320"/>
+          </a:xfrm>
+          <a:prstGeom prst="rect">
+            <a:avLst/>
+          </a:prstGeom>
+          <a:noFill/>
+          <a:ln/>
+        </p:spPr>
+        <p:txBody>
+          <a:bodyPr wrap="square" lIns="0" tIns="0" rIns="0" bIns="0" rtlCol="0" anchor="ctr"/>
+          <a:lstStyle/>
+          <a:p>
+            <a:pPr indent="0" marL="0">
+              <a:buNone/>
+            </a:pPr>
+            <a:r>
+              <a:rPr lang="en-US" sz="1600" b="1" dirty="0">
+                <a:solidFill>
+                  <a:srgbClr val="087F73"/>
+                </a:solidFill>
+                <a:latin typeface="Apple SD Gothic Neo" pitchFamily="34" charset="0"/>
+                <a:ea typeface="Apple SD Gothic Neo" pitchFamily="34" charset="-122"/>
+                <a:cs typeface="Apple SD Gothic Neo" pitchFamily="34" charset="-120"/>
+              </a:rPr>
+              <a:t>상태 구분</a:t>
+            </a:r>
+            <a:endParaRPr lang="en-US" sz="1600" dirty="0"/>
+          </a:p>
+        </p:txBody>
+      </p:sp>
+      <p:sp>
+        <p:nvSpPr>
+          <p:cNvPr id="23" name="Text 19"/>
+          <p:cNvSpPr txBox="1"/>
+          <p:nvPr/>
+        </p:nvSpPr>
+        <p:spPr>
+          <a:xfrm>
+            <a:off x="5806440" y="3794760"/>
+            <a:ext cx="5852160" cy="256032"/>
+          </a:xfrm>
+          <a:prstGeom prst="rect">
+            <a:avLst/>
+          </a:prstGeom>
+          <a:noFill/>
+          <a:ln/>
+        </p:spPr>
+        <p:txBody>
+          <a:bodyPr wrap="square" lIns="0" tIns="0" rIns="0" bIns="0" rtlCol="0" anchor="ctr"/>
+          <a:lstStyle/>
+          <a:p>
+            <a:pPr indent="0" marL="0">
+              <a:buNone/>
+            </a:pPr>
+            <a:r>
+              <a:rPr lang="en-US" sz="1300" dirty="0">
+                <a:solidFill>
+                  <a:srgbClr val="597078"/>
+                </a:solidFill>
+                <a:latin typeface="Apple SD Gothic Neo" pitchFamily="34" charset="0"/>
+                <a:ea typeface="Apple SD Gothic Neo" pitchFamily="34" charset="-122"/>
+                <a:cs typeface="Apple SD Gothic Neo" pitchFamily="34" charset="-120"/>
+              </a:rPr>
+              <a:t>정상, 검증 실패, 자료 부족을 다르게 안내한다</a:t>
+            </a:r>
+            <a:endParaRPr lang="en-US" sz="1300" dirty="0"/>
+          </a:p>
+        </p:txBody>
+      </p:sp>
+      <p:sp>
+        <p:nvSpPr>
+          <p:cNvPr id="24" name="Shape 20"/>
+          <p:cNvSpPr/>
+          <p:nvPr/>
+        </p:nvSpPr>
+        <p:spPr>
+          <a:xfrm>
+            <a:off x="5257800" y="4160520"/>
+            <a:ext cx="384048" cy="384048"/>
+          </a:xfrm>
+          <a:prstGeom prst="ellipse">
+            <a:avLst/>
+          </a:prstGeom>
+          <a:solidFill>
+            <a:srgbClr val="087F73"/>
+          </a:solidFill>
+          <a:ln w="12700">
+            <a:solidFill>
+              <a:srgbClr val="087F73"/>
+            </a:solidFill>
+            <a:prstDash val="solid"/>
+          </a:ln>
+        </p:spPr>
+      </p:sp>
+      <p:sp>
+        <p:nvSpPr>
+          <p:cNvPr id="25" name="Text 21"/>
+          <p:cNvSpPr/>
+          <p:nvPr/>
+        </p:nvSpPr>
+        <p:spPr>
+          <a:xfrm>
+            <a:off x="5257800" y="4160520"/>
+            <a:ext cx="384048" cy="384048"/>
+          </a:xfrm>
+          <a:prstGeom prst="rect">
+            <a:avLst/>
+          </a:prstGeom>
+          <a:noFill/>
+          <a:ln/>
+        </p:spPr>
+        <p:txBody>
+          <a:bodyPr wrap="square" lIns="0" tIns="0" rIns="0" bIns="0" rtlCol="0" anchor="ctr"/>
+          <a:lstStyle/>
+          <a:p>
+            <a:pPr algn="ctr" indent="0" marL="0">
+              <a:buNone/>
+            </a:pPr>
+            <a:r>
+              <a:rPr lang="en-US" sz="1400" b="1" dirty="0">
+                <a:solidFill>
+                  <a:srgbClr val="FFFFFF"/>
+                </a:solidFill>
+                <a:latin typeface="Apple SD Gothic Neo" pitchFamily="34" charset="0"/>
+                <a:ea typeface="Apple SD Gothic Neo" pitchFamily="34" charset="-122"/>
+                <a:cs typeface="Apple SD Gothic Neo" pitchFamily="34" charset="-120"/>
+              </a:rPr>
+              <a:t>5</a:t>
+            </a:r>
+            <a:endParaRPr lang="en-US" sz="1400" dirty="0"/>
+          </a:p>
+        </p:txBody>
+      </p:sp>
+      <p:sp>
+        <p:nvSpPr>
+          <p:cNvPr id="26" name="Text 22"/>
+          <p:cNvSpPr txBox="1"/>
+          <p:nvPr/>
+        </p:nvSpPr>
+        <p:spPr>
+          <a:xfrm>
+            <a:off x="5806440" y="4105656"/>
+            <a:ext cx="5852160" cy="274320"/>
+          </a:xfrm>
+          <a:prstGeom prst="rect">
+            <a:avLst/>
+          </a:prstGeom>
+          <a:noFill/>
+          <a:ln/>
+        </p:spPr>
+        <p:txBody>
+          <a:bodyPr wrap="square" lIns="0" tIns="0" rIns="0" bIns="0" rtlCol="0" anchor="ctr"/>
+          <a:lstStyle/>
+          <a:p>
+            <a:pPr indent="0" marL="0">
+              <a:buNone/>
+            </a:pPr>
+            <a:r>
+              <a:rPr lang="en-US" sz="1600" b="1" dirty="0">
+                <a:solidFill>
+                  <a:srgbClr val="087F73"/>
+                </a:solidFill>
+                <a:latin typeface="Apple SD Gothic Neo" pitchFamily="34" charset="0"/>
+                <a:ea typeface="Apple SD Gothic Neo" pitchFamily="34" charset="-122"/>
+                <a:cs typeface="Apple SD Gothic Neo" pitchFamily="34" charset="-120"/>
+              </a:rPr>
+              <a:t>초안 비공개</a:t>
+            </a:r>
+            <a:endParaRPr lang="en-US" sz="1600" dirty="0"/>
+          </a:p>
+        </p:txBody>
+      </p:sp>
+      <p:sp>
+        <p:nvSpPr>
+          <p:cNvPr id="27" name="Text 23"/>
+          <p:cNvSpPr txBox="1"/>
+          <p:nvPr/>
+        </p:nvSpPr>
+        <p:spPr>
+          <a:xfrm>
+            <a:off x="5806440" y="4379976"/>
+            <a:ext cx="5852160" cy="256032"/>
+          </a:xfrm>
+          <a:prstGeom prst="rect">
+            <a:avLst/>
+          </a:prstGeom>
+          <a:noFill/>
+          <a:ln/>
+        </p:spPr>
+        <p:txBody>
+          <a:bodyPr wrap="square" lIns="0" tIns="0" rIns="0" bIns="0" rtlCol="0" anchor="ctr"/>
+          <a:lstStyle/>
+          <a:p>
+            <a:pPr indent="0" marL="0">
+              <a:buNone/>
+            </a:pPr>
+            <a:r>
+              <a:rPr lang="en-US" sz="1300" dirty="0">
+                <a:solidFill>
+                  <a:srgbClr val="597078"/>
+                </a:solidFill>
+                <a:latin typeface="Apple SD Gothic Neo" pitchFamily="34" charset="0"/>
+                <a:ea typeface="Apple SD Gothic Neo" pitchFamily="34" charset="-122"/>
+                <a:cs typeface="Apple SD Gothic Neo" pitchFamily="34" charset="-120"/>
+              </a:rPr>
+              <a:t>반려될 초안은 먼저 보여주지 않는다</a:t>
+            </a:r>
+            <a:endParaRPr lang="en-US" sz="1300" dirty="0"/>
+          </a:p>
+        </p:txBody>
+      </p:sp>
+      <p:sp>
+        <p:nvSpPr>
+          <p:cNvPr id="28" name="Text 24"/>
+          <p:cNvSpPr txBox="1"/>
+          <p:nvPr/>
+        </p:nvSpPr>
+        <p:spPr>
+          <a:xfrm>
+            <a:off x="5257800" y="4617720"/>
+            <a:ext cx="2468880" cy="274320"/>
+          </a:xfrm>
+          <a:prstGeom prst="rect">
+            <a:avLst/>
+          </a:prstGeom>
+          <a:noFill/>
+          <a:ln/>
+        </p:spPr>
+        <p:txBody>
+          <a:bodyPr wrap="square" lIns="0" tIns="0" rIns="0" bIns="0" rtlCol="0" anchor="ctr"/>
+          <a:lstStyle/>
+          <a:p>
+            <a:pPr indent="0" marL="0">
+              <a:buNone/>
+            </a:pPr>
+            <a:r>
+              <a:rPr lang="en-US" sz="1300" b="1" dirty="0">
                 <a:solidFill>
                   <a:srgbClr val="AD453F"/>
                 </a:solidFill>
@@ -5726,54 +7098,79 @@
                 <a:ea typeface="Apple SD Gothic Neo" pitchFamily="34" charset="-122"/>
                 <a:cs typeface="Apple SD Gothic Neo" pitchFamily="34" charset="-120"/>
               </a:rPr>
-              <a:t>→ 틀린 CPU(100.5%·54.8%)가 근거 표시 없이 최종 응답</a:t>
-            </a:r>
-            <a:endParaRPr lang="en-US" sz="1400" dirty="0"/>
-          </a:p>
-        </p:txBody>
-      </p:sp>
-      <p:sp>
-        <p:nvSpPr>
-          <p:cNvPr id="10" name="Text 6"/>
-          <p:cNvSpPr txBox="1"/>
-          <p:nvPr/>
-        </p:nvSpPr>
-        <p:spPr>
-          <a:xfrm>
-            <a:off x="5257800" y="1783080"/>
-            <a:ext cx="4206240" cy="365760"/>
-          </a:xfrm>
-          <a:prstGeom prst="rect">
-            <a:avLst/>
-          </a:prstGeom>
-          <a:noFill/>
-          <a:ln/>
-        </p:spPr>
-        <p:txBody>
-          <a:bodyPr wrap="square" lIns="0" tIns="0" rIns="0" bIns="0" rtlCol="0" anchor="ctr"/>
-          <a:lstStyle/>
-          <a:p>
-            <a:pPr indent="0" marL="0">
-              <a:buNone/>
-            </a:pPr>
-            <a:r>
-              <a:rPr lang="en-US" sz="1600" b="1" dirty="0">
-                <a:solidFill>
-                  <a:srgbClr val="087F73"/>
-                </a:solidFill>
-                <a:latin typeface="Apple SD Gothic Neo" pitchFamily="34" charset="0"/>
-                <a:ea typeface="Apple SD Gothic Neo" pitchFamily="34" charset="-122"/>
-                <a:cs typeface="Apple SD Gothic Neo" pitchFamily="34" charset="-120"/>
-              </a:rPr>
-              <a:t>개선 후 (근거 대조 검증)</a:t>
-            </a:r>
-            <a:endParaRPr lang="en-US" sz="1600" dirty="0"/>
-          </a:p>
-        </p:txBody>
+              <a:t>검증 실패</a:t>
+            </a:r>
+            <a:endParaRPr lang="en-US" sz="1300" dirty="0"/>
+          </a:p>
+        </p:txBody>
+      </p:sp>
+      <p:sp>
+        <p:nvSpPr>
+          <p:cNvPr id="29" name="Text 25"/>
+          <p:cNvSpPr txBox="1"/>
+          <p:nvPr/>
+        </p:nvSpPr>
+        <p:spPr>
+          <a:xfrm>
+            <a:off x="8138160" y="4617720"/>
+            <a:ext cx="3200400" cy="274320"/>
+          </a:xfrm>
+          <a:prstGeom prst="rect">
+            <a:avLst/>
+          </a:prstGeom>
+          <a:noFill/>
+          <a:ln/>
+        </p:spPr>
+        <p:txBody>
+          <a:bodyPr wrap="square" lIns="0" tIns="0" rIns="0" bIns="0" rtlCol="0" anchor="ctr"/>
+          <a:lstStyle/>
+          <a:p>
+            <a:pPr indent="0" marL="0">
+              <a:buNone/>
+            </a:pPr>
+            <a:r>
+              <a:rPr lang="en-US" sz="1300" b="1" dirty="0">
+                <a:solidFill>
+                  <a:srgbClr val="AD453F"/>
+                </a:solidFill>
+                <a:latin typeface="Apple SD Gothic Neo" pitchFamily="34" charset="0"/>
+                <a:ea typeface="Apple SD Gothic Neo" pitchFamily="34" charset="-122"/>
+                <a:cs typeface="Apple SD Gothic Neo" pitchFamily="34" charset="-120"/>
+              </a:rPr>
+              <a:t>자료 부족 · 검증 불가</a:t>
+            </a:r>
+            <a:endParaRPr lang="en-US" sz="1300" dirty="0"/>
+          </a:p>
+        </p:txBody>
+      </p:sp>
+      <p:sp>
+        <p:nvSpPr>
+          <p:cNvPr id="30" name="Shape 26"/>
+          <p:cNvSpPr/>
+          <p:nvPr/>
+        </p:nvSpPr>
+        <p:spPr>
+          <a:xfrm>
+            <a:off x="5230368" y="4910328"/>
+            <a:ext cx="2752344" cy="1554480"/>
+          </a:xfrm>
+          <a:prstGeom prst="rect">
+            <a:avLst/>
+          </a:prstGeom>
+          <a:solidFill>
+            <a:srgbClr val="FFFFFF"/>
+          </a:solidFill>
+          <a:ln w="12700">
+            <a:solidFill>
+              <a:srgbClr val="DDE5DF"/>
+            </a:solidFill>
+            <a:prstDash val="solid"/>
+          </a:ln>
+        </p:spPr>
       </p:sp>
       <p:pic>
         <p:nvPicPr>
-          <p:cNvPr id="11" name="Image 1" descr="개선후_검증실패_확대.png">    </p:cNvPr>
+          <p:cNvPr id="31" name="Image 1" descr="최종점검_검증실패.png">    </p:cNvPr>
           <p:cNvPicPr>
             <a:picLocks noChangeAspect="1"/>
           </p:cNvPicPr>
@@ -5787,8 +7184,8 @@
         </p:blipFill>
         <p:spPr>
           <a:xfrm>
-            <a:off x="5257800" y="2194560"/>
-            <a:ext cx="3931920" cy="4206240"/>
+            <a:off x="5257800" y="4937760"/>
+            <a:ext cx="2697480" cy="1517904"/>
           </a:xfrm>
           <a:prstGeom prst="rect">
             <a:avLst/>
@@ -5797,160 +7194,53 @@
       </p:pic>
       <p:sp>
         <p:nvSpPr>
-          <p:cNvPr id="12" name="Shape 7"/>
+          <p:cNvPr id="32" name="Shape 27"/>
           <p:cNvSpPr/>
           <p:nvPr/>
         </p:nvSpPr>
         <p:spPr>
           <a:xfrm>
-            <a:off x="9509760" y="2194560"/>
-            <a:ext cx="2103120" cy="3291840"/>
-          </a:xfrm>
-          <a:prstGeom prst="roundRect">
-            <a:avLst>
-              <a:gd name="adj" fmla="val 6522"/>
-            </a:avLst>
+            <a:off x="8110728" y="4910328"/>
+            <a:ext cx="2752344" cy="1554480"/>
+          </a:xfrm>
+          <a:prstGeom prst="rect">
+            <a:avLst/>
           </a:prstGeom>
           <a:solidFill>
-            <a:srgbClr val="EDF5F3"/>
+            <a:srgbClr val="FFFFFF"/>
           </a:solidFill>
           <a:ln w="12700">
             <a:solidFill>
-              <a:srgbClr val="EDF5F3"/>
+              <a:srgbClr val="DDE5DF"/>
             </a:solidFill>
             <a:prstDash val="solid"/>
           </a:ln>
         </p:spPr>
       </p:sp>
-      <p:sp>
-        <p:nvSpPr>
-          <p:cNvPr id="13" name="Text 8"/>
-          <p:cNvSpPr txBox="1"/>
-          <p:nvPr/>
-        </p:nvSpPr>
-        <p:spPr>
-          <a:xfrm>
-            <a:off x="9738360" y="2377440"/>
-            <a:ext cx="1645920" cy="502920"/>
-          </a:xfrm>
-          <a:prstGeom prst="rect">
-            <a:avLst/>
-          </a:prstGeom>
-          <a:noFill/>
-          <a:ln/>
-        </p:spPr>
-        <p:txBody>
-          <a:bodyPr wrap="square" lIns="0" tIns="0" rIns="0" bIns="0" rtlCol="0" anchor="ctr"/>
-          <a:lstStyle/>
-          <a:p>
-            <a:pPr indent="0" marL="0">
-              <a:buNone/>
-            </a:pPr>
-            <a:r>
-              <a:rPr lang="en-US" sz="2000" b="1" dirty="0">
-                <a:solidFill>
-                  <a:srgbClr val="087F73"/>
-                </a:solidFill>
-                <a:latin typeface="Apple SD Gothic Neo" pitchFamily="34" charset="0"/>
-                <a:ea typeface="Apple SD Gothic Neo" pitchFamily="34" charset="-122"/>
-                <a:cs typeface="Apple SD Gothic Neo" pitchFamily="34" charset="-120"/>
-              </a:rPr>
-              <a:t>핵심 차이</a:t>
-            </a:r>
-            <a:endParaRPr lang="en-US" sz="2000" dirty="0"/>
-          </a:p>
-        </p:txBody>
-      </p:sp>
-      <p:sp>
-        <p:nvSpPr>
-          <p:cNvPr id="14" name="Text 9"/>
-          <p:cNvSpPr txBox="1"/>
-          <p:nvPr/>
-        </p:nvSpPr>
-        <p:spPr>
-          <a:xfrm>
-            <a:off x="9738360" y="2971800"/>
-            <a:ext cx="1645920" cy="2377440"/>
-          </a:xfrm>
-          <a:prstGeom prst="rect">
-            <a:avLst/>
-          </a:prstGeom>
-          <a:noFill/>
-          <a:ln/>
-        </p:spPr>
-        <p:txBody>
-          <a:bodyPr wrap="square" lIns="0" tIns="0" rIns="0" bIns="0" rtlCol="0" anchor="t"/>
-          <a:lstStyle/>
-          <a:p>
-            <a:pPr indent="0" marL="0">
-              <a:buNone/>
-            </a:pPr>
-            <a:r>
-              <a:rPr lang="en-US" sz="1300" dirty="0">
-                <a:solidFill>
-                  <a:srgbClr val="203136"/>
-                </a:solidFill>
-                <a:latin typeface="Apple SD Gothic Neo" pitchFamily="34" charset="0"/>
-                <a:ea typeface="Apple SD Gothic Neo" pitchFamily="34" charset="-122"/>
-                <a:cs typeface="Apple SD Gothic Neo" pitchFamily="34" charset="-120"/>
-              </a:rPr>
-              <a:t>통과시키던 틀린 답변을</a:t>
-            </a:r>
-            <a:endParaRPr lang="en-US" sz="1300" dirty="0"/>
-          </a:p>
-          <a:p>
-            <a:pPr indent="0" marL="0">
-              <a:buNone/>
-            </a:pPr>
-            <a:r>
-              <a:rPr lang="en-US" sz="1300" dirty="0">
-                <a:solidFill>
-                  <a:srgbClr val="203136"/>
-                </a:solidFill>
-                <a:latin typeface="Apple SD Gothic Neo" pitchFamily="34" charset="0"/>
-                <a:ea typeface="Apple SD Gothic Neo" pitchFamily="34" charset="-122"/>
-                <a:cs typeface="Apple SD Gothic Neo" pitchFamily="34" charset="-120"/>
-              </a:rPr>
-              <a:t>"검증 실패"로 막고,</a:t>
-            </a:r>
-            <a:endParaRPr lang="en-US" sz="1300" dirty="0"/>
-          </a:p>
-          <a:p>
-            <a:pPr indent="0" marL="0">
-              <a:buNone/>
-            </a:pPr>
-            <a:r>
-              <a:rPr lang="en-US" sz="1300" dirty="0">
-                <a:solidFill>
-                  <a:srgbClr val="203136"/>
-                </a:solidFill>
-                <a:latin typeface="Apple SD Gothic Neo" pitchFamily="34" charset="0"/>
-                <a:ea typeface="Apple SD Gothic Neo" pitchFamily="34" charset="-122"/>
-                <a:cs typeface="Apple SD Gothic Neo" pitchFamily="34" charset="-120"/>
-              </a:rPr>
-              <a:t>사유와 실제 수집값을</a:t>
-            </a:r>
-            <a:endParaRPr lang="en-US" sz="1300" dirty="0"/>
-          </a:p>
-          <a:p>
-            <a:pPr indent="0" marL="0">
-              <a:buNone/>
-            </a:pPr>
-            <a:r>
-              <a:rPr lang="en-US" sz="1300" dirty="0">
-                <a:solidFill>
-                  <a:srgbClr val="203136"/>
-                </a:solidFill>
-                <a:latin typeface="Apple SD Gothic Neo" pitchFamily="34" charset="0"/>
-                <a:ea typeface="Apple SD Gothic Neo" pitchFamily="34" charset="-122"/>
-                <a:cs typeface="Apple SD Gothic Neo" pitchFamily="34" charset="-120"/>
-              </a:rPr>
-              <a:t>함께 안내</a:t>
-            </a:r>
-            <a:endParaRPr lang="en-US" sz="1300" dirty="0"/>
-          </a:p>
-        </p:txBody>
-      </p:sp>
+      <p:pic>
+        <p:nvPicPr>
+          <p:cNvPr id="33" name="Image 2" descr="최종점검_자료부족.png">    </p:cNvPr>
+          <p:cNvPicPr>
+            <a:picLocks noChangeAspect="1"/>
+          </p:cNvPicPr>
+          <p:nvPr/>
+        </p:nvPicPr>
+        <p:blipFill>
+          <a:blip r:embed="rId3"/>
+          <a:stretch>
+            <a:fillRect/>
+          </a:stretch>
+        </p:blipFill>
+        <p:spPr>
+          <a:xfrm>
+            <a:off x="8138160" y="4937760"/>
+            <a:ext cx="2697480" cy="1517904"/>
+          </a:xfrm>
+          <a:prstGeom prst="rect">
+            <a:avLst/>
+          </a:prstGeom>
+        </p:spPr>
+      </p:pic>
     </p:spTree>
   </p:cSld>
   <p:clrMapOvr>
@@ -6016,7 +7306,7 @@
                 <a:ea typeface="Apple SD Gothic Neo" pitchFamily="34" charset="-122"/>
                 <a:cs typeface="Apple SD Gothic Neo" pitchFamily="34" charset="-120"/>
               </a:rPr>
-              <a:t>전후 수치 비교</a:t>
+              <a:t>선택 전후 비교 화면</a:t>
             </a:r>
             <a:endParaRPr lang="en-US" sz="3000" dirty="0"/>
           </a:p>
@@ -6055,7 +7345,7 @@
                 <a:ea typeface="Apple SD Gothic Neo" pitchFamily="34" charset="-122"/>
                 <a:cs typeface="Apple SD Gothic Neo" pitchFamily="34" charset="-120"/>
               </a:rPr>
-              <a:t>07 실측 결과 · 40초</a:t>
+              <a:t>07 같은 틀린 답변, 같은 질문 · 35초</a:t>
             </a:r>
             <a:endParaRPr lang="en-US" sz="1500" dirty="0"/>
           </a:p>
@@ -6141,18 +7431,183 @@
       </p:sp>
       <p:sp>
         <p:nvSpPr>
-          <p:cNvPr id="7" name="Shape 4"/>
+          <p:cNvPr id="7" name="Text 4"/>
+          <p:cNvSpPr txBox="1"/>
+          <p:nvPr/>
+        </p:nvSpPr>
+        <p:spPr>
+          <a:xfrm>
+            <a:off x="640080" y="1783080"/>
+            <a:ext cx="4206240" cy="365760"/>
+          </a:xfrm>
+          <a:prstGeom prst="rect">
+            <a:avLst/>
+          </a:prstGeom>
+          <a:noFill/>
+          <a:ln/>
+        </p:spPr>
+        <p:txBody>
+          <a:bodyPr wrap="square" lIns="0" tIns="0" rIns="0" bIns="0" rtlCol="0" anchor="ctr"/>
+          <a:lstStyle/>
+          <a:p>
+            <a:pPr indent="0" marL="0">
+              <a:buNone/>
+            </a:pPr>
+            <a:r>
+              <a:rPr lang="en-US" sz="1600" b="1" dirty="0">
+                <a:solidFill>
+                  <a:srgbClr val="AD453F"/>
+                </a:solidFill>
+                <a:latin typeface="Apple SD Gothic Neo" pitchFamily="34" charset="0"/>
+                <a:ea typeface="Apple SD Gothic Neo" pitchFamily="34" charset="-122"/>
+                <a:cs typeface="Apple SD Gothic Neo" pitchFamily="34" charset="-120"/>
+              </a:rPr>
+              <a:t>개선 전 (legacy 검증)</a:t>
+            </a:r>
+            <a:endParaRPr lang="en-US" sz="1600" dirty="0"/>
+          </a:p>
+        </p:txBody>
+      </p:sp>
+      <p:pic>
+        <p:nvPicPr>
+          <p:cNvPr id="8" name="Image 0" descr="개선전_답변_확대.png">    </p:cNvPr>
+          <p:cNvPicPr>
+            <a:picLocks noChangeAspect="1"/>
+          </p:cNvPicPr>
+          <p:nvPr/>
+        </p:nvPicPr>
+        <p:blipFill>
+          <a:blip r:embed="rId1"/>
+          <a:stretch>
+            <a:fillRect/>
+          </a:stretch>
+        </p:blipFill>
+        <p:spPr>
+          <a:xfrm>
+            <a:off x="640080" y="2194560"/>
+            <a:ext cx="3931920" cy="1572768"/>
+          </a:xfrm>
+          <a:prstGeom prst="rect">
+            <a:avLst/>
+          </a:prstGeom>
+        </p:spPr>
+      </p:pic>
+      <p:sp>
+        <p:nvSpPr>
+          <p:cNvPr id="9" name="Text 5"/>
+          <p:cNvSpPr txBox="1"/>
+          <p:nvPr/>
+        </p:nvSpPr>
+        <p:spPr>
+          <a:xfrm>
+            <a:off x="640080" y="3886200"/>
+            <a:ext cx="3931920" cy="731520"/>
+          </a:xfrm>
+          <a:prstGeom prst="rect">
+            <a:avLst/>
+          </a:prstGeom>
+          <a:noFill/>
+          <a:ln/>
+        </p:spPr>
+        <p:txBody>
+          <a:bodyPr wrap="square" lIns="0" tIns="0" rIns="0" bIns="0" rtlCol="0" anchor="t"/>
+          <a:lstStyle/>
+          <a:p>
+            <a:pPr indent="0" marL="0">
+              <a:buNone/>
+            </a:pPr>
+            <a:r>
+              <a:rPr lang="en-US" sz="1400" dirty="0">
+                <a:solidFill>
+                  <a:srgbClr val="AD453F"/>
+                </a:solidFill>
+                <a:latin typeface="Apple SD Gothic Neo" pitchFamily="34" charset="0"/>
+                <a:ea typeface="Apple SD Gothic Neo" pitchFamily="34" charset="-122"/>
+                <a:cs typeface="Apple SD Gothic Neo" pitchFamily="34" charset="-120"/>
+              </a:rPr>
+              <a:t>→ 틀린 CPU(100.5%·54.8%)가 근거 표시 없이 최종 응답</a:t>
+            </a:r>
+            <a:endParaRPr lang="en-US" sz="1400" dirty="0"/>
+          </a:p>
+        </p:txBody>
+      </p:sp>
+      <p:sp>
+        <p:nvSpPr>
+          <p:cNvPr id="10" name="Text 6"/>
+          <p:cNvSpPr txBox="1"/>
+          <p:nvPr/>
+        </p:nvSpPr>
+        <p:spPr>
+          <a:xfrm>
+            <a:off x="5257800" y="1783080"/>
+            <a:ext cx="4206240" cy="365760"/>
+          </a:xfrm>
+          <a:prstGeom prst="rect">
+            <a:avLst/>
+          </a:prstGeom>
+          <a:noFill/>
+          <a:ln/>
+        </p:spPr>
+        <p:txBody>
+          <a:bodyPr wrap="square" lIns="0" tIns="0" rIns="0" bIns="0" rtlCol="0" anchor="ctr"/>
+          <a:lstStyle/>
+          <a:p>
+            <a:pPr indent="0" marL="0">
+              <a:buNone/>
+            </a:pPr>
+            <a:r>
+              <a:rPr lang="en-US" sz="1600" b="1" dirty="0">
+                <a:solidFill>
+                  <a:srgbClr val="087F73"/>
+                </a:solidFill>
+                <a:latin typeface="Apple SD Gothic Neo" pitchFamily="34" charset="0"/>
+                <a:ea typeface="Apple SD Gothic Neo" pitchFamily="34" charset="-122"/>
+                <a:cs typeface="Apple SD Gothic Neo" pitchFamily="34" charset="-120"/>
+              </a:rPr>
+              <a:t>개선 후 (근거 대조 검증)</a:t>
+            </a:r>
+            <a:endParaRPr lang="en-US" sz="1600" dirty="0"/>
+          </a:p>
+        </p:txBody>
+      </p:sp>
+      <p:pic>
+        <p:nvPicPr>
+          <p:cNvPr id="11" name="Image 1" descr="개선후_검증실패_확대.png">    </p:cNvPr>
+          <p:cNvPicPr>
+            <a:picLocks noChangeAspect="1"/>
+          </p:cNvPicPr>
+          <p:nvPr/>
+        </p:nvPicPr>
+        <p:blipFill>
+          <a:blip r:embed="rId2"/>
+          <a:stretch>
+            <a:fillRect/>
+          </a:stretch>
+        </p:blipFill>
+        <p:spPr>
+          <a:xfrm>
+            <a:off x="5257800" y="2194560"/>
+            <a:ext cx="3931920" cy="4206240"/>
+          </a:xfrm>
+          <a:prstGeom prst="rect">
+            <a:avLst/>
+          </a:prstGeom>
+        </p:spPr>
+      </p:pic>
+      <p:sp>
+        <p:nvSpPr>
+          <p:cNvPr id="12" name="Shape 7"/>
           <p:cNvSpPr/>
           <p:nvPr/>
         </p:nvSpPr>
         <p:spPr>
           <a:xfrm>
-            <a:off x="640080" y="1874520"/>
-            <a:ext cx="10927080" cy="914400"/>
+            <a:off x="9509760" y="2194560"/>
+            <a:ext cx="2103120" cy="3291840"/>
           </a:xfrm>
           <a:prstGeom prst="roundRect">
             <a:avLst>
-              <a:gd name="adj" fmla="val 12000"/>
+              <a:gd name="adj" fmla="val 6522"/>
             </a:avLst>
           </a:prstGeom>
           <a:solidFill>
@@ -6168,30 +7623,30 @@
       </p:sp>
       <p:sp>
         <p:nvSpPr>
-          <p:cNvPr id="8" name="Text 5"/>
-          <p:cNvSpPr txBox="1"/>
-          <p:nvPr/>
-        </p:nvSpPr>
-        <p:spPr>
-          <a:xfrm>
-            <a:off x="868680" y="1874520"/>
-            <a:ext cx="3291840" cy="914400"/>
-          </a:xfrm>
-          <a:prstGeom prst="rect">
-            <a:avLst/>
-          </a:prstGeom>
-          <a:noFill/>
-          <a:ln/>
-        </p:spPr>
-        <p:txBody>
-          <a:bodyPr wrap="square" lIns="0" tIns="0" rIns="0" bIns="0" rtlCol="0" anchor="ctr"/>
-          <a:lstStyle/>
-          <a:p>
-            <a:pPr indent="0" marL="0">
-              <a:buNone/>
-            </a:pPr>
-            <a:r>
-              <a:rPr lang="en-US" sz="1700" b="1" dirty="0">
+          <p:cNvPr id="13" name="Text 8"/>
+          <p:cNvSpPr txBox="1"/>
+          <p:nvPr/>
+        </p:nvSpPr>
+        <p:spPr>
+          <a:xfrm>
+            <a:off x="9738360" y="2377440"/>
+            <a:ext cx="1645920" cy="502920"/>
+          </a:xfrm>
+          <a:prstGeom prst="rect">
+            <a:avLst/>
+          </a:prstGeom>
+          <a:noFill/>
+          <a:ln/>
+        </p:spPr>
+        <p:txBody>
+          <a:bodyPr wrap="square" lIns="0" tIns="0" rIns="0" bIns="0" rtlCol="0" anchor="ctr"/>
+          <a:lstStyle/>
+          <a:p>
+            <a:pPr indent="0" marL="0">
+              <a:buNone/>
+            </a:pPr>
+            <a:r>
+              <a:rPr lang="en-US" sz="2000" b="1" dirty="0">
                 <a:solidFill>
                   <a:srgbClr val="087F73"/>
                 </a:solidFill>
@@ -6199,38 +7654,38 @@
                 <a:ea typeface="Apple SD Gothic Neo" pitchFamily="34" charset="-122"/>
                 <a:cs typeface="Apple SD Gothic Neo" pitchFamily="34" charset="-120"/>
               </a:rPr>
-              <a:t>답변 검증 (기존 17개)</a:t>
-            </a:r>
-            <a:endParaRPr lang="en-US" sz="1700" dirty="0"/>
-          </a:p>
-        </p:txBody>
-      </p:sp>
-      <p:sp>
-        <p:nvSpPr>
-          <p:cNvPr id="9" name="Text 6"/>
-          <p:cNvSpPr txBox="1"/>
-          <p:nvPr/>
-        </p:nvSpPr>
-        <p:spPr>
-          <a:xfrm>
-            <a:off x="4114800" y="1874520"/>
-            <a:ext cx="3657600" cy="914400"/>
-          </a:xfrm>
-          <a:prstGeom prst="rect">
-            <a:avLst/>
-          </a:prstGeom>
-          <a:noFill/>
-          <a:ln/>
-        </p:spPr>
-        <p:txBody>
-          <a:bodyPr wrap="square" lIns="0" tIns="0" rIns="0" bIns="0" rtlCol="0" anchor="ctr"/>
-          <a:lstStyle/>
-          <a:p>
-            <a:pPr indent="0" marL="0">
-              <a:buNone/>
-            </a:pPr>
-            <a:r>
-              <a:rPr lang="en-US" sz="1800" b="1" dirty="0">
+              <a:t>핵심 차이</a:t>
+            </a:r>
+            <a:endParaRPr lang="en-US" sz="2000" dirty="0"/>
+          </a:p>
+        </p:txBody>
+      </p:sp>
+      <p:sp>
+        <p:nvSpPr>
+          <p:cNvPr id="14" name="Text 9"/>
+          <p:cNvSpPr txBox="1"/>
+          <p:nvPr/>
+        </p:nvSpPr>
+        <p:spPr>
+          <a:xfrm>
+            <a:off x="9738360" y="2971800"/>
+            <a:ext cx="1645920" cy="2377440"/>
+          </a:xfrm>
+          <a:prstGeom prst="rect">
+            <a:avLst/>
+          </a:prstGeom>
+          <a:noFill/>
+          <a:ln/>
+        </p:spPr>
+        <p:txBody>
+          <a:bodyPr wrap="square" lIns="0" tIns="0" rIns="0" bIns="0" rtlCol="0" anchor="t"/>
+          <a:lstStyle/>
+          <a:p>
+            <a:pPr indent="0" marL="0">
+              <a:buNone/>
+            </a:pPr>
+            <a:r>
+              <a:rPr lang="en-US" sz="1300" dirty="0">
                 <a:solidFill>
                   <a:srgbClr val="203136"/>
                 </a:solidFill>
@@ -6238,143 +7693,16 @@
                 <a:ea typeface="Apple SD Gothic Neo" pitchFamily="34" charset="-122"/>
                 <a:cs typeface="Apple SD Gothic Neo" pitchFamily="34" charset="-120"/>
               </a:rPr>
-              <a:t>오류 차단 2/9 → 9/9</a:t>
-            </a:r>
-            <a:endParaRPr lang="en-US" sz="1800" dirty="0"/>
-          </a:p>
-        </p:txBody>
-      </p:sp>
-      <p:sp>
-        <p:nvSpPr>
-          <p:cNvPr id="10" name="Text 7"/>
-          <p:cNvSpPr txBox="1"/>
-          <p:nvPr/>
-        </p:nvSpPr>
-        <p:spPr>
-          <a:xfrm>
-            <a:off x="7772400" y="1874520"/>
-            <a:ext cx="3657600" cy="914400"/>
-          </a:xfrm>
-          <a:prstGeom prst="rect">
-            <a:avLst/>
-          </a:prstGeom>
-          <a:noFill/>
-          <a:ln/>
-        </p:spPr>
-        <p:txBody>
-          <a:bodyPr wrap="square" lIns="0" tIns="0" rIns="0" bIns="0" rtlCol="0" anchor="ctr"/>
-          <a:lstStyle/>
-          <a:p>
-            <a:pPr indent="0" marL="0">
-              <a:buNone/>
-            </a:pPr>
-            <a:r>
-              <a:rPr lang="en-US" sz="1500" dirty="0">
-                <a:solidFill>
-                  <a:srgbClr val="597078"/>
-                </a:solidFill>
-                <a:latin typeface="Apple SD Gothic Neo" pitchFamily="34" charset="0"/>
-                <a:ea typeface="Apple SD Gothic Neo" pitchFamily="34" charset="-122"/>
-                <a:cs typeface="Apple SD Gothic Neo" pitchFamily="34" charset="-120"/>
-              </a:rPr>
-              <a:t>정상 통과 8/8 → 8/8 (오탐 해소)</a:t>
-            </a:r>
-            <a:endParaRPr lang="en-US" sz="1500" dirty="0"/>
-          </a:p>
-        </p:txBody>
-      </p:sp>
-      <p:sp>
-        <p:nvSpPr>
-          <p:cNvPr id="11" name="Shape 8"/>
-          <p:cNvSpPr/>
-          <p:nvPr/>
-        </p:nvSpPr>
-        <p:spPr>
-          <a:xfrm>
-            <a:off x="640080" y="2898648"/>
-            <a:ext cx="10927080" cy="914400"/>
-          </a:xfrm>
-          <a:prstGeom prst="roundRect">
-            <a:avLst>
-              <a:gd name="adj" fmla="val 12000"/>
-            </a:avLst>
-          </a:prstGeom>
-          <a:solidFill>
-            <a:srgbClr val="EDF5F3"/>
-          </a:solidFill>
-          <a:ln w="12700">
-            <a:solidFill>
-              <a:srgbClr val="EDF5F3"/>
-            </a:solidFill>
-            <a:prstDash val="solid"/>
-          </a:ln>
-        </p:spPr>
-      </p:sp>
-      <p:sp>
-        <p:nvSpPr>
-          <p:cNvPr id="12" name="Text 9"/>
-          <p:cNvSpPr txBox="1"/>
-          <p:nvPr/>
-        </p:nvSpPr>
-        <p:spPr>
-          <a:xfrm>
-            <a:off x="868680" y="2898648"/>
-            <a:ext cx="3291840" cy="914400"/>
-          </a:xfrm>
-          <a:prstGeom prst="rect">
-            <a:avLst/>
-          </a:prstGeom>
-          <a:noFill/>
-          <a:ln/>
-        </p:spPr>
-        <p:txBody>
-          <a:bodyPr wrap="square" lIns="0" tIns="0" rIns="0" bIns="0" rtlCol="0" anchor="ctr"/>
-          <a:lstStyle/>
-          <a:p>
-            <a:pPr indent="0" marL="0">
-              <a:buNone/>
-            </a:pPr>
-            <a:r>
-              <a:rPr lang="en-US" sz="1700" b="1" dirty="0">
-                <a:solidFill>
-                  <a:srgbClr val="087F73"/>
-                </a:solidFill>
-                <a:latin typeface="Apple SD Gothic Neo" pitchFamily="34" charset="0"/>
-                <a:ea typeface="Apple SD Gothic Neo" pitchFamily="34" charset="-122"/>
-                <a:cs typeface="Apple SD Gothic Neo" pitchFamily="34" charset="-120"/>
-              </a:rPr>
-              <a:t>검증 규칙 (표적 28개)</a:t>
-            </a:r>
-            <a:endParaRPr lang="en-US" sz="1700" dirty="0"/>
-          </a:p>
-        </p:txBody>
-      </p:sp>
-      <p:sp>
-        <p:nvSpPr>
-          <p:cNvPr id="13" name="Text 10"/>
-          <p:cNvSpPr txBox="1"/>
-          <p:nvPr/>
-        </p:nvSpPr>
-        <p:spPr>
-          <a:xfrm>
-            <a:off x="4114800" y="2898648"/>
-            <a:ext cx="3657600" cy="914400"/>
-          </a:xfrm>
-          <a:prstGeom prst="rect">
-            <a:avLst/>
-          </a:prstGeom>
-          <a:noFill/>
-          <a:ln/>
-        </p:spPr>
-        <p:txBody>
-          <a:bodyPr wrap="square" lIns="0" tIns="0" rIns="0" bIns="0" rtlCol="0" anchor="ctr"/>
-          <a:lstStyle/>
-          <a:p>
-            <a:pPr indent="0" marL="0">
-              <a:buNone/>
-            </a:pPr>
-            <a:r>
-              <a:rPr lang="en-US" sz="1800" b="1" dirty="0">
+              <a:t>통과시키던 틀린 답변을</a:t>
+            </a:r>
+            <a:endParaRPr lang="en-US" sz="1300" dirty="0"/>
+          </a:p>
+          <a:p>
+            <a:pPr indent="0" marL="0">
+              <a:buNone/>
+            </a:pPr>
+            <a:r>
+              <a:rPr lang="en-US" sz="1300" dirty="0">
                 <a:solidFill>
                   <a:srgbClr val="203136"/>
                 </a:solidFill>
@@ -6382,143 +7710,16 @@
                 <a:ea typeface="Apple SD Gothic Neo" pitchFamily="34" charset="-122"/>
                 <a:cs typeface="Apple SD Gothic Neo" pitchFamily="34" charset="-120"/>
               </a:rPr>
-              <a:t>오류 차단 6/14 → 14/14</a:t>
-            </a:r>
-            <a:endParaRPr lang="en-US" sz="1800" dirty="0"/>
-          </a:p>
-        </p:txBody>
-      </p:sp>
-      <p:sp>
-        <p:nvSpPr>
-          <p:cNvPr id="14" name="Text 11"/>
-          <p:cNvSpPr txBox="1"/>
-          <p:nvPr/>
-        </p:nvSpPr>
-        <p:spPr>
-          <a:xfrm>
-            <a:off x="7772400" y="2898648"/>
-            <a:ext cx="3657600" cy="914400"/>
-          </a:xfrm>
-          <a:prstGeom prst="rect">
-            <a:avLst/>
-          </a:prstGeom>
-          <a:noFill/>
-          <a:ln/>
-        </p:spPr>
-        <p:txBody>
-          <a:bodyPr wrap="square" lIns="0" tIns="0" rIns="0" bIns="0" rtlCol="0" anchor="ctr"/>
-          <a:lstStyle/>
-          <a:p>
-            <a:pPr indent="0" marL="0">
-              <a:buNone/>
-            </a:pPr>
-            <a:r>
-              <a:rPr lang="en-US" sz="1500" dirty="0">
-                <a:solidFill>
-                  <a:srgbClr val="597078"/>
-                </a:solidFill>
-                <a:latin typeface="Apple SD Gothic Neo" pitchFamily="34" charset="0"/>
-                <a:ea typeface="Apple SD Gothic Neo" pitchFamily="34" charset="-122"/>
-                <a:cs typeface="Apple SD Gothic Neo" pitchFamily="34" charset="-120"/>
-              </a:rPr>
-              <a:t>정상 통과 7/14 → 14/14 (자체 사례)</a:t>
-            </a:r>
-            <a:endParaRPr lang="en-US" sz="1500" dirty="0"/>
-          </a:p>
-        </p:txBody>
-      </p:sp>
-      <p:sp>
-        <p:nvSpPr>
-          <p:cNvPr id="15" name="Shape 12"/>
-          <p:cNvSpPr/>
-          <p:nvPr/>
-        </p:nvSpPr>
-        <p:spPr>
-          <a:xfrm>
-            <a:off x="640080" y="3922776"/>
-            <a:ext cx="10927080" cy="914400"/>
-          </a:xfrm>
-          <a:prstGeom prst="roundRect">
-            <a:avLst>
-              <a:gd name="adj" fmla="val 12000"/>
-            </a:avLst>
-          </a:prstGeom>
-          <a:solidFill>
-            <a:srgbClr val="EDF5F3"/>
-          </a:solidFill>
-          <a:ln w="12700">
-            <a:solidFill>
-              <a:srgbClr val="EDF5F3"/>
-            </a:solidFill>
-            <a:prstDash val="solid"/>
-          </a:ln>
-        </p:spPr>
-      </p:sp>
-      <p:sp>
-        <p:nvSpPr>
-          <p:cNvPr id="16" name="Text 13"/>
-          <p:cNvSpPr txBox="1"/>
-          <p:nvPr/>
-        </p:nvSpPr>
-        <p:spPr>
-          <a:xfrm>
-            <a:off x="868680" y="3922776"/>
-            <a:ext cx="3291840" cy="914400"/>
-          </a:xfrm>
-          <a:prstGeom prst="rect">
-            <a:avLst/>
-          </a:prstGeom>
-          <a:noFill/>
-          <a:ln/>
-        </p:spPr>
-        <p:txBody>
-          <a:bodyPr wrap="square" lIns="0" tIns="0" rIns="0" bIns="0" rtlCol="0" anchor="ctr"/>
-          <a:lstStyle/>
-          <a:p>
-            <a:pPr indent="0" marL="0">
-              <a:buNone/>
-            </a:pPr>
-            <a:r>
-              <a:rPr lang="en-US" sz="1700" b="1" dirty="0">
-                <a:solidFill>
-                  <a:srgbClr val="087F73"/>
-                </a:solidFill>
-                <a:latin typeface="Apple SD Gothic Neo" pitchFamily="34" charset="0"/>
-                <a:ea typeface="Apple SD Gothic Neo" pitchFamily="34" charset="-122"/>
-                <a:cs typeface="Apple SD Gothic Neo" pitchFamily="34" charset="-120"/>
-              </a:rPr>
-              <a:t>매뉴얼 선택 (14개)</a:t>
-            </a:r>
-            <a:endParaRPr lang="en-US" sz="1700" dirty="0"/>
-          </a:p>
-        </p:txBody>
-      </p:sp>
-      <p:sp>
-        <p:nvSpPr>
-          <p:cNvPr id="17" name="Text 14"/>
-          <p:cNvSpPr txBox="1"/>
-          <p:nvPr/>
-        </p:nvSpPr>
-        <p:spPr>
-          <a:xfrm>
-            <a:off x="4114800" y="3922776"/>
-            <a:ext cx="3657600" cy="914400"/>
-          </a:xfrm>
-          <a:prstGeom prst="rect">
-            <a:avLst/>
-          </a:prstGeom>
-          <a:noFill/>
-          <a:ln/>
-        </p:spPr>
-        <p:txBody>
-          <a:bodyPr wrap="square" lIns="0" tIns="0" rIns="0" bIns="0" rtlCol="0" anchor="ctr"/>
-          <a:lstStyle/>
-          <a:p>
-            <a:pPr indent="0" marL="0">
-              <a:buNone/>
-            </a:pPr>
-            <a:r>
-              <a:rPr lang="en-US" sz="1800" b="1" dirty="0">
+              <a:t>"검증 실패"로 막고,</a:t>
+            </a:r>
+            <a:endParaRPr lang="en-US" sz="1300" dirty="0"/>
+          </a:p>
+          <a:p>
+            <a:pPr indent="0" marL="0">
+              <a:buNone/>
+            </a:pPr>
+            <a:r>
+              <a:rPr lang="en-US" sz="1300" dirty="0">
                 <a:solidFill>
                   <a:srgbClr val="203136"/>
                 </a:solidFill>
@@ -6526,143 +7727,16 @@
                 <a:ea typeface="Apple SD Gothic Neo" pitchFamily="34" charset="-122"/>
                 <a:cs typeface="Apple SD Gothic Neo" pitchFamily="34" charset="-120"/>
               </a:rPr>
-              <a:t>기대 일치 6/14 → 12/14</a:t>
-            </a:r>
-            <a:endParaRPr lang="en-US" sz="1800" dirty="0"/>
-          </a:p>
-        </p:txBody>
-      </p:sp>
-      <p:sp>
-        <p:nvSpPr>
-          <p:cNvPr id="18" name="Text 15"/>
-          <p:cNvSpPr txBox="1"/>
-          <p:nvPr/>
-        </p:nvSpPr>
-        <p:spPr>
-          <a:xfrm>
-            <a:off x="7772400" y="3922776"/>
-            <a:ext cx="3657600" cy="914400"/>
-          </a:xfrm>
-          <a:prstGeom prst="rect">
-            <a:avLst/>
-          </a:prstGeom>
-          <a:noFill/>
-          <a:ln/>
-        </p:spPr>
-        <p:txBody>
-          <a:bodyPr wrap="square" lIns="0" tIns="0" rIns="0" bIns="0" rtlCol="0" anchor="ctr"/>
-          <a:lstStyle/>
-          <a:p>
-            <a:pPr indent="0" marL="0">
-              <a:buNone/>
-            </a:pPr>
-            <a:r>
-              <a:rPr lang="en-US" sz="1500" dirty="0">
-                <a:solidFill>
-                  <a:srgbClr val="597078"/>
-                </a:solidFill>
-                <a:latin typeface="Apple SD Gothic Neo" pitchFamily="34" charset="0"/>
-                <a:ea typeface="Apple SD Gothic Neo" pitchFamily="34" charset="-122"/>
-                <a:cs typeface="Apple SD Gothic Neo" pitchFamily="34" charset="-120"/>
-              </a:rPr>
-              <a:t>무관 질문 미선택 0/2 → 2/2</a:t>
-            </a:r>
-            <a:endParaRPr lang="en-US" sz="1500" dirty="0"/>
-          </a:p>
-        </p:txBody>
-      </p:sp>
-      <p:sp>
-        <p:nvSpPr>
-          <p:cNvPr id="19" name="Shape 16"/>
-          <p:cNvSpPr/>
-          <p:nvPr/>
-        </p:nvSpPr>
-        <p:spPr>
-          <a:xfrm>
-            <a:off x="640080" y="4946904"/>
-            <a:ext cx="10927080" cy="914400"/>
-          </a:xfrm>
-          <a:prstGeom prst="roundRect">
-            <a:avLst>
-              <a:gd name="adj" fmla="val 12000"/>
-            </a:avLst>
-          </a:prstGeom>
-          <a:solidFill>
-            <a:srgbClr val="EDF5F3"/>
-          </a:solidFill>
-          <a:ln w="12700">
-            <a:solidFill>
-              <a:srgbClr val="EDF5F3"/>
-            </a:solidFill>
-            <a:prstDash val="solid"/>
-          </a:ln>
-        </p:spPr>
-      </p:sp>
-      <p:sp>
-        <p:nvSpPr>
-          <p:cNvPr id="20" name="Text 17"/>
-          <p:cNvSpPr txBox="1"/>
-          <p:nvPr/>
-        </p:nvSpPr>
-        <p:spPr>
-          <a:xfrm>
-            <a:off x="868680" y="4946904"/>
-            <a:ext cx="3291840" cy="914400"/>
-          </a:xfrm>
-          <a:prstGeom prst="rect">
-            <a:avLst/>
-          </a:prstGeom>
-          <a:noFill/>
-          <a:ln/>
-        </p:spPr>
-        <p:txBody>
-          <a:bodyPr wrap="square" lIns="0" tIns="0" rIns="0" bIns="0" rtlCol="0" anchor="ctr"/>
-          <a:lstStyle/>
-          <a:p>
-            <a:pPr indent="0" marL="0">
-              <a:buNone/>
-            </a:pPr>
-            <a:r>
-              <a:rPr lang="en-US" sz="1700" b="1" dirty="0">
-                <a:solidFill>
-                  <a:srgbClr val="087F73"/>
-                </a:solidFill>
-                <a:latin typeface="Apple SD Gothic Neo" pitchFamily="34" charset="0"/>
-                <a:ea typeface="Apple SD Gothic Neo" pitchFamily="34" charset="-122"/>
-                <a:cs typeface="Apple SD Gothic Neo" pitchFamily="34" charset="-120"/>
-              </a:rPr>
-              <a:t>Ollama 실모델 (4질문×1회)</a:t>
-            </a:r>
-            <a:endParaRPr lang="en-US" sz="1700" dirty="0"/>
-          </a:p>
-        </p:txBody>
-      </p:sp>
-      <p:sp>
-        <p:nvSpPr>
-          <p:cNvPr id="21" name="Text 18"/>
-          <p:cNvSpPr txBox="1"/>
-          <p:nvPr/>
-        </p:nvSpPr>
-        <p:spPr>
-          <a:xfrm>
-            <a:off x="4114800" y="4946904"/>
-            <a:ext cx="3657600" cy="914400"/>
-          </a:xfrm>
-          <a:prstGeom prst="rect">
-            <a:avLst/>
-          </a:prstGeom>
-          <a:noFill/>
-          <a:ln/>
-        </p:spPr>
-        <p:txBody>
-          <a:bodyPr wrap="square" lIns="0" tIns="0" rIns="0" bIns="0" rtlCol="0" anchor="ctr"/>
-          <a:lstStyle/>
-          <a:p>
-            <a:pPr indent="0" marL="0">
-              <a:buNone/>
-            </a:pPr>
-            <a:r>
-              <a:rPr lang="en-US" sz="1800" b="1" dirty="0">
+              <a:t>사유와 실제 수집값을</a:t>
+            </a:r>
+            <a:endParaRPr lang="en-US" sz="1300" dirty="0"/>
+          </a:p>
+          <a:p>
+            <a:pPr indent="0" marL="0">
+              <a:buNone/>
+            </a:pPr>
+            <a:r>
+              <a:rPr lang="en-US" sz="1300" dirty="0">
                 <a:solidFill>
                   <a:srgbClr val="203136"/>
                 </a:solidFill>
@@ -6670,85 +7744,7 @@
                 <a:ea typeface="Apple SD Gothic Neo" pitchFamily="34" charset="-122"/>
                 <a:cs typeface="Apple SD Gothic Neo" pitchFamily="34" charset="-120"/>
               </a:rPr>
-              <a:t>작성 시도 1.0 → 1.0회</a:t>
-            </a:r>
-            <a:endParaRPr lang="en-US" sz="1800" dirty="0"/>
-          </a:p>
-        </p:txBody>
-      </p:sp>
-      <p:sp>
-        <p:nvSpPr>
-          <p:cNvPr id="22" name="Text 19"/>
-          <p:cNvSpPr txBox="1"/>
-          <p:nvPr/>
-        </p:nvSpPr>
-        <p:spPr>
-          <a:xfrm>
-            <a:off x="7772400" y="4946904"/>
-            <a:ext cx="3657600" cy="914400"/>
-          </a:xfrm>
-          <a:prstGeom prst="rect">
-            <a:avLst/>
-          </a:prstGeom>
-          <a:noFill/>
-          <a:ln/>
-        </p:spPr>
-        <p:txBody>
-          <a:bodyPr wrap="square" lIns="0" tIns="0" rIns="0" bIns="0" rtlCol="0" anchor="ctr"/>
-          <a:lstStyle/>
-          <a:p>
-            <a:pPr indent="0" marL="0">
-              <a:buNone/>
-            </a:pPr>
-            <a:r>
-              <a:rPr lang="en-US" sz="1500" dirty="0">
-                <a:solidFill>
-                  <a:srgbClr val="597078"/>
-                </a:solidFill>
-                <a:latin typeface="Apple SD Gothic Neo" pitchFamily="34" charset="0"/>
-                <a:ea typeface="Apple SD Gothic Neo" pitchFamily="34" charset="-122"/>
-                <a:cs typeface="Apple SD Gothic Neo" pitchFamily="34" charset="-120"/>
-              </a:rPr>
-              <a:t>시간은 개선 전과 비슷 (42.6s ↔ 43.3s)</a:t>
-            </a:r>
-            <a:endParaRPr lang="en-US" sz="1500" dirty="0"/>
-          </a:p>
-        </p:txBody>
-      </p:sp>
-      <p:sp>
-        <p:nvSpPr>
-          <p:cNvPr id="23" name="Text 20"/>
-          <p:cNvSpPr txBox="1"/>
-          <p:nvPr/>
-        </p:nvSpPr>
-        <p:spPr>
-          <a:xfrm>
-            <a:off x="640080" y="6035040"/>
-            <a:ext cx="10927080" cy="365760"/>
-          </a:xfrm>
-          <a:prstGeom prst="rect">
-            <a:avLst/>
-          </a:prstGeom>
-          <a:noFill/>
-          <a:ln/>
-        </p:spPr>
-        <p:txBody>
-          <a:bodyPr wrap="square" lIns="0" tIns="0" rIns="0" bIns="0" rtlCol="0" anchor="ctr"/>
-          <a:lstStyle/>
-          <a:p>
-            <a:pPr indent="0" marL="0">
-              <a:buNone/>
-            </a:pPr>
-            <a:r>
-              <a:rPr lang="en-US" sz="1300" dirty="0">
-                <a:solidFill>
-                  <a:srgbClr val="597078"/>
-                </a:solidFill>
-                <a:latin typeface="Apple SD Gothic Neo" pitchFamily="34" charset="0"/>
-                <a:ea typeface="Apple SD Gothic Neo" pitchFamily="34" charset="-122"/>
-                <a:cs typeface="Apple SD Gothic Neo" pitchFamily="34" charset="-120"/>
-              </a:rPr>
-              <a:t>소규모 자체 평가 · 실모델 최신 비교는 legacy와 grounded · 실행 간 시간 변동이 커서 시간 개선은 주장하지 않음</a:t>
+              <a:t>함께 안내</a:t>
             </a:r>
             <a:endParaRPr lang="en-US" sz="1300" dirty="0"/>
           </a:p>
@@ -6819,7 +7815,7 @@
                 <a:ea typeface="Apple SD Gothic Neo" pitchFamily="34" charset="-122"/>
                 <a:cs typeface="Apple SD Gothic Neo" pitchFamily="34" charset="-120"/>
               </a:rPr>
-              <a:t>보너스: 실측 수치 3가지</a:t>
+              <a:t>전후 수치 비교</a:t>
             </a:r>
             <a:endParaRPr lang="en-US" sz="3000" dirty="0"/>
           </a:p>
@@ -6858,7 +7854,7 @@
                 <a:ea typeface="Apple SD Gothic Neo" pitchFamily="34" charset="-122"/>
                 <a:cs typeface="Apple SD Gothic Neo" pitchFamily="34" charset="-120"/>
               </a:rPr>
-              <a:t>08 동시 실행 · 모델 분리 · 조기 종료 · 20초</a:t>
+              <a:t>08 실측 결과 · 40초</a:t>
             </a:r>
             <a:endParaRPr lang="en-US" sz="1500" dirty="0"/>
           </a:p>
@@ -6950,12 +7946,12 @@
         </p:nvSpPr>
         <p:spPr>
           <a:xfrm>
-            <a:off x="640080" y="1920240"/>
-            <a:ext cx="3566160" cy="3383280"/>
+            <a:off x="640080" y="1874520"/>
+            <a:ext cx="10927080" cy="914400"/>
           </a:xfrm>
           <a:prstGeom prst="roundRect">
             <a:avLst>
-              <a:gd name="adj" fmla="val 4054"/>
+              <a:gd name="adj" fmla="val 12000"/>
             </a:avLst>
           </a:prstGeom>
           <a:solidFill>
@@ -6977,24 +7973,24 @@
         </p:nvSpPr>
         <p:spPr>
           <a:xfrm>
-            <a:off x="868680" y="2103120"/>
-            <a:ext cx="3108960" cy="502920"/>
-          </a:xfrm>
-          <a:prstGeom prst="rect">
-            <a:avLst/>
-          </a:prstGeom>
-          <a:noFill/>
-          <a:ln/>
-        </p:spPr>
-        <p:txBody>
-          <a:bodyPr wrap="square" lIns="0" tIns="0" rIns="0" bIns="0" rtlCol="0" anchor="ctr"/>
-          <a:lstStyle/>
-          <a:p>
-            <a:pPr indent="0" marL="0">
-              <a:buNone/>
-            </a:pPr>
-            <a:r>
-              <a:rPr lang="en-US" sz="2000" b="1" dirty="0">
+            <a:off x="868680" y="1874520"/>
+            <a:ext cx="3291840" cy="914400"/>
+          </a:xfrm>
+          <a:prstGeom prst="rect">
+            <a:avLst/>
+          </a:prstGeom>
+          <a:noFill/>
+          <a:ln/>
+        </p:spPr>
+        <p:txBody>
+          <a:bodyPr wrap="square" lIns="0" tIns="0" rIns="0" bIns="0" rtlCol="0" anchor="ctr"/>
+          <a:lstStyle/>
+          <a:p>
+            <a:pPr indent="0" marL="0">
+              <a:buNone/>
+            </a:pPr>
+            <a:r>
+              <a:rPr lang="en-US" sz="1700" b="1" dirty="0">
                 <a:solidFill>
                   <a:srgbClr val="087F73"/>
                 </a:solidFill>
@@ -7002,9 +7998,9 @@
                 <a:ea typeface="Apple SD Gothic Neo" pitchFamily="34" charset="-122"/>
                 <a:cs typeface="Apple SD Gothic Neo" pitchFamily="34" charset="-120"/>
               </a:rPr>
-              <a:t>동시 실행 (측정)</a:t>
-            </a:r>
-            <a:endParaRPr lang="en-US" sz="2000" dirty="0"/>
+              <a:t>답변 검증 (기존 17개)</a:t>
+            </a:r>
+            <a:endParaRPr lang="en-US" sz="1700" dirty="0"/>
           </a:p>
         </p:txBody>
       </p:sp>
@@ -7016,17 +8012,56 @@
         </p:nvSpPr>
         <p:spPr>
           <a:xfrm>
-            <a:off x="868680" y="2697480"/>
-            <a:ext cx="3108960" cy="2468880"/>
-          </a:xfrm>
-          <a:prstGeom prst="rect">
-            <a:avLst/>
-          </a:prstGeom>
-          <a:noFill/>
-          <a:ln/>
-        </p:spPr>
-        <p:txBody>
-          <a:bodyPr wrap="square" lIns="0" tIns="0" rIns="0" bIns="0" rtlCol="0" anchor="t"/>
+            <a:off x="4114800" y="1874520"/>
+            <a:ext cx="3657600" cy="914400"/>
+          </a:xfrm>
+          <a:prstGeom prst="rect">
+            <a:avLst/>
+          </a:prstGeom>
+          <a:noFill/>
+          <a:ln/>
+        </p:spPr>
+        <p:txBody>
+          <a:bodyPr wrap="square" lIns="0" tIns="0" rIns="0" bIns="0" rtlCol="0" anchor="ctr"/>
+          <a:lstStyle/>
+          <a:p>
+            <a:pPr indent="0" marL="0">
+              <a:buNone/>
+            </a:pPr>
+            <a:r>
+              <a:rPr lang="en-US" sz="1800" b="1" dirty="0">
+                <a:solidFill>
+                  <a:srgbClr val="203136"/>
+                </a:solidFill>
+                <a:latin typeface="Apple SD Gothic Neo" pitchFamily="34" charset="0"/>
+                <a:ea typeface="Apple SD Gothic Neo" pitchFamily="34" charset="-122"/>
+                <a:cs typeface="Apple SD Gothic Neo" pitchFamily="34" charset="-120"/>
+              </a:rPr>
+              <a:t>오류 차단 2/9 → 9/9</a:t>
+            </a:r>
+            <a:endParaRPr lang="en-US" sz="1800" dirty="0"/>
+          </a:p>
+        </p:txBody>
+      </p:sp>
+      <p:sp>
+        <p:nvSpPr>
+          <p:cNvPr id="10" name="Text 7"/>
+          <p:cNvSpPr txBox="1"/>
+          <p:nvPr/>
+        </p:nvSpPr>
+        <p:spPr>
+          <a:xfrm>
+            <a:off x="7772400" y="1874520"/>
+            <a:ext cx="3657600" cy="914400"/>
+          </a:xfrm>
+          <a:prstGeom prst="rect">
+            <a:avLst/>
+          </a:prstGeom>
+          <a:noFill/>
+          <a:ln/>
+        </p:spPr>
+        <p:txBody>
+          <a:bodyPr wrap="square" lIns="0" tIns="0" rIns="0" bIns="0" rtlCol="0" anchor="ctr"/>
           <a:lstStyle/>
           <a:p>
             <a:pPr indent="0" marL="0">
@@ -7035,100 +8070,32 @@
             <a:r>
               <a:rPr lang="en-US" sz="1500" dirty="0">
                 <a:solidFill>
-                  <a:srgbClr val="203136"/>
-                </a:solidFill>
-                <a:latin typeface="Apple SD Gothic Neo" pitchFamily="34" charset="0"/>
-                <a:ea typeface="Apple SD Gothic Neo" pitchFamily="34" charset="-122"/>
-                <a:cs typeface="Apple SD Gothic Neo" pitchFamily="34" charset="-120"/>
-              </a:rPr>
-              <a:t>병렬 0.36~0.37초</a:t>
+                  <a:srgbClr val="597078"/>
+                </a:solidFill>
+                <a:latin typeface="Apple SD Gothic Neo" pitchFamily="34" charset="0"/>
+                <a:ea typeface="Apple SD Gothic Neo" pitchFamily="34" charset="-122"/>
+                <a:cs typeface="Apple SD Gothic Neo" pitchFamily="34" charset="-120"/>
+              </a:rPr>
+              <a:t>정상 통과 8/8 → 8/8 (오탐 해소)</a:t>
             </a:r>
             <a:endParaRPr lang="en-US" sz="1500" dirty="0"/>
           </a:p>
-          <a:p>
-            <a:pPr indent="0" marL="0">
-              <a:buNone/>
-            </a:pPr>
-            <a:r>
-              <a:rPr lang="en-US" sz="1500" dirty="0">
-                <a:solidFill>
-                  <a:srgbClr val="203136"/>
-                </a:solidFill>
-                <a:latin typeface="Apple SD Gothic Neo" pitchFamily="34" charset="0"/>
-                <a:ea typeface="Apple SD Gothic Neo" pitchFamily="34" charset="-122"/>
-                <a:cs typeface="Apple SD Gothic Neo" pitchFamily="34" charset="-120"/>
-              </a:rPr>
-              <a:t>직렬 1.07~1.08초</a:t>
-            </a:r>
-            <a:endParaRPr lang="en-US" sz="1500" dirty="0"/>
-          </a:p>
-          <a:p>
-            <a:pPr indent="0" marL="0">
-              <a:buNone/>
-            </a:pPr>
-            <a:r>
-              <a:rPr lang="en-US" sz="1500" dirty="0">
-                <a:solidFill>
-                  <a:srgbClr val="203136"/>
-                </a:solidFill>
-                <a:latin typeface="Apple SD Gothic Neo" pitchFamily="34" charset="0"/>
-                <a:ea typeface="Apple SD Gothic Neo" pitchFamily="34" charset="-122"/>
-                <a:cs typeface="Apple SD Gothic Neo" pitchFamily="34" charset="-120"/>
-              </a:rPr>
-              <a:t>약 3배 (5회)</a:t>
-            </a:r>
-            <a:endParaRPr lang="en-US" sz="1500" dirty="0"/>
-          </a:p>
-          <a:p>
-            <a:pPr indent="0" marL="0">
-              <a:buNone/>
-            </a:pPr>
-            <a:r>
-              <a:rPr lang="en-US" sz="1500" dirty="0">
-                <a:solidFill>
-                  <a:srgbClr val="203136"/>
-                </a:solidFill>
-                <a:latin typeface="Apple SD Gothic Neo" pitchFamily="34" charset="0"/>
-                <a:ea typeface="Apple SD Gothic Neo" pitchFamily="34" charset="-122"/>
-                <a:cs typeface="Apple SD Gothic Neo" pitchFamily="34" charset="-120"/>
-              </a:rPr>
-              <a:t>※ 0.35초/태스크는</a:t>
-            </a:r>
-            <a:endParaRPr lang="en-US" sz="1500" dirty="0"/>
-          </a:p>
-          <a:p>
-            <a:pPr indent="0" marL="0">
-              <a:buNone/>
-            </a:pPr>
-            <a:r>
-              <a:rPr lang="en-US" sz="1500" dirty="0">
-                <a:solidFill>
-                  <a:srgbClr val="203136"/>
-                </a:solidFill>
-                <a:latin typeface="Apple SD Gothic Neo" pitchFamily="34" charset="0"/>
-                <a:ea typeface="Apple SD Gothic Neo" pitchFamily="34" charset="-122"/>
-                <a:cs typeface="Apple SD Gothic Neo" pitchFamily="34" charset="-120"/>
-              </a:rPr>
-              <a:t>   원본의 시뮬레이션</a:t>
-            </a:r>
-            <a:endParaRPr lang="en-US" sz="1500" dirty="0"/>
-          </a:p>
-        </p:txBody>
-      </p:sp>
-      <p:sp>
-        <p:nvSpPr>
-          <p:cNvPr id="10" name="Shape 7"/>
+        </p:txBody>
+      </p:sp>
+      <p:sp>
+        <p:nvSpPr>
+          <p:cNvPr id="11" name="Shape 8"/>
           <p:cNvSpPr/>
           <p:nvPr/>
         </p:nvSpPr>
         <p:spPr>
           <a:xfrm>
-            <a:off x="4315968" y="1920240"/>
-            <a:ext cx="3566160" cy="3383280"/>
+            <a:off x="640080" y="2898648"/>
+            <a:ext cx="10927080" cy="914400"/>
           </a:xfrm>
           <a:prstGeom prst="roundRect">
             <a:avLst>
-              <a:gd name="adj" fmla="val 4054"/>
+              <a:gd name="adj" fmla="val 12000"/>
             </a:avLst>
           </a:prstGeom>
           <a:solidFill>
@@ -7144,30 +8111,30 @@
       </p:sp>
       <p:sp>
         <p:nvSpPr>
-          <p:cNvPr id="11" name="Text 8"/>
-          <p:cNvSpPr txBox="1"/>
-          <p:nvPr/>
-        </p:nvSpPr>
-        <p:spPr>
-          <a:xfrm>
-            <a:off x="4544568" y="2103120"/>
-            <a:ext cx="3108960" cy="502920"/>
-          </a:xfrm>
-          <a:prstGeom prst="rect">
-            <a:avLst/>
-          </a:prstGeom>
-          <a:noFill/>
-          <a:ln/>
-        </p:spPr>
-        <p:txBody>
-          <a:bodyPr wrap="square" lIns="0" tIns="0" rIns="0" bIns="0" rtlCol="0" anchor="ctr"/>
-          <a:lstStyle/>
-          <a:p>
-            <a:pPr indent="0" marL="0">
-              <a:buNone/>
-            </a:pPr>
-            <a:r>
-              <a:rPr lang="en-US" sz="2000" b="1" dirty="0">
+          <p:cNvPr id="12" name="Text 9"/>
+          <p:cNvSpPr txBox="1"/>
+          <p:nvPr/>
+        </p:nvSpPr>
+        <p:spPr>
+          <a:xfrm>
+            <a:off x="868680" y="2898648"/>
+            <a:ext cx="3291840" cy="914400"/>
+          </a:xfrm>
+          <a:prstGeom prst="rect">
+            <a:avLst/>
+          </a:prstGeom>
+          <a:noFill/>
+          <a:ln/>
+        </p:spPr>
+        <p:txBody>
+          <a:bodyPr wrap="square" lIns="0" tIns="0" rIns="0" bIns="0" rtlCol="0" anchor="ctr"/>
+          <a:lstStyle/>
+          <a:p>
+            <a:pPr indent="0" marL="0">
+              <a:buNone/>
+            </a:pPr>
+            <a:r>
+              <a:rPr lang="en-US" sz="1700" b="1" dirty="0">
                 <a:solidFill>
                   <a:srgbClr val="087F73"/>
                 </a:solidFill>
@@ -7175,31 +8142,70 @@
                 <a:ea typeface="Apple SD Gothic Neo" pitchFamily="34" charset="-122"/>
                 <a:cs typeface="Apple SD Gothic Neo" pitchFamily="34" charset="-120"/>
               </a:rPr>
-              <a:t>모델 분리 (측정·추정)</a:t>
-            </a:r>
-            <a:endParaRPr lang="en-US" sz="2000" dirty="0"/>
-          </a:p>
-        </p:txBody>
-      </p:sp>
-      <p:sp>
-        <p:nvSpPr>
-          <p:cNvPr id="12" name="Text 9"/>
-          <p:cNvSpPr txBox="1"/>
-          <p:nvPr/>
-        </p:nvSpPr>
-        <p:spPr>
-          <a:xfrm>
-            <a:off x="4544568" y="2697480"/>
-            <a:ext cx="3108960" cy="2468880"/>
-          </a:xfrm>
-          <a:prstGeom prst="rect">
-            <a:avLst/>
-          </a:prstGeom>
-          <a:noFill/>
-          <a:ln/>
-        </p:spPr>
-        <p:txBody>
-          <a:bodyPr wrap="square" lIns="0" tIns="0" rIns="0" bIns="0" rtlCol="0" anchor="t"/>
+              <a:t>검증 규칙 (표적 28개)</a:t>
+            </a:r>
+            <a:endParaRPr lang="en-US" sz="1700" dirty="0"/>
+          </a:p>
+        </p:txBody>
+      </p:sp>
+      <p:sp>
+        <p:nvSpPr>
+          <p:cNvPr id="13" name="Text 10"/>
+          <p:cNvSpPr txBox="1"/>
+          <p:nvPr/>
+        </p:nvSpPr>
+        <p:spPr>
+          <a:xfrm>
+            <a:off x="4114800" y="2898648"/>
+            <a:ext cx="3657600" cy="914400"/>
+          </a:xfrm>
+          <a:prstGeom prst="rect">
+            <a:avLst/>
+          </a:prstGeom>
+          <a:noFill/>
+          <a:ln/>
+        </p:spPr>
+        <p:txBody>
+          <a:bodyPr wrap="square" lIns="0" tIns="0" rIns="0" bIns="0" rtlCol="0" anchor="ctr"/>
+          <a:lstStyle/>
+          <a:p>
+            <a:pPr indent="0" marL="0">
+              <a:buNone/>
+            </a:pPr>
+            <a:r>
+              <a:rPr lang="en-US" sz="1800" b="1" dirty="0">
+                <a:solidFill>
+                  <a:srgbClr val="203136"/>
+                </a:solidFill>
+                <a:latin typeface="Apple SD Gothic Neo" pitchFamily="34" charset="0"/>
+                <a:ea typeface="Apple SD Gothic Neo" pitchFamily="34" charset="-122"/>
+                <a:cs typeface="Apple SD Gothic Neo" pitchFamily="34" charset="-120"/>
+              </a:rPr>
+              <a:t>오류 차단 6/14 → 14/14</a:t>
+            </a:r>
+            <a:endParaRPr lang="en-US" sz="1800" dirty="0"/>
+          </a:p>
+        </p:txBody>
+      </p:sp>
+      <p:sp>
+        <p:nvSpPr>
+          <p:cNvPr id="14" name="Text 11"/>
+          <p:cNvSpPr txBox="1"/>
+          <p:nvPr/>
+        </p:nvSpPr>
+        <p:spPr>
+          <a:xfrm>
+            <a:off x="7772400" y="2898648"/>
+            <a:ext cx="3657600" cy="914400"/>
+          </a:xfrm>
+          <a:prstGeom prst="rect">
+            <a:avLst/>
+          </a:prstGeom>
+          <a:noFill/>
+          <a:ln/>
+        </p:spPr>
+        <p:txBody>
+          <a:bodyPr wrap="square" lIns="0" tIns="0" rIns="0" bIns="0" rtlCol="0" anchor="ctr"/>
           <a:lstStyle/>
           <a:p>
             <a:pPr indent="0" marL="0">
@@ -7208,100 +8214,32 @@
             <a:r>
               <a:rPr lang="en-US" sz="1500" dirty="0">
                 <a:solidFill>
-                  <a:srgbClr val="203136"/>
-                </a:solidFill>
-                <a:latin typeface="Apple SD Gothic Neo" pitchFamily="34" charset="0"/>
-                <a:ea typeface="Apple SD Gothic Neo" pitchFamily="34" charset="-122"/>
-                <a:cs typeface="Apple SD Gothic Neo" pitchFamily="34" charset="-120"/>
-              </a:rPr>
-              <a:t>분리 $0.0027</a:t>
+                  <a:srgbClr val="597078"/>
+                </a:solidFill>
+                <a:latin typeface="Apple SD Gothic Neo" pitchFamily="34" charset="0"/>
+                <a:ea typeface="Apple SD Gothic Neo" pitchFamily="34" charset="-122"/>
+                <a:cs typeface="Apple SD Gothic Neo" pitchFamily="34" charset="-120"/>
+              </a:rPr>
+              <a:t>정상 통과 7/14 → 14/14 (자체 사례)</a:t>
             </a:r>
             <a:endParaRPr lang="en-US" sz="1500" dirty="0"/>
           </a:p>
-          <a:p>
-            <a:pPr indent="0" marL="0">
-              <a:buNone/>
-            </a:pPr>
-            <a:r>
-              <a:rPr lang="en-US" sz="1500" dirty="0">
-                <a:solidFill>
-                  <a:srgbClr val="203136"/>
-                </a:solidFill>
-                <a:latin typeface="Apple SD Gothic Neo" pitchFamily="34" charset="0"/>
-                <a:ea typeface="Apple SD Gothic Neo" pitchFamily="34" charset="-122"/>
-                <a:cs typeface="Apple SD Gothic Neo" pitchFamily="34" charset="-120"/>
-              </a:rPr>
-              <a:t>전부 quality $0.0067</a:t>
-            </a:r>
-            <a:endParaRPr lang="en-US" sz="1500" dirty="0"/>
-          </a:p>
-          <a:p>
-            <a:pPr indent="0" marL="0">
-              <a:buNone/>
-            </a:pPr>
-            <a:r>
-              <a:rPr lang="en-US" sz="1500" dirty="0">
-                <a:solidFill>
-                  <a:srgbClr val="203136"/>
-                </a:solidFill>
-                <a:latin typeface="Apple SD Gothic Neo" pitchFamily="34" charset="0"/>
-                <a:ea typeface="Apple SD Gothic Neo" pitchFamily="34" charset="-122"/>
-                <a:cs typeface="Apple SD Gothic Neo" pitchFamily="34" charset="-120"/>
-              </a:rPr>
-              <a:t>약 59% 절감 (추정)</a:t>
-            </a:r>
-            <a:endParaRPr lang="en-US" sz="1500" dirty="0"/>
-          </a:p>
-          <a:p>
-            <a:pPr indent="0" marL="0">
-              <a:buNone/>
-            </a:pPr>
-            <a:r>
-              <a:rPr lang="en-US" sz="1500" dirty="0">
-                <a:solidFill>
-                  <a:srgbClr val="203136"/>
-                </a:solidFill>
-                <a:latin typeface="Apple SD Gothic Neo" pitchFamily="34" charset="0"/>
-                <a:ea typeface="Apple SD Gothic Neo" pitchFamily="34" charset="-122"/>
-                <a:cs typeface="Apple SD Gothic Neo" pitchFamily="34" charset="-120"/>
-              </a:rPr>
-              <a:t>※ 토큰=글자수/4,</a:t>
-            </a:r>
-            <a:endParaRPr lang="en-US" sz="1500" dirty="0"/>
-          </a:p>
-          <a:p>
-            <a:pPr indent="0" marL="0">
-              <a:buNone/>
-            </a:pPr>
-            <a:r>
-              <a:rPr lang="en-US" sz="1500" dirty="0">
-                <a:solidFill>
-                  <a:srgbClr val="203136"/>
-                </a:solidFill>
-                <a:latin typeface="Apple SD Gothic Neo" pitchFamily="34" charset="0"/>
-                <a:ea typeface="Apple SD Gothic Neo" pitchFamily="34" charset="-122"/>
-                <a:cs typeface="Apple SD Gothic Neo" pitchFamily="34" charset="-120"/>
-              </a:rPr>
-              <a:t>   단가는 가정값</a:t>
-            </a:r>
-            <a:endParaRPr lang="en-US" sz="1500" dirty="0"/>
-          </a:p>
-        </p:txBody>
-      </p:sp>
-      <p:sp>
-        <p:nvSpPr>
-          <p:cNvPr id="13" name="Shape 10"/>
+        </p:txBody>
+      </p:sp>
+      <p:sp>
+        <p:nvSpPr>
+          <p:cNvPr id="15" name="Shape 12"/>
           <p:cNvSpPr/>
           <p:nvPr/>
         </p:nvSpPr>
         <p:spPr>
           <a:xfrm>
-            <a:off x="7991856" y="1920240"/>
-            <a:ext cx="3566160" cy="3383280"/>
+            <a:off x="640080" y="3922776"/>
+            <a:ext cx="10927080" cy="914400"/>
           </a:xfrm>
           <a:prstGeom prst="roundRect">
             <a:avLst>
-              <a:gd name="adj" fmla="val 4054"/>
+              <a:gd name="adj" fmla="val 12000"/>
             </a:avLst>
           </a:prstGeom>
           <a:solidFill>
@@ -7317,30 +8255,30 @@
       </p:sp>
       <p:sp>
         <p:nvSpPr>
-          <p:cNvPr id="14" name="Text 11"/>
-          <p:cNvSpPr txBox="1"/>
-          <p:nvPr/>
-        </p:nvSpPr>
-        <p:spPr>
-          <a:xfrm>
-            <a:off x="8220456" y="2103120"/>
-            <a:ext cx="3108960" cy="502920"/>
-          </a:xfrm>
-          <a:prstGeom prst="rect">
-            <a:avLst/>
-          </a:prstGeom>
-          <a:noFill/>
-          <a:ln/>
-        </p:spPr>
-        <p:txBody>
-          <a:bodyPr wrap="square" lIns="0" tIns="0" rIns="0" bIns="0" rtlCol="0" anchor="ctr"/>
-          <a:lstStyle/>
-          <a:p>
-            <a:pPr indent="0" marL="0">
-              <a:buNone/>
-            </a:pPr>
-            <a:r>
-              <a:rPr lang="en-US" sz="2000" b="1" dirty="0">
+          <p:cNvPr id="16" name="Text 13"/>
+          <p:cNvSpPr txBox="1"/>
+          <p:nvPr/>
+        </p:nvSpPr>
+        <p:spPr>
+          <a:xfrm>
+            <a:off x="868680" y="3922776"/>
+            <a:ext cx="3291840" cy="914400"/>
+          </a:xfrm>
+          <a:prstGeom prst="rect">
+            <a:avLst/>
+          </a:prstGeom>
+          <a:noFill/>
+          <a:ln/>
+        </p:spPr>
+        <p:txBody>
+          <a:bodyPr wrap="square" lIns="0" tIns="0" rIns="0" bIns="0" rtlCol="0" anchor="ctr"/>
+          <a:lstStyle/>
+          <a:p>
+            <a:pPr indent="0" marL="0">
+              <a:buNone/>
+            </a:pPr>
+            <a:r>
+              <a:rPr lang="en-US" sz="1700" b="1" dirty="0">
                 <a:solidFill>
                   <a:srgbClr val="087F73"/>
                 </a:solidFill>
@@ -7348,31 +8286,70 @@
                 <a:ea typeface="Apple SD Gothic Neo" pitchFamily="34" charset="-122"/>
                 <a:cs typeface="Apple SD Gothic Neo" pitchFamily="34" charset="-120"/>
               </a:rPr>
-              <a:t>조기 종료 (직접 추가)</a:t>
-            </a:r>
-            <a:endParaRPr lang="en-US" sz="2000" dirty="0"/>
-          </a:p>
-        </p:txBody>
-      </p:sp>
-      <p:sp>
-        <p:nvSpPr>
-          <p:cNvPr id="15" name="Text 12"/>
-          <p:cNvSpPr txBox="1"/>
-          <p:nvPr/>
-        </p:nvSpPr>
-        <p:spPr>
-          <a:xfrm>
-            <a:off x="8220456" y="2697480"/>
-            <a:ext cx="3108960" cy="2468880"/>
-          </a:xfrm>
-          <a:prstGeom prst="rect">
-            <a:avLst/>
-          </a:prstGeom>
-          <a:noFill/>
-          <a:ln/>
-        </p:spPr>
-        <p:txBody>
-          <a:bodyPr wrap="square" lIns="0" tIns="0" rIns="0" bIns="0" rtlCol="0" anchor="t"/>
+              <a:t>매뉴얼 선택 (14개)</a:t>
+            </a:r>
+            <a:endParaRPr lang="en-US" sz="1700" dirty="0"/>
+          </a:p>
+        </p:txBody>
+      </p:sp>
+      <p:sp>
+        <p:nvSpPr>
+          <p:cNvPr id="17" name="Text 14"/>
+          <p:cNvSpPr txBox="1"/>
+          <p:nvPr/>
+        </p:nvSpPr>
+        <p:spPr>
+          <a:xfrm>
+            <a:off x="4114800" y="3922776"/>
+            <a:ext cx="3657600" cy="914400"/>
+          </a:xfrm>
+          <a:prstGeom prst="rect">
+            <a:avLst/>
+          </a:prstGeom>
+          <a:noFill/>
+          <a:ln/>
+        </p:spPr>
+        <p:txBody>
+          <a:bodyPr wrap="square" lIns="0" tIns="0" rIns="0" bIns="0" rtlCol="0" anchor="ctr"/>
+          <a:lstStyle/>
+          <a:p>
+            <a:pPr indent="0" marL="0">
+              <a:buNone/>
+            </a:pPr>
+            <a:r>
+              <a:rPr lang="en-US" sz="1800" b="1" dirty="0">
+                <a:solidFill>
+                  <a:srgbClr val="203136"/>
+                </a:solidFill>
+                <a:latin typeface="Apple SD Gothic Neo" pitchFamily="34" charset="0"/>
+                <a:ea typeface="Apple SD Gothic Neo" pitchFamily="34" charset="-122"/>
+                <a:cs typeface="Apple SD Gothic Neo" pitchFamily="34" charset="-120"/>
+              </a:rPr>
+              <a:t>기대 일치 6/14 → 12/14</a:t>
+            </a:r>
+            <a:endParaRPr lang="en-US" sz="1800" dirty="0"/>
+          </a:p>
+        </p:txBody>
+      </p:sp>
+      <p:sp>
+        <p:nvSpPr>
+          <p:cNvPr id="18" name="Text 15"/>
+          <p:cNvSpPr txBox="1"/>
+          <p:nvPr/>
+        </p:nvSpPr>
+        <p:spPr>
+          <a:xfrm>
+            <a:off x="7772400" y="3922776"/>
+            <a:ext cx="3657600" cy="914400"/>
+          </a:xfrm>
+          <a:prstGeom prst="rect">
+            <a:avLst/>
+          </a:prstGeom>
+          <a:noFill/>
+          <a:ln/>
+        </p:spPr>
+        <p:txBody>
+          <a:bodyPr wrap="square" lIns="0" tIns="0" rIns="0" bIns="0" rtlCol="0" anchor="ctr"/>
           <a:lstStyle/>
           <a:p>
             <a:pPr indent="0" marL="0">
@@ -7381,122 +8358,198 @@
             <a:r>
               <a:rPr lang="en-US" sz="1500" dirty="0">
                 <a:solidFill>
+                  <a:srgbClr val="597078"/>
+                </a:solidFill>
+                <a:latin typeface="Apple SD Gothic Neo" pitchFamily="34" charset="0"/>
+                <a:ea typeface="Apple SD Gothic Neo" pitchFamily="34" charset="-122"/>
+                <a:cs typeface="Apple SD Gothic Neo" pitchFamily="34" charset="-120"/>
+              </a:rPr>
+              <a:t>무관 질문 미선택 0/2 → 2/2</a:t>
+            </a:r>
+            <a:endParaRPr lang="en-US" sz="1500" dirty="0"/>
+          </a:p>
+        </p:txBody>
+      </p:sp>
+      <p:sp>
+        <p:nvSpPr>
+          <p:cNvPr id="19" name="Shape 16"/>
+          <p:cNvSpPr/>
+          <p:nvPr/>
+        </p:nvSpPr>
+        <p:spPr>
+          <a:xfrm>
+            <a:off x="640080" y="4946904"/>
+            <a:ext cx="10927080" cy="914400"/>
+          </a:xfrm>
+          <a:prstGeom prst="roundRect">
+            <a:avLst>
+              <a:gd name="adj" fmla="val 12000"/>
+            </a:avLst>
+          </a:prstGeom>
+          <a:solidFill>
+            <a:srgbClr val="EDF5F3"/>
+          </a:solidFill>
+          <a:ln w="12700">
+            <a:solidFill>
+              <a:srgbClr val="EDF5F3"/>
+            </a:solidFill>
+            <a:prstDash val="solid"/>
+          </a:ln>
+        </p:spPr>
+      </p:sp>
+      <p:sp>
+        <p:nvSpPr>
+          <p:cNvPr id="20" name="Text 17"/>
+          <p:cNvSpPr txBox="1"/>
+          <p:nvPr/>
+        </p:nvSpPr>
+        <p:spPr>
+          <a:xfrm>
+            <a:off x="868680" y="4946904"/>
+            <a:ext cx="3291840" cy="914400"/>
+          </a:xfrm>
+          <a:prstGeom prst="rect">
+            <a:avLst/>
+          </a:prstGeom>
+          <a:noFill/>
+          <a:ln/>
+        </p:spPr>
+        <p:txBody>
+          <a:bodyPr wrap="square" lIns="0" tIns="0" rIns="0" bIns="0" rtlCol="0" anchor="ctr"/>
+          <a:lstStyle/>
+          <a:p>
+            <a:pPr indent="0" marL="0">
+              <a:buNone/>
+            </a:pPr>
+            <a:r>
+              <a:rPr lang="en-US" sz="1700" b="1" dirty="0">
+                <a:solidFill>
+                  <a:srgbClr val="087F73"/>
+                </a:solidFill>
+                <a:latin typeface="Apple SD Gothic Neo" pitchFamily="34" charset="0"/>
+                <a:ea typeface="Apple SD Gothic Neo" pitchFamily="34" charset="-122"/>
+                <a:cs typeface="Apple SD Gothic Neo" pitchFamily="34" charset="-120"/>
+              </a:rPr>
+              <a:t>Ollama 실모델 (4질문×1회)</a:t>
+            </a:r>
+            <a:endParaRPr lang="en-US" sz="1700" dirty="0"/>
+          </a:p>
+        </p:txBody>
+      </p:sp>
+      <p:sp>
+        <p:nvSpPr>
+          <p:cNvPr id="21" name="Text 18"/>
+          <p:cNvSpPr txBox="1"/>
+          <p:nvPr/>
+        </p:nvSpPr>
+        <p:spPr>
+          <a:xfrm>
+            <a:off x="4114800" y="4946904"/>
+            <a:ext cx="3657600" cy="914400"/>
+          </a:xfrm>
+          <a:prstGeom prst="rect">
+            <a:avLst/>
+          </a:prstGeom>
+          <a:noFill/>
+          <a:ln/>
+        </p:spPr>
+        <p:txBody>
+          <a:bodyPr wrap="square" lIns="0" tIns="0" rIns="0" bIns="0" rtlCol="0" anchor="ctr"/>
+          <a:lstStyle/>
+          <a:p>
+            <a:pPr indent="0" marL="0">
+              <a:buNone/>
+            </a:pPr>
+            <a:r>
+              <a:rPr lang="en-US" sz="1800" b="1" dirty="0">
+                <a:solidFill>
                   <a:srgbClr val="203136"/>
                 </a:solidFill>
                 <a:latin typeface="Apple SD Gothic Neo" pitchFamily="34" charset="0"/>
                 <a:ea typeface="Apple SD Gothic Neo" pitchFamily="34" charset="-122"/>
                 <a:cs typeface="Apple SD Gothic Neo" pitchFamily="34" charset="-120"/>
               </a:rPr>
-              <a:t>근거 0건이면 작성 생략</a:t>
+              <a:t>작성 시도 1.0 → 1.0회</a:t>
+            </a:r>
+            <a:endParaRPr lang="en-US" sz="1800" dirty="0"/>
+          </a:p>
+        </p:txBody>
+      </p:sp>
+      <p:sp>
+        <p:nvSpPr>
+          <p:cNvPr id="22" name="Text 19"/>
+          <p:cNvSpPr txBox="1"/>
+          <p:nvPr/>
+        </p:nvSpPr>
+        <p:spPr>
+          <a:xfrm>
+            <a:off x="7772400" y="4946904"/>
+            <a:ext cx="3657600" cy="914400"/>
+          </a:xfrm>
+          <a:prstGeom prst="rect">
+            <a:avLst/>
+          </a:prstGeom>
+          <a:noFill/>
+          <a:ln/>
+        </p:spPr>
+        <p:txBody>
+          <a:bodyPr wrap="square" lIns="0" tIns="0" rIns="0" bIns="0" rtlCol="0" anchor="ctr"/>
+          <a:lstStyle/>
+          <a:p>
+            <a:pPr indent="0" marL="0">
+              <a:buNone/>
+            </a:pPr>
+            <a:r>
+              <a:rPr lang="en-US" sz="1500" dirty="0">
+                <a:solidFill>
+                  <a:srgbClr val="597078"/>
+                </a:solidFill>
+                <a:latin typeface="Apple SD Gothic Neo" pitchFamily="34" charset="0"/>
+                <a:ea typeface="Apple SD Gothic Neo" pitchFamily="34" charset="-122"/>
+                <a:cs typeface="Apple SD Gothic Neo" pitchFamily="34" charset="-120"/>
+              </a:rPr>
+              <a:t>시간은 개선 전과 비슷 (42.6s ↔ 43.3s)</a:t>
             </a:r>
             <a:endParaRPr lang="en-US" sz="1500" dirty="0"/>
           </a:p>
-          <a:p>
-            <a:pPr indent="0" marL="0">
-              <a:buNone/>
-            </a:pPr>
-            <a:r>
-              <a:rPr lang="en-US" sz="1500" dirty="0">
-                <a:solidFill>
-                  <a:srgbClr val="203136"/>
-                </a:solidFill>
-                <a:latin typeface="Apple SD Gothic Neo" pitchFamily="34" charset="0"/>
-                <a:ea typeface="Apple SD Gothic Neo" pitchFamily="34" charset="-122"/>
-                <a:cs typeface="Apple SD Gothic Neo" pitchFamily="34" charset="-120"/>
-              </a:rPr>
-              <a:t>응답 36.6s → 1.2~2.7s</a:t>
-            </a:r>
-            <a:endParaRPr lang="en-US" sz="1500" dirty="0"/>
-          </a:p>
-          <a:p>
-            <a:pPr indent="0" marL="0">
-              <a:buNone/>
-            </a:pPr>
-            <a:r>
-              <a:rPr lang="en-US" sz="1500" dirty="0">
-                <a:solidFill>
-                  <a:srgbClr val="203136"/>
-                </a:solidFill>
-                <a:latin typeface="Apple SD Gothic Neo" pitchFamily="34" charset="0"/>
-                <a:ea typeface="Apple SD Gothic Neo" pitchFamily="34" charset="-122"/>
-                <a:cs typeface="Apple SD Gothic Neo" pitchFamily="34" charset="-120"/>
-              </a:rPr>
-              <a:t>작성 모델 호출 1 → 0회</a:t>
-            </a:r>
-            <a:endParaRPr lang="en-US" sz="1500" dirty="0"/>
-          </a:p>
-          <a:p>
-            <a:pPr indent="0" marL="0">
-              <a:buNone/>
-            </a:pPr>
-            <a:r>
-              <a:rPr lang="en-US" sz="1500" dirty="0">
-                <a:solidFill>
-                  <a:srgbClr val="203136"/>
-                </a:solidFill>
-                <a:latin typeface="Apple SD Gothic Neo" pitchFamily="34" charset="0"/>
-                <a:ea typeface="Apple SD Gothic Neo" pitchFamily="34" charset="-122"/>
-                <a:cs typeface="Apple SD Gothic Neo" pitchFamily="34" charset="-120"/>
-              </a:rPr>
-              <a:t>※ billing-service 질문</a:t>
-            </a:r>
-            <a:endParaRPr lang="en-US" sz="1500" dirty="0"/>
-          </a:p>
-          <a:p>
-            <a:pPr indent="0" marL="0">
-              <a:buNone/>
-            </a:pPr>
-            <a:r>
-              <a:rPr lang="en-US" sz="1500" dirty="0">
-                <a:solidFill>
-                  <a:srgbClr val="203136"/>
-                </a:solidFill>
-                <a:latin typeface="Apple SD Gothic Neo" pitchFamily="34" charset="0"/>
-                <a:ea typeface="Apple SD Gothic Neo" pitchFamily="34" charset="-122"/>
-                <a:cs typeface="Apple SD Gothic Neo" pitchFamily="34" charset="-120"/>
-              </a:rPr>
-              <a:t>   3회, 단일 질문</a:t>
-            </a:r>
-            <a:endParaRPr lang="en-US" sz="1500" dirty="0"/>
-          </a:p>
-        </p:txBody>
-      </p:sp>
-      <p:sp>
-        <p:nvSpPr>
-          <p:cNvPr id="16" name="Text 13"/>
-          <p:cNvSpPr txBox="1"/>
-          <p:nvPr/>
-        </p:nvSpPr>
-        <p:spPr>
-          <a:xfrm>
-            <a:off x="640080" y="5577840"/>
-            <a:ext cx="10881360" cy="457200"/>
-          </a:xfrm>
-          <a:prstGeom prst="rect">
-            <a:avLst/>
-          </a:prstGeom>
-          <a:noFill/>
-          <a:ln/>
-        </p:spPr>
-        <p:txBody>
-          <a:bodyPr wrap="square" lIns="0" tIns="0" rIns="0" bIns="0" rtlCol="0" anchor="ctr"/>
-          <a:lstStyle/>
-          <a:p>
-            <a:pPr indent="0" marL="0">
-              <a:buNone/>
-            </a:pPr>
-            <a:r>
-              <a:rPr lang="en-US" sz="1800" b="1" dirty="0">
-                <a:solidFill>
-                  <a:srgbClr val="087F73"/>
-                </a:solidFill>
-                <a:latin typeface="Apple SD Gothic Neo" pitchFamily="34" charset="0"/>
-                <a:ea typeface="Apple SD Gothic Neo" pitchFamily="34" charset="-122"/>
-                <a:cs typeface="Apple SD Gothic Neo" pitchFamily="34" charset="-120"/>
-              </a:rPr>
-              <a:t>앞 둘은 제공 구조의 효과 "측정", 마지막은 직접 추가한 비용 최적화</a:t>
-            </a:r>
-            <a:endParaRPr lang="en-US" sz="1800" dirty="0"/>
+        </p:txBody>
+      </p:sp>
+      <p:sp>
+        <p:nvSpPr>
+          <p:cNvPr id="23" name="Text 20"/>
+          <p:cNvSpPr txBox="1"/>
+          <p:nvPr/>
+        </p:nvSpPr>
+        <p:spPr>
+          <a:xfrm>
+            <a:off x="640080" y="6035040"/>
+            <a:ext cx="10927080" cy="365760"/>
+          </a:xfrm>
+          <a:prstGeom prst="rect">
+            <a:avLst/>
+          </a:prstGeom>
+          <a:noFill/>
+          <a:ln/>
+        </p:spPr>
+        <p:txBody>
+          <a:bodyPr wrap="square" lIns="0" tIns="0" rIns="0" bIns="0" rtlCol="0" anchor="ctr"/>
+          <a:lstStyle/>
+          <a:p>
+            <a:pPr indent="0" marL="0">
+              <a:buNone/>
+            </a:pPr>
+            <a:r>
+              <a:rPr lang="en-US" sz="1300" dirty="0">
+                <a:solidFill>
+                  <a:srgbClr val="597078"/>
+                </a:solidFill>
+                <a:latin typeface="Apple SD Gothic Neo" pitchFamily="34" charset="0"/>
+                <a:ea typeface="Apple SD Gothic Neo" pitchFamily="34" charset="-122"/>
+                <a:cs typeface="Apple SD Gothic Neo" pitchFamily="34" charset="-120"/>
+              </a:rPr>
+              <a:t>소규모 자체 평가 · 실모델 최신 비교는 legacy와 grounded · 실행 간 시간 변동이 커서 시간 개선은 주장하지 않음</a:t>
+            </a:r>
+            <a:endParaRPr lang="en-US" sz="1300" dirty="0"/>
           </a:p>
         </p:txBody>
       </p:sp>
@@ -7565,7 +8618,7 @@
                 <a:ea typeface="Apple SD Gothic Neo" pitchFamily="34" charset="-122"/>
                 <a:cs typeface="Apple SD Gothic Neo" pitchFamily="34" charset="-120"/>
               </a:rPr>
-              <a:t>한계와 트레이드오프</a:t>
+              <a:t>보너스: 실측 수치 3가지</a:t>
             </a:r>
             <a:endParaRPr lang="en-US" sz="3000" dirty="0"/>
           </a:p>
@@ -7604,7 +8657,7 @@
                 <a:ea typeface="Apple SD Gothic Neo" pitchFamily="34" charset="-122"/>
                 <a:cs typeface="Apple SD Gothic Neo" pitchFamily="34" charset="-120"/>
               </a:rPr>
-              <a:t>09 한계 · 마무리 · 35초</a:t>
+              <a:t>09 동시 실행 · 모델 분리 · 조기 종료 · 20초</a:t>
             </a:r>
             <a:endParaRPr lang="en-US" sz="1500" dirty="0"/>
           </a:p>
@@ -7697,184 +8750,11 @@
         <p:spPr>
           <a:xfrm>
             <a:off x="640080" y="1920240"/>
-            <a:ext cx="5303520" cy="3200400"/>
+            <a:ext cx="3566160" cy="3383280"/>
           </a:xfrm>
           <a:prstGeom prst="roundRect">
             <a:avLst>
-              <a:gd name="adj" fmla="val 4286"/>
-            </a:avLst>
-          </a:prstGeom>
-          <a:solidFill>
-            <a:srgbClr val="F7E8D7"/>
-          </a:solidFill>
-          <a:ln w="12700">
-            <a:solidFill>
-              <a:srgbClr val="F7E8D7"/>
-            </a:solidFill>
-            <a:prstDash val="solid"/>
-          </a:ln>
-        </p:spPr>
-      </p:sp>
-      <p:sp>
-        <p:nvSpPr>
-          <p:cNvPr id="8" name="Text 5"/>
-          <p:cNvSpPr txBox="1"/>
-          <p:nvPr/>
-        </p:nvSpPr>
-        <p:spPr>
-          <a:xfrm>
-            <a:off x="868680" y="2103120"/>
-            <a:ext cx="4846320" cy="502920"/>
-          </a:xfrm>
-          <a:prstGeom prst="rect">
-            <a:avLst/>
-          </a:prstGeom>
-          <a:noFill/>
-          <a:ln/>
-        </p:spPr>
-        <p:txBody>
-          <a:bodyPr wrap="square" lIns="0" tIns="0" rIns="0" bIns="0" rtlCol="0" anchor="ctr"/>
-          <a:lstStyle/>
-          <a:p>
-            <a:pPr indent="0" marL="0">
-              <a:buNone/>
-            </a:pPr>
-            <a:r>
-              <a:rPr lang="en-US" sz="2000" b="1" dirty="0">
-                <a:solidFill>
-                  <a:srgbClr val="AD453F"/>
-                </a:solidFill>
-                <a:latin typeface="Apple SD Gothic Neo" pitchFamily="34" charset="0"/>
-                <a:ea typeface="Apple SD Gothic Neo" pitchFamily="34" charset="-122"/>
-                <a:cs typeface="Apple SD Gothic Neo" pitchFamily="34" charset="-120"/>
-              </a:rPr>
-              <a:t>남은 한계</a:t>
-            </a:r>
-            <a:endParaRPr lang="en-US" sz="2000" dirty="0"/>
-          </a:p>
-        </p:txBody>
-      </p:sp>
-      <p:sp>
-        <p:nvSpPr>
-          <p:cNvPr id="9" name="Text 6"/>
-          <p:cNvSpPr txBox="1"/>
-          <p:nvPr/>
-        </p:nvSpPr>
-        <p:spPr>
-          <a:xfrm>
-            <a:off x="868680" y="2697480"/>
-            <a:ext cx="4846320" cy="2286000"/>
-          </a:xfrm>
-          <a:prstGeom prst="rect">
-            <a:avLst/>
-          </a:prstGeom>
-          <a:noFill/>
-          <a:ln/>
-        </p:spPr>
-        <p:txBody>
-          <a:bodyPr wrap="square" lIns="0" tIns="0" rIns="0" bIns="0" rtlCol="0" anchor="t"/>
-          <a:lstStyle/>
-          <a:p>
-            <a:pPr indent="0" marL="0">
-              <a:buNone/>
-            </a:pPr>
-            <a:r>
-              <a:rPr lang="en-US" sz="1500" dirty="0">
-                <a:solidFill>
-                  <a:srgbClr val="203136"/>
-                </a:solidFill>
-                <a:latin typeface="Apple SD Gothic Neo" pitchFamily="34" charset="0"/>
-                <a:ea typeface="Apple SD Gothic Neo" pitchFamily="34" charset="-122"/>
-                <a:cs typeface="Apple SD Gothic Neo" pitchFamily="34" charset="-120"/>
-              </a:rPr>
-              <a:t>표현 변화 → 누락·오탐 (규칙이</a:t>
-            </a:r>
-            <a:endParaRPr lang="en-US" sz="1500" dirty="0"/>
-          </a:p>
-          <a:p>
-            <a:pPr indent="0" marL="0">
-              <a:buNone/>
-            </a:pPr>
-            <a:r>
-              <a:rPr lang="en-US" sz="1500" dirty="0">
-                <a:solidFill>
-                  <a:srgbClr val="203136"/>
-                </a:solidFill>
-                <a:latin typeface="Apple SD Gothic Neo" pitchFamily="34" charset="0"/>
-                <a:ea typeface="Apple SD Gothic Neo" pitchFamily="34" charset="-122"/>
-                <a:cs typeface="Apple SD Gothic Neo" pitchFamily="34" charset="-120"/>
-              </a:rPr>
-              <a:t>틀린 값을 통과시킨 적 2회)</a:t>
-            </a:r>
-            <a:endParaRPr lang="en-US" sz="1500" dirty="0"/>
-          </a:p>
-          <a:p>
-            <a:pPr indent="0" marL="0">
-              <a:buNone/>
-            </a:pPr>
-            <a:r>
-              <a:rPr lang="en-US" sz="1500" dirty="0">
-                <a:solidFill>
-                  <a:srgbClr val="203136"/>
-                </a:solidFill>
-                <a:latin typeface="Apple SD Gothic Neo" pitchFamily="34" charset="0"/>
-                <a:ea typeface="Apple SD Gothic Neo" pitchFamily="34" charset="-122"/>
-                <a:cs typeface="Apple SD Gothic Neo" pitchFamily="34" charset="-120"/>
-              </a:rPr>
-              <a:t>원인 설명·알림 인용 미검증</a:t>
-            </a:r>
-            <a:endParaRPr lang="en-US" sz="1500" dirty="0"/>
-          </a:p>
-          <a:p>
-            <a:pPr indent="0" marL="0">
-              <a:buNone/>
-            </a:pPr>
-            <a:r>
-              <a:rPr lang="en-US" sz="1500" dirty="0">
-                <a:solidFill>
-                  <a:srgbClr val="203136"/>
-                </a:solidFill>
-                <a:latin typeface="Apple SD Gothic Neo" pitchFamily="34" charset="0"/>
-                <a:ea typeface="Apple SD Gothic Neo" pitchFamily="34" charset="-122"/>
-                <a:cs typeface="Apple SD Gothic Neo" pitchFamily="34" charset="-120"/>
-              </a:rPr>
-              <a:t>서브에이전트: LLM 판단 없음</a:t>
-            </a:r>
-            <a:endParaRPr lang="en-US" sz="1500" dirty="0"/>
-          </a:p>
-          <a:p>
-            <a:pPr indent="0" marL="0">
-              <a:buNone/>
-            </a:pPr>
-            <a:r>
-              <a:rPr lang="en-US" sz="1500" dirty="0">
-                <a:solidFill>
-                  <a:srgbClr val="203136"/>
-                </a:solidFill>
-                <a:latin typeface="Apple SD Gothic Neo" pitchFamily="34" charset="0"/>
-                <a:ea typeface="Apple SD Gothic Neo" pitchFamily="34" charset="-122"/>
-                <a:cs typeface="Apple SD Gothic Neo" pitchFamily="34" charset="-120"/>
-              </a:rPr>
-              <a:t>소규모 자체 평가 · OpenAI 미검증</a:t>
-            </a:r>
-            <a:endParaRPr lang="en-US" sz="1500" dirty="0"/>
-          </a:p>
-        </p:txBody>
-      </p:sp>
-      <p:sp>
-        <p:nvSpPr>
-          <p:cNvPr id="10" name="Shape 7"/>
-          <p:cNvSpPr/>
-          <p:nvPr/>
-        </p:nvSpPr>
-        <p:spPr>
-          <a:xfrm>
-            <a:off x="6217920" y="1920240"/>
-            <a:ext cx="5303520" cy="3200400"/>
-          </a:xfrm>
-          <a:prstGeom prst="roundRect">
-            <a:avLst>
-              <a:gd name="adj" fmla="val 4286"/>
+              <a:gd name="adj" fmla="val 4054"/>
             </a:avLst>
           </a:prstGeom>
           <a:solidFill>
@@ -7890,14 +8770,187 @@
       </p:sp>
       <p:sp>
         <p:nvSpPr>
+          <p:cNvPr id="8" name="Text 5"/>
+          <p:cNvSpPr txBox="1"/>
+          <p:nvPr/>
+        </p:nvSpPr>
+        <p:spPr>
+          <a:xfrm>
+            <a:off x="868680" y="2103120"/>
+            <a:ext cx="3108960" cy="502920"/>
+          </a:xfrm>
+          <a:prstGeom prst="rect">
+            <a:avLst/>
+          </a:prstGeom>
+          <a:noFill/>
+          <a:ln/>
+        </p:spPr>
+        <p:txBody>
+          <a:bodyPr wrap="square" lIns="0" tIns="0" rIns="0" bIns="0" rtlCol="0" anchor="ctr"/>
+          <a:lstStyle/>
+          <a:p>
+            <a:pPr indent="0" marL="0">
+              <a:buNone/>
+            </a:pPr>
+            <a:r>
+              <a:rPr lang="en-US" sz="2000" b="1" dirty="0">
+                <a:solidFill>
+                  <a:srgbClr val="087F73"/>
+                </a:solidFill>
+                <a:latin typeface="Apple SD Gothic Neo" pitchFamily="34" charset="0"/>
+                <a:ea typeface="Apple SD Gothic Neo" pitchFamily="34" charset="-122"/>
+                <a:cs typeface="Apple SD Gothic Neo" pitchFamily="34" charset="-120"/>
+              </a:rPr>
+              <a:t>동시 실행 (측정)</a:t>
+            </a:r>
+            <a:endParaRPr lang="en-US" sz="2000" dirty="0"/>
+          </a:p>
+        </p:txBody>
+      </p:sp>
+      <p:sp>
+        <p:nvSpPr>
+          <p:cNvPr id="9" name="Text 6"/>
+          <p:cNvSpPr txBox="1"/>
+          <p:nvPr/>
+        </p:nvSpPr>
+        <p:spPr>
+          <a:xfrm>
+            <a:off x="868680" y="2697480"/>
+            <a:ext cx="3108960" cy="2468880"/>
+          </a:xfrm>
+          <a:prstGeom prst="rect">
+            <a:avLst/>
+          </a:prstGeom>
+          <a:noFill/>
+          <a:ln/>
+        </p:spPr>
+        <p:txBody>
+          <a:bodyPr wrap="square" lIns="0" tIns="0" rIns="0" bIns="0" rtlCol="0" anchor="t"/>
+          <a:lstStyle/>
+          <a:p>
+            <a:pPr indent="0" marL="0">
+              <a:buNone/>
+            </a:pPr>
+            <a:r>
+              <a:rPr lang="en-US" sz="1500" dirty="0">
+                <a:solidFill>
+                  <a:srgbClr val="203136"/>
+                </a:solidFill>
+                <a:latin typeface="Apple SD Gothic Neo" pitchFamily="34" charset="0"/>
+                <a:ea typeface="Apple SD Gothic Neo" pitchFamily="34" charset="-122"/>
+                <a:cs typeface="Apple SD Gothic Neo" pitchFamily="34" charset="-120"/>
+              </a:rPr>
+              <a:t>병렬 0.36~0.37초</a:t>
+            </a:r>
+            <a:endParaRPr lang="en-US" sz="1500" dirty="0"/>
+          </a:p>
+          <a:p>
+            <a:pPr indent="0" marL="0">
+              <a:buNone/>
+            </a:pPr>
+            <a:r>
+              <a:rPr lang="en-US" sz="1500" dirty="0">
+                <a:solidFill>
+                  <a:srgbClr val="203136"/>
+                </a:solidFill>
+                <a:latin typeface="Apple SD Gothic Neo" pitchFamily="34" charset="0"/>
+                <a:ea typeface="Apple SD Gothic Neo" pitchFamily="34" charset="-122"/>
+                <a:cs typeface="Apple SD Gothic Neo" pitchFamily="34" charset="-120"/>
+              </a:rPr>
+              <a:t>직렬 1.07~1.08초</a:t>
+            </a:r>
+            <a:endParaRPr lang="en-US" sz="1500" dirty="0"/>
+          </a:p>
+          <a:p>
+            <a:pPr indent="0" marL="0">
+              <a:buNone/>
+            </a:pPr>
+            <a:r>
+              <a:rPr lang="en-US" sz="1500" dirty="0">
+                <a:solidFill>
+                  <a:srgbClr val="203136"/>
+                </a:solidFill>
+                <a:latin typeface="Apple SD Gothic Neo" pitchFamily="34" charset="0"/>
+                <a:ea typeface="Apple SD Gothic Neo" pitchFamily="34" charset="-122"/>
+                <a:cs typeface="Apple SD Gothic Neo" pitchFamily="34" charset="-120"/>
+              </a:rPr>
+              <a:t>약 3배 (5회)</a:t>
+            </a:r>
+            <a:endParaRPr lang="en-US" sz="1500" dirty="0"/>
+          </a:p>
+          <a:p>
+            <a:pPr indent="0" marL="0">
+              <a:buNone/>
+            </a:pPr>
+            <a:r>
+              <a:rPr lang="en-US" sz="1500" dirty="0">
+                <a:solidFill>
+                  <a:srgbClr val="203136"/>
+                </a:solidFill>
+                <a:latin typeface="Apple SD Gothic Neo" pitchFamily="34" charset="0"/>
+                <a:ea typeface="Apple SD Gothic Neo" pitchFamily="34" charset="-122"/>
+                <a:cs typeface="Apple SD Gothic Neo" pitchFamily="34" charset="-120"/>
+              </a:rPr>
+              <a:t>※ 0.35초/태스크는</a:t>
+            </a:r>
+            <a:endParaRPr lang="en-US" sz="1500" dirty="0"/>
+          </a:p>
+          <a:p>
+            <a:pPr indent="0" marL="0">
+              <a:buNone/>
+            </a:pPr>
+            <a:r>
+              <a:rPr lang="en-US" sz="1500" dirty="0">
+                <a:solidFill>
+                  <a:srgbClr val="203136"/>
+                </a:solidFill>
+                <a:latin typeface="Apple SD Gothic Neo" pitchFamily="34" charset="0"/>
+                <a:ea typeface="Apple SD Gothic Neo" pitchFamily="34" charset="-122"/>
+                <a:cs typeface="Apple SD Gothic Neo" pitchFamily="34" charset="-120"/>
+              </a:rPr>
+              <a:t>   원본의 시뮬레이션</a:t>
+            </a:r>
+            <a:endParaRPr lang="en-US" sz="1500" dirty="0"/>
+          </a:p>
+        </p:txBody>
+      </p:sp>
+      <p:sp>
+        <p:nvSpPr>
+          <p:cNvPr id="10" name="Shape 7"/>
+          <p:cNvSpPr/>
+          <p:nvPr/>
+        </p:nvSpPr>
+        <p:spPr>
+          <a:xfrm>
+            <a:off x="4315968" y="1920240"/>
+            <a:ext cx="3566160" cy="3383280"/>
+          </a:xfrm>
+          <a:prstGeom prst="roundRect">
+            <a:avLst>
+              <a:gd name="adj" fmla="val 4054"/>
+            </a:avLst>
+          </a:prstGeom>
+          <a:solidFill>
+            <a:srgbClr val="EDF5F3"/>
+          </a:solidFill>
+          <a:ln w="12700">
+            <a:solidFill>
+              <a:srgbClr val="EDF5F3"/>
+            </a:solidFill>
+            <a:prstDash val="solid"/>
+          </a:ln>
+        </p:spPr>
+      </p:sp>
+      <p:sp>
+        <p:nvSpPr>
           <p:cNvPr id="11" name="Text 8"/>
           <p:cNvSpPr txBox="1"/>
           <p:nvPr/>
         </p:nvSpPr>
         <p:spPr>
           <a:xfrm>
-            <a:off x="6446520" y="2103120"/>
-            <a:ext cx="4846320" cy="502920"/>
+            <a:off x="4544568" y="2103120"/>
+            <a:ext cx="3108960" cy="502920"/>
           </a:xfrm>
           <a:prstGeom prst="rect">
             <a:avLst/>
@@ -7921,7 +8974,7 @@
                 <a:ea typeface="Apple SD Gothic Neo" pitchFamily="34" charset="-122"/>
                 <a:cs typeface="Apple SD Gothic Neo" pitchFamily="34" charset="-120"/>
               </a:rPr>
-              <a:t>트레이드오프</a:t>
+              <a:t>모델 분리 (측정·추정)</a:t>
             </a:r>
             <a:endParaRPr lang="en-US" sz="2000" dirty="0"/>
           </a:p>
@@ -7935,8 +8988,8 @@
         </p:nvSpPr>
         <p:spPr>
           <a:xfrm>
-            <a:off x="6446520" y="2697480"/>
-            <a:ext cx="4846320" cy="2286000"/>
+            <a:off x="4544568" y="2697480"/>
+            <a:ext cx="3108960" cy="2468880"/>
           </a:xfrm>
           <a:prstGeom prst="rect">
             <a:avLst/>
@@ -7960,7 +9013,7 @@
                 <a:ea typeface="Apple SD Gothic Neo" pitchFamily="34" charset="-122"/>
                 <a:cs typeface="Apple SD Gothic Neo" pitchFamily="34" charset="-120"/>
               </a:rPr>
-              <a:t>시스템명 요구 완화 ↔ 수치 없는</a:t>
+              <a:t>분리 $0.0027</a:t>
             </a:r>
             <a:endParaRPr lang="en-US" sz="1500" dirty="0"/>
           </a:p>
@@ -7977,7 +9030,7 @@
                 <a:ea typeface="Apple SD Gothic Neo" pitchFamily="34" charset="-122"/>
                 <a:cs typeface="Apple SD Gothic Neo" pitchFamily="34" charset="-120"/>
               </a:rPr>
-              <a:t>답변은 대조 없이 통과</a:t>
+              <a:t>전부 quality $0.0067</a:t>
             </a:r>
             <a:endParaRPr lang="en-US" sz="1500" dirty="0"/>
           </a:p>
@@ -7994,7 +9047,7 @@
                 <a:ea typeface="Apple SD Gothic Neo" pitchFamily="34" charset="-122"/>
                 <a:cs typeface="Apple SD Gothic Neo" pitchFamily="34" charset="-120"/>
               </a:rPr>
-              <a:t>초안 비공개 ↔ 토큰 스트리밍 포기</a:t>
+              <a:t>약 59% 절감 (추정)</a:t>
             </a:r>
             <a:endParaRPr lang="en-US" sz="1500" dirty="0"/>
           </a:p>
@@ -8011,7 +9064,7 @@
                 <a:ea typeface="Apple SD Gothic Neo" pitchFamily="34" charset="-122"/>
                 <a:cs typeface="Apple SD Gothic Neo" pitchFamily="34" charset="-120"/>
               </a:rPr>
-              <a:t>부분 자료 진행 ↔ 한계 표시 필요</a:t>
+              <a:t>※ 토큰=글자수/4,</a:t>
             </a:r>
             <a:endParaRPr lang="en-US" sz="1500" dirty="0"/>
           </a:p>
@@ -8028,7 +9081,7 @@
                 <a:ea typeface="Apple SD Gothic Neo" pitchFamily="34" charset="-122"/>
                 <a:cs typeface="Apple SD Gothic Neo" pitchFamily="34" charset="-120"/>
               </a:rPr>
-              <a:t>모듈화 ↔ 성능 이득 없음</a:t>
+              <a:t>   단가는 가정값</a:t>
             </a:r>
             <a:endParaRPr lang="en-US" sz="1500" dirty="0"/>
           </a:p>
@@ -8036,13 +9089,186 @@
       </p:sp>
       <p:sp>
         <p:nvSpPr>
-          <p:cNvPr id="13" name="Text 10"/>
-          <p:cNvSpPr txBox="1"/>
-          <p:nvPr/>
-        </p:nvSpPr>
-        <p:spPr>
-          <a:xfrm>
-            <a:off x="640080" y="5257800"/>
+          <p:cNvPr id="13" name="Shape 10"/>
+          <p:cNvSpPr/>
+          <p:nvPr/>
+        </p:nvSpPr>
+        <p:spPr>
+          <a:xfrm>
+            <a:off x="7991856" y="1920240"/>
+            <a:ext cx="3566160" cy="3383280"/>
+          </a:xfrm>
+          <a:prstGeom prst="roundRect">
+            <a:avLst>
+              <a:gd name="adj" fmla="val 4054"/>
+            </a:avLst>
+          </a:prstGeom>
+          <a:solidFill>
+            <a:srgbClr val="EDF5F3"/>
+          </a:solidFill>
+          <a:ln w="12700">
+            <a:solidFill>
+              <a:srgbClr val="EDF5F3"/>
+            </a:solidFill>
+            <a:prstDash val="solid"/>
+          </a:ln>
+        </p:spPr>
+      </p:sp>
+      <p:sp>
+        <p:nvSpPr>
+          <p:cNvPr id="14" name="Text 11"/>
+          <p:cNvSpPr txBox="1"/>
+          <p:nvPr/>
+        </p:nvSpPr>
+        <p:spPr>
+          <a:xfrm>
+            <a:off x="8220456" y="2103120"/>
+            <a:ext cx="3108960" cy="502920"/>
+          </a:xfrm>
+          <a:prstGeom prst="rect">
+            <a:avLst/>
+          </a:prstGeom>
+          <a:noFill/>
+          <a:ln/>
+        </p:spPr>
+        <p:txBody>
+          <a:bodyPr wrap="square" lIns="0" tIns="0" rIns="0" bIns="0" rtlCol="0" anchor="ctr"/>
+          <a:lstStyle/>
+          <a:p>
+            <a:pPr indent="0" marL="0">
+              <a:buNone/>
+            </a:pPr>
+            <a:r>
+              <a:rPr lang="en-US" sz="2000" b="1" dirty="0">
+                <a:solidFill>
+                  <a:srgbClr val="087F73"/>
+                </a:solidFill>
+                <a:latin typeface="Apple SD Gothic Neo" pitchFamily="34" charset="0"/>
+                <a:ea typeface="Apple SD Gothic Neo" pitchFamily="34" charset="-122"/>
+                <a:cs typeface="Apple SD Gothic Neo" pitchFamily="34" charset="-120"/>
+              </a:rPr>
+              <a:t>조기 종료 (직접 추가)</a:t>
+            </a:r>
+            <a:endParaRPr lang="en-US" sz="2000" dirty="0"/>
+          </a:p>
+        </p:txBody>
+      </p:sp>
+      <p:sp>
+        <p:nvSpPr>
+          <p:cNvPr id="15" name="Text 12"/>
+          <p:cNvSpPr txBox="1"/>
+          <p:nvPr/>
+        </p:nvSpPr>
+        <p:spPr>
+          <a:xfrm>
+            <a:off x="8220456" y="2697480"/>
+            <a:ext cx="3108960" cy="2468880"/>
+          </a:xfrm>
+          <a:prstGeom prst="rect">
+            <a:avLst/>
+          </a:prstGeom>
+          <a:noFill/>
+          <a:ln/>
+        </p:spPr>
+        <p:txBody>
+          <a:bodyPr wrap="square" lIns="0" tIns="0" rIns="0" bIns="0" rtlCol="0" anchor="t"/>
+          <a:lstStyle/>
+          <a:p>
+            <a:pPr indent="0" marL="0">
+              <a:buNone/>
+            </a:pPr>
+            <a:r>
+              <a:rPr lang="en-US" sz="1500" dirty="0">
+                <a:solidFill>
+                  <a:srgbClr val="203136"/>
+                </a:solidFill>
+                <a:latin typeface="Apple SD Gothic Neo" pitchFamily="34" charset="0"/>
+                <a:ea typeface="Apple SD Gothic Neo" pitchFamily="34" charset="-122"/>
+                <a:cs typeface="Apple SD Gothic Neo" pitchFamily="34" charset="-120"/>
+              </a:rPr>
+              <a:t>근거 0건이면 작성 생략</a:t>
+            </a:r>
+            <a:endParaRPr lang="en-US" sz="1500" dirty="0"/>
+          </a:p>
+          <a:p>
+            <a:pPr indent="0" marL="0">
+              <a:buNone/>
+            </a:pPr>
+            <a:r>
+              <a:rPr lang="en-US" sz="1500" dirty="0">
+                <a:solidFill>
+                  <a:srgbClr val="203136"/>
+                </a:solidFill>
+                <a:latin typeface="Apple SD Gothic Neo" pitchFamily="34" charset="0"/>
+                <a:ea typeface="Apple SD Gothic Neo" pitchFamily="34" charset="-122"/>
+                <a:cs typeface="Apple SD Gothic Neo" pitchFamily="34" charset="-120"/>
+              </a:rPr>
+              <a:t>응답 36.6s → 1.2~2.7s</a:t>
+            </a:r>
+            <a:endParaRPr lang="en-US" sz="1500" dirty="0"/>
+          </a:p>
+          <a:p>
+            <a:pPr indent="0" marL="0">
+              <a:buNone/>
+            </a:pPr>
+            <a:r>
+              <a:rPr lang="en-US" sz="1500" dirty="0">
+                <a:solidFill>
+                  <a:srgbClr val="203136"/>
+                </a:solidFill>
+                <a:latin typeface="Apple SD Gothic Neo" pitchFamily="34" charset="0"/>
+                <a:ea typeface="Apple SD Gothic Neo" pitchFamily="34" charset="-122"/>
+                <a:cs typeface="Apple SD Gothic Neo" pitchFamily="34" charset="-120"/>
+              </a:rPr>
+              <a:t>작성 모델 호출 1 → 0회</a:t>
+            </a:r>
+            <a:endParaRPr lang="en-US" sz="1500" dirty="0"/>
+          </a:p>
+          <a:p>
+            <a:pPr indent="0" marL="0">
+              <a:buNone/>
+            </a:pPr>
+            <a:r>
+              <a:rPr lang="en-US" sz="1500" dirty="0">
+                <a:solidFill>
+                  <a:srgbClr val="203136"/>
+                </a:solidFill>
+                <a:latin typeface="Apple SD Gothic Neo" pitchFamily="34" charset="0"/>
+                <a:ea typeface="Apple SD Gothic Neo" pitchFamily="34" charset="-122"/>
+                <a:cs typeface="Apple SD Gothic Neo" pitchFamily="34" charset="-120"/>
+              </a:rPr>
+              <a:t>※ billing-service 질문</a:t>
+            </a:r>
+            <a:endParaRPr lang="en-US" sz="1500" dirty="0"/>
+          </a:p>
+          <a:p>
+            <a:pPr indent="0" marL="0">
+              <a:buNone/>
+            </a:pPr>
+            <a:r>
+              <a:rPr lang="en-US" sz="1500" dirty="0">
+                <a:solidFill>
+                  <a:srgbClr val="203136"/>
+                </a:solidFill>
+                <a:latin typeface="Apple SD Gothic Neo" pitchFamily="34" charset="0"/>
+                <a:ea typeface="Apple SD Gothic Neo" pitchFamily="34" charset="-122"/>
+                <a:cs typeface="Apple SD Gothic Neo" pitchFamily="34" charset="-120"/>
+              </a:rPr>
+              <a:t>   3회, 단일 질문</a:t>
+            </a:r>
+            <a:endParaRPr lang="en-US" sz="1500" dirty="0"/>
+          </a:p>
+        </p:txBody>
+      </p:sp>
+      <p:sp>
+        <p:nvSpPr>
+          <p:cNvPr id="16" name="Text 13"/>
+          <p:cNvSpPr txBox="1"/>
+          <p:nvPr/>
+        </p:nvSpPr>
+        <p:spPr>
+          <a:xfrm>
+            <a:off x="640080" y="5577840"/>
             <a:ext cx="10881360" cy="457200"/>
           </a:xfrm>
           <a:prstGeom prst="rect">
@@ -8067,48 +9293,9 @@
                 <a:ea typeface="Apple SD Gothic Neo" pitchFamily="34" charset="-122"/>
                 <a:cs typeface="Apple SD Gothic Neo" pitchFamily="34" charset="-120"/>
               </a:rPr>
-              <a:t>검사 통과 = 추출한 수치의 대조 결과 ≠ 답변 전체가 사실이라는 보장</a:t>
+              <a:t>앞 둘은 제공 구조의 효과 "측정", 마지막은 직접 추가한 비용 최적화</a:t>
             </a:r>
             <a:endParaRPr lang="en-US" sz="1800" dirty="0"/>
-          </a:p>
-        </p:txBody>
-      </p:sp>
-      <p:sp>
-        <p:nvSpPr>
-          <p:cNvPr id="14" name="Text 11"/>
-          <p:cNvSpPr txBox="1"/>
-          <p:nvPr/>
-        </p:nvSpPr>
-        <p:spPr>
-          <a:xfrm>
-            <a:off x="640080" y="5760720"/>
-            <a:ext cx="10881360" cy="457200"/>
-          </a:xfrm>
-          <a:prstGeom prst="rect">
-            <a:avLst/>
-          </a:prstGeom>
-          <a:noFill/>
-          <a:ln/>
-        </p:spPr>
-        <p:txBody>
-          <a:bodyPr wrap="square" lIns="0" tIns="0" rIns="0" bIns="0" rtlCol="0" anchor="ctr"/>
-          <a:lstStyle/>
-          <a:p>
-            <a:pPr indent="0" marL="0">
-              <a:buNone/>
-            </a:pPr>
-            <a:r>
-              <a:rPr lang="en-US" sz="1400" dirty="0">
-                <a:solidFill>
-                  <a:srgbClr val="597078"/>
-                </a:solidFill>
-                <a:latin typeface="Apple SD Gothic Neo" pitchFamily="34" charset="0"/>
-                <a:ea typeface="Apple SD Gothic Neo" pitchFamily="34" charset="-122"/>
-                <a:cs typeface="Apple SD Gothic Neo" pitchFamily="34" charset="-120"/>
-              </a:rPr>
-              <a:t>향후 개선: 사용자에게 되묻는 대상 확인 · 독립 평가셋 · LLM 판정 병행 · LangSmith 기반 평가 · 임베딩 검색 확장(문서 증가 시 인덱스 전략)</a:t>
-            </a:r>
-            <a:endParaRPr lang="en-US" sz="1400" dirty="0"/>
           </a:p>
         </p:txBody>
       </p:sp>

--- a/submission/AI_Capstone_발표.pptx
+++ b/submission/AI_Capstone_발표.pptx
@@ -1504,6 +1504,12 @@
               <a:t>최종 실행 화면입니다. 작성 모델은 정해진 답변을 내는 모의 모델이고, 실제 MCP 도구와 로컬 임베딩을 연결했습니다. 모니터링 자료는 교육용 샘플입니다. 화면의 구성은 다음 장에서 설명하겠습니다.</a:t>
             </a:r>
           </a:p>
+          <a:p/>
+          <a:p>
+            <a:r>
+              <a:t>(이 슬라이드의 화면은 GIF이며 슬라이드쇼에서 자동 재생됩니다. PDF에서는 재생되지 않습니다.)</a:t>
+            </a:r>
+          </a:p>
         </p:txBody>
       </p:sp>
       <p:sp>
@@ -1587,11 +1593,20 @@
           <a:lstStyle/>
           <a:p>
             <a:r>
-              <a:rPr lang="en-US" dirty="0"/>
-              <a:t>[목표 40초] 왼쪽 통과 → 오른쪽 검증 실패 순서
-같은 질문에서 CPU를 수집값보다 15퍼센트포인트 높게 쓰도록 오류를 넣었습니다. 기존 검증은 그 답변을 통과시켰지만, 개선 검증은 총 세 번 작성해도 일치하지 않자 실패 사유와 실제 수집값을 안내했습니다. 두 실행의 모니터링 수치는 변동하므로 같은 숫자를 비교한 실험은 아닙니다. 같은 오류 조건에서 검증 설정에 따라 처리가 달라지는지를 재현했습니다.</a:t>
-            </a:r>
-            <a:endParaRPr lang="en-US" dirty="0"/>
+              <a:t>[목표 40초] 왼쪽 통과 → 오른쪽 검증 실패 순서</a:t>
+            </a:r>
+          </a:p>
+          <a:p/>
+          <a:p>
+            <a:r>
+              <a:t>같은 질문에서 CPU를 수집값보다 15퍼센트포인트 높게 쓰도록 오류를 넣었습니다. 기존 검증은 그 답변을 통과시켰지만, 개선 검증은 총 세 번 작성해도 일치하지 않자 실패 사유와 실제 수집값을 안내했습니다. 두 실행의 모니터링 수치는 변동하므로 같은 숫자를 비교한 실험은 아닙니다. 같은 오류 조건에서 검증 설정에 따라 처리가 달라지는지를 재현했습니다.</a:t>
+            </a:r>
+          </a:p>
+          <a:p/>
+          <a:p>
+            <a:r>
+              <a:t>(이 슬라이드의 화면은 GIF이며 슬라이드쇼에서 자동 재생됩니다. PDF에서는 재생되지 않습니다.)</a:t>
+            </a:r>
           </a:p>
         </p:txBody>
       </p:sp>
@@ -6501,31 +6516,6 @@
           </a:p>
         </p:txBody>
       </p:sp>
-      <p:pic>
-        <p:nvPicPr>
-          <p:cNvPr id="7" name="Image 0" descr="실제 실행 화면 확대">    </p:cNvPr>
-          <p:cNvPicPr>
-            <a:picLocks noChangeAspect="1"/>
-          </p:cNvPicPr>
-          <p:nvPr/>
-        </p:nvPicPr>
-        <p:blipFill>
-          <a:blip r:embed="rId1"/>
-          <a:srcRect l="23438" t="38194" r="27344" b="1389"/>
-          <a:stretch>
-            <a:fillRect/>
-          </a:stretch>
-        </p:blipFill>
-        <p:spPr>
-          <a:xfrm>
-            <a:off x="640080" y="1783080"/>
-            <a:ext cx="6675120" cy="4608576"/>
-          </a:xfrm>
-          <a:prstGeom prst="rect">
-            <a:avLst/>
-          </a:prstGeom>
-        </p:spPr>
-      </p:pic>
       <p:sp>
         <p:nvSpPr>
           <p:cNvPr id="8" name="Shape 4"/>
@@ -7026,6 +7016,30 @@
           </a:p>
         </p:txBody>
       </p:sp>
+      <p:pic>
+        <p:nvPicPr>
+          <p:cNvPr id="21" name="Picture 20" descr="ppt_정상진단.gif"/>
+          <p:cNvPicPr>
+            <a:picLocks noChangeAspect="1"/>
+          </p:cNvPicPr>
+          <p:nvPr/>
+        </p:nvPicPr>
+        <p:blipFill>
+          <a:blip r:embed="rId4"/>
+          <a:stretch>
+            <a:fillRect/>
+          </a:stretch>
+        </p:blipFill>
+        <p:spPr>
+          <a:xfrm>
+            <a:off x="1280160" y="1783080"/>
+            <a:ext cx="5376672" cy="4608576"/>
+          </a:xfrm>
+          <a:prstGeom prst="rect">
+            <a:avLst/>
+          </a:prstGeom>
+        </p:spPr>
+      </p:pic>
     </p:spTree>
   </p:cSld>
   <p:clrMapOvr>
@@ -8505,16 +8519,133 @@
           </a:p>
         </p:txBody>
       </p:sp>
+      <p:sp>
+        <p:nvSpPr>
+          <p:cNvPr id="15" name="Text 10"/>
+          <p:cNvSpPr txBox="1"/>
+          <p:nvPr/>
+        </p:nvSpPr>
+        <p:spPr>
+          <a:xfrm>
+            <a:off x="731520" y="5166360"/>
+            <a:ext cx="5029200" cy="457200"/>
+          </a:xfrm>
+          <a:prstGeom prst="rect">
+            <a:avLst/>
+          </a:prstGeom>
+          <a:noFill/>
+          <a:ln/>
+        </p:spPr>
+        <p:txBody>
+          <a:bodyPr wrap="square" lIns="0" tIns="0" rIns="0" bIns="0" rtlCol="0" anchor="ctr"/>
+          <a:lstStyle/>
+          <a:p>
+            <a:pPr indent="0" marL="0">
+              <a:buNone/>
+            </a:pPr>
+            <a:r>
+              <a:rPr lang="en-US" sz="1900" dirty="0">
+                <a:solidFill>
+                  <a:srgbClr val="62746D"/>
+                </a:solidFill>
+                <a:latin typeface="Apple SD Gothic Neo" pitchFamily="34" charset="0"/>
+                <a:ea typeface="Apple SD Gothic Neo" pitchFamily="34" charset="-122"/>
+                <a:cs typeface="Apple SD Gothic Neo" pitchFamily="34" charset="-120"/>
+              </a:rPr>
+              <a:t>검사 기준: 길이·번호</a:t>
+            </a:r>
+            <a:endParaRPr lang="en-US" sz="1900" dirty="0"/>
+          </a:p>
+        </p:txBody>
+      </p:sp>
+      <p:sp>
+        <p:nvSpPr>
+          <p:cNvPr id="16" name="Text 11"/>
+          <p:cNvSpPr txBox="1"/>
+          <p:nvPr/>
+        </p:nvSpPr>
+        <p:spPr>
+          <a:xfrm>
+            <a:off x="6400800" y="5166360"/>
+            <a:ext cx="5120640" cy="457200"/>
+          </a:xfrm>
+          <a:prstGeom prst="rect">
+            <a:avLst/>
+          </a:prstGeom>
+          <a:noFill/>
+          <a:ln/>
+        </p:spPr>
+        <p:txBody>
+          <a:bodyPr wrap="square" lIns="0" tIns="0" rIns="0" bIns="0" rtlCol="0" anchor="ctr"/>
+          <a:lstStyle/>
+          <a:p>
+            <a:pPr indent="0" marL="0">
+              <a:buNone/>
+            </a:pPr>
+            <a:r>
+              <a:rPr lang="en-US" sz="1900" b="1" dirty="0">
+                <a:solidFill>
+                  <a:srgbClr val="16785C"/>
+                </a:solidFill>
+                <a:latin typeface="Apple SD Gothic Neo" pitchFamily="34" charset="0"/>
+                <a:ea typeface="Apple SD Gothic Neo" pitchFamily="34" charset="-122"/>
+                <a:cs typeface="Apple SD Gothic Neo" pitchFamily="34" charset="-120"/>
+              </a:rPr>
+              <a:t>총 3회 실패 → 사유와 실제 수집값 제공</a:t>
+            </a:r>
+            <a:endParaRPr lang="en-US" sz="1900" dirty="0"/>
+          </a:p>
+        </p:txBody>
+      </p:sp>
+      <p:sp>
+        <p:nvSpPr>
+          <p:cNvPr id="17" name="Text 12"/>
+          <p:cNvSpPr txBox="1"/>
+          <p:nvPr/>
+        </p:nvSpPr>
+        <p:spPr>
+          <a:xfrm>
+            <a:off x="685800" y="5989320"/>
+            <a:ext cx="10881360" cy="320040"/>
+          </a:xfrm>
+          <a:prstGeom prst="rect">
+            <a:avLst/>
+          </a:prstGeom>
+          <a:noFill/>
+          <a:ln/>
+        </p:spPr>
+        <p:txBody>
+          <a:bodyPr wrap="square" lIns="0" tIns="0" rIns="0" bIns="0" rtlCol="0" anchor="ctr"/>
+          <a:lstStyle/>
+          <a:p>
+            <a:pPr indent="0" marL="0">
+              <a:buNone/>
+            </a:pPr>
+            <a:r>
+              <a:rPr lang="en-US" sz="1200" dirty="0">
+                <a:solidFill>
+                  <a:srgbClr val="62746D"/>
+                </a:solidFill>
+                <a:latin typeface="Apple SD Gothic Neo" pitchFamily="34" charset="0"/>
+                <a:ea typeface="Apple SD Gothic Neo" pitchFamily="34" charset="-122"/>
+                <a:cs typeface="Apple SD Gothic Neo" pitchFamily="34" charset="-120"/>
+              </a:rPr>
+              <a:t>같은 질문 + CPU 수치에 15%p 오류 주입 · 모의 모델 재현 · 실행별 모니터링 수치에는 변동이 있음</a:t>
+            </a:r>
+            <a:endParaRPr lang="en-US" sz="1200" dirty="0"/>
+          </a:p>
+        </p:txBody>
+      </p:sp>
       <p:pic>
         <p:nvPicPr>
-          <p:cNvPr id="13" name="Image 0" descr="/Users/hayeon/Documents/Codex/2026-10-19/x20/outputs/capstone-final-check/deck/개선전_답변_확대.png">    </p:cNvPr>
+          <p:cNvPr id="18" name="Picture 17" descr="ppt_개선전.gif"/>
           <p:cNvPicPr>
             <a:picLocks noChangeAspect="1"/>
           </p:cNvPicPr>
           <p:nvPr/>
         </p:nvPicPr>
         <p:blipFill>
-          <a:blip r:embed="rId1"/>
+          <a:blip r:embed="rId5"/>
           <a:stretch>
             <a:fillRect/>
           </a:stretch>
@@ -8522,7 +8653,7 @@
         <p:spPr>
           <a:xfrm>
             <a:off x="640080" y="2743200"/>
-            <a:ext cx="5166360" cy="2066544"/>
+            <a:ext cx="5166360" cy="2309362"/>
           </a:xfrm>
           <a:prstGeom prst="rect">
             <a:avLst/>
@@ -8531,15 +8662,14 @@
       </p:pic>
       <p:pic>
         <p:nvPicPr>
-          <p:cNvPr id="14" name="Image 1" descr="실제 실행 화면 확대">    </p:cNvPr>
+          <p:cNvPr id="19" name="Picture 18" descr="ppt_개선후.gif"/>
           <p:cNvPicPr>
             <a:picLocks noChangeAspect="1"/>
           </p:cNvPicPr>
           <p:nvPr/>
         </p:nvPicPr>
         <p:blipFill>
-          <a:blip r:embed="rId2"/>
-          <a:srcRect l="0" t="17000" r="0" b="45000"/>
+          <a:blip r:embed="rId6"/>
           <a:stretch>
             <a:fillRect/>
           </a:stretch>
@@ -8547,130 +8677,13 @@
         <p:spPr>
           <a:xfrm>
             <a:off x="6355080" y="2743200"/>
-            <a:ext cx="5166360" cy="2066544"/>
+            <a:ext cx="5166360" cy="2309362"/>
           </a:xfrm>
           <a:prstGeom prst="rect">
             <a:avLst/>
           </a:prstGeom>
         </p:spPr>
       </p:pic>
-      <p:sp>
-        <p:nvSpPr>
-          <p:cNvPr id="15" name="Text 10"/>
-          <p:cNvSpPr txBox="1"/>
-          <p:nvPr/>
-        </p:nvSpPr>
-        <p:spPr>
-          <a:xfrm>
-            <a:off x="731520" y="5166360"/>
-            <a:ext cx="5029200" cy="457200"/>
-          </a:xfrm>
-          <a:prstGeom prst="rect">
-            <a:avLst/>
-          </a:prstGeom>
-          <a:noFill/>
-          <a:ln/>
-        </p:spPr>
-        <p:txBody>
-          <a:bodyPr wrap="square" lIns="0" tIns="0" rIns="0" bIns="0" rtlCol="0" anchor="ctr"/>
-          <a:lstStyle/>
-          <a:p>
-            <a:pPr indent="0" marL="0">
-              <a:buNone/>
-            </a:pPr>
-            <a:r>
-              <a:rPr lang="en-US" sz="1900" dirty="0">
-                <a:solidFill>
-                  <a:srgbClr val="62746D"/>
-                </a:solidFill>
-                <a:latin typeface="Apple SD Gothic Neo" pitchFamily="34" charset="0"/>
-                <a:ea typeface="Apple SD Gothic Neo" pitchFamily="34" charset="-122"/>
-                <a:cs typeface="Apple SD Gothic Neo" pitchFamily="34" charset="-120"/>
-              </a:rPr>
-              <a:t>검사 기준: 길이·번호</a:t>
-            </a:r>
-            <a:endParaRPr lang="en-US" sz="1900" dirty="0"/>
-          </a:p>
-        </p:txBody>
-      </p:sp>
-      <p:sp>
-        <p:nvSpPr>
-          <p:cNvPr id="16" name="Text 11"/>
-          <p:cNvSpPr txBox="1"/>
-          <p:nvPr/>
-        </p:nvSpPr>
-        <p:spPr>
-          <a:xfrm>
-            <a:off x="6400800" y="5166360"/>
-            <a:ext cx="5120640" cy="457200"/>
-          </a:xfrm>
-          <a:prstGeom prst="rect">
-            <a:avLst/>
-          </a:prstGeom>
-          <a:noFill/>
-          <a:ln/>
-        </p:spPr>
-        <p:txBody>
-          <a:bodyPr wrap="square" lIns="0" tIns="0" rIns="0" bIns="0" rtlCol="0" anchor="ctr"/>
-          <a:lstStyle/>
-          <a:p>
-            <a:pPr indent="0" marL="0">
-              <a:buNone/>
-            </a:pPr>
-            <a:r>
-              <a:rPr lang="en-US" sz="1900" b="1" dirty="0">
-                <a:solidFill>
-                  <a:srgbClr val="16785C"/>
-                </a:solidFill>
-                <a:latin typeface="Apple SD Gothic Neo" pitchFamily="34" charset="0"/>
-                <a:ea typeface="Apple SD Gothic Neo" pitchFamily="34" charset="-122"/>
-                <a:cs typeface="Apple SD Gothic Neo" pitchFamily="34" charset="-120"/>
-              </a:rPr>
-              <a:t>총 3회 실패 → 사유와 실제 수집값 제공</a:t>
-            </a:r>
-            <a:endParaRPr lang="en-US" sz="1900" dirty="0"/>
-          </a:p>
-        </p:txBody>
-      </p:sp>
-      <p:sp>
-        <p:nvSpPr>
-          <p:cNvPr id="17" name="Text 12"/>
-          <p:cNvSpPr txBox="1"/>
-          <p:nvPr/>
-        </p:nvSpPr>
-        <p:spPr>
-          <a:xfrm>
-            <a:off x="685800" y="5989320"/>
-            <a:ext cx="10881360" cy="320040"/>
-          </a:xfrm>
-          <a:prstGeom prst="rect">
-            <a:avLst/>
-          </a:prstGeom>
-          <a:noFill/>
-          <a:ln/>
-        </p:spPr>
-        <p:txBody>
-          <a:bodyPr wrap="square" lIns="0" tIns="0" rIns="0" bIns="0" rtlCol="0" anchor="ctr"/>
-          <a:lstStyle/>
-          <a:p>
-            <a:pPr indent="0" marL="0">
-              <a:buNone/>
-            </a:pPr>
-            <a:r>
-              <a:rPr lang="en-US" sz="1200" dirty="0">
-                <a:solidFill>
-                  <a:srgbClr val="62746D"/>
-                </a:solidFill>
-                <a:latin typeface="Apple SD Gothic Neo" pitchFamily="34" charset="0"/>
-                <a:ea typeface="Apple SD Gothic Neo" pitchFamily="34" charset="-122"/>
-                <a:cs typeface="Apple SD Gothic Neo" pitchFamily="34" charset="-120"/>
-              </a:rPr>
-              <a:t>같은 질문 + CPU 수치에 15%p 오류 주입 · 모의 모델 재현 · 실행별 모니터링 수치에는 변동이 있음</a:t>
-            </a:r>
-            <a:endParaRPr lang="en-US" sz="1200" dirty="0"/>
-          </a:p>
-        </p:txBody>
-      </p:sp>
     </p:spTree>
   </p:cSld>
   <p:clrMapOvr>

--- a/submission/AI_Capstone_발표.pptx
+++ b/submission/AI_Capstone_발표.pptx
@@ -1139,11 +1139,14 @@
           <a:lstStyle/>
           <a:p>
             <a:r>
-              <a:rPr lang="en-US" dirty="0"/>
-              <a:t>[목표 25초] 제목을 보고 청중을 향해 설명
-안녕하세요. 운영 장애 진단 에이전트를 개선한 김하연입니다. 이 에이전트는 장애 질문을 받으면 시스템 자료와 대응 매뉴얼을 찾아 답합니다. 저는 운영자가 잘못된 수치를 믿고 조치할 수 있다는 문제에 주목했습니다. 그래서 수집 근거와 답변을 대조하고, 근거가 부족할 때는 멈추는 방향으로 개선했습니다.</a:t>
-            </a:r>
-            <a:endParaRPr lang="en-US" dirty="0"/>
+              <a:t>[목표 15초] 청중에게 인사하며 시작, 목차 4개를 짚으며 말하기</a:t>
+            </a:r>
+          </a:p>
+          <a:p/>
+          <a:p>
+            <a:r>
+              <a:t>안녕하세요. 운영 장애 진단 에이전트의 근거 기반 개선을 발표할 김하연입니다. 발표는 문제 정의, 개선 사항, 실행 결과와 평가, 한계 순서로 진행하겠습니다.</a:t>
+            </a:r>
           </a:p>
         </p:txBody>
       </p:sp>
@@ -1228,11 +1231,14 @@
           <a:lstStyle/>
           <a:p>
             <a:r>
-              <a:rPr lang="en-US" dirty="0"/>
-              <a:t>[목표 35초] 40% → 99% → 통과 순서로 가리키기
-이 숫자는 문제를 설명하기 위한 예시입니다. 수집한 CPU는 40퍼센트인데 답변이 99퍼센트라고 해도, 기존 검증은 통과시킬 수 있었습니다. 답변이 30자 이상이고 ‘1)’이 있는지만 확인했기 때문입니다. 세 번 실패하면 강제 합격하기도 했습니다. 길이와 형식이 맞는다는 사실이 내용의 정확성을 보장하지 못한다는 것이 출발점이었습니다.</a:t>
-            </a:r>
-            <a:endParaRPr lang="en-US" dirty="0"/>
+              <a:t>[목표 35초] 40% → 99% → 통과 순서로 가리키기</a:t>
+            </a:r>
+          </a:p>
+          <a:p/>
+          <a:p>
+            <a:r>
+              <a:t>먼저 문제 정의입니다. 기존 검증은 답변이 30자 이상이고 '1)'을 포함하는지만 확인했습니다. 예를 들어 수집한 CPU가 40퍼센트인데 답변이 99퍼센트여도 통과할 수 있었고, 세 번 실패하면 강제로 통과시켰습니다. 형식이 맞아도 내용이 맞는다는 보장은 없다는 점이 출발점입니다. 이 수치는 설명을 위한 예시입니다.</a:t>
+            </a:r>
           </a:p>
         </p:txBody>
       </p:sp>
@@ -1317,11 +1323,14 @@
           <a:lstStyle/>
           <a:p>
             <a:r>
-              <a:rPr lang="en-US" dirty="0"/>
-              <a:t>[목표 40초] 검증·검색·조사 세 줄을 순서대로 설명
-개선은 세 가지입니다. 먼저 시스템별 CPU와 메모리를 수집값과 대조하고, 불일치 이유를 알려 다시 작성하게 했습니다. 최초 작성을 포함해 총 세 번 실패하면 실패를 안내합니다. 둘째, 매뉴얼을 의미로 검색하되 유사도가 낮거나 후보 차이가 작으면 선택을 보류합니다. 셋째, 조사 작업의 실패를 분리해 성공한 자료는 유지합니다. 모니터링 근거가 하나도 없으면 작성 모델 호출부터 생략합니다.</a:t>
-            </a:r>
-            <a:endParaRPr lang="en-US" dirty="0"/>
+              <a:t>[목표 40초] 검증, 검색, 조사 세 줄을 위에서 아래로 짚기</a:t>
+            </a:r>
+          </a:p>
+          <a:p/>
+          <a:p>
+            <a:r>
+              <a:t>다음은 개선 사항입니다. 첫째, 답변의 시스템별 CPU와 메모리를 수집값과 대조하고, 불일치하면 사유를 알려 다시 작성하게 했습니다. 최초 작성을 포함해 세 번 실패하면 실패를 안내합니다. 둘째, 매뉴얼을 의미로 검색하고, 유사도가 낮거나 후보 차이가 작으면 선택하지 않습니다. 셋째, 조사 하나가 실패해도 성공한 자료는 유지하고, 근거가 없으면 작성 모델 호출을 생략합니다.</a:t>
+            </a:r>
           </a:p>
         </p:txBody>
       </p:sp>
@@ -1406,11 +1415,14 @@
           <a:lstStyle/>
           <a:p>
             <a:r>
-              <a:rPr lang="en-US" dirty="0"/>
-              <a:t>[목표 50초] 초록색 노드, 아래쪽 중단 경로, 재작성 화살표를 가리키기
-이 그림은 주요 흐름을 요약한 것입니다. 조사 후 근거가 없으면 작성을 생략하고, 있으면 작성한 답변을 검증합니다. 모니터링과 매뉴얼 조사를 두 서브에이전트로 나눴지만, 독립 모델이 판단하는 구조는 아닙니다. MCP는 도구 연결 규약이고 RAG는 검색 자료를 답변에 활용하는 방식입니다. 제공된 LangGraph와 서버 위에 검색 도구와 검증·실패 분기를 추가했습니다. 모듈화와 의존성 주입으로 도구를 바꿔 테스트할 수 있게 했고, LangSmith는 실행 추적만 확인했습니다.</a:t>
-            </a:r>
-            <a:endParaRPr lang="en-US" dirty="0"/>
+              <a:t>[목표 50초] 흐름도를 왼쪽에서 오른쪽으로 따라가기, 막히면 '근거 없으면 생략, 다르면 재작성'만 강조</a:t>
+            </a:r>
+          </a:p>
+          <a:p/>
+          <a:p>
+            <a:r>
+              <a:t>이어서 구조와 사용 기술입니다. 처리 흐름은 질문과 계획, 모니터링과 매뉴얼 조사, 근거 확인, 답변 작성, 수치 검증 순서입니다. 근거가 없으면 작성을 생략하고, 수치가 다르면 재작성하며, 세 번 실패하면 실패를 안내합니다. 조사는 서브그래프 두 개로 나눴고, 독립된 모델이 판단하는 구조는 아닙니다. MCP로 도구를 연결하고 검색한 매뉴얼을 답변 작성에 활용했습니다. 모듈 분리와 의존성 주입으로 테스트를 구성했고, LangSmith는 추적 확인까지만 했습니다.</a:t>
+            </a:r>
           </a:p>
         </p:txBody>
       </p:sp>
@@ -1495,19 +1507,13 @@
           <a:lstStyle/>
           <a:p>
             <a:r>
-              <a:t>[목표 10초] 화면 전체를 보여주기</a:t>
+              <a:t>[목표 15초] 화면만 보여주고 바로 다음 장으로 넘어가기</a:t>
             </a:r>
           </a:p>
           <a:p/>
           <a:p>
             <a:r>
-              <a:t>최종 실행 화면입니다. 작성 모델은 정해진 답변을 내는 모의 모델이고, 실제 MCP 도구와 로컬 임베딩을 연결했습니다. 모니터링 자료는 교육용 샘플입니다. 화면의 구성은 다음 장에서 설명하겠습니다.</a:t>
-            </a:r>
-          </a:p>
-          <a:p/>
-          <a:p>
-            <a:r>
-              <a:t>(이 슬라이드의 화면은 GIF이며 슬라이드쇼에서 자동 재생됩니다. PDF에서는 재생되지 않습니다.)</a:t>
+              <a:t>최종 실행 화면입니다. 모의 작성 모델에 실제 MCP 도구와 로컬 임베딩을 연결했습니다. 구성은 다음 장에서 설명하겠습니다.</a:t>
             </a:r>
           </a:p>
         </p:txBody>
@@ -1593,19 +1599,13 @@
           <a:lstStyle/>
           <a:p>
             <a:r>
-              <a:t>[목표 40초] 왼쪽 통과 → 오른쪽 검증 실패 순서</a:t>
+              <a:t>[목표 35초] GIF를 보며 왼쪽에서 오른쪽 순서로 설명하기</a:t>
             </a:r>
           </a:p>
           <a:p/>
           <a:p>
             <a:r>
-              <a:t>같은 질문에서 CPU를 수집값보다 15퍼센트포인트 높게 쓰도록 오류를 넣었습니다. 기존 검증은 그 답변을 통과시켰지만, 개선 검증은 총 세 번 작성해도 일치하지 않자 실패 사유와 실제 수집값을 안내했습니다. 두 실행의 모니터링 수치는 변동하므로 같은 숫자를 비교한 실험은 아닙니다. 같은 오류 조건에서 검증 설정에 따라 처리가 달라지는지를 재현했습니다.</a:t>
-            </a:r>
-          </a:p>
-          <a:p/>
-          <a:p>
-            <a:r>
-              <a:t>(이 슬라이드의 화면은 GIF이며 슬라이드쇼에서 자동 재생됩니다. PDF에서는 재생되지 않습니다.)</a:t>
+              <a:t>개선 전후 비교입니다. 같은 질문에서 모의 모델이 CPU를 15퍼센트포인트 높게 쓰도록 오류를 넣었습니다. 왼쪽 개선 전에는 틀린 수치가 그대로 통과하고, 오른쪽 개선 후에는 세 번 작성해도 일치하지 않아 사유와 실제 수집값을 안내합니다. 두 실행의 수치는 서로 다르므로, 같은 숫자의 비교가 아니라 처리 방식의 차이를 재현한 것입니다.</a:t>
             </a:r>
           </a:p>
         </p:txBody>
@@ -1691,11 +1691,14 @@
           <a:lstStyle/>
           <a:p>
             <a:r>
-              <a:rPr lang="en-US" dirty="0"/>
-              <a:t>[목표 35초] 두 그래프와 자체 평가 조건만 짚기
-같은 17개 입력에서 오류 답변 차단은 9개 중 2개에서 9개로 늘었고, 정상 답변 8개는 통과했습니다. 검색은 14개 사례 중 기대 일치가 6개에서 12개로 늘었습니다. 다만 직접 만든 작은 평가셋이어서 일반적인 정확도로 볼 수는 없습니다. 최신 실모델 비교에서는 작성 시도와 응답 시간이 비슷했기 때문에 전체적인 속도 향상은 주장하지 않습니다.</a:t>
-            </a:r>
-            <a:endParaRPr lang="en-US" dirty="0"/>
+              <a:t>[목표 35초] 숫자 두 개(2/9→9/9, 6/14→12/14)를 또박또박 말하기</a:t>
+            </a:r>
+          </a:p>
+          <a:p/>
+          <a:p>
+            <a:r>
+              <a:t>평가 결과입니다. 같은 17개 입력에서 오류 답변 차단은 9개 중 2개에서 9개로 늘었고, 정상 답변 8개는 모두 통과했습니다. 매뉴얼 선택은 14개 사례 중 기대와 일치한 수가 6개에서 12개로 늘었습니다. 다만 직접 만든 소규모 평가셋이라 일반적인 정확도는 아닙니다. 실모델 비교에서는 작성 시도와 응답 시간이 비슷해 속도 향상은 주장하지 않습니다.</a:t>
+            </a:r>
           </a:p>
         </p:txBody>
       </p:sp>
@@ -1780,11 +1783,14 @@
           <a:lstStyle/>
           <a:p>
             <a:r>
-              <a:rPr lang="en-US" dirty="0"/>
-              <a:t>[목표 30초] 마지막 핵심 문장을 천천히 말하기
-검사 통과가 답변 전체의 진실성을 뜻하지는 않습니다. 시스템명과 CPU·메모리 수치를 대조하지만 원인 설명과 권장 조치는 판단하지 못하고, 새로운 표현도 놓칠 수 있습니다. 초안을 숨기는 대신 최종 답변까지 기다려야 하는 비용도 있습니다. 앞으로는 독립 평가셋과 구조화된 수치 출력으로 보완하겠습니다. 확인한 범위를 보여주고, 근거가 부족하면 멈추도록 개선했습니다. 감사합니다.</a:t>
-            </a:r>
-            <a:endParaRPr lang="en-US" dirty="0"/>
+              <a:t>[목표 35초] 천천히 읽고, 마지막 문장 뒤에 인사하며 마무리하기</a:t>
+            </a:r>
+          </a:p>
+          <a:p/>
+          <a:p>
+            <a:r>
+              <a:t>마지막으로 한계입니다. 검증은 시스템명과 CPU, 메모리 수치의 일치만 확인하며 원인 설명은 판단하지 못합니다. 규칙 기반이라 새로운 표현을 놓칠 수 있고, 초안을 숨기는 대신 답변을 기다려야 하며, 임베딩 검색에는 자원과 지연이 듭니다. 향후 독립 평가셋과 구조화된 수치 출력으로 보완하겠습니다. 이상으로 발표를 마치겠습니다. 감사합니다.</a:t>
+            </a:r>
           </a:p>
         </p:txBody>
       </p:sp>
@@ -1869,13 +1875,13 @@
           <a:lstStyle/>
           <a:p>
             <a:r>
-              <a:t>[목표 35초] 화면 위 번호를 위에서 아래로 가리키기</a:t>
+              <a:t>[목표 30초] 화면 위 번호를 위에서 아래로 가리키기</a:t>
             </a:r>
           </a:p>
           <a:p/>
           <a:p>
             <a:r>
-              <a:t>화면은 제공받은 Vue 화면을 근거를 확인하기 쉽게 고친 것입니다. 첫째, 진행 단계로 지금 어떤 작업을 하는지 보이게 했습니다. 둘째, 수집값과 답변값을 나란히 놓아 직접 비교할 수 있게 했습니다. 셋째, 매뉴얼 검색 후보와 유사도를 공개했고, 점수는 확률이 아니라고 표시했습니다. 넷째, 검증 실패와 자료 부족은 정상 완료와 다른 상태로 안내합니다. 반려될 초안은 먼저 보여주지 않습니다.</a:t>
+              <a:t>화면은 제공받은 Vue 화면을 근거 확인 중심으로 개선했습니다. 1번은 진행 단계, 2번은 수집값과 답변값의 비교표입니다. 3번은 매뉴얼 검색 후보와 유사도이며, 점수는 확률이 아닙니다. 4번은 정상, 검증 실패, 자료 부족을 구분해 안내하고, 5번은 반려될 초안을 먼저 보여주지 않는 기능입니다.</a:t>
             </a:r>
           </a:p>
         </p:txBody>
@@ -3052,7 +3058,7 @@
                 <a:ea typeface="Apple SD Gothic Neo" pitchFamily="34" charset="-122"/>
                 <a:cs typeface="Apple SD Gothic Neo" pitchFamily="34" charset="-120"/>
               </a:rPr>
-              <a:t>형식은 맞아도, 수치는 틀릴 수 있었다</a:t>
+              <a:t>형식 검증만으로는 수치 오류를 걸러내지 못함</a:t>
             </a:r>
             <a:endParaRPr lang="en-US" sz="3200" dirty="0"/>
           </a:p>
@@ -3918,7 +3924,7 @@
                 <a:ea typeface="Apple SD Gothic Neo" pitchFamily="34" charset="-122"/>
                 <a:cs typeface="Apple SD Gothic Neo" pitchFamily="34" charset="-120"/>
               </a:rPr>
-              <a:t>근거를 모으는 과정부터, 답변을 내보내기까지</a:t>
+              <a:t>근거 수집부터 답변 출력까지 전 구간 개선</a:t>
             </a:r>
             <a:endParaRPr lang="en-US" sz="3200" dirty="0"/>
           </a:p>
@@ -4883,7 +4889,7 @@
                 <a:ea typeface="Apple SD Gothic Neo" pitchFamily="34" charset="-122"/>
                 <a:cs typeface="Apple SD Gothic Neo" pitchFamily="34" charset="-120"/>
               </a:rPr>
-              <a:t>근거 확인과 실패 분기를 처리 흐름에 넣었다</a:t>
+              <a:t>근거 확인 및 실패 분기를 반영한 처리 흐름</a:t>
             </a:r>
             <a:endParaRPr lang="en-US" sz="3200" dirty="0"/>
           </a:p>
@@ -6432,7 +6438,7 @@
                 <a:ea typeface="Apple SD Gothic Neo" pitchFamily="34" charset="-122"/>
                 <a:cs typeface="Apple SD Gothic Neo" pitchFamily="34" charset="-120"/>
               </a:rPr>
-              <a:t>최종 답변 옆에, 확인한 근거를 남겼다</a:t>
+              <a:t>최종 답변과 확인 근거를 함께 제공</a:t>
             </a:r>
             <a:endParaRPr lang="en-US" sz="3200" dirty="0"/>
           </a:p>
@@ -6658,7 +6664,7 @@
                 <a:ea typeface="Apple SD Gothic Neo" pitchFamily="34" charset="-122"/>
                 <a:cs typeface="Apple SD Gothic Neo" pitchFamily="34" charset="-120"/>
               </a:rPr>
-              <a:t>초안은 숨기고 처리 후 제공</a:t>
+              <a:t>초안 비공개, 검증 후 제공</a:t>
             </a:r>
             <a:endParaRPr lang="en-US" sz="1600" dirty="0"/>
           </a:p>
@@ -7121,7 +7127,7 @@
                 </a:solidFill>
                 <a:latin typeface="Apple SD Gothic Neo"/>
               </a:rPr>
-              <a:t>화면도 근거를 확인하는 방향으로 고쳤다</a:t>
+              <a:t>근거 확인 중심의 화면 개선</a:t>
             </a:r>
           </a:p>
         </p:txBody>
@@ -7328,7 +7334,7 @@
                 </a:solidFill>
                 <a:latin typeface="Apple SD Gothic Neo"/>
               </a:rPr>
-              <a:t>기다리는 동안 하는 일이 보인다</a:t>
+              <a:t>처리 중인 작업을 단계별로 표시</a:t>
             </a:r>
           </a:p>
         </p:txBody>
@@ -7477,7 +7483,7 @@
                 </a:solidFill>
                 <a:latin typeface="Apple SD Gothic Neo"/>
               </a:rPr>
-              <a:t>통과했다는 말만 믿지 않고 직접 비교한다</a:t>
+              <a:t>수집값과 답변값을 직접 비교</a:t>
             </a:r>
           </a:p>
         </p:txBody>
@@ -7626,7 +7632,7 @@
                 </a:solidFill>
                 <a:latin typeface="Apple SD Gothic Neo"/>
               </a:rPr>
-              <a:t>선택된 매뉴얼과 점수를 확인한다</a:t>
+              <a:t>선택된 매뉴얼과 유사도 점수 확인</a:t>
             </a:r>
           </a:p>
         </p:txBody>
@@ -7775,7 +7781,7 @@
                 </a:solidFill>
                 <a:latin typeface="Apple SD Gothic Neo"/>
               </a:rPr>
-              <a:t>정상 · 검증 실패 · 자료 부족을 다르게 안내한다</a:t>
+              <a:t>정상 · 검증 실패 · 자료 부족 상태를 구분하여 안내</a:t>
             </a:r>
           </a:p>
         </p:txBody>
@@ -7924,7 +7930,7 @@
                 </a:solidFill>
                 <a:latin typeface="Apple SD Gothic Neo"/>
               </a:rPr>
-              <a:t>반려될 초안은 먼저 보여주지 않는다</a:t>
+              <a:t>검증 전 초안 비공개</a:t>
             </a:r>
           </a:p>
         </p:txBody>
@@ -8217,7 +8223,7 @@
                 <a:ea typeface="Apple SD Gothic Neo" pitchFamily="34" charset="-122"/>
                 <a:cs typeface="Apple SD Gothic Neo" pitchFamily="34" charset="-120"/>
               </a:rPr>
-              <a:t>같은 오류 조건에서, 통과 대신 실패를 안내했다</a:t>
+              <a:t>동일 오류 조건에서 오답 통과 대신 실패 안내</a:t>
             </a:r>
             <a:endParaRPr lang="en-US" sz="3200" dirty="0"/>
           </a:p>
@@ -8788,7 +8794,7 @@
                 <a:ea typeface="Apple SD Gothic Neo" pitchFamily="34" charset="-122"/>
                 <a:cs typeface="Apple SD Gothic Neo" pitchFamily="34" charset="-120"/>
               </a:rPr>
-              <a:t>자체 평가에서 오류 차단과 검색 선택을 개선했다</a:t>
+              <a:t>자체 평가 기준 오류 차단 및 매뉴얼 선택 개선</a:t>
             </a:r>
             <a:endParaRPr lang="en-US" sz="3200" dirty="0"/>
           </a:p>
@@ -9312,7 +9318,7 @@
                 <a:ea typeface="Apple SD Gothic Neo" pitchFamily="34" charset="-122"/>
                 <a:cs typeface="Apple SD Gothic Neo" pitchFamily="34" charset="-120"/>
               </a:rPr>
-              <a:t>검사 통과가 답변 전체의 진실성을 뜻하지는 않는다</a:t>
+              <a:t>검증 통과가 답변 전체의 정확성을 보장하지 않음</a:t>
             </a:r>
             <a:endParaRPr lang="en-US" sz="3200" dirty="0"/>
           </a:p>
@@ -9897,7 +9903,7 @@
                 <a:ea typeface="Apple SD Gothic Neo" pitchFamily="34" charset="-122"/>
                 <a:cs typeface="Apple SD Gothic Neo" pitchFamily="34" charset="-120"/>
               </a:rPr>
-              <a:t>확인한 범위를 보여주고, 근거가 부족하면 멈추도록.</a:t>
+              <a:t>확인 범위를 명시하고, 근거가 부족하면 응답을 중단하는 방향으로 개선</a:t>
             </a:r>
             <a:endParaRPr lang="en-US" sz="2700" dirty="0"/>
           </a:p>

--- a/submission/AI_Capstone_발표.pptx
+++ b/submission/AI_Capstone_발표.pptx
@@ -13,6 +13,7 @@
     <p:sldId id="264" r:id="rId15"/>
     <p:sldId id="261" r:id="rId7"/>
     <p:sldId id="262" r:id="rId8"/>
+    <p:sldId id="265" r:id="rId16"/>
     <p:sldId id="263" r:id="rId9"/>
   </p:sldIdLst>
   <p:notesMasterIdLst>
@@ -1179,6 +1180,82 @@
         <p14:creationId xmlns:p14="http://schemas.microsoft.com/office/powerpoint/2010/main" val="1024086991"/>
       </p:ext>
     </p:extLst>
+  </p:cSld>
+  <p:clrMapOvr>
+    <a:masterClrMapping/>
+  </p:clrMapOvr>
+</p:notes>
+</file>
+
+<file path=ppt/notesSlides/notesSlide10.xml><?xml version="1.0" encoding="utf-8"?>
+<p:notes xmlns:a="http://schemas.openxmlformats.org/drawingml/2006/main" xmlns:p="http://schemas.openxmlformats.org/presentationml/2006/main" xmlns:r="http://schemas.openxmlformats.org/officeDocument/2006/relationships">
+  <p:cSld>
+    <p:spTree>
+      <p:nvGrpSpPr>
+        <p:cNvPr id="1" name=""/>
+        <p:cNvGrpSpPr/>
+        <p:nvPr/>
+      </p:nvGrpSpPr>
+      <p:grpSpPr>
+        <a:xfrm>
+          <a:off x="0" y="0"/>
+          <a:ext cx="0" cy="0"/>
+          <a:chOff x="0" y="0"/>
+          <a:chExt cx="0" cy="0"/>
+        </a:xfrm>
+      </p:grpSpPr>
+      <p:sp>
+        <p:nvSpPr>
+          <p:cNvPr id="2" name="Slide Image Placeholder 1"/>
+          <p:cNvSpPr>
+            <a:spLocks noGrp="1"/>
+          </p:cNvSpPr>
+          <p:nvPr>
+            <p:ph type="sldImg" idx="2"/>
+          </p:nvPr>
+        </p:nvSpPr>
+        <p:spPr/>
+      </p:sp>
+      <p:sp>
+        <p:nvSpPr>
+          <p:cNvPr id="3" name="Notes Placeholder 2"/>
+          <p:cNvSpPr>
+            <a:spLocks noGrp="1"/>
+          </p:cNvSpPr>
+          <p:nvPr>
+            <p:ph type="body" idx="3" sz="quarter"/>
+          </p:nvPr>
+        </p:nvSpPr>
+        <p:spPr/>
+        <p:txBody>
+          <a:bodyPr/>
+          <a:lstStyle/>
+          <a:p>
+            <a:r>
+              <a:t>[목표 45초] 왼쪽 숫자 세 개를 짚고, 오른쪽은 '이유와 한계' 한 줄씩만 읽기</a:t>
+            </a:r>
+          </a:p>
+          <a:p/>
+          <a:p>
+            <a:r>
+              <a:t>이어서 비용과 성능 측정, 그리고 기술 선택 이유입니다. 근거가 없을 때 작성 모델 호출을 생략해 응답 시간이 36.6초에서 1.2~2.7초로 줄었습니다. 조사를 병렬로 처리하면 직렬 1.07초가 0.36초가 되며, 제공받은 구조를 측정한 값입니다. 재작성은 평균 2회에서 1회로 줄었지만 정확도 향상은 아닙니다. 오른쪽은 기술별 선택 이유와 한계입니다. 비용은 글자 수 기반 추정이고 프롬프트 압축은 적용하지 않았습니다.</a:t>
+            </a:r>
+          </a:p>
+        </p:txBody>
+      </p:sp>
+      <p:sp>
+        <p:nvSpPr>
+          <p:cNvPr id="4" name="Slide Number Placeholder 3"/>
+          <p:cNvSpPr>
+            <a:spLocks noGrp="1"/>
+          </p:cNvSpPr>
+          <p:nvPr>
+            <p:ph type="sldNum" idx="5" sz="quarter"/>
+          </p:nvPr>
+        </p:nvSpPr>
+        <p:spPr/>
+      </p:sp>
+    </p:spTree>
   </p:cSld>
   <p:clrMapOvr>
     <a:masterClrMapping/>
@@ -2404,7 +2481,7 @@
                 <a:ea typeface="Apple SD Gothic Neo" pitchFamily="34" charset="-122"/>
                 <a:cs typeface="Apple SD Gothic Neo" pitchFamily="34" charset="-120"/>
               </a:rPr>
-              <a:t>01 / 09</a:t>
+              <a:t>01 / 10</a:t>
             </a:r>
             <a:endParaRPr lang="en-US" sz="900" dirty="0"/>
           </a:p>
@@ -2951,6 +3028,1019 @@
               <a:t>일치하면 응답 · 부족하면 중단</a:t>
             </a:r>
             <a:endParaRPr lang="en-US" sz="1200" dirty="0"/>
+          </a:p>
+        </p:txBody>
+      </p:sp>
+    </p:spTree>
+  </p:cSld>
+  <p:clrMapOvr>
+    <a:masterClrMapping/>
+  </p:clrMapOvr>
+</p:sld>
+</file>
+
+<file path=ppt/slides/slide10.xml><?xml version="1.0" encoding="utf-8"?>
+<p:sld xmlns:a="http://schemas.openxmlformats.org/drawingml/2006/main" xmlns:p="http://schemas.openxmlformats.org/presentationml/2006/main" xmlns:r="http://schemas.openxmlformats.org/officeDocument/2006/relationships">
+  <p:cSld>
+    <p:spTree>
+      <p:nvGrpSpPr>
+        <p:cNvPr id="1" name=""/>
+        <p:cNvGrpSpPr/>
+        <p:nvPr/>
+      </p:nvGrpSpPr>
+      <p:grpSpPr/>
+      <p:sp>
+        <p:nvSpPr>
+          <p:cNvPr id="2" name="TextBox 1"/>
+          <p:cNvSpPr txBox="1"/>
+          <p:nvPr/>
+        </p:nvSpPr>
+        <p:spPr>
+          <a:xfrm>
+            <a:off x="594360" y="320040"/>
+            <a:ext cx="9144000" cy="274320"/>
+          </a:xfrm>
+          <a:prstGeom prst="rect">
+            <a:avLst/>
+          </a:prstGeom>
+          <a:noFill/>
+        </p:spPr>
+        <p:txBody>
+          <a:bodyPr wrap="square" lIns="0" rIns="0" tIns="0" bIns="0">
+            <a:spAutoFit/>
+          </a:bodyPr>
+          <a:lstStyle/>
+          <a:p>
+            <a:r>
+              <a:rPr sz="1100" b="1">
+                <a:solidFill>
+                  <a:srgbClr val="16785C"/>
+                </a:solidFill>
+                <a:latin typeface="Apple SD Gothic Neo"/>
+              </a:rPr>
+              <a:t>08  비용·성능 측정과 기술 선택</a:t>
+            </a:r>
+          </a:p>
+        </p:txBody>
+      </p:sp>
+      <p:sp>
+        <p:nvSpPr>
+          <p:cNvPr id="3" name="TextBox 2"/>
+          <p:cNvSpPr txBox="1"/>
+          <p:nvPr/>
+        </p:nvSpPr>
+        <p:spPr>
+          <a:xfrm>
+            <a:off x="594360" y="868680"/>
+            <a:ext cx="10972800" cy="914400"/>
+          </a:xfrm>
+          <a:prstGeom prst="rect">
+            <a:avLst/>
+          </a:prstGeom>
+          <a:noFill/>
+        </p:spPr>
+        <p:txBody>
+          <a:bodyPr wrap="square" lIns="0" rIns="0" tIns="0" bIns="0">
+            <a:spAutoFit/>
+          </a:bodyPr>
+          <a:lstStyle/>
+          <a:p>
+            <a:r>
+              <a:rPr sz="3200" b="1">
+                <a:solidFill>
+                  <a:srgbClr val="19382F"/>
+                </a:solidFill>
+                <a:latin typeface="Apple SD Gothic Neo"/>
+              </a:rPr>
+              <a:t>측정 결과 및 기술 선택 근거</a:t>
+            </a:r>
+          </a:p>
+        </p:txBody>
+      </p:sp>
+      <p:sp>
+        <p:nvSpPr>
+          <p:cNvPr id="4" name="TextBox 3"/>
+          <p:cNvSpPr txBox="1"/>
+          <p:nvPr/>
+        </p:nvSpPr>
+        <p:spPr>
+          <a:xfrm>
+            <a:off x="594360" y="6473952"/>
+            <a:ext cx="7315200" cy="164592"/>
+          </a:xfrm>
+          <a:prstGeom prst="rect">
+            <a:avLst/>
+          </a:prstGeom>
+          <a:noFill/>
+        </p:spPr>
+        <p:txBody>
+          <a:bodyPr wrap="square" lIns="0" rIns="0" tIns="0" bIns="0">
+            <a:spAutoFit/>
+          </a:bodyPr>
+          <a:lstStyle/>
+          <a:p>
+            <a:r>
+              <a:rPr sz="900" b="0">
+                <a:solidFill>
+                  <a:srgbClr val="62746D"/>
+                </a:solidFill>
+                <a:latin typeface="Apple SD Gothic Neo"/>
+              </a:rPr>
+              <a:t>AI CAPSTONE  ·  김하연</a:t>
+            </a:r>
+          </a:p>
+        </p:txBody>
+      </p:sp>
+      <p:sp>
+        <p:nvSpPr>
+          <p:cNvPr id="5" name="TextBox 4"/>
+          <p:cNvSpPr txBox="1"/>
+          <p:nvPr/>
+        </p:nvSpPr>
+        <p:spPr>
+          <a:xfrm>
+            <a:off x="10835640" y="6473952"/>
+            <a:ext cx="777240" cy="164592"/>
+          </a:xfrm>
+          <a:prstGeom prst="rect">
+            <a:avLst/>
+          </a:prstGeom>
+          <a:noFill/>
+        </p:spPr>
+        <p:txBody>
+          <a:bodyPr wrap="square" lIns="0" rIns="0" tIns="0" bIns="0">
+            <a:spAutoFit/>
+          </a:bodyPr>
+          <a:lstStyle/>
+          <a:p>
+            <a:r>
+              <a:rPr sz="900" b="0">
+                <a:solidFill>
+                  <a:srgbClr val="62746D"/>
+                </a:solidFill>
+                <a:latin typeface="Apple SD Gothic Neo"/>
+              </a:rPr>
+              <a:t>09 / 10</a:t>
+            </a:r>
+          </a:p>
+        </p:txBody>
+      </p:sp>
+      <p:sp>
+        <p:nvSpPr>
+          <p:cNvPr id="6" name="TextBox 5"/>
+          <p:cNvSpPr txBox="1"/>
+          <p:nvPr/>
+        </p:nvSpPr>
+        <p:spPr>
+          <a:xfrm>
+            <a:off x="640080" y="1691640"/>
+            <a:ext cx="5212080" cy="274320"/>
+          </a:xfrm>
+          <a:prstGeom prst="rect">
+            <a:avLst/>
+          </a:prstGeom>
+          <a:noFill/>
+        </p:spPr>
+        <p:txBody>
+          <a:bodyPr wrap="square" lIns="0" rIns="0" tIns="0" bIns="0">
+            <a:spAutoFit/>
+          </a:bodyPr>
+          <a:lstStyle/>
+          <a:p>
+            <a:r>
+              <a:rPr sz="1400" b="1">
+                <a:solidFill>
+                  <a:srgbClr val="62746D"/>
+                </a:solidFill>
+                <a:latin typeface="Apple SD Gothic Neo"/>
+              </a:rPr>
+              <a:t>측정 결과</a:t>
+            </a:r>
+          </a:p>
+        </p:txBody>
+      </p:sp>
+      <p:sp>
+        <p:nvSpPr>
+          <p:cNvPr id="7" name="TextBox 6"/>
+          <p:cNvSpPr txBox="1"/>
+          <p:nvPr/>
+        </p:nvSpPr>
+        <p:spPr>
+          <a:xfrm>
+            <a:off x="6309360" y="1691640"/>
+            <a:ext cx="5212080" cy="274320"/>
+          </a:xfrm>
+          <a:prstGeom prst="rect">
+            <a:avLst/>
+          </a:prstGeom>
+          <a:noFill/>
+        </p:spPr>
+        <p:txBody>
+          <a:bodyPr wrap="square" lIns="0" rIns="0" tIns="0" bIns="0">
+            <a:spAutoFit/>
+          </a:bodyPr>
+          <a:lstStyle/>
+          <a:p>
+            <a:r>
+              <a:rPr sz="1400" b="1">
+                <a:solidFill>
+                  <a:srgbClr val="62746D"/>
+                </a:solidFill>
+                <a:latin typeface="Apple SD Gothic Neo"/>
+              </a:rPr>
+              <a:t>기술 선택 이유와 한계</a:t>
+            </a:r>
+          </a:p>
+        </p:txBody>
+      </p:sp>
+      <p:sp>
+        <p:nvSpPr>
+          <p:cNvPr id="8" name="TextBox 7"/>
+          <p:cNvSpPr txBox="1"/>
+          <p:nvPr/>
+        </p:nvSpPr>
+        <p:spPr>
+          <a:xfrm>
+            <a:off x="640080" y="2011680"/>
+            <a:ext cx="5212080" cy="274320"/>
+          </a:xfrm>
+          <a:prstGeom prst="rect">
+            <a:avLst/>
+          </a:prstGeom>
+          <a:noFill/>
+        </p:spPr>
+        <p:txBody>
+          <a:bodyPr wrap="square" lIns="0" rIns="0" tIns="0" bIns="0">
+            <a:spAutoFit/>
+          </a:bodyPr>
+          <a:lstStyle/>
+          <a:p>
+            <a:r>
+              <a:rPr sz="1400" b="1">
+                <a:solidFill>
+                  <a:srgbClr val="16785C"/>
+                </a:solidFill>
+                <a:latin typeface="Apple SD Gothic Neo"/>
+              </a:rPr>
+              <a:t>작성 모델 호출 생략 (근거 0건)</a:t>
+            </a:r>
+          </a:p>
+        </p:txBody>
+      </p:sp>
+      <p:sp>
+        <p:nvSpPr>
+          <p:cNvPr id="9" name="TextBox 8"/>
+          <p:cNvSpPr txBox="1"/>
+          <p:nvPr/>
+        </p:nvSpPr>
+        <p:spPr>
+          <a:xfrm>
+            <a:off x="640080" y="2304288"/>
+            <a:ext cx="5212080" cy="502920"/>
+          </a:xfrm>
+          <a:prstGeom prst="rect">
+            <a:avLst/>
+          </a:prstGeom>
+          <a:noFill/>
+        </p:spPr>
+        <p:txBody>
+          <a:bodyPr wrap="square" lIns="0" rIns="0" tIns="0" bIns="0">
+            <a:spAutoFit/>
+          </a:bodyPr>
+          <a:lstStyle/>
+          <a:p>
+            <a:r>
+              <a:rPr sz="2800" b="1">
+                <a:solidFill>
+                  <a:srgbClr val="19382F"/>
+                </a:solidFill>
+                <a:latin typeface="Apple SD Gothic Neo"/>
+              </a:rPr>
+              <a:t>36.6초 → 1.2~2.7초</a:t>
+            </a:r>
+          </a:p>
+        </p:txBody>
+      </p:sp>
+      <p:sp>
+        <p:nvSpPr>
+          <p:cNvPr id="10" name="TextBox 9"/>
+          <p:cNvSpPr txBox="1"/>
+          <p:nvPr/>
+        </p:nvSpPr>
+        <p:spPr>
+          <a:xfrm>
+            <a:off x="640080" y="2852928"/>
+            <a:ext cx="5212080" cy="274320"/>
+          </a:xfrm>
+          <a:prstGeom prst="rect">
+            <a:avLst/>
+          </a:prstGeom>
+          <a:noFill/>
+        </p:spPr>
+        <p:txBody>
+          <a:bodyPr wrap="square" lIns="0" rIns="0" tIns="0" bIns="0">
+            <a:spAutoFit/>
+          </a:bodyPr>
+          <a:lstStyle/>
+          <a:p>
+            <a:r>
+              <a:rPr sz="1200" b="0">
+                <a:solidFill>
+                  <a:srgbClr val="62746D"/>
+                </a:solidFill>
+                <a:latin typeface="Apple SD Gothic Neo"/>
+              </a:rPr>
+              <a:t>단일 질문 실측 · 작성 호출 1회 → 0회</a:t>
+            </a:r>
+          </a:p>
+        </p:txBody>
+      </p:sp>
+      <p:sp>
+        <p:nvSpPr>
+          <p:cNvPr id="11" name="TextBox 10"/>
+          <p:cNvSpPr txBox="1"/>
+          <p:nvPr/>
+        </p:nvSpPr>
+        <p:spPr>
+          <a:xfrm>
+            <a:off x="640080" y="3200400"/>
+            <a:ext cx="5212080" cy="274320"/>
+          </a:xfrm>
+          <a:prstGeom prst="rect">
+            <a:avLst/>
+          </a:prstGeom>
+          <a:noFill/>
+        </p:spPr>
+        <p:txBody>
+          <a:bodyPr wrap="square" lIns="0" rIns="0" tIns="0" bIns="0">
+            <a:spAutoFit/>
+          </a:bodyPr>
+          <a:lstStyle/>
+          <a:p>
+            <a:r>
+              <a:rPr sz="1400" b="1">
+                <a:solidFill>
+                  <a:srgbClr val="16785C"/>
+                </a:solidFill>
+                <a:latin typeface="Apple SD Gothic Neo"/>
+              </a:rPr>
+              <a:t>병렬 조사 (모니터링 3건)</a:t>
+            </a:r>
+          </a:p>
+        </p:txBody>
+      </p:sp>
+      <p:sp>
+        <p:nvSpPr>
+          <p:cNvPr id="12" name="TextBox 11"/>
+          <p:cNvSpPr txBox="1"/>
+          <p:nvPr/>
+        </p:nvSpPr>
+        <p:spPr>
+          <a:xfrm>
+            <a:off x="640080" y="3493008"/>
+            <a:ext cx="5212080" cy="502920"/>
+          </a:xfrm>
+          <a:prstGeom prst="rect">
+            <a:avLst/>
+          </a:prstGeom>
+          <a:noFill/>
+        </p:spPr>
+        <p:txBody>
+          <a:bodyPr wrap="square" lIns="0" rIns="0" tIns="0" bIns="0">
+            <a:spAutoFit/>
+          </a:bodyPr>
+          <a:lstStyle/>
+          <a:p>
+            <a:r>
+              <a:rPr sz="2800" b="1">
+                <a:solidFill>
+                  <a:srgbClr val="19382F"/>
+                </a:solidFill>
+                <a:latin typeface="Apple SD Gothic Neo"/>
+              </a:rPr>
+              <a:t>1.07초 → 0.36초</a:t>
+            </a:r>
+          </a:p>
+        </p:txBody>
+      </p:sp>
+      <p:sp>
+        <p:nvSpPr>
+          <p:cNvPr id="13" name="TextBox 12"/>
+          <p:cNvSpPr txBox="1"/>
+          <p:nvPr/>
+        </p:nvSpPr>
+        <p:spPr>
+          <a:xfrm>
+            <a:off x="640080" y="4041648"/>
+            <a:ext cx="5212080" cy="274320"/>
+          </a:xfrm>
+          <a:prstGeom prst="rect">
+            <a:avLst/>
+          </a:prstGeom>
+          <a:noFill/>
+        </p:spPr>
+        <p:txBody>
+          <a:bodyPr wrap="square" lIns="0" rIns="0" tIns="0" bIns="0">
+            <a:spAutoFit/>
+          </a:bodyPr>
+          <a:lstStyle/>
+          <a:p>
+            <a:r>
+              <a:rPr sz="1200" b="0">
+                <a:solidFill>
+                  <a:srgbClr val="62746D"/>
+                </a:solidFill>
+                <a:latin typeface="Apple SD Gothic Neo"/>
+              </a:rPr>
+              <a:t>제공 구조를 측정 · 작업당 0.35초는 모의 지연</a:t>
+            </a:r>
+          </a:p>
+        </p:txBody>
+      </p:sp>
+      <p:sp>
+        <p:nvSpPr>
+          <p:cNvPr id="14" name="TextBox 13"/>
+          <p:cNvSpPr txBox="1"/>
+          <p:nvPr/>
+        </p:nvSpPr>
+        <p:spPr>
+          <a:xfrm>
+            <a:off x="640080" y="4389120"/>
+            <a:ext cx="5212080" cy="274320"/>
+          </a:xfrm>
+          <a:prstGeom prst="rect">
+            <a:avLst/>
+          </a:prstGeom>
+          <a:noFill/>
+        </p:spPr>
+        <p:txBody>
+          <a:bodyPr wrap="square" lIns="0" rIns="0" tIns="0" bIns="0">
+            <a:spAutoFit/>
+          </a:bodyPr>
+          <a:lstStyle/>
+          <a:p>
+            <a:r>
+              <a:rPr sz="1400" b="1">
+                <a:solidFill>
+                  <a:srgbClr val="16785C"/>
+                </a:solidFill>
+                <a:latin typeface="Apple SD Gothic Neo"/>
+              </a:rPr>
+              <a:t>평균 재작성 횟수</a:t>
+            </a:r>
+          </a:p>
+        </p:txBody>
+      </p:sp>
+      <p:sp>
+        <p:nvSpPr>
+          <p:cNvPr id="15" name="TextBox 14"/>
+          <p:cNvSpPr txBox="1"/>
+          <p:nvPr/>
+        </p:nvSpPr>
+        <p:spPr>
+          <a:xfrm>
+            <a:off x="640080" y="4681728"/>
+            <a:ext cx="5212080" cy="502920"/>
+          </a:xfrm>
+          <a:prstGeom prst="rect">
+            <a:avLst/>
+          </a:prstGeom>
+          <a:noFill/>
+        </p:spPr>
+        <p:txBody>
+          <a:bodyPr wrap="square" lIns="0" rIns="0" tIns="0" bIns="0">
+            <a:spAutoFit/>
+          </a:bodyPr>
+          <a:lstStyle/>
+          <a:p>
+            <a:r>
+              <a:rPr sz="2800" b="1">
+                <a:solidFill>
+                  <a:srgbClr val="19382F"/>
+                </a:solidFill>
+                <a:latin typeface="Apple SD Gothic Neo"/>
+              </a:rPr>
+              <a:t>2.0회 → 1.0회</a:t>
+            </a:r>
+          </a:p>
+        </p:txBody>
+      </p:sp>
+      <p:sp>
+        <p:nvSpPr>
+          <p:cNvPr id="16" name="TextBox 15"/>
+          <p:cNvSpPr txBox="1"/>
+          <p:nvPr/>
+        </p:nvSpPr>
+        <p:spPr>
+          <a:xfrm>
+            <a:off x="640080" y="5230368"/>
+            <a:ext cx="5212080" cy="274320"/>
+          </a:xfrm>
+          <a:prstGeom prst="rect">
+            <a:avLst/>
+          </a:prstGeom>
+          <a:noFill/>
+        </p:spPr>
+        <p:txBody>
+          <a:bodyPr wrap="square" lIns="0" rIns="0" tIns="0" bIns="0">
+            <a:spAutoFit/>
+          </a:bodyPr>
+          <a:lstStyle/>
+          <a:p>
+            <a:r>
+              <a:rPr sz="1200" b="0">
+                <a:solidFill>
+                  <a:srgbClr val="62746D"/>
+                </a:solidFill>
+                <a:latin typeface="Apple SD Gothic Neo"/>
+              </a:rPr>
+              <a:t>비용 절감 지표이며 정확도 향상은 아님</a:t>
+            </a:r>
+          </a:p>
+        </p:txBody>
+      </p:sp>
+      <p:sp>
+        <p:nvSpPr>
+          <p:cNvPr id="17" name="TextBox 16"/>
+          <p:cNvSpPr txBox="1"/>
+          <p:nvPr/>
+        </p:nvSpPr>
+        <p:spPr>
+          <a:xfrm>
+            <a:off x="6309360" y="2011680"/>
+            <a:ext cx="5212080" cy="274320"/>
+          </a:xfrm>
+          <a:prstGeom prst="rect">
+            <a:avLst/>
+          </a:prstGeom>
+          <a:noFill/>
+        </p:spPr>
+        <p:txBody>
+          <a:bodyPr wrap="square" lIns="0" rIns="0" tIns="0" bIns="0">
+            <a:spAutoFit/>
+          </a:bodyPr>
+          <a:lstStyle/>
+          <a:p>
+            <a:r>
+              <a:rPr sz="1700" b="1">
+                <a:solidFill>
+                  <a:srgbClr val="16785C"/>
+                </a:solidFill>
+                <a:latin typeface="Apple SD Gothic Neo"/>
+              </a:rPr>
+              <a:t>의미 기반 검색</a:t>
+            </a:r>
+          </a:p>
+        </p:txBody>
+      </p:sp>
+      <p:sp>
+        <p:nvSpPr>
+          <p:cNvPr id="18" name="TextBox 17"/>
+          <p:cNvSpPr txBox="1"/>
+          <p:nvPr/>
+        </p:nvSpPr>
+        <p:spPr>
+          <a:xfrm>
+            <a:off x="6309360" y="2322576"/>
+            <a:ext cx="5212080" cy="256032"/>
+          </a:xfrm>
+          <a:prstGeom prst="rect">
+            <a:avLst/>
+          </a:prstGeom>
+          <a:noFill/>
+        </p:spPr>
+        <p:txBody>
+          <a:bodyPr wrap="square" lIns="0" rIns="0" tIns="0" bIns="0">
+            <a:spAutoFit/>
+          </a:bodyPr>
+          <a:lstStyle/>
+          <a:p>
+            <a:r>
+              <a:rPr sz="1300" b="0">
+                <a:solidFill>
+                  <a:srgbClr val="19382F"/>
+                </a:solidFill>
+                <a:latin typeface="Apple SD Gothic Neo"/>
+              </a:rPr>
+              <a:t>이유: 키워드는 표현이 다르면 놓침</a:t>
+            </a:r>
+          </a:p>
+        </p:txBody>
+      </p:sp>
+      <p:sp>
+        <p:nvSpPr>
+          <p:cNvPr id="19" name="TextBox 18"/>
+          <p:cNvSpPr txBox="1"/>
+          <p:nvPr/>
+        </p:nvSpPr>
+        <p:spPr>
+          <a:xfrm>
+            <a:off x="6309360" y="2578608"/>
+            <a:ext cx="5212080" cy="256032"/>
+          </a:xfrm>
+          <a:prstGeom prst="rect">
+            <a:avLst/>
+          </a:prstGeom>
+          <a:noFill/>
+        </p:spPr>
+        <p:txBody>
+          <a:bodyPr wrap="square" lIns="0" rIns="0" tIns="0" bIns="0">
+            <a:spAutoFit/>
+          </a:bodyPr>
+          <a:lstStyle/>
+          <a:p>
+            <a:r>
+              <a:rPr sz="1300" b="0">
+                <a:solidFill>
+                  <a:srgbClr val="B6503E"/>
+                </a:solidFill>
+                <a:latin typeface="Apple SD Gothic Neo"/>
+              </a:rPr>
+              <a:t>한계: 임베딩 자원과 지연</a:t>
+            </a:r>
+          </a:p>
+        </p:txBody>
+      </p:sp>
+      <p:sp>
+        <p:nvSpPr>
+          <p:cNvPr id="20" name="TextBox 19"/>
+          <p:cNvSpPr txBox="1"/>
+          <p:nvPr/>
+        </p:nvSpPr>
+        <p:spPr>
+          <a:xfrm>
+            <a:off x="6309360" y="2907792"/>
+            <a:ext cx="5212080" cy="274320"/>
+          </a:xfrm>
+          <a:prstGeom prst="rect">
+            <a:avLst/>
+          </a:prstGeom>
+          <a:noFill/>
+        </p:spPr>
+        <p:txBody>
+          <a:bodyPr wrap="square" lIns="0" rIns="0" tIns="0" bIns="0">
+            <a:spAutoFit/>
+          </a:bodyPr>
+          <a:lstStyle/>
+          <a:p>
+            <a:r>
+              <a:rPr sz="1700" b="1">
+                <a:solidFill>
+                  <a:srgbClr val="16785C"/>
+                </a:solidFill>
+                <a:latin typeface="Apple SD Gothic Neo"/>
+              </a:rPr>
+              <a:t>규칙 기반 검증</a:t>
+            </a:r>
+          </a:p>
+        </p:txBody>
+      </p:sp>
+      <p:sp>
+        <p:nvSpPr>
+          <p:cNvPr id="21" name="TextBox 20"/>
+          <p:cNvSpPr txBox="1"/>
+          <p:nvPr/>
+        </p:nvSpPr>
+        <p:spPr>
+          <a:xfrm>
+            <a:off x="6309360" y="3218688"/>
+            <a:ext cx="5212080" cy="256032"/>
+          </a:xfrm>
+          <a:prstGeom prst="rect">
+            <a:avLst/>
+          </a:prstGeom>
+          <a:noFill/>
+        </p:spPr>
+        <p:txBody>
+          <a:bodyPr wrap="square" lIns="0" rIns="0" tIns="0" bIns="0">
+            <a:spAutoFit/>
+          </a:bodyPr>
+          <a:lstStyle/>
+          <a:p>
+            <a:r>
+              <a:rPr sz="1300" b="0">
+                <a:solidFill>
+                  <a:srgbClr val="19382F"/>
+                </a:solidFill>
+                <a:latin typeface="Apple SD Gothic Neo"/>
+              </a:rPr>
+              <a:t>이유: 판정이 명확하고 재현 가능</a:t>
+            </a:r>
+          </a:p>
+        </p:txBody>
+      </p:sp>
+      <p:sp>
+        <p:nvSpPr>
+          <p:cNvPr id="22" name="TextBox 21"/>
+          <p:cNvSpPr txBox="1"/>
+          <p:nvPr/>
+        </p:nvSpPr>
+        <p:spPr>
+          <a:xfrm>
+            <a:off x="6309360" y="3474720"/>
+            <a:ext cx="5212080" cy="256032"/>
+          </a:xfrm>
+          <a:prstGeom prst="rect">
+            <a:avLst/>
+          </a:prstGeom>
+          <a:noFill/>
+        </p:spPr>
+        <p:txBody>
+          <a:bodyPr wrap="square" lIns="0" rIns="0" tIns="0" bIns="0">
+            <a:spAutoFit/>
+          </a:bodyPr>
+          <a:lstStyle/>
+          <a:p>
+            <a:r>
+              <a:rPr sz="1300" b="0">
+                <a:solidFill>
+                  <a:srgbClr val="B6503E"/>
+                </a:solidFill>
+                <a:latin typeface="Apple SD Gothic Neo"/>
+              </a:rPr>
+              <a:t>한계: 새 표현을 놓칠 수 있음</a:t>
+            </a:r>
+          </a:p>
+        </p:txBody>
+      </p:sp>
+      <p:sp>
+        <p:nvSpPr>
+          <p:cNvPr id="23" name="TextBox 22"/>
+          <p:cNvSpPr txBox="1"/>
+          <p:nvPr/>
+        </p:nvSpPr>
+        <p:spPr>
+          <a:xfrm>
+            <a:off x="6309360" y="3803904"/>
+            <a:ext cx="5212080" cy="274320"/>
+          </a:xfrm>
+          <a:prstGeom prst="rect">
+            <a:avLst/>
+          </a:prstGeom>
+          <a:noFill/>
+        </p:spPr>
+        <p:txBody>
+          <a:bodyPr wrap="square" lIns="0" rIns="0" tIns="0" bIns="0">
+            <a:spAutoFit/>
+          </a:bodyPr>
+          <a:lstStyle/>
+          <a:p>
+            <a:r>
+              <a:rPr sz="1700" b="1">
+                <a:solidFill>
+                  <a:srgbClr val="16785C"/>
+                </a:solidFill>
+                <a:latin typeface="Apple SD Gothic Neo"/>
+              </a:rPr>
+              <a:t>초안 비공개</a:t>
+            </a:r>
+          </a:p>
+        </p:txBody>
+      </p:sp>
+      <p:sp>
+        <p:nvSpPr>
+          <p:cNvPr id="24" name="TextBox 23"/>
+          <p:cNvSpPr txBox="1"/>
+          <p:nvPr/>
+        </p:nvSpPr>
+        <p:spPr>
+          <a:xfrm>
+            <a:off x="6309360" y="4114800"/>
+            <a:ext cx="5212080" cy="256032"/>
+          </a:xfrm>
+          <a:prstGeom prst="rect">
+            <a:avLst/>
+          </a:prstGeom>
+          <a:noFill/>
+        </p:spPr>
+        <p:txBody>
+          <a:bodyPr wrap="square" lIns="0" rIns="0" tIns="0" bIns="0">
+            <a:spAutoFit/>
+          </a:bodyPr>
+          <a:lstStyle/>
+          <a:p>
+            <a:r>
+              <a:rPr sz="1300" b="0">
+                <a:solidFill>
+                  <a:srgbClr val="19382F"/>
+                </a:solidFill>
+                <a:latin typeface="Apple SD Gothic Neo"/>
+              </a:rPr>
+              <a:t>이유: 틀린 수치의 노출 방지</a:t>
+            </a:r>
+          </a:p>
+        </p:txBody>
+      </p:sp>
+      <p:sp>
+        <p:nvSpPr>
+          <p:cNvPr id="25" name="TextBox 24"/>
+          <p:cNvSpPr txBox="1"/>
+          <p:nvPr/>
+        </p:nvSpPr>
+        <p:spPr>
+          <a:xfrm>
+            <a:off x="6309360" y="4370832"/>
+            <a:ext cx="5212080" cy="256032"/>
+          </a:xfrm>
+          <a:prstGeom prst="rect">
+            <a:avLst/>
+          </a:prstGeom>
+          <a:noFill/>
+        </p:spPr>
+        <p:txBody>
+          <a:bodyPr wrap="square" lIns="0" rIns="0" tIns="0" bIns="0">
+            <a:spAutoFit/>
+          </a:bodyPr>
+          <a:lstStyle/>
+          <a:p>
+            <a:r>
+              <a:rPr sz="1300" b="0">
+                <a:solidFill>
+                  <a:srgbClr val="B6503E"/>
+                </a:solidFill>
+                <a:latin typeface="Apple SD Gothic Neo"/>
+              </a:rPr>
+              <a:t>한계: 최종 답변까지 대기 (토큰 스트리밍 포기)</a:t>
+            </a:r>
+          </a:p>
+        </p:txBody>
+      </p:sp>
+      <p:sp>
+        <p:nvSpPr>
+          <p:cNvPr id="26" name="TextBox 25"/>
+          <p:cNvSpPr txBox="1"/>
+          <p:nvPr/>
+        </p:nvSpPr>
+        <p:spPr>
+          <a:xfrm>
+            <a:off x="6309360" y="4700016"/>
+            <a:ext cx="5212080" cy="274320"/>
+          </a:xfrm>
+          <a:prstGeom prst="rect">
+            <a:avLst/>
+          </a:prstGeom>
+          <a:noFill/>
+        </p:spPr>
+        <p:txBody>
+          <a:bodyPr wrap="square" lIns="0" rIns="0" tIns="0" bIns="0">
+            <a:spAutoFit/>
+          </a:bodyPr>
+          <a:lstStyle/>
+          <a:p>
+            <a:r>
+              <a:rPr sz="1700" b="1">
+                <a:solidFill>
+                  <a:srgbClr val="16785C"/>
+                </a:solidFill>
+                <a:latin typeface="Apple SD Gothic Neo"/>
+              </a:rPr>
+              <a:t>서브그래프 · 모듈화</a:t>
+            </a:r>
+          </a:p>
+        </p:txBody>
+      </p:sp>
+      <p:sp>
+        <p:nvSpPr>
+          <p:cNvPr id="27" name="TextBox 26"/>
+          <p:cNvSpPr txBox="1"/>
+          <p:nvPr/>
+        </p:nvSpPr>
+        <p:spPr>
+          <a:xfrm>
+            <a:off x="6309360" y="5010912"/>
+            <a:ext cx="5212080" cy="256032"/>
+          </a:xfrm>
+          <a:prstGeom prst="rect">
+            <a:avLst/>
+          </a:prstGeom>
+          <a:noFill/>
+        </p:spPr>
+        <p:txBody>
+          <a:bodyPr wrap="square" lIns="0" rIns="0" tIns="0" bIns="0">
+            <a:spAutoFit/>
+          </a:bodyPr>
+          <a:lstStyle/>
+          <a:p>
+            <a:r>
+              <a:rPr sz="1300" b="0">
+                <a:solidFill>
+                  <a:srgbClr val="19382F"/>
+                </a:solidFill>
+                <a:latin typeface="Apple SD Gothic Neo"/>
+              </a:rPr>
+              <a:t>이유: 부분 실패 격리, 테스트 용이</a:t>
+            </a:r>
+          </a:p>
+        </p:txBody>
+      </p:sp>
+      <p:sp>
+        <p:nvSpPr>
+          <p:cNvPr id="28" name="TextBox 27"/>
+          <p:cNvSpPr txBox="1"/>
+          <p:nvPr/>
+        </p:nvSpPr>
+        <p:spPr>
+          <a:xfrm>
+            <a:off x="6309360" y="5266944"/>
+            <a:ext cx="5212080" cy="256032"/>
+          </a:xfrm>
+          <a:prstGeom prst="rect">
+            <a:avLst/>
+          </a:prstGeom>
+          <a:noFill/>
+        </p:spPr>
+        <p:txBody>
+          <a:bodyPr wrap="square" lIns="0" rIns="0" tIns="0" bIns="0">
+            <a:spAutoFit/>
+          </a:bodyPr>
+          <a:lstStyle/>
+          <a:p>
+            <a:r>
+              <a:rPr sz="1300" b="0">
+                <a:solidFill>
+                  <a:srgbClr val="B6503E"/>
+                </a:solidFill>
+                <a:latin typeface="Apple SD Gothic Neo"/>
+              </a:rPr>
+              <a:t>한계: 속도 이득은 없음</a:t>
+            </a:r>
+          </a:p>
+        </p:txBody>
+      </p:sp>
+      <p:sp>
+        <p:nvSpPr>
+          <p:cNvPr id="29" name="Rectangle 28"/>
+          <p:cNvSpPr/>
+          <p:nvPr/>
+        </p:nvSpPr>
+        <p:spPr>
+          <a:xfrm>
+            <a:off x="640080" y="5806440"/>
+            <a:ext cx="10881360" cy="457200"/>
+          </a:xfrm>
+          <a:prstGeom prst="rect">
+            <a:avLst/>
+          </a:prstGeom>
+          <a:solidFill>
+            <a:srgbClr val="EEF5F1"/>
+          </a:solidFill>
+          <a:ln>
+            <a:noFill/>
+          </a:ln>
+        </p:spPr>
+        <p:style>
+          <a:lnRef idx="1">
+            <a:schemeClr val="accent1"/>
+          </a:lnRef>
+          <a:fillRef idx="3">
+            <a:schemeClr val="accent1"/>
+          </a:fillRef>
+          <a:effectRef idx="2">
+            <a:schemeClr val="accent1"/>
+          </a:effectRef>
+          <a:fontRef idx="minor">
+            <a:schemeClr val="lt1"/>
+          </a:fontRef>
+        </p:style>
+        <p:txBody>
+          <a:bodyPr rtlCol="0" anchor="ctr"/>
+          <a:lstStyle/>
+          <a:p>
+            <a:pPr algn="ctr"/>
+          </a:p>
+        </p:txBody>
+      </p:sp>
+      <p:sp>
+        <p:nvSpPr>
+          <p:cNvPr id="30" name="TextBox 29"/>
+          <p:cNvSpPr txBox="1"/>
+          <p:nvPr/>
+        </p:nvSpPr>
+        <p:spPr>
+          <a:xfrm>
+            <a:off x="822960" y="5916168"/>
+            <a:ext cx="10515600" cy="274320"/>
+          </a:xfrm>
+          <a:prstGeom prst="rect">
+            <a:avLst/>
+          </a:prstGeom>
+          <a:noFill/>
+        </p:spPr>
+        <p:txBody>
+          <a:bodyPr wrap="square" lIns="0" rIns="0" tIns="0" bIns="0">
+            <a:spAutoFit/>
+          </a:bodyPr>
+          <a:lstStyle/>
+          <a:p>
+            <a:r>
+              <a:rPr sz="1200" b="0">
+                <a:solidFill>
+                  <a:srgbClr val="62746D"/>
+                </a:solidFill>
+                <a:latin typeface="Apple SD Gothic Neo"/>
+              </a:rPr>
+              <a:t>비용은 글자 수 기반 추정  |  프롬프트 압축·요약은 미적용  |  fast/quality 모델 분리와 병렬 구조는 제공 기반을 측정한 것</a:t>
+            </a:r>
           </a:p>
         </p:txBody>
       </p:sp>
@@ -3136,7 +4226,7 @@
                 <a:ea typeface="Apple SD Gothic Neo" pitchFamily="34" charset="-122"/>
                 <a:cs typeface="Apple SD Gothic Neo" pitchFamily="34" charset="-120"/>
               </a:rPr>
-              <a:t>02 / 09</a:t>
+              <a:t>02 / 10</a:t>
             </a:r>
             <a:endParaRPr lang="en-US" sz="900" dirty="0"/>
           </a:p>
@@ -4002,7 +5092,7 @@
                 <a:ea typeface="Apple SD Gothic Neo" pitchFamily="34" charset="-122"/>
                 <a:cs typeface="Apple SD Gothic Neo" pitchFamily="34" charset="-120"/>
               </a:rPr>
-              <a:t>03 / 09</a:t>
+              <a:t>03 / 10</a:t>
             </a:r>
             <a:endParaRPr lang="en-US" sz="900" dirty="0"/>
           </a:p>
@@ -4967,7 +6057,7 @@
                 <a:ea typeface="Apple SD Gothic Neo" pitchFamily="34" charset="-122"/>
                 <a:cs typeface="Apple SD Gothic Neo" pitchFamily="34" charset="-120"/>
               </a:rPr>
-              <a:t>04 / 09</a:t>
+              <a:t>04 / 10</a:t>
             </a:r>
             <a:endParaRPr lang="en-US" sz="900" dirty="0"/>
           </a:p>
@@ -6516,7 +7606,7 @@
                 <a:ea typeface="Apple SD Gothic Neo" pitchFamily="34" charset="-122"/>
                 <a:cs typeface="Apple SD Gothic Neo" pitchFamily="34" charset="-120"/>
               </a:rPr>
-              <a:t>05 / 09</a:t>
+              <a:t>05 / 10</a:t>
             </a:r>
             <a:endParaRPr lang="en-US" sz="900" dirty="0"/>
           </a:p>
@@ -8114,7 +9204,7 @@
                 </a:solidFill>
                 <a:latin typeface="Apple SD Gothic Neo"/>
               </a:rPr>
-              <a:t>06 / 09</a:t>
+              <a:t>06 / 10</a:t>
             </a:r>
           </a:p>
         </p:txBody>
@@ -8301,7 +9391,7 @@
                 <a:ea typeface="Apple SD Gothic Neo" pitchFamily="34" charset="-122"/>
                 <a:cs typeface="Apple SD Gothic Neo" pitchFamily="34" charset="-120"/>
               </a:rPr>
-              <a:t>07 / 09</a:t>
+              <a:t>07 / 10</a:t>
             </a:r>
             <a:endParaRPr lang="en-US" sz="900" dirty="0"/>
           </a:p>
@@ -8872,7 +9962,7 @@
                 <a:ea typeface="Apple SD Gothic Neo" pitchFamily="34" charset="-122"/>
                 <a:cs typeface="Apple SD Gothic Neo" pitchFamily="34" charset="-120"/>
               </a:rPr>
-              <a:t>08 / 09</a:t>
+              <a:t>08 / 10</a:t>
             </a:r>
             <a:endParaRPr lang="en-US" sz="900" dirty="0"/>
           </a:p>
@@ -9279,7 +10369,7 @@
                 <a:ea typeface="Apple SD Gothic Neo" pitchFamily="34" charset="-122"/>
                 <a:cs typeface="Apple SD Gothic Neo" pitchFamily="34" charset="-120"/>
               </a:rPr>
-              <a:t>08  한계와 트레이드오프</a:t>
+              <a:t>09  한계와 트레이드오프</a:t>
             </a:r>
             <a:endParaRPr lang="en-US" sz="1100" dirty="0"/>
           </a:p>
@@ -9396,7 +10486,7 @@
                 <a:ea typeface="Apple SD Gothic Neo" pitchFamily="34" charset="-122"/>
                 <a:cs typeface="Apple SD Gothic Neo" pitchFamily="34" charset="-120"/>
               </a:rPr>
-              <a:t>09 / 09</a:t>
+              <a:t>10 / 10</a:t>
             </a:r>
             <a:endParaRPr lang="en-US" sz="900" dirty="0"/>
           </a:p>

--- a/submission/AI_Capstone_발표.pptx
+++ b/submission/AI_Capstone_발표.pptx
@@ -3040,18 +3040,32 @@
 </file>
 
 <file path=ppt/slides/slide10.xml><?xml version="1.0" encoding="utf-8"?>
-<p:sld xmlns:a="http://schemas.openxmlformats.org/drawingml/2006/main" xmlns:p="http://schemas.openxmlformats.org/presentationml/2006/main" xmlns:r="http://schemas.openxmlformats.org/officeDocument/2006/relationships">
-  <p:cSld>
+<p:sld xmlns:a="http://schemas.openxmlformats.org/drawingml/2006/main" xmlns:r="http://schemas.openxmlformats.org/officeDocument/2006/relationships" xmlns:p="http://schemas.openxmlformats.org/presentationml/2006/main">
+  <p:cSld name="Slide 8">
+    <p:bg>
+      <p:bgPr>
+        <a:solidFill>
+          <a:srgbClr val="102F27"/>
+        </a:solidFill>
+      </p:bgPr>
+    </p:bg>
     <p:spTree>
       <p:nvGrpSpPr>
         <p:cNvPr id="1" name=""/>
         <p:cNvGrpSpPr/>
         <p:nvPr/>
       </p:nvGrpSpPr>
-      <p:grpSpPr/>
-      <p:sp>
-        <p:nvSpPr>
-          <p:cNvPr id="2" name="TextBox 1"/>
+      <p:grpSpPr>
+        <a:xfrm>
+          <a:off x="0" y="0"/>
+          <a:ext cx="0" cy="0"/>
+          <a:chOff x="0" y="0"/>
+          <a:chExt cx="0" cy="0"/>
+        </a:xfrm>
+      </p:grpSpPr>
+      <p:sp>
+        <p:nvSpPr>
+          <p:cNvPr id="2" name="Text 0"/>
           <p:cNvSpPr txBox="1"/>
           <p:nvPr/>
         </p:nvSpPr>
@@ -3064,28 +3078,33 @@
             <a:avLst/>
           </a:prstGeom>
           <a:noFill/>
-        </p:spPr>
-        <p:txBody>
-          <a:bodyPr wrap="square" lIns="0" rIns="0" tIns="0" bIns="0">
-            <a:spAutoFit/>
-          </a:bodyPr>
-          <a:lstStyle/>
-          <a:p>
-            <a:r>
-              <a:rPr sz="1100" b="1">
-                <a:solidFill>
-                  <a:srgbClr val="16785C"/>
-                </a:solidFill>
-                <a:latin typeface="Apple SD Gothic Neo"/>
-              </a:rPr>
-              <a:t>08  비용·성능 측정과 기술 선택</a:t>
-            </a:r>
-          </a:p>
-        </p:txBody>
-      </p:sp>
-      <p:sp>
-        <p:nvSpPr>
-          <p:cNvPr id="3" name="TextBox 2"/>
+          <a:ln/>
+        </p:spPr>
+        <p:txBody>
+          <a:bodyPr wrap="square" lIns="0" tIns="0" rIns="0" bIns="0" rtlCol="0" anchor="ctr"/>
+          <a:lstStyle/>
+          <a:p>
+            <a:pPr indent="0" marL="0">
+              <a:buNone/>
+            </a:pPr>
+            <a:r>
+              <a:rPr lang="en-US" sz="1100" b="1" dirty="0">
+                <a:solidFill>
+                  <a:srgbClr val="A4DAC2"/>
+                </a:solidFill>
+                <a:latin typeface="Apple SD Gothic Neo" pitchFamily="34" charset="0"/>
+                <a:ea typeface="Apple SD Gothic Neo" pitchFamily="34" charset="-122"/>
+                <a:cs typeface="Apple SD Gothic Neo" pitchFamily="34" charset="-120"/>
+              </a:rPr>
+              <a:t>09  한계와 트레이드오프</a:t>
+            </a:r>
+            <a:endParaRPr lang="en-US" sz="1100" dirty="0"/>
+          </a:p>
+        </p:txBody>
+      </p:sp>
+      <p:sp>
+        <p:nvSpPr>
+          <p:cNvPr id="3" name="Text 1"/>
           <p:cNvSpPr txBox="1"/>
           <p:nvPr/>
         </p:nvSpPr>
@@ -3098,28 +3117,33 @@
             <a:avLst/>
           </a:prstGeom>
           <a:noFill/>
-        </p:spPr>
-        <p:txBody>
-          <a:bodyPr wrap="square" lIns="0" rIns="0" tIns="0" bIns="0">
-            <a:spAutoFit/>
-          </a:bodyPr>
-          <a:lstStyle/>
-          <a:p>
-            <a:r>
-              <a:rPr sz="3200" b="1">
-                <a:solidFill>
-                  <a:srgbClr val="19382F"/>
-                </a:solidFill>
-                <a:latin typeface="Apple SD Gothic Neo"/>
-              </a:rPr>
-              <a:t>측정 결과 및 기술 선택 근거</a:t>
-            </a:r>
-          </a:p>
-        </p:txBody>
-      </p:sp>
-      <p:sp>
-        <p:nvSpPr>
-          <p:cNvPr id="4" name="TextBox 3"/>
+          <a:ln/>
+        </p:spPr>
+        <p:txBody>
+          <a:bodyPr wrap="square" lIns="0" tIns="0" rIns="0" bIns="0" rtlCol="0" anchor="ctr"/>
+          <a:lstStyle/>
+          <a:p>
+            <a:pPr indent="0" marL="0">
+              <a:buNone/>
+            </a:pPr>
+            <a:r>
+              <a:rPr lang="en-US" sz="3200" b="1" dirty="0">
+                <a:solidFill>
+                  <a:srgbClr val="FFFFFF"/>
+                </a:solidFill>
+                <a:latin typeface="Apple SD Gothic Neo" pitchFamily="34" charset="0"/>
+                <a:ea typeface="Apple SD Gothic Neo" pitchFamily="34" charset="-122"/>
+                <a:cs typeface="Apple SD Gothic Neo" pitchFamily="34" charset="-120"/>
+              </a:rPr>
+              <a:t>검증 통과가 답변 전체의 정확성을 보장하지 않음</a:t>
+            </a:r>
+            <a:endParaRPr lang="en-US" sz="3200" dirty="0"/>
+          </a:p>
+        </p:txBody>
+      </p:sp>
+      <p:sp>
+        <p:nvSpPr>
+          <p:cNvPr id="4" name="Text 2"/>
           <p:cNvSpPr txBox="1"/>
           <p:nvPr/>
         </p:nvSpPr>
@@ -3132,28 +3156,33 @@
             <a:avLst/>
           </a:prstGeom>
           <a:noFill/>
-        </p:spPr>
-        <p:txBody>
-          <a:bodyPr wrap="square" lIns="0" rIns="0" tIns="0" bIns="0">
-            <a:spAutoFit/>
-          </a:bodyPr>
-          <a:lstStyle/>
-          <a:p>
-            <a:r>
-              <a:rPr sz="900" b="0">
-                <a:solidFill>
-                  <a:srgbClr val="62746D"/>
-                </a:solidFill>
-                <a:latin typeface="Apple SD Gothic Neo"/>
+          <a:ln/>
+        </p:spPr>
+        <p:txBody>
+          <a:bodyPr wrap="square" lIns="0" tIns="0" rIns="0" bIns="0" rtlCol="0" anchor="ctr"/>
+          <a:lstStyle/>
+          <a:p>
+            <a:pPr indent="0" marL="0">
+              <a:buNone/>
+            </a:pPr>
+            <a:r>
+              <a:rPr lang="en-US" sz="900" dirty="0">
+                <a:solidFill>
+                  <a:srgbClr val="A4DAC2"/>
+                </a:solidFill>
+                <a:latin typeface="Apple SD Gothic Neo" pitchFamily="34" charset="0"/>
+                <a:ea typeface="Apple SD Gothic Neo" pitchFamily="34" charset="-122"/>
+                <a:cs typeface="Apple SD Gothic Neo" pitchFamily="34" charset="-120"/>
               </a:rPr>
               <a:t>AI CAPSTONE  ·  김하연</a:t>
             </a:r>
-          </a:p>
-        </p:txBody>
-      </p:sp>
-      <p:sp>
-        <p:nvSpPr>
-          <p:cNvPr id="5" name="TextBox 4"/>
+            <a:endParaRPr lang="en-US" sz="900" dirty="0"/>
+          </a:p>
+        </p:txBody>
+      </p:sp>
+      <p:sp>
+        <p:nvSpPr>
+          <p:cNvPr id="5" name="Text 3"/>
           <p:cNvSpPr txBox="1"/>
           <p:nvPr/>
         </p:nvSpPr>
@@ -3166,881 +3195,573 @@
             <a:avLst/>
           </a:prstGeom>
           <a:noFill/>
-        </p:spPr>
-        <p:txBody>
-          <a:bodyPr wrap="square" lIns="0" rIns="0" tIns="0" bIns="0">
-            <a:spAutoFit/>
-          </a:bodyPr>
-          <a:lstStyle/>
-          <a:p>
-            <a:r>
-              <a:rPr sz="900" b="0">
-                <a:solidFill>
-                  <a:srgbClr val="62746D"/>
-                </a:solidFill>
-                <a:latin typeface="Apple SD Gothic Neo"/>
-              </a:rPr>
-              <a:t>09 / 10</a:t>
-            </a:r>
-          </a:p>
-        </p:txBody>
-      </p:sp>
-      <p:sp>
-        <p:nvSpPr>
-          <p:cNvPr id="6" name="TextBox 5"/>
-          <p:cNvSpPr txBox="1"/>
-          <p:nvPr/>
-        </p:nvSpPr>
-        <p:spPr>
-          <a:xfrm>
-            <a:off x="640080" y="1691640"/>
-            <a:ext cx="5212080" cy="274320"/>
-          </a:xfrm>
-          <a:prstGeom prst="rect">
-            <a:avLst/>
-          </a:prstGeom>
-          <a:noFill/>
-        </p:spPr>
-        <p:txBody>
-          <a:bodyPr wrap="square" lIns="0" rIns="0" tIns="0" bIns="0">
-            <a:spAutoFit/>
-          </a:bodyPr>
-          <a:lstStyle/>
-          <a:p>
-            <a:r>
-              <a:rPr sz="1400" b="1">
-                <a:solidFill>
-                  <a:srgbClr val="62746D"/>
-                </a:solidFill>
-                <a:latin typeface="Apple SD Gothic Neo"/>
-              </a:rPr>
-              <a:t>측정 결과</a:t>
-            </a:r>
-          </a:p>
-        </p:txBody>
-      </p:sp>
-      <p:sp>
-        <p:nvSpPr>
-          <p:cNvPr id="7" name="TextBox 6"/>
-          <p:cNvSpPr txBox="1"/>
-          <p:nvPr/>
-        </p:nvSpPr>
-        <p:spPr>
-          <a:xfrm>
-            <a:off x="6309360" y="1691640"/>
-            <a:ext cx="5212080" cy="274320"/>
-          </a:xfrm>
-          <a:prstGeom prst="rect">
-            <a:avLst/>
-          </a:prstGeom>
-          <a:noFill/>
-        </p:spPr>
-        <p:txBody>
-          <a:bodyPr wrap="square" lIns="0" rIns="0" tIns="0" bIns="0">
-            <a:spAutoFit/>
-          </a:bodyPr>
-          <a:lstStyle/>
-          <a:p>
-            <a:r>
-              <a:rPr sz="1400" b="1">
-                <a:solidFill>
-                  <a:srgbClr val="62746D"/>
-                </a:solidFill>
-                <a:latin typeface="Apple SD Gothic Neo"/>
-              </a:rPr>
-              <a:t>기술 선택 이유와 한계</a:t>
-            </a:r>
-          </a:p>
-        </p:txBody>
-      </p:sp>
-      <p:sp>
-        <p:nvSpPr>
-          <p:cNvPr id="8" name="TextBox 7"/>
-          <p:cNvSpPr txBox="1"/>
-          <p:nvPr/>
-        </p:nvSpPr>
-        <p:spPr>
-          <a:xfrm>
-            <a:off x="640080" y="2011680"/>
-            <a:ext cx="5212080" cy="274320"/>
-          </a:xfrm>
-          <a:prstGeom prst="rect">
-            <a:avLst/>
-          </a:prstGeom>
-          <a:noFill/>
-        </p:spPr>
-        <p:txBody>
-          <a:bodyPr wrap="square" lIns="0" rIns="0" tIns="0" bIns="0">
-            <a:spAutoFit/>
-          </a:bodyPr>
-          <a:lstStyle/>
-          <a:p>
-            <a:r>
-              <a:rPr sz="1400" b="1">
-                <a:solidFill>
-                  <a:srgbClr val="16785C"/>
-                </a:solidFill>
-                <a:latin typeface="Apple SD Gothic Neo"/>
-              </a:rPr>
-              <a:t>작성 모델 호출 생략 (근거 0건)</a:t>
-            </a:r>
-          </a:p>
-        </p:txBody>
-      </p:sp>
-      <p:sp>
-        <p:nvSpPr>
-          <p:cNvPr id="9" name="TextBox 8"/>
-          <p:cNvSpPr txBox="1"/>
-          <p:nvPr/>
-        </p:nvSpPr>
-        <p:spPr>
-          <a:xfrm>
-            <a:off x="640080" y="2304288"/>
-            <a:ext cx="5212080" cy="502920"/>
-          </a:xfrm>
-          <a:prstGeom prst="rect">
-            <a:avLst/>
-          </a:prstGeom>
-          <a:noFill/>
-        </p:spPr>
-        <p:txBody>
-          <a:bodyPr wrap="square" lIns="0" rIns="0" tIns="0" bIns="0">
-            <a:spAutoFit/>
-          </a:bodyPr>
-          <a:lstStyle/>
-          <a:p>
-            <a:r>
-              <a:rPr sz="2800" b="1">
-                <a:solidFill>
-                  <a:srgbClr val="19382F"/>
-                </a:solidFill>
-                <a:latin typeface="Apple SD Gothic Neo"/>
-              </a:rPr>
-              <a:t>36.6초 → 1.2~2.7초</a:t>
-            </a:r>
-          </a:p>
-        </p:txBody>
-      </p:sp>
-      <p:sp>
-        <p:nvSpPr>
-          <p:cNvPr id="10" name="TextBox 9"/>
-          <p:cNvSpPr txBox="1"/>
-          <p:nvPr/>
-        </p:nvSpPr>
-        <p:spPr>
-          <a:xfrm>
-            <a:off x="640080" y="2852928"/>
-            <a:ext cx="5212080" cy="274320"/>
-          </a:xfrm>
-          <a:prstGeom prst="rect">
-            <a:avLst/>
-          </a:prstGeom>
-          <a:noFill/>
-        </p:spPr>
-        <p:txBody>
-          <a:bodyPr wrap="square" lIns="0" rIns="0" tIns="0" bIns="0">
-            <a:spAutoFit/>
-          </a:bodyPr>
-          <a:lstStyle/>
-          <a:p>
-            <a:r>
-              <a:rPr sz="1200" b="0">
-                <a:solidFill>
-                  <a:srgbClr val="62746D"/>
-                </a:solidFill>
-                <a:latin typeface="Apple SD Gothic Neo"/>
-              </a:rPr>
-              <a:t>단일 질문 실측 · 작성 호출 1회 → 0회</a:t>
-            </a:r>
-          </a:p>
-        </p:txBody>
-      </p:sp>
-      <p:sp>
-        <p:nvSpPr>
-          <p:cNvPr id="11" name="TextBox 10"/>
-          <p:cNvSpPr txBox="1"/>
-          <p:nvPr/>
-        </p:nvSpPr>
-        <p:spPr>
-          <a:xfrm>
-            <a:off x="640080" y="3200400"/>
-            <a:ext cx="5212080" cy="274320"/>
-          </a:xfrm>
-          <a:prstGeom prst="rect">
-            <a:avLst/>
-          </a:prstGeom>
-          <a:noFill/>
-        </p:spPr>
-        <p:txBody>
-          <a:bodyPr wrap="square" lIns="0" rIns="0" tIns="0" bIns="0">
-            <a:spAutoFit/>
-          </a:bodyPr>
-          <a:lstStyle/>
-          <a:p>
-            <a:r>
-              <a:rPr sz="1400" b="1">
-                <a:solidFill>
-                  <a:srgbClr val="16785C"/>
-                </a:solidFill>
-                <a:latin typeface="Apple SD Gothic Neo"/>
-              </a:rPr>
-              <a:t>병렬 조사 (모니터링 3건)</a:t>
-            </a:r>
-          </a:p>
-        </p:txBody>
-      </p:sp>
-      <p:sp>
-        <p:nvSpPr>
-          <p:cNvPr id="12" name="TextBox 11"/>
-          <p:cNvSpPr txBox="1"/>
-          <p:nvPr/>
-        </p:nvSpPr>
-        <p:spPr>
-          <a:xfrm>
-            <a:off x="640080" y="3493008"/>
-            <a:ext cx="5212080" cy="502920"/>
-          </a:xfrm>
-          <a:prstGeom prst="rect">
-            <a:avLst/>
-          </a:prstGeom>
-          <a:noFill/>
-        </p:spPr>
-        <p:txBody>
-          <a:bodyPr wrap="square" lIns="0" rIns="0" tIns="0" bIns="0">
-            <a:spAutoFit/>
-          </a:bodyPr>
-          <a:lstStyle/>
-          <a:p>
-            <a:r>
-              <a:rPr sz="2800" b="1">
-                <a:solidFill>
-                  <a:srgbClr val="19382F"/>
-                </a:solidFill>
-                <a:latin typeface="Apple SD Gothic Neo"/>
-              </a:rPr>
-              <a:t>1.07초 → 0.36초</a:t>
-            </a:r>
-          </a:p>
-        </p:txBody>
-      </p:sp>
-      <p:sp>
-        <p:nvSpPr>
-          <p:cNvPr id="13" name="TextBox 12"/>
-          <p:cNvSpPr txBox="1"/>
-          <p:nvPr/>
-        </p:nvSpPr>
-        <p:spPr>
-          <a:xfrm>
-            <a:off x="640080" y="4041648"/>
-            <a:ext cx="5212080" cy="274320"/>
-          </a:xfrm>
-          <a:prstGeom prst="rect">
-            <a:avLst/>
-          </a:prstGeom>
-          <a:noFill/>
-        </p:spPr>
-        <p:txBody>
-          <a:bodyPr wrap="square" lIns="0" rIns="0" tIns="0" bIns="0">
-            <a:spAutoFit/>
-          </a:bodyPr>
-          <a:lstStyle/>
-          <a:p>
-            <a:r>
-              <a:rPr sz="1200" b="0">
-                <a:solidFill>
-                  <a:srgbClr val="62746D"/>
-                </a:solidFill>
-                <a:latin typeface="Apple SD Gothic Neo"/>
-              </a:rPr>
-              <a:t>제공 구조를 측정 · 작업당 0.35초는 모의 지연</a:t>
-            </a:r>
-          </a:p>
-        </p:txBody>
-      </p:sp>
-      <p:sp>
-        <p:nvSpPr>
-          <p:cNvPr id="14" name="TextBox 13"/>
-          <p:cNvSpPr txBox="1"/>
-          <p:nvPr/>
-        </p:nvSpPr>
-        <p:spPr>
-          <a:xfrm>
-            <a:off x="640080" y="4389120"/>
-            <a:ext cx="5212080" cy="274320"/>
-          </a:xfrm>
-          <a:prstGeom prst="rect">
-            <a:avLst/>
-          </a:prstGeom>
-          <a:noFill/>
-        </p:spPr>
-        <p:txBody>
-          <a:bodyPr wrap="square" lIns="0" rIns="0" tIns="0" bIns="0">
-            <a:spAutoFit/>
-          </a:bodyPr>
-          <a:lstStyle/>
-          <a:p>
-            <a:r>
-              <a:rPr sz="1400" b="1">
-                <a:solidFill>
-                  <a:srgbClr val="16785C"/>
-                </a:solidFill>
-                <a:latin typeface="Apple SD Gothic Neo"/>
-              </a:rPr>
-              <a:t>평균 재작성 횟수</a:t>
-            </a:r>
-          </a:p>
-        </p:txBody>
-      </p:sp>
-      <p:sp>
-        <p:nvSpPr>
-          <p:cNvPr id="15" name="TextBox 14"/>
-          <p:cNvSpPr txBox="1"/>
-          <p:nvPr/>
-        </p:nvSpPr>
-        <p:spPr>
-          <a:xfrm>
-            <a:off x="640080" y="4681728"/>
-            <a:ext cx="5212080" cy="502920"/>
-          </a:xfrm>
-          <a:prstGeom prst="rect">
-            <a:avLst/>
-          </a:prstGeom>
-          <a:noFill/>
-        </p:spPr>
-        <p:txBody>
-          <a:bodyPr wrap="square" lIns="0" rIns="0" tIns="0" bIns="0">
-            <a:spAutoFit/>
-          </a:bodyPr>
-          <a:lstStyle/>
-          <a:p>
-            <a:r>
-              <a:rPr sz="2800" b="1">
-                <a:solidFill>
-                  <a:srgbClr val="19382F"/>
-                </a:solidFill>
-                <a:latin typeface="Apple SD Gothic Neo"/>
-              </a:rPr>
-              <a:t>2.0회 → 1.0회</a:t>
-            </a:r>
-          </a:p>
-        </p:txBody>
-      </p:sp>
-      <p:sp>
-        <p:nvSpPr>
-          <p:cNvPr id="16" name="TextBox 15"/>
-          <p:cNvSpPr txBox="1"/>
-          <p:nvPr/>
-        </p:nvSpPr>
-        <p:spPr>
-          <a:xfrm>
-            <a:off x="640080" y="5230368"/>
-            <a:ext cx="5212080" cy="274320"/>
-          </a:xfrm>
-          <a:prstGeom prst="rect">
-            <a:avLst/>
-          </a:prstGeom>
-          <a:noFill/>
-        </p:spPr>
-        <p:txBody>
-          <a:bodyPr wrap="square" lIns="0" rIns="0" tIns="0" bIns="0">
-            <a:spAutoFit/>
-          </a:bodyPr>
-          <a:lstStyle/>
-          <a:p>
-            <a:r>
-              <a:rPr sz="1200" b="0">
-                <a:solidFill>
-                  <a:srgbClr val="62746D"/>
-                </a:solidFill>
-                <a:latin typeface="Apple SD Gothic Neo"/>
-              </a:rPr>
-              <a:t>비용 절감 지표이며 정확도 향상은 아님</a:t>
-            </a:r>
-          </a:p>
-        </p:txBody>
-      </p:sp>
-      <p:sp>
-        <p:nvSpPr>
-          <p:cNvPr id="17" name="TextBox 16"/>
-          <p:cNvSpPr txBox="1"/>
-          <p:nvPr/>
-        </p:nvSpPr>
-        <p:spPr>
-          <a:xfrm>
-            <a:off x="6309360" y="2011680"/>
-            <a:ext cx="5212080" cy="274320"/>
-          </a:xfrm>
-          <a:prstGeom prst="rect">
-            <a:avLst/>
-          </a:prstGeom>
-          <a:noFill/>
-        </p:spPr>
-        <p:txBody>
-          <a:bodyPr wrap="square" lIns="0" rIns="0" tIns="0" bIns="0">
-            <a:spAutoFit/>
-          </a:bodyPr>
-          <a:lstStyle/>
-          <a:p>
-            <a:r>
-              <a:rPr sz="1700" b="1">
-                <a:solidFill>
-                  <a:srgbClr val="16785C"/>
-                </a:solidFill>
-                <a:latin typeface="Apple SD Gothic Neo"/>
-              </a:rPr>
-              <a:t>의미 기반 검색</a:t>
-            </a:r>
-          </a:p>
-        </p:txBody>
-      </p:sp>
-      <p:sp>
-        <p:nvSpPr>
-          <p:cNvPr id="18" name="TextBox 17"/>
-          <p:cNvSpPr txBox="1"/>
-          <p:nvPr/>
-        </p:nvSpPr>
-        <p:spPr>
-          <a:xfrm>
-            <a:off x="6309360" y="2322576"/>
-            <a:ext cx="5212080" cy="256032"/>
-          </a:xfrm>
-          <a:prstGeom prst="rect">
-            <a:avLst/>
-          </a:prstGeom>
-          <a:noFill/>
-        </p:spPr>
-        <p:txBody>
-          <a:bodyPr wrap="square" lIns="0" rIns="0" tIns="0" bIns="0">
-            <a:spAutoFit/>
-          </a:bodyPr>
-          <a:lstStyle/>
-          <a:p>
-            <a:r>
-              <a:rPr sz="1300" b="0">
-                <a:solidFill>
-                  <a:srgbClr val="19382F"/>
-                </a:solidFill>
-                <a:latin typeface="Apple SD Gothic Neo"/>
-              </a:rPr>
-              <a:t>이유: 키워드는 표현이 다르면 놓침</a:t>
-            </a:r>
-          </a:p>
-        </p:txBody>
-      </p:sp>
-      <p:sp>
-        <p:nvSpPr>
-          <p:cNvPr id="19" name="TextBox 18"/>
-          <p:cNvSpPr txBox="1"/>
-          <p:nvPr/>
-        </p:nvSpPr>
-        <p:spPr>
-          <a:xfrm>
-            <a:off x="6309360" y="2578608"/>
-            <a:ext cx="5212080" cy="256032"/>
-          </a:xfrm>
-          <a:prstGeom prst="rect">
-            <a:avLst/>
-          </a:prstGeom>
-          <a:noFill/>
-        </p:spPr>
-        <p:txBody>
-          <a:bodyPr wrap="square" lIns="0" rIns="0" tIns="0" bIns="0">
-            <a:spAutoFit/>
-          </a:bodyPr>
-          <a:lstStyle/>
-          <a:p>
-            <a:r>
-              <a:rPr sz="1300" b="0">
-                <a:solidFill>
-                  <a:srgbClr val="B6503E"/>
-                </a:solidFill>
-                <a:latin typeface="Apple SD Gothic Neo"/>
-              </a:rPr>
-              <a:t>한계: 임베딩 자원과 지연</a:t>
-            </a:r>
-          </a:p>
-        </p:txBody>
-      </p:sp>
-      <p:sp>
-        <p:nvSpPr>
-          <p:cNvPr id="20" name="TextBox 19"/>
-          <p:cNvSpPr txBox="1"/>
-          <p:nvPr/>
-        </p:nvSpPr>
-        <p:spPr>
-          <a:xfrm>
-            <a:off x="6309360" y="2907792"/>
-            <a:ext cx="5212080" cy="274320"/>
-          </a:xfrm>
-          <a:prstGeom prst="rect">
-            <a:avLst/>
-          </a:prstGeom>
-          <a:noFill/>
-        </p:spPr>
-        <p:txBody>
-          <a:bodyPr wrap="square" lIns="0" rIns="0" tIns="0" bIns="0">
-            <a:spAutoFit/>
-          </a:bodyPr>
-          <a:lstStyle/>
-          <a:p>
-            <a:r>
-              <a:rPr sz="1700" b="1">
-                <a:solidFill>
-                  <a:srgbClr val="16785C"/>
-                </a:solidFill>
-                <a:latin typeface="Apple SD Gothic Neo"/>
-              </a:rPr>
-              <a:t>규칙 기반 검증</a:t>
-            </a:r>
-          </a:p>
-        </p:txBody>
-      </p:sp>
-      <p:sp>
-        <p:nvSpPr>
-          <p:cNvPr id="21" name="TextBox 20"/>
-          <p:cNvSpPr txBox="1"/>
-          <p:nvPr/>
-        </p:nvSpPr>
-        <p:spPr>
-          <a:xfrm>
-            <a:off x="6309360" y="3218688"/>
-            <a:ext cx="5212080" cy="256032"/>
-          </a:xfrm>
-          <a:prstGeom prst="rect">
-            <a:avLst/>
-          </a:prstGeom>
-          <a:noFill/>
-        </p:spPr>
-        <p:txBody>
-          <a:bodyPr wrap="square" lIns="0" rIns="0" tIns="0" bIns="0">
-            <a:spAutoFit/>
-          </a:bodyPr>
-          <a:lstStyle/>
-          <a:p>
-            <a:r>
-              <a:rPr sz="1300" b="0">
-                <a:solidFill>
-                  <a:srgbClr val="19382F"/>
-                </a:solidFill>
-                <a:latin typeface="Apple SD Gothic Neo"/>
-              </a:rPr>
-              <a:t>이유: 판정이 명확하고 재현 가능</a:t>
-            </a:r>
-          </a:p>
-        </p:txBody>
-      </p:sp>
-      <p:sp>
-        <p:nvSpPr>
-          <p:cNvPr id="22" name="TextBox 21"/>
-          <p:cNvSpPr txBox="1"/>
-          <p:nvPr/>
-        </p:nvSpPr>
-        <p:spPr>
-          <a:xfrm>
-            <a:off x="6309360" y="3474720"/>
-            <a:ext cx="5212080" cy="256032"/>
-          </a:xfrm>
-          <a:prstGeom prst="rect">
-            <a:avLst/>
-          </a:prstGeom>
-          <a:noFill/>
-        </p:spPr>
-        <p:txBody>
-          <a:bodyPr wrap="square" lIns="0" rIns="0" tIns="0" bIns="0">
-            <a:spAutoFit/>
-          </a:bodyPr>
-          <a:lstStyle/>
-          <a:p>
-            <a:r>
-              <a:rPr sz="1300" b="0">
-                <a:solidFill>
-                  <a:srgbClr val="B6503E"/>
-                </a:solidFill>
-                <a:latin typeface="Apple SD Gothic Neo"/>
-              </a:rPr>
-              <a:t>한계: 새 표현을 놓칠 수 있음</a:t>
-            </a:r>
-          </a:p>
-        </p:txBody>
-      </p:sp>
-      <p:sp>
-        <p:nvSpPr>
-          <p:cNvPr id="23" name="TextBox 22"/>
-          <p:cNvSpPr txBox="1"/>
-          <p:nvPr/>
-        </p:nvSpPr>
-        <p:spPr>
-          <a:xfrm>
-            <a:off x="6309360" y="3803904"/>
-            <a:ext cx="5212080" cy="274320"/>
-          </a:xfrm>
-          <a:prstGeom prst="rect">
-            <a:avLst/>
-          </a:prstGeom>
-          <a:noFill/>
-        </p:spPr>
-        <p:txBody>
-          <a:bodyPr wrap="square" lIns="0" rIns="0" tIns="0" bIns="0">
-            <a:spAutoFit/>
-          </a:bodyPr>
-          <a:lstStyle/>
-          <a:p>
-            <a:r>
-              <a:rPr sz="1700" b="1">
-                <a:solidFill>
-                  <a:srgbClr val="16785C"/>
-                </a:solidFill>
-                <a:latin typeface="Apple SD Gothic Neo"/>
-              </a:rPr>
-              <a:t>초안 비공개</a:t>
-            </a:r>
-          </a:p>
-        </p:txBody>
-      </p:sp>
-      <p:sp>
-        <p:nvSpPr>
-          <p:cNvPr id="24" name="TextBox 23"/>
-          <p:cNvSpPr txBox="1"/>
-          <p:nvPr/>
-        </p:nvSpPr>
-        <p:spPr>
-          <a:xfrm>
-            <a:off x="6309360" y="4114800"/>
-            <a:ext cx="5212080" cy="256032"/>
-          </a:xfrm>
-          <a:prstGeom prst="rect">
-            <a:avLst/>
-          </a:prstGeom>
-          <a:noFill/>
-        </p:spPr>
-        <p:txBody>
-          <a:bodyPr wrap="square" lIns="0" rIns="0" tIns="0" bIns="0">
-            <a:spAutoFit/>
-          </a:bodyPr>
-          <a:lstStyle/>
-          <a:p>
-            <a:r>
-              <a:rPr sz="1300" b="0">
-                <a:solidFill>
-                  <a:srgbClr val="19382F"/>
-                </a:solidFill>
-                <a:latin typeface="Apple SD Gothic Neo"/>
-              </a:rPr>
-              <a:t>이유: 틀린 수치의 노출 방지</a:t>
-            </a:r>
-          </a:p>
-        </p:txBody>
-      </p:sp>
-      <p:sp>
-        <p:nvSpPr>
-          <p:cNvPr id="25" name="TextBox 24"/>
-          <p:cNvSpPr txBox="1"/>
-          <p:nvPr/>
-        </p:nvSpPr>
-        <p:spPr>
-          <a:xfrm>
-            <a:off x="6309360" y="4370832"/>
-            <a:ext cx="5212080" cy="256032"/>
-          </a:xfrm>
-          <a:prstGeom prst="rect">
-            <a:avLst/>
-          </a:prstGeom>
-          <a:noFill/>
-        </p:spPr>
-        <p:txBody>
-          <a:bodyPr wrap="square" lIns="0" rIns="0" tIns="0" bIns="0">
-            <a:spAutoFit/>
-          </a:bodyPr>
-          <a:lstStyle/>
-          <a:p>
-            <a:r>
-              <a:rPr sz="1300" b="0">
-                <a:solidFill>
-                  <a:srgbClr val="B6503E"/>
-                </a:solidFill>
-                <a:latin typeface="Apple SD Gothic Neo"/>
-              </a:rPr>
-              <a:t>한계: 최종 답변까지 대기 (토큰 스트리밍 포기)</a:t>
-            </a:r>
-          </a:p>
-        </p:txBody>
-      </p:sp>
-      <p:sp>
-        <p:nvSpPr>
-          <p:cNvPr id="26" name="TextBox 25"/>
-          <p:cNvSpPr txBox="1"/>
-          <p:nvPr/>
-        </p:nvSpPr>
-        <p:spPr>
-          <a:xfrm>
-            <a:off x="6309360" y="4700016"/>
-            <a:ext cx="5212080" cy="274320"/>
-          </a:xfrm>
-          <a:prstGeom prst="rect">
-            <a:avLst/>
-          </a:prstGeom>
-          <a:noFill/>
-        </p:spPr>
-        <p:txBody>
-          <a:bodyPr wrap="square" lIns="0" rIns="0" tIns="0" bIns="0">
-            <a:spAutoFit/>
-          </a:bodyPr>
-          <a:lstStyle/>
-          <a:p>
-            <a:r>
-              <a:rPr sz="1700" b="1">
-                <a:solidFill>
-                  <a:srgbClr val="16785C"/>
-                </a:solidFill>
-                <a:latin typeface="Apple SD Gothic Neo"/>
-              </a:rPr>
-              <a:t>서브그래프 · 모듈화</a:t>
-            </a:r>
-          </a:p>
-        </p:txBody>
-      </p:sp>
-      <p:sp>
-        <p:nvSpPr>
-          <p:cNvPr id="27" name="TextBox 26"/>
-          <p:cNvSpPr txBox="1"/>
-          <p:nvPr/>
-        </p:nvSpPr>
-        <p:spPr>
-          <a:xfrm>
-            <a:off x="6309360" y="5010912"/>
-            <a:ext cx="5212080" cy="256032"/>
-          </a:xfrm>
-          <a:prstGeom prst="rect">
-            <a:avLst/>
-          </a:prstGeom>
-          <a:noFill/>
-        </p:spPr>
-        <p:txBody>
-          <a:bodyPr wrap="square" lIns="0" rIns="0" tIns="0" bIns="0">
-            <a:spAutoFit/>
-          </a:bodyPr>
-          <a:lstStyle/>
-          <a:p>
-            <a:r>
-              <a:rPr sz="1300" b="0">
-                <a:solidFill>
-                  <a:srgbClr val="19382F"/>
-                </a:solidFill>
-                <a:latin typeface="Apple SD Gothic Neo"/>
-              </a:rPr>
-              <a:t>이유: 부분 실패 격리, 테스트 용이</a:t>
-            </a:r>
-          </a:p>
-        </p:txBody>
-      </p:sp>
-      <p:sp>
-        <p:nvSpPr>
-          <p:cNvPr id="28" name="TextBox 27"/>
-          <p:cNvSpPr txBox="1"/>
-          <p:nvPr/>
-        </p:nvSpPr>
-        <p:spPr>
-          <a:xfrm>
-            <a:off x="6309360" y="5266944"/>
-            <a:ext cx="5212080" cy="256032"/>
-          </a:xfrm>
-          <a:prstGeom prst="rect">
-            <a:avLst/>
-          </a:prstGeom>
-          <a:noFill/>
-        </p:spPr>
-        <p:txBody>
-          <a:bodyPr wrap="square" lIns="0" rIns="0" tIns="0" bIns="0">
-            <a:spAutoFit/>
-          </a:bodyPr>
-          <a:lstStyle/>
-          <a:p>
-            <a:r>
-              <a:rPr sz="1300" b="0">
-                <a:solidFill>
-                  <a:srgbClr val="B6503E"/>
-                </a:solidFill>
-                <a:latin typeface="Apple SD Gothic Neo"/>
-              </a:rPr>
-              <a:t>한계: 속도 이득은 없음</a:t>
-            </a:r>
-          </a:p>
-        </p:txBody>
-      </p:sp>
-      <p:sp>
-        <p:nvSpPr>
-          <p:cNvPr id="29" name="Rectangle 28"/>
-          <p:cNvSpPr/>
-          <p:nvPr/>
-        </p:nvSpPr>
-        <p:spPr>
-          <a:xfrm>
-            <a:off x="640080" y="5806440"/>
-            <a:ext cx="10881360" cy="457200"/>
-          </a:xfrm>
-          <a:prstGeom prst="rect">
-            <a:avLst/>
-          </a:prstGeom>
-          <a:solidFill>
-            <a:srgbClr val="EEF5F1"/>
-          </a:solidFill>
-          <a:ln>
-            <a:noFill/>
-          </a:ln>
-        </p:spPr>
-        <p:style>
-          <a:lnRef idx="1">
-            <a:schemeClr val="accent1"/>
-          </a:lnRef>
-          <a:fillRef idx="3">
-            <a:schemeClr val="accent1"/>
-          </a:fillRef>
-          <a:effectRef idx="2">
-            <a:schemeClr val="accent1"/>
-          </a:effectRef>
-          <a:fontRef idx="minor">
-            <a:schemeClr val="lt1"/>
-          </a:fontRef>
-        </p:style>
-        <p:txBody>
-          <a:bodyPr rtlCol="0" anchor="ctr"/>
-          <a:lstStyle/>
-          <a:p>
-            <a:pPr algn="ctr"/>
-          </a:p>
-        </p:txBody>
-      </p:sp>
-      <p:sp>
-        <p:nvSpPr>
-          <p:cNvPr id="30" name="TextBox 29"/>
-          <p:cNvSpPr txBox="1"/>
-          <p:nvPr/>
-        </p:nvSpPr>
-        <p:spPr>
-          <a:xfrm>
-            <a:off x="822960" y="5916168"/>
-            <a:ext cx="10515600" cy="274320"/>
-          </a:xfrm>
-          <a:prstGeom prst="rect">
-            <a:avLst/>
-          </a:prstGeom>
-          <a:noFill/>
-        </p:spPr>
-        <p:txBody>
-          <a:bodyPr wrap="square" lIns="0" rIns="0" tIns="0" bIns="0">
-            <a:spAutoFit/>
-          </a:bodyPr>
-          <a:lstStyle/>
-          <a:p>
-            <a:r>
-              <a:rPr sz="1200" b="0">
-                <a:solidFill>
-                  <a:srgbClr val="62746D"/>
-                </a:solidFill>
-                <a:latin typeface="Apple SD Gothic Neo"/>
-              </a:rPr>
-              <a:t>비용은 글자 수 기반 추정  |  프롬프트 압축·요약은 미적용  |  fast/quality 모델 분리와 병렬 구조는 제공 기반을 측정한 것</a:t>
-            </a:r>
+          <a:ln/>
+        </p:spPr>
+        <p:txBody>
+          <a:bodyPr wrap="square" lIns="0" tIns="0" rIns="0" bIns="0" rtlCol="0" anchor="ctr"/>
+          <a:lstStyle/>
+          <a:p>
+            <a:pPr indent="0" marL="0">
+              <a:buNone/>
+            </a:pPr>
+            <a:r>
+              <a:rPr lang="en-US" sz="900" dirty="0">
+                <a:solidFill>
+                  <a:srgbClr val="A4DAC2"/>
+                </a:solidFill>
+                <a:latin typeface="Apple SD Gothic Neo" pitchFamily="34" charset="0"/>
+                <a:ea typeface="Apple SD Gothic Neo" pitchFamily="34" charset="-122"/>
+                <a:cs typeface="Apple SD Gothic Neo" pitchFamily="34" charset="-120"/>
+              </a:rPr>
+              <a:t>10 / 10</a:t>
+            </a:r>
+            <a:endParaRPr lang="en-US" sz="900" dirty="0"/>
+          </a:p>
+        </p:txBody>
+      </p:sp>
+      <p:sp>
+        <p:nvSpPr>
+          <p:cNvPr id="7" name="Text 4"/>
+          <p:cNvSpPr txBox="1"/>
+          <p:nvPr/>
+        </p:nvSpPr>
+        <p:spPr>
+          <a:xfrm>
+            <a:off x="685800" y="2011680"/>
+            <a:ext cx="1828800" cy="411480"/>
+          </a:xfrm>
+          <a:prstGeom prst="rect">
+            <a:avLst/>
+          </a:prstGeom>
+          <a:noFill/>
+          <a:ln/>
+        </p:spPr>
+        <p:txBody>
+          <a:bodyPr wrap="square" lIns="0" tIns="0" rIns="0" bIns="0" rtlCol="0" anchor="ctr"/>
+          <a:lstStyle/>
+          <a:p>
+            <a:pPr indent="0" marL="0">
+              <a:buNone/>
+            </a:pPr>
+            <a:r>
+              <a:rPr lang="en-US" sz="1800" b="1" dirty="0">
+                <a:solidFill>
+                  <a:srgbClr val="A4DAC2"/>
+                </a:solidFill>
+                <a:latin typeface="Apple SD Gothic Neo" pitchFamily="34" charset="0"/>
+                <a:ea typeface="Apple SD Gothic Neo" pitchFamily="34" charset="-122"/>
+                <a:cs typeface="Apple SD Gothic Neo" pitchFamily="34" charset="-120"/>
+              </a:rPr>
+              <a:t>검증 범위</a:t>
+            </a:r>
+            <a:endParaRPr lang="en-US" sz="1800" dirty="0"/>
+          </a:p>
+        </p:txBody>
+      </p:sp>
+      <p:sp>
+        <p:nvSpPr>
+          <p:cNvPr id="8" name="Text 5"/>
+          <p:cNvSpPr txBox="1"/>
+          <p:nvPr/>
+        </p:nvSpPr>
+        <p:spPr>
+          <a:xfrm>
+            <a:off x="2834640" y="2011680"/>
+            <a:ext cx="4114800" cy="457200"/>
+          </a:xfrm>
+          <a:prstGeom prst="rect">
+            <a:avLst/>
+          </a:prstGeom>
+          <a:noFill/>
+          <a:ln/>
+        </p:spPr>
+        <p:txBody>
+          <a:bodyPr wrap="square" lIns="0" tIns="0" rIns="0" bIns="0" rtlCol="0" anchor="ctr"/>
+          <a:lstStyle/>
+          <a:p>
+            <a:pPr indent="0" marL="0">
+              <a:buNone/>
+            </a:pPr>
+            <a:r>
+              <a:rPr lang="en-US" sz="2000" dirty="0">
+                <a:solidFill>
+                  <a:srgbClr val="FFFFFF"/>
+                </a:solidFill>
+                <a:latin typeface="Apple SD Gothic Neo" pitchFamily="34" charset="0"/>
+                <a:ea typeface="Apple SD Gothic Neo" pitchFamily="34" charset="-122"/>
+                <a:cs typeface="Apple SD Gothic Neo" pitchFamily="34" charset="-120"/>
+              </a:rPr>
+              <a:t>시스템명·CPU·메모리만 대조</a:t>
+            </a:r>
+            <a:endParaRPr lang="en-US" sz="2000" dirty="0"/>
+          </a:p>
+        </p:txBody>
+      </p:sp>
+      <p:sp>
+        <p:nvSpPr>
+          <p:cNvPr id="9" name="Text 6"/>
+          <p:cNvSpPr txBox="1"/>
+          <p:nvPr/>
+        </p:nvSpPr>
+        <p:spPr>
+          <a:xfrm>
+            <a:off x="7086600" y="2011680"/>
+            <a:ext cx="457200" cy="457200"/>
+          </a:xfrm>
+          <a:prstGeom prst="rect">
+            <a:avLst/>
+          </a:prstGeom>
+          <a:noFill/>
+          <a:ln/>
+        </p:spPr>
+        <p:txBody>
+          <a:bodyPr wrap="square" lIns="0" tIns="0" rIns="0" bIns="0" rtlCol="0" anchor="ctr"/>
+          <a:lstStyle/>
+          <a:p>
+            <a:pPr indent="0" marL="0">
+              <a:buNone/>
+            </a:pPr>
+            <a:r>
+              <a:rPr lang="en-US" sz="2200" dirty="0">
+                <a:solidFill>
+                  <a:srgbClr val="A4DAC2"/>
+                </a:solidFill>
+                <a:latin typeface="Apple SD Gothic Neo" pitchFamily="34" charset="0"/>
+                <a:ea typeface="Apple SD Gothic Neo" pitchFamily="34" charset="-122"/>
+                <a:cs typeface="Apple SD Gothic Neo" pitchFamily="34" charset="-120"/>
+              </a:rPr>
+              <a:t>↔</a:t>
+            </a:r>
+            <a:endParaRPr lang="en-US" sz="2200" dirty="0"/>
+          </a:p>
+        </p:txBody>
+      </p:sp>
+      <p:sp>
+        <p:nvSpPr>
+          <p:cNvPr id="10" name="Text 7"/>
+          <p:cNvSpPr txBox="1"/>
+          <p:nvPr/>
+        </p:nvSpPr>
+        <p:spPr>
+          <a:xfrm>
+            <a:off x="7863840" y="2011680"/>
+            <a:ext cx="3657600" cy="548640"/>
+          </a:xfrm>
+          <a:prstGeom prst="rect">
+            <a:avLst/>
+          </a:prstGeom>
+          <a:noFill/>
+          <a:ln/>
+        </p:spPr>
+        <p:txBody>
+          <a:bodyPr wrap="square" lIns="0" tIns="0" rIns="0" bIns="0" rtlCol="0" anchor="ctr"/>
+          <a:lstStyle/>
+          <a:p>
+            <a:pPr indent="0" marL="0">
+              <a:buNone/>
+            </a:pPr>
+            <a:r>
+              <a:rPr lang="en-US" sz="1700" dirty="0">
+                <a:solidFill>
+                  <a:srgbClr val="A4DAC2"/>
+                </a:solidFill>
+                <a:latin typeface="Apple SD Gothic Neo" pitchFamily="34" charset="0"/>
+                <a:ea typeface="Apple SD Gothic Neo" pitchFamily="34" charset="-122"/>
+                <a:cs typeface="Apple SD Gothic Neo" pitchFamily="34" charset="-120"/>
+              </a:rPr>
+              <a:t>원인 설명·권장 조치는 미검증</a:t>
+            </a:r>
+            <a:endParaRPr lang="en-US" sz="1700" dirty="0"/>
+          </a:p>
+        </p:txBody>
+      </p:sp>
+      <p:sp>
+        <p:nvSpPr>
+          <p:cNvPr id="11" name="Text 8"/>
+          <p:cNvSpPr txBox="1"/>
+          <p:nvPr/>
+        </p:nvSpPr>
+        <p:spPr>
+          <a:xfrm>
+            <a:off x="685800" y="3063240"/>
+            <a:ext cx="1828800" cy="411480"/>
+          </a:xfrm>
+          <a:prstGeom prst="rect">
+            <a:avLst/>
+          </a:prstGeom>
+          <a:noFill/>
+          <a:ln/>
+        </p:spPr>
+        <p:txBody>
+          <a:bodyPr wrap="square" lIns="0" tIns="0" rIns="0" bIns="0" rtlCol="0" anchor="ctr"/>
+          <a:lstStyle/>
+          <a:p>
+            <a:pPr indent="0" marL="0">
+              <a:buNone/>
+            </a:pPr>
+            <a:r>
+              <a:rPr lang="en-US" sz="1800" b="1" dirty="0">
+                <a:solidFill>
+                  <a:srgbClr val="A4DAC2"/>
+                </a:solidFill>
+                <a:latin typeface="Apple SD Gothic Neo" pitchFamily="34" charset="0"/>
+                <a:ea typeface="Apple SD Gothic Neo" pitchFamily="34" charset="-122"/>
+                <a:cs typeface="Apple SD Gothic Neo" pitchFamily="34" charset="-120"/>
+              </a:rPr>
+              <a:t>표현과 평가</a:t>
+            </a:r>
+            <a:endParaRPr lang="en-US" sz="1800" dirty="0"/>
+          </a:p>
+        </p:txBody>
+      </p:sp>
+      <p:sp>
+        <p:nvSpPr>
+          <p:cNvPr id="12" name="Text 9"/>
+          <p:cNvSpPr txBox="1"/>
+          <p:nvPr/>
+        </p:nvSpPr>
+        <p:spPr>
+          <a:xfrm>
+            <a:off x="2834640" y="3063240"/>
+            <a:ext cx="4114800" cy="457200"/>
+          </a:xfrm>
+          <a:prstGeom prst="rect">
+            <a:avLst/>
+          </a:prstGeom>
+          <a:noFill/>
+          <a:ln/>
+        </p:spPr>
+        <p:txBody>
+          <a:bodyPr wrap="square" lIns="0" tIns="0" rIns="0" bIns="0" rtlCol="0" anchor="ctr"/>
+          <a:lstStyle/>
+          <a:p>
+            <a:pPr indent="0" marL="0">
+              <a:buNone/>
+            </a:pPr>
+            <a:r>
+              <a:rPr lang="en-US" sz="2000" dirty="0">
+                <a:solidFill>
+                  <a:srgbClr val="FFFFFF"/>
+                </a:solidFill>
+                <a:latin typeface="Apple SD Gothic Neo" pitchFamily="34" charset="0"/>
+                <a:ea typeface="Apple SD Gothic Neo" pitchFamily="34" charset="-122"/>
+                <a:cs typeface="Apple SD Gothic Neo" pitchFamily="34" charset="-120"/>
+              </a:rPr>
+              <a:t>명확한 규칙, 재현 가능한 판정</a:t>
+            </a:r>
+            <a:endParaRPr lang="en-US" sz="2000" dirty="0"/>
+          </a:p>
+        </p:txBody>
+      </p:sp>
+      <p:sp>
+        <p:nvSpPr>
+          <p:cNvPr id="13" name="Text 10"/>
+          <p:cNvSpPr txBox="1"/>
+          <p:nvPr/>
+        </p:nvSpPr>
+        <p:spPr>
+          <a:xfrm>
+            <a:off x="7086600" y="3063240"/>
+            <a:ext cx="457200" cy="457200"/>
+          </a:xfrm>
+          <a:prstGeom prst="rect">
+            <a:avLst/>
+          </a:prstGeom>
+          <a:noFill/>
+          <a:ln/>
+        </p:spPr>
+        <p:txBody>
+          <a:bodyPr wrap="square" lIns="0" tIns="0" rIns="0" bIns="0" rtlCol="0" anchor="ctr"/>
+          <a:lstStyle/>
+          <a:p>
+            <a:pPr indent="0" marL="0">
+              <a:buNone/>
+            </a:pPr>
+            <a:r>
+              <a:rPr lang="en-US" sz="2200" dirty="0">
+                <a:solidFill>
+                  <a:srgbClr val="A4DAC2"/>
+                </a:solidFill>
+                <a:latin typeface="Apple SD Gothic Neo" pitchFamily="34" charset="0"/>
+                <a:ea typeface="Apple SD Gothic Neo" pitchFamily="34" charset="-122"/>
+                <a:cs typeface="Apple SD Gothic Neo" pitchFamily="34" charset="-120"/>
+              </a:rPr>
+              <a:t>↔</a:t>
+            </a:r>
+            <a:endParaRPr lang="en-US" sz="2200" dirty="0"/>
+          </a:p>
+        </p:txBody>
+      </p:sp>
+      <p:sp>
+        <p:nvSpPr>
+          <p:cNvPr id="14" name="Text 11"/>
+          <p:cNvSpPr txBox="1"/>
+          <p:nvPr/>
+        </p:nvSpPr>
+        <p:spPr>
+          <a:xfrm>
+            <a:off x="7863840" y="3063240"/>
+            <a:ext cx="3657600" cy="548640"/>
+          </a:xfrm>
+          <a:prstGeom prst="rect">
+            <a:avLst/>
+          </a:prstGeom>
+          <a:noFill/>
+          <a:ln/>
+        </p:spPr>
+        <p:txBody>
+          <a:bodyPr wrap="square" lIns="0" tIns="0" rIns="0" bIns="0" rtlCol="0" anchor="ctr"/>
+          <a:lstStyle/>
+          <a:p>
+            <a:pPr indent="0" marL="0">
+              <a:buNone/>
+            </a:pPr>
+            <a:r>
+              <a:rPr lang="en-US" sz="1700" dirty="0">
+                <a:solidFill>
+                  <a:srgbClr val="A4DAC2"/>
+                </a:solidFill>
+                <a:latin typeface="Apple SD Gothic Neo" pitchFamily="34" charset="0"/>
+                <a:ea typeface="Apple SD Gothic Neo" pitchFamily="34" charset="-122"/>
+                <a:cs typeface="Apple SD Gothic Neo" pitchFamily="34" charset="-120"/>
+              </a:rPr>
+              <a:t>새 표현 누락 · 자체 평가의 낙관 가능성</a:t>
+            </a:r>
+            <a:endParaRPr lang="en-US" sz="1700" dirty="0"/>
+          </a:p>
+        </p:txBody>
+      </p:sp>
+      <p:sp>
+        <p:nvSpPr>
+          <p:cNvPr id="15" name="Text 12"/>
+          <p:cNvSpPr txBox="1"/>
+          <p:nvPr/>
+        </p:nvSpPr>
+        <p:spPr>
+          <a:xfrm>
+            <a:off x="685800" y="4114800"/>
+            <a:ext cx="1828800" cy="411480"/>
+          </a:xfrm>
+          <a:prstGeom prst="rect">
+            <a:avLst/>
+          </a:prstGeom>
+          <a:noFill/>
+          <a:ln/>
+        </p:spPr>
+        <p:txBody>
+          <a:bodyPr wrap="square" lIns="0" tIns="0" rIns="0" bIns="0" rtlCol="0" anchor="ctr"/>
+          <a:lstStyle/>
+          <a:p>
+            <a:pPr indent="0" marL="0">
+              <a:buNone/>
+            </a:pPr>
+            <a:r>
+              <a:rPr lang="en-US" sz="1800" b="1" dirty="0">
+                <a:solidFill>
+                  <a:srgbClr val="A4DAC2"/>
+                </a:solidFill>
+                <a:latin typeface="Apple SD Gothic Neo" pitchFamily="34" charset="0"/>
+                <a:ea typeface="Apple SD Gothic Neo" pitchFamily="34" charset="-122"/>
+                <a:cs typeface="Apple SD Gothic Neo" pitchFamily="34" charset="-120"/>
+              </a:rPr>
+              <a:t>사용 경험</a:t>
+            </a:r>
+            <a:endParaRPr lang="en-US" sz="1800" dirty="0"/>
+          </a:p>
+        </p:txBody>
+      </p:sp>
+      <p:sp>
+        <p:nvSpPr>
+          <p:cNvPr id="16" name="Text 13"/>
+          <p:cNvSpPr txBox="1"/>
+          <p:nvPr/>
+        </p:nvSpPr>
+        <p:spPr>
+          <a:xfrm>
+            <a:off x="2834640" y="4114800"/>
+            <a:ext cx="4114800" cy="457200"/>
+          </a:xfrm>
+          <a:prstGeom prst="rect">
+            <a:avLst/>
+          </a:prstGeom>
+          <a:noFill/>
+          <a:ln/>
+        </p:spPr>
+        <p:txBody>
+          <a:bodyPr wrap="square" lIns="0" tIns="0" rIns="0" bIns="0" rtlCol="0" anchor="ctr"/>
+          <a:lstStyle/>
+          <a:p>
+            <a:pPr indent="0" marL="0">
+              <a:buNone/>
+            </a:pPr>
+            <a:r>
+              <a:rPr lang="en-US" sz="2000" dirty="0">
+                <a:solidFill>
+                  <a:srgbClr val="FFFFFF"/>
+                </a:solidFill>
+                <a:latin typeface="Apple SD Gothic Neo" pitchFamily="34" charset="0"/>
+                <a:ea typeface="Apple SD Gothic Neo" pitchFamily="34" charset="-122"/>
+                <a:cs typeface="Apple SD Gothic Neo" pitchFamily="34" charset="-120"/>
+              </a:rPr>
+              <a:t>초안 비공개 · 의미 기반 검색</a:t>
+            </a:r>
+            <a:endParaRPr lang="en-US" sz="2000" dirty="0"/>
+          </a:p>
+        </p:txBody>
+      </p:sp>
+      <p:sp>
+        <p:nvSpPr>
+          <p:cNvPr id="17" name="Text 14"/>
+          <p:cNvSpPr txBox="1"/>
+          <p:nvPr/>
+        </p:nvSpPr>
+        <p:spPr>
+          <a:xfrm>
+            <a:off x="7086600" y="4114800"/>
+            <a:ext cx="457200" cy="457200"/>
+          </a:xfrm>
+          <a:prstGeom prst="rect">
+            <a:avLst/>
+          </a:prstGeom>
+          <a:noFill/>
+          <a:ln/>
+        </p:spPr>
+        <p:txBody>
+          <a:bodyPr wrap="square" lIns="0" tIns="0" rIns="0" bIns="0" rtlCol="0" anchor="ctr"/>
+          <a:lstStyle/>
+          <a:p>
+            <a:pPr indent="0" marL="0">
+              <a:buNone/>
+            </a:pPr>
+            <a:r>
+              <a:rPr lang="en-US" sz="2200" dirty="0">
+                <a:solidFill>
+                  <a:srgbClr val="A4DAC2"/>
+                </a:solidFill>
+                <a:latin typeface="Apple SD Gothic Neo" pitchFamily="34" charset="0"/>
+                <a:ea typeface="Apple SD Gothic Neo" pitchFamily="34" charset="-122"/>
+                <a:cs typeface="Apple SD Gothic Neo" pitchFamily="34" charset="-120"/>
+              </a:rPr>
+              <a:t>↔</a:t>
+            </a:r>
+            <a:endParaRPr lang="en-US" sz="2200" dirty="0"/>
+          </a:p>
+        </p:txBody>
+      </p:sp>
+      <p:sp>
+        <p:nvSpPr>
+          <p:cNvPr id="18" name="Text 15"/>
+          <p:cNvSpPr txBox="1"/>
+          <p:nvPr/>
+        </p:nvSpPr>
+        <p:spPr>
+          <a:xfrm>
+            <a:off x="7863840" y="4114800"/>
+            <a:ext cx="3657600" cy="548640"/>
+          </a:xfrm>
+          <a:prstGeom prst="rect">
+            <a:avLst/>
+          </a:prstGeom>
+          <a:noFill/>
+          <a:ln/>
+        </p:spPr>
+        <p:txBody>
+          <a:bodyPr wrap="square" lIns="0" tIns="0" rIns="0" bIns="0" rtlCol="0" anchor="ctr"/>
+          <a:lstStyle/>
+          <a:p>
+            <a:pPr indent="0" marL="0">
+              <a:buNone/>
+            </a:pPr>
+            <a:r>
+              <a:rPr lang="en-US" sz="1700" dirty="0">
+                <a:solidFill>
+                  <a:srgbClr val="A4DAC2"/>
+                </a:solidFill>
+                <a:latin typeface="Apple SD Gothic Neo" pitchFamily="34" charset="0"/>
+                <a:ea typeface="Apple SD Gothic Neo" pitchFamily="34" charset="-122"/>
+                <a:cs typeface="Apple SD Gothic Neo" pitchFamily="34" charset="-120"/>
+              </a:rPr>
+              <a:t>최종 답변 대기 · 임베딩 자원과 지연</a:t>
+            </a:r>
+            <a:endParaRPr lang="en-US" sz="1700" dirty="0"/>
+          </a:p>
+        </p:txBody>
+      </p:sp>
+      <p:sp>
+        <p:nvSpPr>
+          <p:cNvPr id="19" name="Text 16"/>
+          <p:cNvSpPr txBox="1"/>
+          <p:nvPr/>
+        </p:nvSpPr>
+        <p:spPr>
+          <a:xfrm>
+            <a:off x="685800" y="5440680"/>
+            <a:ext cx="10881360" cy="548640"/>
+          </a:xfrm>
+          <a:prstGeom prst="rect">
+            <a:avLst/>
+          </a:prstGeom>
+          <a:noFill/>
+          <a:ln/>
+        </p:spPr>
+        <p:txBody>
+          <a:bodyPr wrap="square" lIns="0" tIns="0" rIns="0" bIns="0" rtlCol="0" anchor="ctr"/>
+          <a:lstStyle/>
+          <a:p>
+            <a:pPr indent="0" marL="0">
+              <a:buNone/>
+            </a:pPr>
+            <a:r>
+              <a:rPr lang="en-US" sz="2700" b="1" dirty="0">
+                <a:solidFill>
+                  <a:srgbClr val="FFFFFF"/>
+                </a:solidFill>
+                <a:latin typeface="Apple SD Gothic Neo" pitchFamily="34" charset="0"/>
+                <a:ea typeface="Apple SD Gothic Neo" pitchFamily="34" charset="-122"/>
+                <a:cs typeface="Apple SD Gothic Neo" pitchFamily="34" charset="-120"/>
+              </a:rPr>
+              <a:t>확인 범위를 명시하고, 근거가 부족하면 응답을 중단하는 방향으로 개선</a:t>
+            </a:r>
+            <a:endParaRPr lang="en-US" sz="2700" dirty="0"/>
+          </a:p>
+        </p:txBody>
+      </p:sp>
+      <p:sp>
+        <p:nvSpPr>
+          <p:cNvPr id="20" name="Text 17"/>
+          <p:cNvSpPr txBox="1"/>
+          <p:nvPr/>
+        </p:nvSpPr>
+        <p:spPr>
+          <a:xfrm>
+            <a:off x="685800" y="6080760"/>
+            <a:ext cx="10881360" cy="274320"/>
+          </a:xfrm>
+          <a:prstGeom prst="rect">
+            <a:avLst/>
+          </a:prstGeom>
+          <a:noFill/>
+          <a:ln/>
+        </p:spPr>
+        <p:txBody>
+          <a:bodyPr wrap="square" lIns="0" tIns="0" rIns="0" bIns="0" rtlCol="0" anchor="ctr"/>
+          <a:lstStyle/>
+          <a:p>
+            <a:pPr indent="0" marL="0">
+              <a:buNone/>
+            </a:pPr>
+            <a:r>
+              <a:rPr lang="en-US" sz="1400" dirty="0">
+                <a:solidFill>
+                  <a:srgbClr val="A4DAC2"/>
+                </a:solidFill>
+                <a:latin typeface="Apple SD Gothic Neo" pitchFamily="34" charset="0"/>
+                <a:ea typeface="Apple SD Gothic Neo" pitchFamily="34" charset="-122"/>
+                <a:cs typeface="Apple SD Gothic Neo" pitchFamily="34" charset="-120"/>
+              </a:rPr>
+              <a:t>다음 단계: 독립 평가셋 · 구조화된 수치 출력 · 불분명한 대상은 되묻기</a:t>
+            </a:r>
+            <a:endParaRPr lang="en-US" sz="1400" dirty="0"/>
           </a:p>
         </p:txBody>
       </p:sp>
@@ -10313,32 +10034,18 @@
 </file>
 
 <file path=ppt/slides/slide9.xml><?xml version="1.0" encoding="utf-8"?>
-<p:sld xmlns:a="http://schemas.openxmlformats.org/drawingml/2006/main" xmlns:r="http://schemas.openxmlformats.org/officeDocument/2006/relationships" xmlns:p="http://schemas.openxmlformats.org/presentationml/2006/main">
-  <p:cSld name="Slide 8">
-    <p:bg>
-      <p:bgPr>
-        <a:solidFill>
-          <a:srgbClr val="102F27"/>
-        </a:solidFill>
-      </p:bgPr>
-    </p:bg>
+<p:sld xmlns:a="http://schemas.openxmlformats.org/drawingml/2006/main" xmlns:p="http://schemas.openxmlformats.org/presentationml/2006/main" xmlns:r="http://schemas.openxmlformats.org/officeDocument/2006/relationships">
+  <p:cSld>
     <p:spTree>
       <p:nvGrpSpPr>
         <p:cNvPr id="1" name=""/>
         <p:cNvGrpSpPr/>
         <p:nvPr/>
       </p:nvGrpSpPr>
-      <p:grpSpPr>
-        <a:xfrm>
-          <a:off x="0" y="0"/>
-          <a:ext cx="0" cy="0"/>
-          <a:chOff x="0" y="0"/>
-          <a:chExt cx="0" cy="0"/>
-        </a:xfrm>
-      </p:grpSpPr>
-      <p:sp>
-        <p:nvSpPr>
-          <p:cNvPr id="2" name="Text 0"/>
+      <p:grpSpPr/>
+      <p:sp>
+        <p:nvSpPr>
+          <p:cNvPr id="2" name="TextBox 1"/>
           <p:cNvSpPr txBox="1"/>
           <p:nvPr/>
         </p:nvSpPr>
@@ -10351,33 +10058,28 @@
             <a:avLst/>
           </a:prstGeom>
           <a:noFill/>
-          <a:ln/>
-        </p:spPr>
-        <p:txBody>
-          <a:bodyPr wrap="square" lIns="0" tIns="0" rIns="0" bIns="0" rtlCol="0" anchor="ctr"/>
-          <a:lstStyle/>
-          <a:p>
-            <a:pPr indent="0" marL="0">
-              <a:buNone/>
-            </a:pPr>
-            <a:r>
-              <a:rPr lang="en-US" sz="1100" b="1" dirty="0">
-                <a:solidFill>
-                  <a:srgbClr val="A4DAC2"/>
-                </a:solidFill>
-                <a:latin typeface="Apple SD Gothic Neo" pitchFamily="34" charset="0"/>
-                <a:ea typeface="Apple SD Gothic Neo" pitchFamily="34" charset="-122"/>
-                <a:cs typeface="Apple SD Gothic Neo" pitchFamily="34" charset="-120"/>
-              </a:rPr>
-              <a:t>09  한계와 트레이드오프</a:t>
-            </a:r>
-            <a:endParaRPr lang="en-US" sz="1100" dirty="0"/>
-          </a:p>
-        </p:txBody>
-      </p:sp>
-      <p:sp>
-        <p:nvSpPr>
-          <p:cNvPr id="3" name="Text 1"/>
+        </p:spPr>
+        <p:txBody>
+          <a:bodyPr wrap="square" lIns="0" rIns="0" tIns="0" bIns="0">
+            <a:spAutoFit/>
+          </a:bodyPr>
+          <a:lstStyle/>
+          <a:p>
+            <a:r>
+              <a:rPr sz="1100" b="1">
+                <a:solidFill>
+                  <a:srgbClr val="16785C"/>
+                </a:solidFill>
+                <a:latin typeface="Apple SD Gothic Neo"/>
+              </a:rPr>
+              <a:t>08  비용·성능 측정과 기술 선택</a:t>
+            </a:r>
+          </a:p>
+        </p:txBody>
+      </p:sp>
+      <p:sp>
+        <p:nvSpPr>
+          <p:cNvPr id="3" name="TextBox 2"/>
           <p:cNvSpPr txBox="1"/>
           <p:nvPr/>
         </p:nvSpPr>
@@ -10390,33 +10092,96 @@
             <a:avLst/>
           </a:prstGeom>
           <a:noFill/>
-          <a:ln/>
-        </p:spPr>
-        <p:txBody>
-          <a:bodyPr wrap="square" lIns="0" tIns="0" rIns="0" bIns="0" rtlCol="0" anchor="ctr"/>
-          <a:lstStyle/>
-          <a:p>
-            <a:pPr indent="0" marL="0">
-              <a:buNone/>
-            </a:pPr>
-            <a:r>
-              <a:rPr lang="en-US" sz="3200" b="1" dirty="0">
-                <a:solidFill>
-                  <a:srgbClr val="FFFFFF"/>
-                </a:solidFill>
-                <a:latin typeface="Apple SD Gothic Neo" pitchFamily="34" charset="0"/>
-                <a:ea typeface="Apple SD Gothic Neo" pitchFamily="34" charset="-122"/>
-                <a:cs typeface="Apple SD Gothic Neo" pitchFamily="34" charset="-120"/>
-              </a:rPr>
-              <a:t>검증 통과가 답변 전체의 정확성을 보장하지 않음</a:t>
-            </a:r>
-            <a:endParaRPr lang="en-US" sz="3200" dirty="0"/>
-          </a:p>
-        </p:txBody>
-      </p:sp>
-      <p:sp>
-        <p:nvSpPr>
-          <p:cNvPr id="4" name="Text 2"/>
+        </p:spPr>
+        <p:txBody>
+          <a:bodyPr wrap="square" lIns="0" rIns="0" tIns="0" bIns="0">
+            <a:spAutoFit/>
+          </a:bodyPr>
+          <a:lstStyle/>
+          <a:p>
+            <a:r>
+              <a:rPr sz="3200" b="1">
+                <a:solidFill>
+                  <a:srgbClr val="19382F"/>
+                </a:solidFill>
+                <a:latin typeface="Apple SD Gothic Neo"/>
+              </a:rPr>
+              <a:t>측정 결과 및 기술 선택 근거</a:t>
+            </a:r>
+          </a:p>
+        </p:txBody>
+      </p:sp>
+      <p:sp>
+        <p:nvSpPr>
+          <p:cNvPr id="4" name="TextBox 3"/>
+          <p:cNvSpPr txBox="1"/>
+          <p:nvPr/>
+        </p:nvSpPr>
+        <p:spPr>
+          <a:xfrm>
+            <a:off x="640080" y="1645920"/>
+            <a:ext cx="5212080" cy="274320"/>
+          </a:xfrm>
+          <a:prstGeom prst="rect">
+            <a:avLst/>
+          </a:prstGeom>
+          <a:noFill/>
+        </p:spPr>
+        <p:txBody>
+          <a:bodyPr wrap="square" lIns="0" rIns="0" tIns="0" bIns="0">
+            <a:spAutoFit/>
+          </a:bodyPr>
+          <a:lstStyle/>
+          <a:p>
+            <a:r>
+              <a:rPr sz="1400" b="1">
+                <a:solidFill>
+                  <a:srgbClr val="62746D"/>
+                </a:solidFill>
+                <a:latin typeface="Apple SD Gothic Neo"/>
+              </a:rPr>
+              <a:t>측정 결과 (전 → 후)</a:t>
+            </a:r>
+          </a:p>
+        </p:txBody>
+      </p:sp>
+      <p:sp>
+        <p:nvSpPr>
+          <p:cNvPr id="5" name="TextBox 4"/>
+          <p:cNvSpPr txBox="1"/>
+          <p:nvPr/>
+        </p:nvSpPr>
+        <p:spPr>
+          <a:xfrm>
+            <a:off x="6309360" y="1645920"/>
+            <a:ext cx="5212080" cy="274320"/>
+          </a:xfrm>
+          <a:prstGeom prst="rect">
+            <a:avLst/>
+          </a:prstGeom>
+          <a:noFill/>
+        </p:spPr>
+        <p:txBody>
+          <a:bodyPr wrap="square" lIns="0" rIns="0" tIns="0" bIns="0">
+            <a:spAutoFit/>
+          </a:bodyPr>
+          <a:lstStyle/>
+          <a:p>
+            <a:r>
+              <a:rPr sz="1400" b="1">
+                <a:solidFill>
+                  <a:srgbClr val="62746D"/>
+                </a:solidFill>
+                <a:latin typeface="Apple SD Gothic Neo"/>
+              </a:rPr>
+              <a:t>기술 선택 이유와 한계</a:t>
+            </a:r>
+          </a:p>
+        </p:txBody>
+      </p:sp>
+      <p:sp>
+        <p:nvSpPr>
+          <p:cNvPr id="6" name="TextBox 5"/>
           <p:cNvSpPr txBox="1"/>
           <p:nvPr/>
         </p:nvSpPr>
@@ -10429,33 +10194,28 @@
             <a:avLst/>
           </a:prstGeom>
           <a:noFill/>
-          <a:ln/>
-        </p:spPr>
-        <p:txBody>
-          <a:bodyPr wrap="square" lIns="0" tIns="0" rIns="0" bIns="0" rtlCol="0" anchor="ctr"/>
-          <a:lstStyle/>
-          <a:p>
-            <a:pPr indent="0" marL="0">
-              <a:buNone/>
-            </a:pPr>
-            <a:r>
-              <a:rPr lang="en-US" sz="900" dirty="0">
-                <a:solidFill>
-                  <a:srgbClr val="A4DAC2"/>
-                </a:solidFill>
-                <a:latin typeface="Apple SD Gothic Neo" pitchFamily="34" charset="0"/>
-                <a:ea typeface="Apple SD Gothic Neo" pitchFamily="34" charset="-122"/>
-                <a:cs typeface="Apple SD Gothic Neo" pitchFamily="34" charset="-120"/>
+        </p:spPr>
+        <p:txBody>
+          <a:bodyPr wrap="square" lIns="0" rIns="0" tIns="0" bIns="0">
+            <a:spAutoFit/>
+          </a:bodyPr>
+          <a:lstStyle/>
+          <a:p>
+            <a:r>
+              <a:rPr sz="900" b="0">
+                <a:solidFill>
+                  <a:srgbClr val="62746D"/>
+                </a:solidFill>
+                <a:latin typeface="Apple SD Gothic Neo"/>
               </a:rPr>
               <a:t>AI CAPSTONE  ·  김하연</a:t>
             </a:r>
-            <a:endParaRPr lang="en-US" sz="900" dirty="0"/>
-          </a:p>
-        </p:txBody>
-      </p:sp>
-      <p:sp>
-        <p:nvSpPr>
-          <p:cNvPr id="5" name="Text 3"/>
+          </a:p>
+        </p:txBody>
+      </p:sp>
+      <p:sp>
+        <p:nvSpPr>
+          <p:cNvPr id="7" name="TextBox 6"/>
           <p:cNvSpPr txBox="1"/>
           <p:nvPr/>
         </p:nvSpPr>
@@ -10468,573 +10228,1977 @@
             <a:avLst/>
           </a:prstGeom>
           <a:noFill/>
-          <a:ln/>
-        </p:spPr>
-        <p:txBody>
-          <a:bodyPr wrap="square" lIns="0" tIns="0" rIns="0" bIns="0" rtlCol="0" anchor="ctr"/>
-          <a:lstStyle/>
-          <a:p>
-            <a:pPr indent="0" marL="0">
-              <a:buNone/>
-            </a:pPr>
-            <a:r>
-              <a:rPr lang="en-US" sz="900" dirty="0">
-                <a:solidFill>
-                  <a:srgbClr val="A4DAC2"/>
-                </a:solidFill>
-                <a:latin typeface="Apple SD Gothic Neo" pitchFamily="34" charset="0"/>
-                <a:ea typeface="Apple SD Gothic Neo" pitchFamily="34" charset="-122"/>
-                <a:cs typeface="Apple SD Gothic Neo" pitchFamily="34" charset="-120"/>
-              </a:rPr>
-              <a:t>10 / 10</a:t>
-            </a:r>
-            <a:endParaRPr lang="en-US" sz="900" dirty="0"/>
-          </a:p>
-        </p:txBody>
-      </p:sp>
-      <p:sp>
-        <p:nvSpPr>
-          <p:cNvPr id="7" name="Text 4"/>
-          <p:cNvSpPr txBox="1"/>
-          <p:nvPr/>
-        </p:nvSpPr>
-        <p:spPr>
-          <a:xfrm>
-            <a:off x="685800" y="2011680"/>
-            <a:ext cx="1828800" cy="411480"/>
-          </a:xfrm>
-          <a:prstGeom prst="rect">
-            <a:avLst/>
-          </a:prstGeom>
-          <a:noFill/>
-          <a:ln/>
-        </p:spPr>
-        <p:txBody>
-          <a:bodyPr wrap="square" lIns="0" tIns="0" rIns="0" bIns="0" rtlCol="0" anchor="ctr"/>
-          <a:lstStyle/>
-          <a:p>
-            <a:pPr indent="0" marL="0">
-              <a:buNone/>
-            </a:pPr>
-            <a:r>
-              <a:rPr lang="en-US" sz="1800" b="1" dirty="0">
-                <a:solidFill>
-                  <a:srgbClr val="A4DAC2"/>
-                </a:solidFill>
-                <a:latin typeface="Apple SD Gothic Neo" pitchFamily="34" charset="0"/>
-                <a:ea typeface="Apple SD Gothic Neo" pitchFamily="34" charset="-122"/>
-                <a:cs typeface="Apple SD Gothic Neo" pitchFamily="34" charset="-120"/>
-              </a:rPr>
-              <a:t>검증 범위</a:t>
-            </a:r>
-            <a:endParaRPr lang="en-US" sz="1800" dirty="0"/>
-          </a:p>
-        </p:txBody>
-      </p:sp>
-      <p:sp>
-        <p:nvSpPr>
-          <p:cNvPr id="8" name="Text 5"/>
-          <p:cNvSpPr txBox="1"/>
-          <p:nvPr/>
-        </p:nvSpPr>
-        <p:spPr>
-          <a:xfrm>
-            <a:off x="2834640" y="2011680"/>
-            <a:ext cx="4114800" cy="457200"/>
-          </a:xfrm>
-          <a:prstGeom prst="rect">
-            <a:avLst/>
-          </a:prstGeom>
-          <a:noFill/>
-          <a:ln/>
-        </p:spPr>
-        <p:txBody>
-          <a:bodyPr wrap="square" lIns="0" tIns="0" rIns="0" bIns="0" rtlCol="0" anchor="ctr"/>
-          <a:lstStyle/>
-          <a:p>
-            <a:pPr indent="0" marL="0">
-              <a:buNone/>
-            </a:pPr>
-            <a:r>
-              <a:rPr lang="en-US" sz="2000" dirty="0">
+        </p:spPr>
+        <p:txBody>
+          <a:bodyPr wrap="square" lIns="0" rIns="0" tIns="0" bIns="0">
+            <a:spAutoFit/>
+          </a:bodyPr>
+          <a:lstStyle/>
+          <a:p>
+            <a:r>
+              <a:rPr sz="900" b="0">
+                <a:solidFill>
+                  <a:srgbClr val="62746D"/>
+                </a:solidFill>
+                <a:latin typeface="Apple SD Gothic Neo"/>
+              </a:rPr>
+              <a:t>09 / 10</a:t>
+            </a:r>
+          </a:p>
+        </p:txBody>
+      </p:sp>
+      <p:sp>
+        <p:nvSpPr>
+          <p:cNvPr id="8" name="TextBox 7"/>
+          <p:cNvSpPr txBox="1"/>
+          <p:nvPr/>
+        </p:nvSpPr>
+        <p:spPr>
+          <a:xfrm>
+            <a:off x="640080" y="1645920"/>
+            <a:ext cx="5212080" cy="274320"/>
+          </a:xfrm>
+          <a:prstGeom prst="rect">
+            <a:avLst/>
+          </a:prstGeom>
+          <a:noFill/>
+        </p:spPr>
+        <p:txBody>
+          <a:bodyPr wrap="square" lIns="0" rIns="0" tIns="0" bIns="0">
+            <a:spAutoFit/>
+          </a:bodyPr>
+          <a:lstStyle/>
+          <a:p>
+            <a:r>
+              <a:rPr sz="1400" b="1">
+                <a:solidFill>
+                  <a:srgbClr val="62746D"/>
+                </a:solidFill>
+                <a:latin typeface="Apple SD Gothic Neo"/>
+              </a:rPr>
+              <a:t>측정 결과 (전 → 후)</a:t>
+            </a:r>
+          </a:p>
+        </p:txBody>
+      </p:sp>
+      <p:sp>
+        <p:nvSpPr>
+          <p:cNvPr id="9" name="TextBox 8"/>
+          <p:cNvSpPr txBox="1"/>
+          <p:nvPr/>
+        </p:nvSpPr>
+        <p:spPr>
+          <a:xfrm>
+            <a:off x="6309360" y="1645920"/>
+            <a:ext cx="5212080" cy="274320"/>
+          </a:xfrm>
+          <a:prstGeom prst="rect">
+            <a:avLst/>
+          </a:prstGeom>
+          <a:noFill/>
+        </p:spPr>
+        <p:txBody>
+          <a:bodyPr wrap="square" lIns="0" rIns="0" tIns="0" bIns="0">
+            <a:spAutoFit/>
+          </a:bodyPr>
+          <a:lstStyle/>
+          <a:p>
+            <a:r>
+              <a:rPr sz="1400" b="1">
+                <a:solidFill>
+                  <a:srgbClr val="62746D"/>
+                </a:solidFill>
+                <a:latin typeface="Apple SD Gothic Neo"/>
+              </a:rPr>
+              <a:t>기술 선택 이유와 한계</a:t>
+            </a:r>
+          </a:p>
+        </p:txBody>
+      </p:sp>
+      <p:sp>
+        <p:nvSpPr>
+          <p:cNvPr id="10" name="TextBox 9"/>
+          <p:cNvSpPr txBox="1"/>
+          <p:nvPr/>
+        </p:nvSpPr>
+        <p:spPr>
+          <a:xfrm>
+            <a:off x="640080" y="1965960"/>
+            <a:ext cx="3657600" cy="274320"/>
+          </a:xfrm>
+          <a:prstGeom prst="rect">
+            <a:avLst/>
+          </a:prstGeom>
+          <a:noFill/>
+        </p:spPr>
+        <p:txBody>
+          <a:bodyPr wrap="square" lIns="0" rIns="0" tIns="0" bIns="0">
+            <a:spAutoFit/>
+          </a:bodyPr>
+          <a:lstStyle/>
+          <a:p>
+            <a:r>
+              <a:rPr sz="1400" b="1">
+                <a:solidFill>
+                  <a:srgbClr val="16785C"/>
+                </a:solidFill>
+                <a:latin typeface="Apple SD Gothic Neo"/>
+              </a:rPr>
+              <a:t>작성 모델 호출 생략 (근거 0건)</a:t>
+            </a:r>
+          </a:p>
+        </p:txBody>
+      </p:sp>
+      <p:sp>
+        <p:nvSpPr>
+          <p:cNvPr id="11" name="Rounded Rectangle 10"/>
+          <p:cNvSpPr/>
+          <p:nvPr/>
+        </p:nvSpPr>
+        <p:spPr>
+          <a:xfrm>
+            <a:off x="4343400" y="1938528"/>
+            <a:ext cx="1508760" cy="292608"/>
+          </a:xfrm>
+          <a:prstGeom prst="roundRect">
+            <a:avLst/>
+          </a:prstGeom>
+          <a:solidFill>
+            <a:srgbClr val="EEF5F1"/>
+          </a:solidFill>
+          <a:ln>
+            <a:noFill/>
+          </a:ln>
+          <a:effectLst/>
+        </p:spPr>
+        <p:style>
+          <a:lnRef idx="1">
+            <a:schemeClr val="accent1"/>
+          </a:lnRef>
+          <a:fillRef idx="3">
+            <a:schemeClr val="accent1"/>
+          </a:fillRef>
+          <a:effectRef idx="2">
+            <a:schemeClr val="accent1"/>
+          </a:effectRef>
+          <a:fontRef idx="minor">
+            <a:schemeClr val="lt1"/>
+          </a:fontRef>
+        </p:style>
+        <p:txBody>
+          <a:bodyPr rtlCol="0" anchor="ctr" tIns="0" bIns="0"/>
+          <a:lstStyle/>
+          <a:p>
+            <a:pPr algn="ctr"/>
+            <a:r>
+              <a:rPr sz="1200" b="1">
+                <a:solidFill>
+                  <a:srgbClr val="16785C"/>
+                </a:solidFill>
+                <a:latin typeface="Apple SD Gothic Neo"/>
+              </a:rPr>
+              <a:t>13배 이상 단축</a:t>
+            </a:r>
+          </a:p>
+        </p:txBody>
+      </p:sp>
+      <p:sp>
+        <p:nvSpPr>
+          <p:cNvPr id="12" name="TextBox 11"/>
+          <p:cNvSpPr txBox="1"/>
+          <p:nvPr/>
+        </p:nvSpPr>
+        <p:spPr>
+          <a:xfrm>
+            <a:off x="640080" y="2313432"/>
+            <a:ext cx="320040" cy="274320"/>
+          </a:xfrm>
+          <a:prstGeom prst="rect">
+            <a:avLst/>
+          </a:prstGeom>
+          <a:noFill/>
+        </p:spPr>
+        <p:txBody>
+          <a:bodyPr wrap="square" lIns="0" rIns="0" tIns="0" bIns="0" anchor="ctr">
+            <a:spAutoFit/>
+          </a:bodyPr>
+          <a:lstStyle/>
+          <a:p>
+            <a:r>
+              <a:rPr sz="1200" b="1">
+                <a:solidFill>
+                  <a:srgbClr val="62746D"/>
+                </a:solidFill>
+                <a:latin typeface="Apple SD Gothic Neo"/>
+              </a:rPr>
+              <a:t>전</a:t>
+            </a:r>
+          </a:p>
+        </p:txBody>
+      </p:sp>
+      <p:sp>
+        <p:nvSpPr>
+          <p:cNvPr id="13" name="Rectangle 12"/>
+          <p:cNvSpPr/>
+          <p:nvPr/>
+        </p:nvSpPr>
+        <p:spPr>
+          <a:xfrm>
+            <a:off x="1005840" y="2313432"/>
+            <a:ext cx="2743200" cy="274320"/>
+          </a:xfrm>
+          <a:prstGeom prst="rect">
+            <a:avLst/>
+          </a:prstGeom>
+          <a:solidFill>
+            <a:srgbClr val="B7C4BE"/>
+          </a:solidFill>
+          <a:ln>
+            <a:noFill/>
+          </a:ln>
+          <a:effectLst/>
+        </p:spPr>
+        <p:style>
+          <a:lnRef idx="1">
+            <a:schemeClr val="accent1"/>
+          </a:lnRef>
+          <a:fillRef idx="3">
+            <a:schemeClr val="accent1"/>
+          </a:fillRef>
+          <a:effectRef idx="2">
+            <a:schemeClr val="accent1"/>
+          </a:effectRef>
+          <a:fontRef idx="minor">
+            <a:schemeClr val="lt1"/>
+          </a:fontRef>
+        </p:style>
+        <p:txBody>
+          <a:bodyPr rtlCol="0" anchor="ctr"/>
+          <a:lstStyle/>
+          <a:p>
+            <a:pPr algn="ctr"/>
+          </a:p>
+        </p:txBody>
+      </p:sp>
+      <p:sp>
+        <p:nvSpPr>
+          <p:cNvPr id="14" name="TextBox 13"/>
+          <p:cNvSpPr txBox="1"/>
+          <p:nvPr/>
+        </p:nvSpPr>
+        <p:spPr>
+          <a:xfrm>
+            <a:off x="3858768" y="2313432"/>
+            <a:ext cx="1737360" cy="274320"/>
+          </a:xfrm>
+          <a:prstGeom prst="rect">
+            <a:avLst/>
+          </a:prstGeom>
+          <a:noFill/>
+        </p:spPr>
+        <p:txBody>
+          <a:bodyPr wrap="square" lIns="0" rIns="0" tIns="0" bIns="0" anchor="ctr">
+            <a:spAutoFit/>
+          </a:bodyPr>
+          <a:lstStyle/>
+          <a:p>
+            <a:r>
+              <a:rPr sz="1500" b="1">
+                <a:solidFill>
+                  <a:srgbClr val="19382F"/>
+                </a:solidFill>
+                <a:latin typeface="Apple SD Gothic Neo"/>
+              </a:rPr>
+              <a:t>36.6초</a:t>
+            </a:r>
+          </a:p>
+        </p:txBody>
+      </p:sp>
+      <p:sp>
+        <p:nvSpPr>
+          <p:cNvPr id="15" name="TextBox 14"/>
+          <p:cNvSpPr txBox="1"/>
+          <p:nvPr/>
+        </p:nvSpPr>
+        <p:spPr>
+          <a:xfrm>
+            <a:off x="640080" y="2660903"/>
+            <a:ext cx="320040" cy="274320"/>
+          </a:xfrm>
+          <a:prstGeom prst="rect">
+            <a:avLst/>
+          </a:prstGeom>
+          <a:noFill/>
+        </p:spPr>
+        <p:txBody>
+          <a:bodyPr wrap="square" lIns="0" rIns="0" tIns="0" bIns="0" anchor="ctr">
+            <a:spAutoFit/>
+          </a:bodyPr>
+          <a:lstStyle/>
+          <a:p>
+            <a:r>
+              <a:rPr sz="1200" b="1">
+                <a:solidFill>
+                  <a:srgbClr val="62746D"/>
+                </a:solidFill>
+                <a:latin typeface="Apple SD Gothic Neo"/>
+              </a:rPr>
+              <a:t>후</a:t>
+            </a:r>
+          </a:p>
+        </p:txBody>
+      </p:sp>
+      <p:sp>
+        <p:nvSpPr>
+          <p:cNvPr id="16" name="Rectangle 15"/>
+          <p:cNvSpPr/>
+          <p:nvPr/>
+        </p:nvSpPr>
+        <p:spPr>
+          <a:xfrm>
+            <a:off x="1005840" y="2660903"/>
+            <a:ext cx="202367" cy="274320"/>
+          </a:xfrm>
+          <a:prstGeom prst="rect">
+            <a:avLst/>
+          </a:prstGeom>
+          <a:solidFill>
+            <a:srgbClr val="2E9E78"/>
+          </a:solidFill>
+          <a:ln>
+            <a:noFill/>
+          </a:ln>
+          <a:effectLst/>
+        </p:spPr>
+        <p:style>
+          <a:lnRef idx="1">
+            <a:schemeClr val="accent1"/>
+          </a:lnRef>
+          <a:fillRef idx="3">
+            <a:schemeClr val="accent1"/>
+          </a:fillRef>
+          <a:effectRef idx="2">
+            <a:schemeClr val="accent1"/>
+          </a:effectRef>
+          <a:fontRef idx="minor">
+            <a:schemeClr val="lt1"/>
+          </a:fontRef>
+        </p:style>
+        <p:txBody>
+          <a:bodyPr rtlCol="0" anchor="ctr"/>
+          <a:lstStyle/>
+          <a:p>
+            <a:pPr algn="ctr"/>
+          </a:p>
+        </p:txBody>
+      </p:sp>
+      <p:sp>
+        <p:nvSpPr>
+          <p:cNvPr id="17" name="TextBox 16"/>
+          <p:cNvSpPr txBox="1"/>
+          <p:nvPr/>
+        </p:nvSpPr>
+        <p:spPr>
+          <a:xfrm>
+            <a:off x="1317935" y="2660903"/>
+            <a:ext cx="1737360" cy="274320"/>
+          </a:xfrm>
+          <a:prstGeom prst="rect">
+            <a:avLst/>
+          </a:prstGeom>
+          <a:noFill/>
+        </p:spPr>
+        <p:txBody>
+          <a:bodyPr wrap="square" lIns="0" rIns="0" tIns="0" bIns="0" anchor="ctr">
+            <a:spAutoFit/>
+          </a:bodyPr>
+          <a:lstStyle/>
+          <a:p>
+            <a:r>
+              <a:rPr sz="1500" b="1">
+                <a:solidFill>
+                  <a:srgbClr val="19382F"/>
+                </a:solidFill>
+                <a:latin typeface="Apple SD Gothic Neo"/>
+              </a:rPr>
+              <a:t>1.2~2.7초</a:t>
+            </a:r>
+          </a:p>
+        </p:txBody>
+      </p:sp>
+      <p:sp>
+        <p:nvSpPr>
+          <p:cNvPr id="18" name="TextBox 17"/>
+          <p:cNvSpPr txBox="1"/>
+          <p:nvPr/>
+        </p:nvSpPr>
+        <p:spPr>
+          <a:xfrm>
+            <a:off x="640080" y="2990088"/>
+            <a:ext cx="5212080" cy="182880"/>
+          </a:xfrm>
+          <a:prstGeom prst="rect">
+            <a:avLst/>
+          </a:prstGeom>
+          <a:noFill/>
+        </p:spPr>
+        <p:txBody>
+          <a:bodyPr wrap="square" lIns="0" rIns="0" tIns="0" bIns="0">
+            <a:spAutoFit/>
+          </a:bodyPr>
+          <a:lstStyle/>
+          <a:p>
+            <a:r>
+              <a:rPr sz="1100" b="0">
+                <a:solidFill>
+                  <a:srgbClr val="62746D"/>
+                </a:solidFill>
+                <a:latin typeface="Apple SD Gothic Neo"/>
+              </a:rPr>
+              <a:t>단일 질문 실측 · 작성 호출 1회 → 0회</a:t>
+            </a:r>
+          </a:p>
+        </p:txBody>
+      </p:sp>
+      <p:sp>
+        <p:nvSpPr>
+          <p:cNvPr id="19" name="TextBox 18"/>
+          <p:cNvSpPr txBox="1"/>
+          <p:nvPr/>
+        </p:nvSpPr>
+        <p:spPr>
+          <a:xfrm>
+            <a:off x="640080" y="3246120"/>
+            <a:ext cx="3657600" cy="274320"/>
+          </a:xfrm>
+          <a:prstGeom prst="rect">
+            <a:avLst/>
+          </a:prstGeom>
+          <a:noFill/>
+        </p:spPr>
+        <p:txBody>
+          <a:bodyPr wrap="square" lIns="0" rIns="0" tIns="0" bIns="0">
+            <a:spAutoFit/>
+          </a:bodyPr>
+          <a:lstStyle/>
+          <a:p>
+            <a:r>
+              <a:rPr sz="1400" b="1">
+                <a:solidFill>
+                  <a:srgbClr val="16785C"/>
+                </a:solidFill>
+                <a:latin typeface="Apple SD Gothic Neo"/>
+              </a:rPr>
+              <a:t>병렬 조사 (모니터링 3건)</a:t>
+            </a:r>
+          </a:p>
+        </p:txBody>
+      </p:sp>
+      <p:sp>
+        <p:nvSpPr>
+          <p:cNvPr id="20" name="Rounded Rectangle 19"/>
+          <p:cNvSpPr/>
+          <p:nvPr/>
+        </p:nvSpPr>
+        <p:spPr>
+          <a:xfrm>
+            <a:off x="4343400" y="3218688"/>
+            <a:ext cx="1508760" cy="292608"/>
+          </a:xfrm>
+          <a:prstGeom prst="roundRect">
+            <a:avLst/>
+          </a:prstGeom>
+          <a:solidFill>
+            <a:srgbClr val="EEF5F1"/>
+          </a:solidFill>
+          <a:ln>
+            <a:noFill/>
+          </a:ln>
+          <a:effectLst/>
+        </p:spPr>
+        <p:style>
+          <a:lnRef idx="1">
+            <a:schemeClr val="accent1"/>
+          </a:lnRef>
+          <a:fillRef idx="3">
+            <a:schemeClr val="accent1"/>
+          </a:fillRef>
+          <a:effectRef idx="2">
+            <a:schemeClr val="accent1"/>
+          </a:effectRef>
+          <a:fontRef idx="minor">
+            <a:schemeClr val="lt1"/>
+          </a:fontRef>
+        </p:style>
+        <p:txBody>
+          <a:bodyPr rtlCol="0" anchor="ctr" tIns="0" bIns="0"/>
+          <a:lstStyle/>
+          <a:p>
+            <a:pPr algn="ctr"/>
+            <a:r>
+              <a:rPr sz="1200" b="1">
+                <a:solidFill>
+                  <a:srgbClr val="16785C"/>
+                </a:solidFill>
+                <a:latin typeface="Apple SD Gothic Neo"/>
+              </a:rPr>
+              <a:t>약 2.9배 단축</a:t>
+            </a:r>
+          </a:p>
+        </p:txBody>
+      </p:sp>
+      <p:sp>
+        <p:nvSpPr>
+          <p:cNvPr id="21" name="TextBox 20"/>
+          <p:cNvSpPr txBox="1"/>
+          <p:nvPr/>
+        </p:nvSpPr>
+        <p:spPr>
+          <a:xfrm>
+            <a:off x="640080" y="3593591"/>
+            <a:ext cx="320040" cy="274320"/>
+          </a:xfrm>
+          <a:prstGeom prst="rect">
+            <a:avLst/>
+          </a:prstGeom>
+          <a:noFill/>
+        </p:spPr>
+        <p:txBody>
+          <a:bodyPr wrap="square" lIns="0" rIns="0" tIns="0" bIns="0" anchor="ctr">
+            <a:spAutoFit/>
+          </a:bodyPr>
+          <a:lstStyle/>
+          <a:p>
+            <a:r>
+              <a:rPr sz="1200" b="1">
+                <a:solidFill>
+                  <a:srgbClr val="62746D"/>
+                </a:solidFill>
+                <a:latin typeface="Apple SD Gothic Neo"/>
+              </a:rPr>
+              <a:t>전</a:t>
+            </a:r>
+          </a:p>
+        </p:txBody>
+      </p:sp>
+      <p:sp>
+        <p:nvSpPr>
+          <p:cNvPr id="22" name="Rectangle 21"/>
+          <p:cNvSpPr/>
+          <p:nvPr/>
+        </p:nvSpPr>
+        <p:spPr>
+          <a:xfrm>
+            <a:off x="1005840" y="3593591"/>
+            <a:ext cx="2743200" cy="274320"/>
+          </a:xfrm>
+          <a:prstGeom prst="rect">
+            <a:avLst/>
+          </a:prstGeom>
+          <a:solidFill>
+            <a:srgbClr val="B7C4BE"/>
+          </a:solidFill>
+          <a:ln>
+            <a:noFill/>
+          </a:ln>
+          <a:effectLst/>
+        </p:spPr>
+        <p:style>
+          <a:lnRef idx="1">
+            <a:schemeClr val="accent1"/>
+          </a:lnRef>
+          <a:fillRef idx="3">
+            <a:schemeClr val="accent1"/>
+          </a:fillRef>
+          <a:effectRef idx="2">
+            <a:schemeClr val="accent1"/>
+          </a:effectRef>
+          <a:fontRef idx="minor">
+            <a:schemeClr val="lt1"/>
+          </a:fontRef>
+        </p:style>
+        <p:txBody>
+          <a:bodyPr rtlCol="0" anchor="ctr"/>
+          <a:lstStyle/>
+          <a:p>
+            <a:pPr algn="ctr"/>
+          </a:p>
+        </p:txBody>
+      </p:sp>
+      <p:sp>
+        <p:nvSpPr>
+          <p:cNvPr id="23" name="TextBox 22"/>
+          <p:cNvSpPr txBox="1"/>
+          <p:nvPr/>
+        </p:nvSpPr>
+        <p:spPr>
+          <a:xfrm>
+            <a:off x="3858768" y="3593591"/>
+            <a:ext cx="1737360" cy="274320"/>
+          </a:xfrm>
+          <a:prstGeom prst="rect">
+            <a:avLst/>
+          </a:prstGeom>
+          <a:noFill/>
+        </p:spPr>
+        <p:txBody>
+          <a:bodyPr wrap="square" lIns="0" rIns="0" tIns="0" bIns="0" anchor="ctr">
+            <a:spAutoFit/>
+          </a:bodyPr>
+          <a:lstStyle/>
+          <a:p>
+            <a:r>
+              <a:rPr sz="1500" b="1">
+                <a:solidFill>
+                  <a:srgbClr val="19382F"/>
+                </a:solidFill>
+                <a:latin typeface="Apple SD Gothic Neo"/>
+              </a:rPr>
+              <a:t>1.07초</a:t>
+            </a:r>
+          </a:p>
+        </p:txBody>
+      </p:sp>
+      <p:sp>
+        <p:nvSpPr>
+          <p:cNvPr id="24" name="TextBox 23"/>
+          <p:cNvSpPr txBox="1"/>
+          <p:nvPr/>
+        </p:nvSpPr>
+        <p:spPr>
+          <a:xfrm>
+            <a:off x="640080" y="3941063"/>
+            <a:ext cx="320040" cy="274320"/>
+          </a:xfrm>
+          <a:prstGeom prst="rect">
+            <a:avLst/>
+          </a:prstGeom>
+          <a:noFill/>
+        </p:spPr>
+        <p:txBody>
+          <a:bodyPr wrap="square" lIns="0" rIns="0" tIns="0" bIns="0" anchor="ctr">
+            <a:spAutoFit/>
+          </a:bodyPr>
+          <a:lstStyle/>
+          <a:p>
+            <a:r>
+              <a:rPr sz="1200" b="1">
+                <a:solidFill>
+                  <a:srgbClr val="62746D"/>
+                </a:solidFill>
+                <a:latin typeface="Apple SD Gothic Neo"/>
+              </a:rPr>
+              <a:t>후</a:t>
+            </a:r>
+          </a:p>
+        </p:txBody>
+      </p:sp>
+      <p:sp>
+        <p:nvSpPr>
+          <p:cNvPr id="25" name="Rectangle 24"/>
+          <p:cNvSpPr/>
+          <p:nvPr/>
+        </p:nvSpPr>
+        <p:spPr>
+          <a:xfrm>
+            <a:off x="1005840" y="3941063"/>
+            <a:ext cx="922945" cy="274320"/>
+          </a:xfrm>
+          <a:prstGeom prst="rect">
+            <a:avLst/>
+          </a:prstGeom>
+          <a:solidFill>
+            <a:srgbClr val="2E9E78"/>
+          </a:solidFill>
+          <a:ln>
+            <a:noFill/>
+          </a:ln>
+          <a:effectLst/>
+        </p:spPr>
+        <p:style>
+          <a:lnRef idx="1">
+            <a:schemeClr val="accent1"/>
+          </a:lnRef>
+          <a:fillRef idx="3">
+            <a:schemeClr val="accent1"/>
+          </a:fillRef>
+          <a:effectRef idx="2">
+            <a:schemeClr val="accent1"/>
+          </a:effectRef>
+          <a:fontRef idx="minor">
+            <a:schemeClr val="lt1"/>
+          </a:fontRef>
+        </p:style>
+        <p:txBody>
+          <a:bodyPr rtlCol="0" anchor="ctr"/>
+          <a:lstStyle/>
+          <a:p>
+            <a:pPr algn="ctr"/>
+          </a:p>
+        </p:txBody>
+      </p:sp>
+      <p:sp>
+        <p:nvSpPr>
+          <p:cNvPr id="26" name="TextBox 25"/>
+          <p:cNvSpPr txBox="1"/>
+          <p:nvPr/>
+        </p:nvSpPr>
+        <p:spPr>
+          <a:xfrm>
+            <a:off x="2038513" y="3941063"/>
+            <a:ext cx="1737360" cy="274320"/>
+          </a:xfrm>
+          <a:prstGeom prst="rect">
+            <a:avLst/>
+          </a:prstGeom>
+          <a:noFill/>
+        </p:spPr>
+        <p:txBody>
+          <a:bodyPr wrap="square" lIns="0" rIns="0" tIns="0" bIns="0" anchor="ctr">
+            <a:spAutoFit/>
+          </a:bodyPr>
+          <a:lstStyle/>
+          <a:p>
+            <a:r>
+              <a:rPr sz="1500" b="1">
+                <a:solidFill>
+                  <a:srgbClr val="19382F"/>
+                </a:solidFill>
+                <a:latin typeface="Apple SD Gothic Neo"/>
+              </a:rPr>
+              <a:t>0.36초</a:t>
+            </a:r>
+          </a:p>
+        </p:txBody>
+      </p:sp>
+      <p:sp>
+        <p:nvSpPr>
+          <p:cNvPr id="27" name="TextBox 26"/>
+          <p:cNvSpPr txBox="1"/>
+          <p:nvPr/>
+        </p:nvSpPr>
+        <p:spPr>
+          <a:xfrm>
+            <a:off x="640080" y="4270248"/>
+            <a:ext cx="5212080" cy="182880"/>
+          </a:xfrm>
+          <a:prstGeom prst="rect">
+            <a:avLst/>
+          </a:prstGeom>
+          <a:noFill/>
+        </p:spPr>
+        <p:txBody>
+          <a:bodyPr wrap="square" lIns="0" rIns="0" tIns="0" bIns="0">
+            <a:spAutoFit/>
+          </a:bodyPr>
+          <a:lstStyle/>
+          <a:p>
+            <a:r>
+              <a:rPr sz="1100" b="0">
+                <a:solidFill>
+                  <a:srgbClr val="62746D"/>
+                </a:solidFill>
+                <a:latin typeface="Apple SD Gothic Neo"/>
+              </a:rPr>
+              <a:t>제공 구조 측정 · 작업당 0.35초는 모의 지연</a:t>
+            </a:r>
+          </a:p>
+        </p:txBody>
+      </p:sp>
+      <p:sp>
+        <p:nvSpPr>
+          <p:cNvPr id="28" name="TextBox 27"/>
+          <p:cNvSpPr txBox="1"/>
+          <p:nvPr/>
+        </p:nvSpPr>
+        <p:spPr>
+          <a:xfrm>
+            <a:off x="640080" y="4526279"/>
+            <a:ext cx="3657600" cy="274320"/>
+          </a:xfrm>
+          <a:prstGeom prst="rect">
+            <a:avLst/>
+          </a:prstGeom>
+          <a:noFill/>
+        </p:spPr>
+        <p:txBody>
+          <a:bodyPr wrap="square" lIns="0" rIns="0" tIns="0" bIns="0">
+            <a:spAutoFit/>
+          </a:bodyPr>
+          <a:lstStyle/>
+          <a:p>
+            <a:r>
+              <a:rPr sz="1400" b="1">
+                <a:solidFill>
+                  <a:srgbClr val="16785C"/>
+                </a:solidFill>
+                <a:latin typeface="Apple SD Gothic Neo"/>
+              </a:rPr>
+              <a:t>평균 재작성 횟수</a:t>
+            </a:r>
+          </a:p>
+        </p:txBody>
+      </p:sp>
+      <p:sp>
+        <p:nvSpPr>
+          <p:cNvPr id="29" name="Rounded Rectangle 28"/>
+          <p:cNvSpPr/>
+          <p:nvPr/>
+        </p:nvSpPr>
+        <p:spPr>
+          <a:xfrm>
+            <a:off x="4343400" y="4498847"/>
+            <a:ext cx="1508760" cy="292608"/>
+          </a:xfrm>
+          <a:prstGeom prst="roundRect">
+            <a:avLst/>
+          </a:prstGeom>
+          <a:solidFill>
+            <a:srgbClr val="EEF5F1"/>
+          </a:solidFill>
+          <a:ln>
+            <a:noFill/>
+          </a:ln>
+          <a:effectLst/>
+        </p:spPr>
+        <p:style>
+          <a:lnRef idx="1">
+            <a:schemeClr val="accent1"/>
+          </a:lnRef>
+          <a:fillRef idx="3">
+            <a:schemeClr val="accent1"/>
+          </a:fillRef>
+          <a:effectRef idx="2">
+            <a:schemeClr val="accent1"/>
+          </a:effectRef>
+          <a:fontRef idx="minor">
+            <a:schemeClr val="lt1"/>
+          </a:fontRef>
+        </p:style>
+        <p:txBody>
+          <a:bodyPr rtlCol="0" anchor="ctr" tIns="0" bIns="0"/>
+          <a:lstStyle/>
+          <a:p>
+            <a:pPr algn="ctr"/>
+            <a:r>
+              <a:rPr sz="1200" b="1">
+                <a:solidFill>
+                  <a:srgbClr val="16785C"/>
+                </a:solidFill>
+                <a:latin typeface="Apple SD Gothic Neo"/>
+              </a:rPr>
+              <a:t>50% 감소</a:t>
+            </a:r>
+          </a:p>
+        </p:txBody>
+      </p:sp>
+      <p:sp>
+        <p:nvSpPr>
+          <p:cNvPr id="30" name="TextBox 29"/>
+          <p:cNvSpPr txBox="1"/>
+          <p:nvPr/>
+        </p:nvSpPr>
+        <p:spPr>
+          <a:xfrm>
+            <a:off x="640080" y="4873751"/>
+            <a:ext cx="320040" cy="274320"/>
+          </a:xfrm>
+          <a:prstGeom prst="rect">
+            <a:avLst/>
+          </a:prstGeom>
+          <a:noFill/>
+        </p:spPr>
+        <p:txBody>
+          <a:bodyPr wrap="square" lIns="0" rIns="0" tIns="0" bIns="0" anchor="ctr">
+            <a:spAutoFit/>
+          </a:bodyPr>
+          <a:lstStyle/>
+          <a:p>
+            <a:r>
+              <a:rPr sz="1200" b="1">
+                <a:solidFill>
+                  <a:srgbClr val="62746D"/>
+                </a:solidFill>
+                <a:latin typeface="Apple SD Gothic Neo"/>
+              </a:rPr>
+              <a:t>전</a:t>
+            </a:r>
+          </a:p>
+        </p:txBody>
+      </p:sp>
+      <p:sp>
+        <p:nvSpPr>
+          <p:cNvPr id="31" name="Rectangle 30"/>
+          <p:cNvSpPr/>
+          <p:nvPr/>
+        </p:nvSpPr>
+        <p:spPr>
+          <a:xfrm>
+            <a:off x="1005840" y="4873751"/>
+            <a:ext cx="2743200" cy="274320"/>
+          </a:xfrm>
+          <a:prstGeom prst="rect">
+            <a:avLst/>
+          </a:prstGeom>
+          <a:solidFill>
+            <a:srgbClr val="B7C4BE"/>
+          </a:solidFill>
+          <a:ln>
+            <a:noFill/>
+          </a:ln>
+          <a:effectLst/>
+        </p:spPr>
+        <p:style>
+          <a:lnRef idx="1">
+            <a:schemeClr val="accent1"/>
+          </a:lnRef>
+          <a:fillRef idx="3">
+            <a:schemeClr val="accent1"/>
+          </a:fillRef>
+          <a:effectRef idx="2">
+            <a:schemeClr val="accent1"/>
+          </a:effectRef>
+          <a:fontRef idx="minor">
+            <a:schemeClr val="lt1"/>
+          </a:fontRef>
+        </p:style>
+        <p:txBody>
+          <a:bodyPr rtlCol="0" anchor="ctr"/>
+          <a:lstStyle/>
+          <a:p>
+            <a:pPr algn="ctr"/>
+          </a:p>
+        </p:txBody>
+      </p:sp>
+      <p:sp>
+        <p:nvSpPr>
+          <p:cNvPr id="32" name="TextBox 31"/>
+          <p:cNvSpPr txBox="1"/>
+          <p:nvPr/>
+        </p:nvSpPr>
+        <p:spPr>
+          <a:xfrm>
+            <a:off x="3858768" y="4873751"/>
+            <a:ext cx="1737360" cy="274320"/>
+          </a:xfrm>
+          <a:prstGeom prst="rect">
+            <a:avLst/>
+          </a:prstGeom>
+          <a:noFill/>
+        </p:spPr>
+        <p:txBody>
+          <a:bodyPr wrap="square" lIns="0" rIns="0" tIns="0" bIns="0" anchor="ctr">
+            <a:spAutoFit/>
+          </a:bodyPr>
+          <a:lstStyle/>
+          <a:p>
+            <a:r>
+              <a:rPr sz="1500" b="1">
+                <a:solidFill>
+                  <a:srgbClr val="19382F"/>
+                </a:solidFill>
+                <a:latin typeface="Apple SD Gothic Neo"/>
+              </a:rPr>
+              <a:t>2.0회</a:t>
+            </a:r>
+          </a:p>
+        </p:txBody>
+      </p:sp>
+      <p:sp>
+        <p:nvSpPr>
+          <p:cNvPr id="33" name="TextBox 32"/>
+          <p:cNvSpPr txBox="1"/>
+          <p:nvPr/>
+        </p:nvSpPr>
+        <p:spPr>
+          <a:xfrm>
+            <a:off x="640080" y="5221223"/>
+            <a:ext cx="320040" cy="274320"/>
+          </a:xfrm>
+          <a:prstGeom prst="rect">
+            <a:avLst/>
+          </a:prstGeom>
+          <a:noFill/>
+        </p:spPr>
+        <p:txBody>
+          <a:bodyPr wrap="square" lIns="0" rIns="0" tIns="0" bIns="0" anchor="ctr">
+            <a:spAutoFit/>
+          </a:bodyPr>
+          <a:lstStyle/>
+          <a:p>
+            <a:r>
+              <a:rPr sz="1200" b="1">
+                <a:solidFill>
+                  <a:srgbClr val="62746D"/>
+                </a:solidFill>
+                <a:latin typeface="Apple SD Gothic Neo"/>
+              </a:rPr>
+              <a:t>후</a:t>
+            </a:r>
+          </a:p>
+        </p:txBody>
+      </p:sp>
+      <p:sp>
+        <p:nvSpPr>
+          <p:cNvPr id="34" name="Rectangle 33"/>
+          <p:cNvSpPr/>
+          <p:nvPr/>
+        </p:nvSpPr>
+        <p:spPr>
+          <a:xfrm>
+            <a:off x="1005840" y="5221223"/>
+            <a:ext cx="1371600" cy="274320"/>
+          </a:xfrm>
+          <a:prstGeom prst="rect">
+            <a:avLst/>
+          </a:prstGeom>
+          <a:solidFill>
+            <a:srgbClr val="2E9E78"/>
+          </a:solidFill>
+          <a:ln>
+            <a:noFill/>
+          </a:ln>
+          <a:effectLst/>
+        </p:spPr>
+        <p:style>
+          <a:lnRef idx="1">
+            <a:schemeClr val="accent1"/>
+          </a:lnRef>
+          <a:fillRef idx="3">
+            <a:schemeClr val="accent1"/>
+          </a:fillRef>
+          <a:effectRef idx="2">
+            <a:schemeClr val="accent1"/>
+          </a:effectRef>
+          <a:fontRef idx="minor">
+            <a:schemeClr val="lt1"/>
+          </a:fontRef>
+        </p:style>
+        <p:txBody>
+          <a:bodyPr rtlCol="0" anchor="ctr"/>
+          <a:lstStyle/>
+          <a:p>
+            <a:pPr algn="ctr"/>
+          </a:p>
+        </p:txBody>
+      </p:sp>
+      <p:sp>
+        <p:nvSpPr>
+          <p:cNvPr id="35" name="TextBox 34"/>
+          <p:cNvSpPr txBox="1"/>
+          <p:nvPr/>
+        </p:nvSpPr>
+        <p:spPr>
+          <a:xfrm>
+            <a:off x="2487168" y="5221223"/>
+            <a:ext cx="1737360" cy="274320"/>
+          </a:xfrm>
+          <a:prstGeom prst="rect">
+            <a:avLst/>
+          </a:prstGeom>
+          <a:noFill/>
+        </p:spPr>
+        <p:txBody>
+          <a:bodyPr wrap="square" lIns="0" rIns="0" tIns="0" bIns="0" anchor="ctr">
+            <a:spAutoFit/>
+          </a:bodyPr>
+          <a:lstStyle/>
+          <a:p>
+            <a:r>
+              <a:rPr sz="1500" b="1">
+                <a:solidFill>
+                  <a:srgbClr val="19382F"/>
+                </a:solidFill>
+                <a:latin typeface="Apple SD Gothic Neo"/>
+              </a:rPr>
+              <a:t>1.0회</a:t>
+            </a:r>
+          </a:p>
+        </p:txBody>
+      </p:sp>
+      <p:sp>
+        <p:nvSpPr>
+          <p:cNvPr id="36" name="TextBox 35"/>
+          <p:cNvSpPr txBox="1"/>
+          <p:nvPr/>
+        </p:nvSpPr>
+        <p:spPr>
+          <a:xfrm>
+            <a:off x="640080" y="5550407"/>
+            <a:ext cx="5212080" cy="182880"/>
+          </a:xfrm>
+          <a:prstGeom prst="rect">
+            <a:avLst/>
+          </a:prstGeom>
+          <a:noFill/>
+        </p:spPr>
+        <p:txBody>
+          <a:bodyPr wrap="square" lIns="0" rIns="0" tIns="0" bIns="0">
+            <a:spAutoFit/>
+          </a:bodyPr>
+          <a:lstStyle/>
+          <a:p>
+            <a:r>
+              <a:rPr sz="1100" b="0">
+                <a:solidFill>
+                  <a:srgbClr val="62746D"/>
+                </a:solidFill>
+                <a:latin typeface="Apple SD Gothic Neo"/>
+              </a:rPr>
+              <a:t>비용 절감 지표 · 정확도 향상은 아님</a:t>
+            </a:r>
+          </a:p>
+        </p:txBody>
+      </p:sp>
+      <p:sp>
+        <p:nvSpPr>
+          <p:cNvPr id="37" name="Rectangle 36"/>
+          <p:cNvSpPr/>
+          <p:nvPr/>
+        </p:nvSpPr>
+        <p:spPr>
+          <a:xfrm>
+            <a:off x="6309360" y="2011680"/>
+            <a:ext cx="5212080" cy="329184"/>
+          </a:xfrm>
+          <a:prstGeom prst="rect">
+            <a:avLst/>
+          </a:prstGeom>
+          <a:solidFill>
+            <a:srgbClr val="19382F"/>
+          </a:solidFill>
+          <a:ln>
+            <a:noFill/>
+          </a:ln>
+          <a:effectLst/>
+        </p:spPr>
+        <p:style>
+          <a:lnRef idx="1">
+            <a:schemeClr val="accent1"/>
+          </a:lnRef>
+          <a:fillRef idx="3">
+            <a:schemeClr val="accent1"/>
+          </a:fillRef>
+          <a:effectRef idx="2">
+            <a:schemeClr val="accent1"/>
+          </a:effectRef>
+          <a:fontRef idx="minor">
+            <a:schemeClr val="lt1"/>
+          </a:fontRef>
+        </p:style>
+        <p:txBody>
+          <a:bodyPr rtlCol="0" anchor="ctr"/>
+          <a:lstStyle/>
+          <a:p>
+            <a:pPr algn="ctr"/>
+          </a:p>
+        </p:txBody>
+      </p:sp>
+      <p:sp>
+        <p:nvSpPr>
+          <p:cNvPr id="38" name="TextBox 37"/>
+          <p:cNvSpPr txBox="1"/>
+          <p:nvPr/>
+        </p:nvSpPr>
+        <p:spPr>
+          <a:xfrm>
+            <a:off x="6419088" y="2011680"/>
+            <a:ext cx="1261872" cy="329184"/>
+          </a:xfrm>
+          <a:prstGeom prst="rect">
+            <a:avLst/>
+          </a:prstGeom>
+          <a:noFill/>
+        </p:spPr>
+        <p:txBody>
+          <a:bodyPr wrap="square" lIns="0" rIns="0" tIns="0" bIns="0" anchor="ctr">
+            <a:spAutoFit/>
+          </a:bodyPr>
+          <a:lstStyle/>
+          <a:p>
+            <a:r>
+              <a:rPr sz="1200" b="1">
                 <a:solidFill>
                   <a:srgbClr val="FFFFFF"/>
                 </a:solidFill>
-                <a:latin typeface="Apple SD Gothic Neo" pitchFamily="34" charset="0"/>
-                <a:ea typeface="Apple SD Gothic Neo" pitchFamily="34" charset="-122"/>
-                <a:cs typeface="Apple SD Gothic Neo" pitchFamily="34" charset="-120"/>
-              </a:rPr>
-              <a:t>시스템명·CPU·메모리만 대조</a:t>
-            </a:r>
-            <a:endParaRPr lang="en-US" sz="2000" dirty="0"/>
-          </a:p>
-        </p:txBody>
-      </p:sp>
-      <p:sp>
-        <p:nvSpPr>
-          <p:cNvPr id="9" name="Text 6"/>
-          <p:cNvSpPr txBox="1"/>
-          <p:nvPr/>
-        </p:nvSpPr>
-        <p:spPr>
-          <a:xfrm>
-            <a:off x="7086600" y="2011680"/>
-            <a:ext cx="457200" cy="457200"/>
-          </a:xfrm>
-          <a:prstGeom prst="rect">
-            <a:avLst/>
-          </a:prstGeom>
-          <a:noFill/>
-          <a:ln/>
-        </p:spPr>
-        <p:txBody>
-          <a:bodyPr wrap="square" lIns="0" tIns="0" rIns="0" bIns="0" rtlCol="0" anchor="ctr"/>
-          <a:lstStyle/>
-          <a:p>
-            <a:pPr indent="0" marL="0">
-              <a:buNone/>
-            </a:pPr>
-            <a:r>
-              <a:rPr lang="en-US" sz="2200" dirty="0">
-                <a:solidFill>
-                  <a:srgbClr val="A4DAC2"/>
-                </a:solidFill>
-                <a:latin typeface="Apple SD Gothic Neo" pitchFamily="34" charset="0"/>
-                <a:ea typeface="Apple SD Gothic Neo" pitchFamily="34" charset="-122"/>
-                <a:cs typeface="Apple SD Gothic Neo" pitchFamily="34" charset="-120"/>
-              </a:rPr>
-              <a:t>↔</a:t>
-            </a:r>
-            <a:endParaRPr lang="en-US" sz="2200" dirty="0"/>
-          </a:p>
-        </p:txBody>
-      </p:sp>
-      <p:sp>
-        <p:nvSpPr>
-          <p:cNvPr id="10" name="Text 7"/>
-          <p:cNvSpPr txBox="1"/>
-          <p:nvPr/>
-        </p:nvSpPr>
-        <p:spPr>
-          <a:xfrm>
-            <a:off x="7863840" y="2011680"/>
-            <a:ext cx="3657600" cy="548640"/>
-          </a:xfrm>
-          <a:prstGeom prst="rect">
-            <a:avLst/>
-          </a:prstGeom>
-          <a:noFill/>
-          <a:ln/>
-        </p:spPr>
-        <p:txBody>
-          <a:bodyPr wrap="square" lIns="0" tIns="0" rIns="0" bIns="0" rtlCol="0" anchor="ctr"/>
-          <a:lstStyle/>
-          <a:p>
-            <a:pPr indent="0" marL="0">
-              <a:buNone/>
-            </a:pPr>
-            <a:r>
-              <a:rPr lang="en-US" sz="1700" dirty="0">
-                <a:solidFill>
-                  <a:srgbClr val="A4DAC2"/>
-                </a:solidFill>
-                <a:latin typeface="Apple SD Gothic Neo" pitchFamily="34" charset="0"/>
-                <a:ea typeface="Apple SD Gothic Neo" pitchFamily="34" charset="-122"/>
-                <a:cs typeface="Apple SD Gothic Neo" pitchFamily="34" charset="-120"/>
-              </a:rPr>
-              <a:t>원인 설명·권장 조치는 미검증</a:t>
-            </a:r>
-            <a:endParaRPr lang="en-US" sz="1700" dirty="0"/>
-          </a:p>
-        </p:txBody>
-      </p:sp>
-      <p:sp>
-        <p:nvSpPr>
-          <p:cNvPr id="11" name="Text 8"/>
-          <p:cNvSpPr txBox="1"/>
-          <p:nvPr/>
-        </p:nvSpPr>
-        <p:spPr>
-          <a:xfrm>
-            <a:off x="685800" y="3063240"/>
-            <a:ext cx="1828800" cy="411480"/>
-          </a:xfrm>
-          <a:prstGeom prst="rect">
-            <a:avLst/>
-          </a:prstGeom>
-          <a:noFill/>
-          <a:ln/>
-        </p:spPr>
-        <p:txBody>
-          <a:bodyPr wrap="square" lIns="0" tIns="0" rIns="0" bIns="0" rtlCol="0" anchor="ctr"/>
-          <a:lstStyle/>
-          <a:p>
-            <a:pPr indent="0" marL="0">
-              <a:buNone/>
-            </a:pPr>
-            <a:r>
-              <a:rPr lang="en-US" sz="1800" b="1" dirty="0">
-                <a:solidFill>
-                  <a:srgbClr val="A4DAC2"/>
-                </a:solidFill>
-                <a:latin typeface="Apple SD Gothic Neo" pitchFamily="34" charset="0"/>
-                <a:ea typeface="Apple SD Gothic Neo" pitchFamily="34" charset="-122"/>
-                <a:cs typeface="Apple SD Gothic Neo" pitchFamily="34" charset="-120"/>
-              </a:rPr>
-              <a:t>표현과 평가</a:t>
-            </a:r>
-            <a:endParaRPr lang="en-US" sz="1800" dirty="0"/>
-          </a:p>
-        </p:txBody>
-      </p:sp>
-      <p:sp>
-        <p:nvSpPr>
-          <p:cNvPr id="12" name="Text 9"/>
-          <p:cNvSpPr txBox="1"/>
-          <p:nvPr/>
-        </p:nvSpPr>
-        <p:spPr>
-          <a:xfrm>
-            <a:off x="2834640" y="3063240"/>
-            <a:ext cx="4114800" cy="457200"/>
-          </a:xfrm>
-          <a:prstGeom prst="rect">
-            <a:avLst/>
-          </a:prstGeom>
-          <a:noFill/>
-          <a:ln/>
-        </p:spPr>
-        <p:txBody>
-          <a:bodyPr wrap="square" lIns="0" tIns="0" rIns="0" bIns="0" rtlCol="0" anchor="ctr"/>
-          <a:lstStyle/>
-          <a:p>
-            <a:pPr indent="0" marL="0">
-              <a:buNone/>
-            </a:pPr>
-            <a:r>
-              <a:rPr lang="en-US" sz="2000" dirty="0">
+                <a:latin typeface="Apple SD Gothic Neo"/>
+              </a:rPr>
+              <a:t>기술</a:t>
+            </a:r>
+          </a:p>
+        </p:txBody>
+      </p:sp>
+      <p:sp>
+        <p:nvSpPr>
+          <p:cNvPr id="39" name="TextBox 38"/>
+          <p:cNvSpPr txBox="1"/>
+          <p:nvPr/>
+        </p:nvSpPr>
+        <p:spPr>
+          <a:xfrm>
+            <a:off x="7836407" y="2011680"/>
+            <a:ext cx="1764791" cy="329184"/>
+          </a:xfrm>
+          <a:prstGeom prst="rect">
+            <a:avLst/>
+          </a:prstGeom>
+          <a:noFill/>
+        </p:spPr>
+        <p:txBody>
+          <a:bodyPr wrap="square" lIns="0" rIns="0" tIns="0" bIns="0" anchor="ctr">
+            <a:spAutoFit/>
+          </a:bodyPr>
+          <a:lstStyle/>
+          <a:p>
+            <a:r>
+              <a:rPr sz="1200" b="1">
                 <a:solidFill>
                   <a:srgbClr val="FFFFFF"/>
                 </a:solidFill>
-                <a:latin typeface="Apple SD Gothic Neo" pitchFamily="34" charset="0"/>
-                <a:ea typeface="Apple SD Gothic Neo" pitchFamily="34" charset="-122"/>
-                <a:cs typeface="Apple SD Gothic Neo" pitchFamily="34" charset="-120"/>
-              </a:rPr>
-              <a:t>명확한 규칙, 재현 가능한 판정</a:t>
-            </a:r>
-            <a:endParaRPr lang="en-US" sz="2000" dirty="0"/>
-          </a:p>
-        </p:txBody>
-      </p:sp>
-      <p:sp>
-        <p:nvSpPr>
-          <p:cNvPr id="13" name="Text 10"/>
-          <p:cNvSpPr txBox="1"/>
-          <p:nvPr/>
-        </p:nvSpPr>
-        <p:spPr>
-          <a:xfrm>
-            <a:off x="7086600" y="3063240"/>
-            <a:ext cx="457200" cy="457200"/>
-          </a:xfrm>
-          <a:prstGeom prst="rect">
-            <a:avLst/>
-          </a:prstGeom>
-          <a:noFill/>
-          <a:ln/>
-        </p:spPr>
-        <p:txBody>
-          <a:bodyPr wrap="square" lIns="0" tIns="0" rIns="0" bIns="0" rtlCol="0" anchor="ctr"/>
-          <a:lstStyle/>
-          <a:p>
-            <a:pPr indent="0" marL="0">
-              <a:buNone/>
-            </a:pPr>
-            <a:r>
-              <a:rPr lang="en-US" sz="2200" dirty="0">
-                <a:solidFill>
-                  <a:srgbClr val="A4DAC2"/>
-                </a:solidFill>
-                <a:latin typeface="Apple SD Gothic Neo" pitchFamily="34" charset="0"/>
-                <a:ea typeface="Apple SD Gothic Neo" pitchFamily="34" charset="-122"/>
-                <a:cs typeface="Apple SD Gothic Neo" pitchFamily="34" charset="-120"/>
-              </a:rPr>
-              <a:t>↔</a:t>
-            </a:r>
-            <a:endParaRPr lang="en-US" sz="2200" dirty="0"/>
-          </a:p>
-        </p:txBody>
-      </p:sp>
-      <p:sp>
-        <p:nvSpPr>
-          <p:cNvPr id="14" name="Text 11"/>
-          <p:cNvSpPr txBox="1"/>
-          <p:nvPr/>
-        </p:nvSpPr>
-        <p:spPr>
-          <a:xfrm>
-            <a:off x="7863840" y="3063240"/>
-            <a:ext cx="3657600" cy="548640"/>
-          </a:xfrm>
-          <a:prstGeom prst="rect">
-            <a:avLst/>
-          </a:prstGeom>
-          <a:noFill/>
-          <a:ln/>
-        </p:spPr>
-        <p:txBody>
-          <a:bodyPr wrap="square" lIns="0" tIns="0" rIns="0" bIns="0" rtlCol="0" anchor="ctr"/>
-          <a:lstStyle/>
-          <a:p>
-            <a:pPr indent="0" marL="0">
-              <a:buNone/>
-            </a:pPr>
-            <a:r>
-              <a:rPr lang="en-US" sz="1700" dirty="0">
-                <a:solidFill>
-                  <a:srgbClr val="A4DAC2"/>
-                </a:solidFill>
-                <a:latin typeface="Apple SD Gothic Neo" pitchFamily="34" charset="0"/>
-                <a:ea typeface="Apple SD Gothic Neo" pitchFamily="34" charset="-122"/>
-                <a:cs typeface="Apple SD Gothic Neo" pitchFamily="34" charset="-120"/>
-              </a:rPr>
-              <a:t>새 표현 누락 · 자체 평가의 낙관 가능성</a:t>
-            </a:r>
-            <a:endParaRPr lang="en-US" sz="1700" dirty="0"/>
-          </a:p>
-        </p:txBody>
-      </p:sp>
-      <p:sp>
-        <p:nvSpPr>
-          <p:cNvPr id="15" name="Text 12"/>
-          <p:cNvSpPr txBox="1"/>
-          <p:nvPr/>
-        </p:nvSpPr>
-        <p:spPr>
-          <a:xfrm>
-            <a:off x="685800" y="4114800"/>
-            <a:ext cx="1828800" cy="411480"/>
-          </a:xfrm>
-          <a:prstGeom prst="rect">
-            <a:avLst/>
-          </a:prstGeom>
-          <a:noFill/>
-          <a:ln/>
-        </p:spPr>
-        <p:txBody>
-          <a:bodyPr wrap="square" lIns="0" tIns="0" rIns="0" bIns="0" rtlCol="0" anchor="ctr"/>
-          <a:lstStyle/>
-          <a:p>
-            <a:pPr indent="0" marL="0">
-              <a:buNone/>
-            </a:pPr>
-            <a:r>
-              <a:rPr lang="en-US" sz="1800" b="1" dirty="0">
-                <a:solidFill>
-                  <a:srgbClr val="A4DAC2"/>
-                </a:solidFill>
-                <a:latin typeface="Apple SD Gothic Neo" pitchFamily="34" charset="0"/>
-                <a:ea typeface="Apple SD Gothic Neo" pitchFamily="34" charset="-122"/>
-                <a:cs typeface="Apple SD Gothic Neo" pitchFamily="34" charset="-120"/>
-              </a:rPr>
-              <a:t>사용 경험</a:t>
-            </a:r>
-            <a:endParaRPr lang="en-US" sz="1800" dirty="0"/>
-          </a:p>
-        </p:txBody>
-      </p:sp>
-      <p:sp>
-        <p:nvSpPr>
-          <p:cNvPr id="16" name="Text 13"/>
-          <p:cNvSpPr txBox="1"/>
-          <p:nvPr/>
-        </p:nvSpPr>
-        <p:spPr>
-          <a:xfrm>
-            <a:off x="2834640" y="4114800"/>
-            <a:ext cx="4114800" cy="457200"/>
-          </a:xfrm>
-          <a:prstGeom prst="rect">
-            <a:avLst/>
-          </a:prstGeom>
-          <a:noFill/>
-          <a:ln/>
-        </p:spPr>
-        <p:txBody>
-          <a:bodyPr wrap="square" lIns="0" tIns="0" rIns="0" bIns="0" rtlCol="0" anchor="ctr"/>
-          <a:lstStyle/>
-          <a:p>
-            <a:pPr indent="0" marL="0">
-              <a:buNone/>
-            </a:pPr>
-            <a:r>
-              <a:rPr lang="en-US" sz="2000" dirty="0">
+                <a:latin typeface="Apple SD Gothic Neo"/>
+              </a:rPr>
+              <a:t>선택 이유</a:t>
+            </a:r>
+          </a:p>
+        </p:txBody>
+      </p:sp>
+      <p:sp>
+        <p:nvSpPr>
+          <p:cNvPr id="40" name="TextBox 39"/>
+          <p:cNvSpPr txBox="1"/>
+          <p:nvPr/>
+        </p:nvSpPr>
+        <p:spPr>
+          <a:xfrm>
+            <a:off x="9756648" y="2011680"/>
+            <a:ext cx="1764791" cy="329184"/>
+          </a:xfrm>
+          <a:prstGeom prst="rect">
+            <a:avLst/>
+          </a:prstGeom>
+          <a:noFill/>
+        </p:spPr>
+        <p:txBody>
+          <a:bodyPr wrap="square" lIns="0" rIns="0" tIns="0" bIns="0" anchor="ctr">
+            <a:spAutoFit/>
+          </a:bodyPr>
+          <a:lstStyle/>
+          <a:p>
+            <a:r>
+              <a:rPr sz="1200" b="1">
                 <a:solidFill>
                   <a:srgbClr val="FFFFFF"/>
                 </a:solidFill>
-                <a:latin typeface="Apple SD Gothic Neo" pitchFamily="34" charset="0"/>
-                <a:ea typeface="Apple SD Gothic Neo" pitchFamily="34" charset="-122"/>
-                <a:cs typeface="Apple SD Gothic Neo" pitchFamily="34" charset="-120"/>
-              </a:rPr>
-              <a:t>초안 비공개 · 의미 기반 검색</a:t>
-            </a:r>
-            <a:endParaRPr lang="en-US" sz="2000" dirty="0"/>
-          </a:p>
-        </p:txBody>
-      </p:sp>
-      <p:sp>
-        <p:nvSpPr>
-          <p:cNvPr id="17" name="Text 14"/>
-          <p:cNvSpPr txBox="1"/>
-          <p:nvPr/>
-        </p:nvSpPr>
-        <p:spPr>
-          <a:xfrm>
-            <a:off x="7086600" y="4114800"/>
-            <a:ext cx="457200" cy="457200"/>
-          </a:xfrm>
-          <a:prstGeom prst="rect">
-            <a:avLst/>
-          </a:prstGeom>
-          <a:noFill/>
-          <a:ln/>
-        </p:spPr>
-        <p:txBody>
-          <a:bodyPr wrap="square" lIns="0" tIns="0" rIns="0" bIns="0" rtlCol="0" anchor="ctr"/>
-          <a:lstStyle/>
-          <a:p>
-            <a:pPr indent="0" marL="0">
-              <a:buNone/>
-            </a:pPr>
-            <a:r>
-              <a:rPr lang="en-US" sz="2200" dirty="0">
-                <a:solidFill>
-                  <a:srgbClr val="A4DAC2"/>
-                </a:solidFill>
-                <a:latin typeface="Apple SD Gothic Neo" pitchFamily="34" charset="0"/>
-                <a:ea typeface="Apple SD Gothic Neo" pitchFamily="34" charset="-122"/>
-                <a:cs typeface="Apple SD Gothic Neo" pitchFamily="34" charset="-120"/>
-              </a:rPr>
-              <a:t>↔</a:t>
-            </a:r>
-            <a:endParaRPr lang="en-US" sz="2200" dirty="0"/>
-          </a:p>
-        </p:txBody>
-      </p:sp>
-      <p:sp>
-        <p:nvSpPr>
-          <p:cNvPr id="18" name="Text 15"/>
-          <p:cNvSpPr txBox="1"/>
-          <p:nvPr/>
-        </p:nvSpPr>
-        <p:spPr>
-          <a:xfrm>
-            <a:off x="7863840" y="4114800"/>
-            <a:ext cx="3657600" cy="548640"/>
-          </a:xfrm>
-          <a:prstGeom prst="rect">
-            <a:avLst/>
-          </a:prstGeom>
-          <a:noFill/>
-          <a:ln/>
-        </p:spPr>
-        <p:txBody>
-          <a:bodyPr wrap="square" lIns="0" tIns="0" rIns="0" bIns="0" rtlCol="0" anchor="ctr"/>
-          <a:lstStyle/>
-          <a:p>
-            <a:pPr indent="0" marL="0">
-              <a:buNone/>
-            </a:pPr>
-            <a:r>
-              <a:rPr lang="en-US" sz="1700" dirty="0">
-                <a:solidFill>
-                  <a:srgbClr val="A4DAC2"/>
-                </a:solidFill>
-                <a:latin typeface="Apple SD Gothic Neo" pitchFamily="34" charset="0"/>
-                <a:ea typeface="Apple SD Gothic Neo" pitchFamily="34" charset="-122"/>
-                <a:cs typeface="Apple SD Gothic Neo" pitchFamily="34" charset="-120"/>
-              </a:rPr>
-              <a:t>최종 답변 대기 · 임베딩 자원과 지연</a:t>
-            </a:r>
-            <a:endParaRPr lang="en-US" sz="1700" dirty="0"/>
-          </a:p>
-        </p:txBody>
-      </p:sp>
-      <p:sp>
-        <p:nvSpPr>
-          <p:cNvPr id="19" name="Text 16"/>
-          <p:cNvSpPr txBox="1"/>
-          <p:nvPr/>
-        </p:nvSpPr>
-        <p:spPr>
-          <a:xfrm>
-            <a:off x="685800" y="5440680"/>
-            <a:ext cx="10881360" cy="548640"/>
-          </a:xfrm>
-          <a:prstGeom prst="rect">
-            <a:avLst/>
-          </a:prstGeom>
-          <a:noFill/>
-          <a:ln/>
-        </p:spPr>
-        <p:txBody>
-          <a:bodyPr wrap="square" lIns="0" tIns="0" rIns="0" bIns="0" rtlCol="0" anchor="ctr"/>
-          <a:lstStyle/>
-          <a:p>
-            <a:pPr indent="0" marL="0">
-              <a:buNone/>
-            </a:pPr>
-            <a:r>
-              <a:rPr lang="en-US" sz="2700" b="1" dirty="0">
-                <a:solidFill>
-                  <a:srgbClr val="FFFFFF"/>
-                </a:solidFill>
-                <a:latin typeface="Apple SD Gothic Neo" pitchFamily="34" charset="0"/>
-                <a:ea typeface="Apple SD Gothic Neo" pitchFamily="34" charset="-122"/>
-                <a:cs typeface="Apple SD Gothic Neo" pitchFamily="34" charset="-120"/>
-              </a:rPr>
-              <a:t>확인 범위를 명시하고, 근거가 부족하면 응답을 중단하는 방향으로 개선</a:t>
-            </a:r>
-            <a:endParaRPr lang="en-US" sz="2700" dirty="0"/>
-          </a:p>
-        </p:txBody>
-      </p:sp>
-      <p:sp>
-        <p:nvSpPr>
-          <p:cNvPr id="20" name="Text 17"/>
-          <p:cNvSpPr txBox="1"/>
-          <p:nvPr/>
-        </p:nvSpPr>
-        <p:spPr>
-          <a:xfrm>
-            <a:off x="685800" y="6080760"/>
-            <a:ext cx="10881360" cy="274320"/>
-          </a:xfrm>
-          <a:prstGeom prst="rect">
-            <a:avLst/>
-          </a:prstGeom>
-          <a:noFill/>
-          <a:ln/>
-        </p:spPr>
-        <p:txBody>
-          <a:bodyPr wrap="square" lIns="0" tIns="0" rIns="0" bIns="0" rtlCol="0" anchor="ctr"/>
-          <a:lstStyle/>
-          <a:p>
-            <a:pPr indent="0" marL="0">
-              <a:buNone/>
-            </a:pPr>
-            <a:r>
-              <a:rPr lang="en-US" sz="1400" dirty="0">
-                <a:solidFill>
-                  <a:srgbClr val="A4DAC2"/>
-                </a:solidFill>
-                <a:latin typeface="Apple SD Gothic Neo" pitchFamily="34" charset="0"/>
-                <a:ea typeface="Apple SD Gothic Neo" pitchFamily="34" charset="-122"/>
-                <a:cs typeface="Apple SD Gothic Neo" pitchFamily="34" charset="-120"/>
-              </a:rPr>
-              <a:t>다음 단계: 독립 평가셋 · 구조화된 수치 출력 · 불분명한 대상은 되묻기</a:t>
-            </a:r>
-            <a:endParaRPr lang="en-US" sz="1400" dirty="0"/>
+                <a:latin typeface="Apple SD Gothic Neo"/>
+              </a:rPr>
+              <a:t>한계</a:t>
+            </a:r>
+          </a:p>
+        </p:txBody>
+      </p:sp>
+      <p:sp>
+        <p:nvSpPr>
+          <p:cNvPr id="41" name="Rectangle 40"/>
+          <p:cNvSpPr/>
+          <p:nvPr/>
+        </p:nvSpPr>
+        <p:spPr>
+          <a:xfrm>
+            <a:off x="6309360" y="2340864"/>
+            <a:ext cx="5212080" cy="822960"/>
+          </a:xfrm>
+          <a:prstGeom prst="rect">
+            <a:avLst/>
+          </a:prstGeom>
+          <a:solidFill>
+            <a:srgbClr val="F4F8F6"/>
+          </a:solidFill>
+          <a:ln>
+            <a:noFill/>
+          </a:ln>
+          <a:effectLst/>
+        </p:spPr>
+        <p:style>
+          <a:lnRef idx="1">
+            <a:schemeClr val="accent1"/>
+          </a:lnRef>
+          <a:fillRef idx="3">
+            <a:schemeClr val="accent1"/>
+          </a:fillRef>
+          <a:effectRef idx="2">
+            <a:schemeClr val="accent1"/>
+          </a:effectRef>
+          <a:fontRef idx="minor">
+            <a:schemeClr val="lt1"/>
+          </a:fontRef>
+        </p:style>
+        <p:txBody>
+          <a:bodyPr rtlCol="0" anchor="ctr"/>
+          <a:lstStyle/>
+          <a:p>
+            <a:pPr algn="ctr"/>
+          </a:p>
+        </p:txBody>
+      </p:sp>
+      <p:sp>
+        <p:nvSpPr>
+          <p:cNvPr id="42" name="TextBox 41"/>
+          <p:cNvSpPr txBox="1"/>
+          <p:nvPr/>
+        </p:nvSpPr>
+        <p:spPr>
+          <a:xfrm>
+            <a:off x="6419088" y="2340864"/>
+            <a:ext cx="1188720" cy="822960"/>
+          </a:xfrm>
+          <a:prstGeom prst="rect">
+            <a:avLst/>
+          </a:prstGeom>
+          <a:noFill/>
+        </p:spPr>
+        <p:txBody>
+          <a:bodyPr wrap="square" lIns="0" rIns="0" tIns="0" bIns="0" anchor="ctr">
+            <a:spAutoFit/>
+          </a:bodyPr>
+          <a:lstStyle/>
+          <a:p>
+            <a:r>
+              <a:rPr sz="1500" b="1">
+                <a:solidFill>
+                  <a:srgbClr val="16785C"/>
+                </a:solidFill>
+                <a:latin typeface="Apple SD Gothic Neo"/>
+              </a:rPr>
+              <a:t>의미 기반 검색</a:t>
+            </a:r>
+          </a:p>
+        </p:txBody>
+      </p:sp>
+      <p:sp>
+        <p:nvSpPr>
+          <p:cNvPr id="43" name="TextBox 42"/>
+          <p:cNvSpPr txBox="1"/>
+          <p:nvPr/>
+        </p:nvSpPr>
+        <p:spPr>
+          <a:xfrm>
+            <a:off x="7836407" y="2340864"/>
+            <a:ext cx="1691639" cy="822960"/>
+          </a:xfrm>
+          <a:prstGeom prst="rect">
+            <a:avLst/>
+          </a:prstGeom>
+          <a:noFill/>
+        </p:spPr>
+        <p:txBody>
+          <a:bodyPr wrap="square" lIns="0" rIns="0" tIns="0" bIns="0" anchor="ctr">
+            <a:spAutoFit/>
+          </a:bodyPr>
+          <a:lstStyle/>
+          <a:p>
+            <a:r>
+              <a:rPr sz="1300" b="0">
+                <a:solidFill>
+                  <a:srgbClr val="19382F"/>
+                </a:solidFill>
+                <a:latin typeface="Apple SD Gothic Neo"/>
+              </a:rPr>
+              <a:t>키워드는 표현이 다르면 놓침</a:t>
+            </a:r>
+          </a:p>
+        </p:txBody>
+      </p:sp>
+      <p:sp>
+        <p:nvSpPr>
+          <p:cNvPr id="44" name="TextBox 43"/>
+          <p:cNvSpPr txBox="1"/>
+          <p:nvPr/>
+        </p:nvSpPr>
+        <p:spPr>
+          <a:xfrm>
+            <a:off x="9756648" y="2340864"/>
+            <a:ext cx="1691639" cy="822960"/>
+          </a:xfrm>
+          <a:prstGeom prst="rect">
+            <a:avLst/>
+          </a:prstGeom>
+          <a:noFill/>
+        </p:spPr>
+        <p:txBody>
+          <a:bodyPr wrap="square" lIns="0" rIns="0" tIns="0" bIns="0" anchor="ctr">
+            <a:spAutoFit/>
+          </a:bodyPr>
+          <a:lstStyle/>
+          <a:p>
+            <a:r>
+              <a:rPr sz="1300" b="0">
+                <a:solidFill>
+                  <a:srgbClr val="B6503E"/>
+                </a:solidFill>
+                <a:latin typeface="Apple SD Gothic Neo"/>
+              </a:rPr>
+              <a:t>임베딩 자원 · 지연</a:t>
+            </a:r>
+          </a:p>
+        </p:txBody>
+      </p:sp>
+      <p:sp>
+        <p:nvSpPr>
+          <p:cNvPr id="45" name="Rectangle 44"/>
+          <p:cNvSpPr/>
+          <p:nvPr/>
+        </p:nvSpPr>
+        <p:spPr>
+          <a:xfrm>
+            <a:off x="6309360" y="3154680"/>
+            <a:ext cx="5212080" cy="822960"/>
+          </a:xfrm>
+          <a:prstGeom prst="rect">
+            <a:avLst/>
+          </a:prstGeom>
+          <a:solidFill>
+            <a:srgbClr val="FFFFFF"/>
+          </a:solidFill>
+          <a:ln>
+            <a:noFill/>
+          </a:ln>
+          <a:effectLst/>
+        </p:spPr>
+        <p:style>
+          <a:lnRef idx="1">
+            <a:schemeClr val="accent1"/>
+          </a:lnRef>
+          <a:fillRef idx="3">
+            <a:schemeClr val="accent1"/>
+          </a:fillRef>
+          <a:effectRef idx="2">
+            <a:schemeClr val="accent1"/>
+          </a:effectRef>
+          <a:fontRef idx="minor">
+            <a:schemeClr val="lt1"/>
+          </a:fontRef>
+        </p:style>
+        <p:txBody>
+          <a:bodyPr rtlCol="0" anchor="ctr"/>
+          <a:lstStyle/>
+          <a:p>
+            <a:pPr algn="ctr"/>
+          </a:p>
+        </p:txBody>
+      </p:sp>
+      <p:sp>
+        <p:nvSpPr>
+          <p:cNvPr id="46" name="TextBox 45"/>
+          <p:cNvSpPr txBox="1"/>
+          <p:nvPr/>
+        </p:nvSpPr>
+        <p:spPr>
+          <a:xfrm>
+            <a:off x="6419088" y="3154680"/>
+            <a:ext cx="1188720" cy="822960"/>
+          </a:xfrm>
+          <a:prstGeom prst="rect">
+            <a:avLst/>
+          </a:prstGeom>
+          <a:noFill/>
+        </p:spPr>
+        <p:txBody>
+          <a:bodyPr wrap="square" lIns="0" rIns="0" tIns="0" bIns="0" anchor="ctr">
+            <a:spAutoFit/>
+          </a:bodyPr>
+          <a:lstStyle/>
+          <a:p>
+            <a:r>
+              <a:rPr sz="1500" b="1">
+                <a:solidFill>
+                  <a:srgbClr val="16785C"/>
+                </a:solidFill>
+                <a:latin typeface="Apple SD Gothic Neo"/>
+              </a:rPr>
+              <a:t>규칙 기반 검증</a:t>
+            </a:r>
+          </a:p>
+        </p:txBody>
+      </p:sp>
+      <p:sp>
+        <p:nvSpPr>
+          <p:cNvPr id="47" name="TextBox 46"/>
+          <p:cNvSpPr txBox="1"/>
+          <p:nvPr/>
+        </p:nvSpPr>
+        <p:spPr>
+          <a:xfrm>
+            <a:off x="7836407" y="3154680"/>
+            <a:ext cx="1691639" cy="822960"/>
+          </a:xfrm>
+          <a:prstGeom prst="rect">
+            <a:avLst/>
+          </a:prstGeom>
+          <a:noFill/>
+        </p:spPr>
+        <p:txBody>
+          <a:bodyPr wrap="square" lIns="0" rIns="0" tIns="0" bIns="0" anchor="ctr">
+            <a:spAutoFit/>
+          </a:bodyPr>
+          <a:lstStyle/>
+          <a:p>
+            <a:r>
+              <a:rPr sz="1300" b="0">
+                <a:solidFill>
+                  <a:srgbClr val="19382F"/>
+                </a:solidFill>
+                <a:latin typeface="Apple SD Gothic Neo"/>
+              </a:rPr>
+              <a:t>판정이 명확 · 재현 가능</a:t>
+            </a:r>
+          </a:p>
+        </p:txBody>
+      </p:sp>
+      <p:sp>
+        <p:nvSpPr>
+          <p:cNvPr id="48" name="TextBox 47"/>
+          <p:cNvSpPr txBox="1"/>
+          <p:nvPr/>
+        </p:nvSpPr>
+        <p:spPr>
+          <a:xfrm>
+            <a:off x="9756648" y="3154680"/>
+            <a:ext cx="1691639" cy="822960"/>
+          </a:xfrm>
+          <a:prstGeom prst="rect">
+            <a:avLst/>
+          </a:prstGeom>
+          <a:noFill/>
+        </p:spPr>
+        <p:txBody>
+          <a:bodyPr wrap="square" lIns="0" rIns="0" tIns="0" bIns="0" anchor="ctr">
+            <a:spAutoFit/>
+          </a:bodyPr>
+          <a:lstStyle/>
+          <a:p>
+            <a:r>
+              <a:rPr sz="1300" b="0">
+                <a:solidFill>
+                  <a:srgbClr val="B6503E"/>
+                </a:solidFill>
+                <a:latin typeface="Apple SD Gothic Neo"/>
+              </a:rPr>
+              <a:t>새 표현 누락 가능</a:t>
+            </a:r>
+          </a:p>
+        </p:txBody>
+      </p:sp>
+      <p:sp>
+        <p:nvSpPr>
+          <p:cNvPr id="49" name="Rectangle 48"/>
+          <p:cNvSpPr/>
+          <p:nvPr/>
+        </p:nvSpPr>
+        <p:spPr>
+          <a:xfrm>
+            <a:off x="6309360" y="3968496"/>
+            <a:ext cx="5212080" cy="822960"/>
+          </a:xfrm>
+          <a:prstGeom prst="rect">
+            <a:avLst/>
+          </a:prstGeom>
+          <a:solidFill>
+            <a:srgbClr val="F4F8F6"/>
+          </a:solidFill>
+          <a:ln>
+            <a:noFill/>
+          </a:ln>
+          <a:effectLst/>
+        </p:spPr>
+        <p:style>
+          <a:lnRef idx="1">
+            <a:schemeClr val="accent1"/>
+          </a:lnRef>
+          <a:fillRef idx="3">
+            <a:schemeClr val="accent1"/>
+          </a:fillRef>
+          <a:effectRef idx="2">
+            <a:schemeClr val="accent1"/>
+          </a:effectRef>
+          <a:fontRef idx="minor">
+            <a:schemeClr val="lt1"/>
+          </a:fontRef>
+        </p:style>
+        <p:txBody>
+          <a:bodyPr rtlCol="0" anchor="ctr"/>
+          <a:lstStyle/>
+          <a:p>
+            <a:pPr algn="ctr"/>
+          </a:p>
+        </p:txBody>
+      </p:sp>
+      <p:sp>
+        <p:nvSpPr>
+          <p:cNvPr id="50" name="TextBox 49"/>
+          <p:cNvSpPr txBox="1"/>
+          <p:nvPr/>
+        </p:nvSpPr>
+        <p:spPr>
+          <a:xfrm>
+            <a:off x="6419088" y="3968496"/>
+            <a:ext cx="1188720" cy="822960"/>
+          </a:xfrm>
+          <a:prstGeom prst="rect">
+            <a:avLst/>
+          </a:prstGeom>
+          <a:noFill/>
+        </p:spPr>
+        <p:txBody>
+          <a:bodyPr wrap="square" lIns="0" rIns="0" tIns="0" bIns="0" anchor="ctr">
+            <a:spAutoFit/>
+          </a:bodyPr>
+          <a:lstStyle/>
+          <a:p>
+            <a:r>
+              <a:rPr sz="1500" b="1">
+                <a:solidFill>
+                  <a:srgbClr val="16785C"/>
+                </a:solidFill>
+                <a:latin typeface="Apple SD Gothic Neo"/>
+              </a:rPr>
+              <a:t>초안 비공개</a:t>
+            </a:r>
+          </a:p>
+        </p:txBody>
+      </p:sp>
+      <p:sp>
+        <p:nvSpPr>
+          <p:cNvPr id="51" name="TextBox 50"/>
+          <p:cNvSpPr txBox="1"/>
+          <p:nvPr/>
+        </p:nvSpPr>
+        <p:spPr>
+          <a:xfrm>
+            <a:off x="7836407" y="3968496"/>
+            <a:ext cx="1691639" cy="822960"/>
+          </a:xfrm>
+          <a:prstGeom prst="rect">
+            <a:avLst/>
+          </a:prstGeom>
+          <a:noFill/>
+        </p:spPr>
+        <p:txBody>
+          <a:bodyPr wrap="square" lIns="0" rIns="0" tIns="0" bIns="0" anchor="ctr">
+            <a:spAutoFit/>
+          </a:bodyPr>
+          <a:lstStyle/>
+          <a:p>
+            <a:r>
+              <a:rPr sz="1300" b="0">
+                <a:solidFill>
+                  <a:srgbClr val="19382F"/>
+                </a:solidFill>
+                <a:latin typeface="Apple SD Gothic Neo"/>
+              </a:rPr>
+              <a:t>틀린 수치 노출 방지</a:t>
+            </a:r>
+          </a:p>
+        </p:txBody>
+      </p:sp>
+      <p:sp>
+        <p:nvSpPr>
+          <p:cNvPr id="52" name="TextBox 51"/>
+          <p:cNvSpPr txBox="1"/>
+          <p:nvPr/>
+        </p:nvSpPr>
+        <p:spPr>
+          <a:xfrm>
+            <a:off x="9756648" y="3968496"/>
+            <a:ext cx="1691639" cy="822960"/>
+          </a:xfrm>
+          <a:prstGeom prst="rect">
+            <a:avLst/>
+          </a:prstGeom>
+          <a:noFill/>
+        </p:spPr>
+        <p:txBody>
+          <a:bodyPr wrap="square" lIns="0" rIns="0" tIns="0" bIns="0" anchor="ctr">
+            <a:spAutoFit/>
+          </a:bodyPr>
+          <a:lstStyle/>
+          <a:p>
+            <a:r>
+              <a:rPr sz="1300" b="0">
+                <a:solidFill>
+                  <a:srgbClr val="B6503E"/>
+                </a:solidFill>
+                <a:latin typeface="Apple SD Gothic Neo"/>
+              </a:rPr>
+              <a:t>답변 대기 · 토큰 스트리밍 포기</a:t>
+            </a:r>
+          </a:p>
+        </p:txBody>
+      </p:sp>
+      <p:sp>
+        <p:nvSpPr>
+          <p:cNvPr id="53" name="Rectangle 52"/>
+          <p:cNvSpPr/>
+          <p:nvPr/>
+        </p:nvSpPr>
+        <p:spPr>
+          <a:xfrm>
+            <a:off x="6309360" y="4782312"/>
+            <a:ext cx="5212080" cy="822960"/>
+          </a:xfrm>
+          <a:prstGeom prst="rect">
+            <a:avLst/>
+          </a:prstGeom>
+          <a:solidFill>
+            <a:srgbClr val="FFFFFF"/>
+          </a:solidFill>
+          <a:ln>
+            <a:noFill/>
+          </a:ln>
+          <a:effectLst/>
+        </p:spPr>
+        <p:style>
+          <a:lnRef idx="1">
+            <a:schemeClr val="accent1"/>
+          </a:lnRef>
+          <a:fillRef idx="3">
+            <a:schemeClr val="accent1"/>
+          </a:fillRef>
+          <a:effectRef idx="2">
+            <a:schemeClr val="accent1"/>
+          </a:effectRef>
+          <a:fontRef idx="minor">
+            <a:schemeClr val="lt1"/>
+          </a:fontRef>
+        </p:style>
+        <p:txBody>
+          <a:bodyPr rtlCol="0" anchor="ctr"/>
+          <a:lstStyle/>
+          <a:p>
+            <a:pPr algn="ctr"/>
+          </a:p>
+        </p:txBody>
+      </p:sp>
+      <p:sp>
+        <p:nvSpPr>
+          <p:cNvPr id="54" name="TextBox 53"/>
+          <p:cNvSpPr txBox="1"/>
+          <p:nvPr/>
+        </p:nvSpPr>
+        <p:spPr>
+          <a:xfrm>
+            <a:off x="6419088" y="4782312"/>
+            <a:ext cx="1188720" cy="822960"/>
+          </a:xfrm>
+          <a:prstGeom prst="rect">
+            <a:avLst/>
+          </a:prstGeom>
+          <a:noFill/>
+        </p:spPr>
+        <p:txBody>
+          <a:bodyPr wrap="square" lIns="0" rIns="0" tIns="0" bIns="0" anchor="ctr">
+            <a:spAutoFit/>
+          </a:bodyPr>
+          <a:lstStyle/>
+          <a:p>
+            <a:r>
+              <a:rPr sz="1500" b="1">
+                <a:solidFill>
+                  <a:srgbClr val="16785C"/>
+                </a:solidFill>
+                <a:latin typeface="Apple SD Gothic Neo"/>
+              </a:rPr>
+              <a:t>서브그래프 · 모듈화</a:t>
+            </a:r>
+          </a:p>
+        </p:txBody>
+      </p:sp>
+      <p:sp>
+        <p:nvSpPr>
+          <p:cNvPr id="55" name="TextBox 54"/>
+          <p:cNvSpPr txBox="1"/>
+          <p:nvPr/>
+        </p:nvSpPr>
+        <p:spPr>
+          <a:xfrm>
+            <a:off x="7836407" y="4782312"/>
+            <a:ext cx="1691639" cy="822960"/>
+          </a:xfrm>
+          <a:prstGeom prst="rect">
+            <a:avLst/>
+          </a:prstGeom>
+          <a:noFill/>
+        </p:spPr>
+        <p:txBody>
+          <a:bodyPr wrap="square" lIns="0" rIns="0" tIns="0" bIns="0" anchor="ctr">
+            <a:spAutoFit/>
+          </a:bodyPr>
+          <a:lstStyle/>
+          <a:p>
+            <a:r>
+              <a:rPr sz="1300" b="0">
+                <a:solidFill>
+                  <a:srgbClr val="19382F"/>
+                </a:solidFill>
+                <a:latin typeface="Apple SD Gothic Neo"/>
+              </a:rPr>
+              <a:t>부분 실패 격리 · 테스트 용이</a:t>
+            </a:r>
+          </a:p>
+        </p:txBody>
+      </p:sp>
+      <p:sp>
+        <p:nvSpPr>
+          <p:cNvPr id="56" name="TextBox 55"/>
+          <p:cNvSpPr txBox="1"/>
+          <p:nvPr/>
+        </p:nvSpPr>
+        <p:spPr>
+          <a:xfrm>
+            <a:off x="9756648" y="4782312"/>
+            <a:ext cx="1691639" cy="822960"/>
+          </a:xfrm>
+          <a:prstGeom prst="rect">
+            <a:avLst/>
+          </a:prstGeom>
+          <a:noFill/>
+        </p:spPr>
+        <p:txBody>
+          <a:bodyPr wrap="square" lIns="0" rIns="0" tIns="0" bIns="0" anchor="ctr">
+            <a:spAutoFit/>
+          </a:bodyPr>
+          <a:lstStyle/>
+          <a:p>
+            <a:r>
+              <a:rPr sz="1300" b="0">
+                <a:solidFill>
+                  <a:srgbClr val="B6503E"/>
+                </a:solidFill>
+                <a:latin typeface="Apple SD Gothic Neo"/>
+              </a:rPr>
+              <a:t>속도 이득 없음</a:t>
+            </a:r>
+          </a:p>
+        </p:txBody>
+      </p:sp>
+      <p:sp>
+        <p:nvSpPr>
+          <p:cNvPr id="57" name="Rectangle 56"/>
+          <p:cNvSpPr/>
+          <p:nvPr/>
+        </p:nvSpPr>
+        <p:spPr>
+          <a:xfrm>
+            <a:off x="6309360" y="5596128"/>
+            <a:ext cx="5212080" cy="13716"/>
+          </a:xfrm>
+          <a:prstGeom prst="rect">
+            <a:avLst/>
+          </a:prstGeom>
+          <a:solidFill>
+            <a:srgbClr val="B7C4BE"/>
+          </a:solidFill>
+          <a:ln>
+            <a:noFill/>
+          </a:ln>
+          <a:effectLst/>
+        </p:spPr>
+        <p:style>
+          <a:lnRef idx="1">
+            <a:schemeClr val="accent1"/>
+          </a:lnRef>
+          <a:fillRef idx="3">
+            <a:schemeClr val="accent1"/>
+          </a:fillRef>
+          <a:effectRef idx="2">
+            <a:schemeClr val="accent1"/>
+          </a:effectRef>
+          <a:fontRef idx="minor">
+            <a:schemeClr val="lt1"/>
+          </a:fontRef>
+        </p:style>
+        <p:txBody>
+          <a:bodyPr rtlCol="0" anchor="ctr"/>
+          <a:lstStyle/>
+          <a:p>
+            <a:pPr algn="ctr"/>
+          </a:p>
+        </p:txBody>
+      </p:sp>
+      <p:sp>
+        <p:nvSpPr>
+          <p:cNvPr id="58" name="Rectangle 57"/>
+          <p:cNvSpPr/>
+          <p:nvPr/>
+        </p:nvSpPr>
+        <p:spPr>
+          <a:xfrm>
+            <a:off x="640080" y="5852160"/>
+            <a:ext cx="10881360" cy="411480"/>
+          </a:xfrm>
+          <a:prstGeom prst="rect">
+            <a:avLst/>
+          </a:prstGeom>
+          <a:solidFill>
+            <a:srgbClr val="EEF5F1"/>
+          </a:solidFill>
+          <a:ln>
+            <a:noFill/>
+          </a:ln>
+          <a:effectLst/>
+        </p:spPr>
+        <p:style>
+          <a:lnRef idx="1">
+            <a:schemeClr val="accent1"/>
+          </a:lnRef>
+          <a:fillRef idx="3">
+            <a:schemeClr val="accent1"/>
+          </a:fillRef>
+          <a:effectRef idx="2">
+            <a:schemeClr val="accent1"/>
+          </a:effectRef>
+          <a:fontRef idx="minor">
+            <a:schemeClr val="lt1"/>
+          </a:fontRef>
+        </p:style>
+        <p:txBody>
+          <a:bodyPr rtlCol="0" anchor="ctr"/>
+          <a:lstStyle/>
+          <a:p>
+            <a:pPr algn="ctr"/>
+          </a:p>
+        </p:txBody>
+      </p:sp>
+      <p:sp>
+        <p:nvSpPr>
+          <p:cNvPr id="59" name="TextBox 58"/>
+          <p:cNvSpPr txBox="1"/>
+          <p:nvPr/>
+        </p:nvSpPr>
+        <p:spPr>
+          <a:xfrm>
+            <a:off x="822960" y="5852160"/>
+            <a:ext cx="10515600" cy="411480"/>
+          </a:xfrm>
+          <a:prstGeom prst="rect">
+            <a:avLst/>
+          </a:prstGeom>
+          <a:noFill/>
+        </p:spPr>
+        <p:txBody>
+          <a:bodyPr wrap="square" lIns="0" rIns="0" tIns="0" bIns="0" anchor="ctr">
+            <a:spAutoFit/>
+          </a:bodyPr>
+          <a:lstStyle/>
+          <a:p>
+            <a:r>
+              <a:rPr sz="1200" b="0">
+                <a:solidFill>
+                  <a:srgbClr val="62746D"/>
+                </a:solidFill>
+                <a:latin typeface="Apple SD Gothic Neo"/>
+              </a:rPr>
+              <a:t>비용은 글자 수 기반 추정  |  프롬프트 압축·요약은 미적용  |  fast/quality 모델 분리와 병렬 구조는 제공 기반을 측정한 것</a:t>
+            </a:r>
           </a:p>
         </p:txBody>
       </p:sp>

--- a/submission/AI_Capstone_발표.pptx
+++ b/submission/AI_Capstone_발표.pptx
@@ -1238,7 +1238,7 @@
           <a:p/>
           <a:p>
             <a:r>
-              <a:t>이어서 비용과 성능 측정, 그리고 기술 선택 이유입니다. 근거가 없을 때 작성 모델 호출을 생략해 응답 시간이 36.6초에서 1.2~2.7초로 줄었습니다. 조사를 병렬로 처리하면 직렬 1.07초가 0.36초가 되며, 제공받은 구조를 측정한 값입니다. 재작성은 평균 2회에서 1회로 줄었지만 정확도 향상은 아닙니다. 오른쪽은 기술별 선택 이유와 한계입니다. 비용은 글자 수 기반 추정이고 프롬프트 압축은 적용하지 않았습니다.</a:t>
+              <a:t>이어서 비용과 성능 측정, 그리고 기술 선택 이유입니다. 근거가 없을 때 작성 모델 호출을 생략해 응답 시간이 36.6초에서 1.2~2.7초로 줄었습니다. 조사를 병렬로 처리하면 직렬 1.07초가 0.36초가 되며, 제공받은 구조를 측정한 값입니다. 모델을 용도별로 나눈 비용은 글자 수 기반 추정으로 약 59퍼센트 절감됩니다. 오른쪽은 기술별 선택 이유와 한계입니다. 프롬프트 압축은 적용하지 않았습니다.</a:t>
             </a:r>
           </a:p>
         </p:txBody>
@@ -10181,14 +10181,14 @@
       </p:sp>
       <p:sp>
         <p:nvSpPr>
-          <p:cNvPr id="6" name="TextBox 5"/>
-          <p:cNvSpPr txBox="1"/>
-          <p:nvPr/>
-        </p:nvSpPr>
-        <p:spPr>
-          <a:xfrm>
-            <a:off x="594360" y="6473952"/>
-            <a:ext cx="7315200" cy="164592"/>
+          <p:cNvPr id="8" name="TextBox 7"/>
+          <p:cNvSpPr txBox="1"/>
+          <p:nvPr/>
+        </p:nvSpPr>
+        <p:spPr>
+          <a:xfrm>
+            <a:off x="640080" y="1645920"/>
+            <a:ext cx="5212080" cy="274320"/>
           </a:xfrm>
           <a:prstGeom prst="rect">
             <a:avLst/>
@@ -10202,27 +10202,27 @@
           <a:lstStyle/>
           <a:p>
             <a:r>
-              <a:rPr sz="900" b="0">
+              <a:rPr sz="1400" b="1">
                 <a:solidFill>
                   <a:srgbClr val="62746D"/>
                 </a:solidFill>
                 <a:latin typeface="Apple SD Gothic Neo"/>
               </a:rPr>
-              <a:t>AI CAPSTONE  ·  김하연</a:t>
-            </a:r>
-          </a:p>
-        </p:txBody>
-      </p:sp>
-      <p:sp>
-        <p:nvSpPr>
-          <p:cNvPr id="7" name="TextBox 6"/>
-          <p:cNvSpPr txBox="1"/>
-          <p:nvPr/>
-        </p:nvSpPr>
-        <p:spPr>
-          <a:xfrm>
-            <a:off x="10835640" y="6473952"/>
-            <a:ext cx="777240" cy="164592"/>
+              <a:t>측정 결과 (전 → 후)</a:t>
+            </a:r>
+          </a:p>
+        </p:txBody>
+      </p:sp>
+      <p:sp>
+        <p:nvSpPr>
+          <p:cNvPr id="9" name="TextBox 8"/>
+          <p:cNvSpPr txBox="1"/>
+          <p:nvPr/>
+        </p:nvSpPr>
+        <p:spPr>
+          <a:xfrm>
+            <a:off x="6309360" y="1645920"/>
+            <a:ext cx="5212080" cy="274320"/>
           </a:xfrm>
           <a:prstGeom prst="rect">
             <a:avLst/>
@@ -10236,27 +10236,27 @@
           <a:lstStyle/>
           <a:p>
             <a:r>
-              <a:rPr sz="900" b="0">
+              <a:rPr sz="1400" b="1">
                 <a:solidFill>
                   <a:srgbClr val="62746D"/>
                 </a:solidFill>
                 <a:latin typeface="Apple SD Gothic Neo"/>
               </a:rPr>
-              <a:t>09 / 10</a:t>
-            </a:r>
-          </a:p>
-        </p:txBody>
-      </p:sp>
-      <p:sp>
-        <p:nvSpPr>
-          <p:cNvPr id="8" name="TextBox 7"/>
-          <p:cNvSpPr txBox="1"/>
-          <p:nvPr/>
-        </p:nvSpPr>
-        <p:spPr>
-          <a:xfrm>
-            <a:off x="640080" y="1645920"/>
-            <a:ext cx="5212080" cy="274320"/>
+              <a:t>기술 선택 이유와 한계</a:t>
+            </a:r>
+          </a:p>
+        </p:txBody>
+      </p:sp>
+      <p:sp>
+        <p:nvSpPr>
+          <p:cNvPr id="10" name="TextBox 9"/>
+          <p:cNvSpPr txBox="1"/>
+          <p:nvPr/>
+        </p:nvSpPr>
+        <p:spPr>
+          <a:xfrm>
+            <a:off x="594360" y="6473952"/>
+            <a:ext cx="7315200" cy="164592"/>
           </a:xfrm>
           <a:prstGeom prst="rect">
             <a:avLst/>
@@ -10270,27 +10270,27 @@
           <a:lstStyle/>
           <a:p>
             <a:r>
-              <a:rPr sz="1400" b="1">
+              <a:rPr sz="900" b="0">
                 <a:solidFill>
                   <a:srgbClr val="62746D"/>
                 </a:solidFill>
                 <a:latin typeface="Apple SD Gothic Neo"/>
               </a:rPr>
-              <a:t>측정 결과 (전 → 후)</a:t>
-            </a:r>
-          </a:p>
-        </p:txBody>
-      </p:sp>
-      <p:sp>
-        <p:nvSpPr>
-          <p:cNvPr id="9" name="TextBox 8"/>
-          <p:cNvSpPr txBox="1"/>
-          <p:nvPr/>
-        </p:nvSpPr>
-        <p:spPr>
-          <a:xfrm>
-            <a:off x="6309360" y="1645920"/>
-            <a:ext cx="5212080" cy="274320"/>
+              <a:t>AI CAPSTONE  ·  김하연</a:t>
+            </a:r>
+          </a:p>
+        </p:txBody>
+      </p:sp>
+      <p:sp>
+        <p:nvSpPr>
+          <p:cNvPr id="11" name="TextBox 10"/>
+          <p:cNvSpPr txBox="1"/>
+          <p:nvPr/>
+        </p:nvSpPr>
+        <p:spPr>
+          <a:xfrm>
+            <a:off x="10835640" y="6473952"/>
+            <a:ext cx="777240" cy="164592"/>
           </a:xfrm>
           <a:prstGeom prst="rect">
             <a:avLst/>
@@ -10304,27 +10304,27 @@
           <a:lstStyle/>
           <a:p>
             <a:r>
-              <a:rPr sz="1400" b="1">
+              <a:rPr sz="900" b="0">
                 <a:solidFill>
                   <a:srgbClr val="62746D"/>
                 </a:solidFill>
                 <a:latin typeface="Apple SD Gothic Neo"/>
               </a:rPr>
-              <a:t>기술 선택 이유와 한계</a:t>
-            </a:r>
-          </a:p>
-        </p:txBody>
-      </p:sp>
-      <p:sp>
-        <p:nvSpPr>
-          <p:cNvPr id="10" name="TextBox 9"/>
-          <p:cNvSpPr txBox="1"/>
-          <p:nvPr/>
-        </p:nvSpPr>
-        <p:spPr>
-          <a:xfrm>
-            <a:off x="640080" y="1965960"/>
-            <a:ext cx="3657600" cy="274320"/>
+              <a:t>09 / 10</a:t>
+            </a:r>
+          </a:p>
+        </p:txBody>
+      </p:sp>
+      <p:sp>
+        <p:nvSpPr>
+          <p:cNvPr id="12" name="TextBox 11"/>
+          <p:cNvSpPr txBox="1"/>
+          <p:nvPr/>
+        </p:nvSpPr>
+        <p:spPr>
+          <a:xfrm>
+            <a:off x="640080" y="1645920"/>
+            <a:ext cx="5212080" cy="274320"/>
           </a:xfrm>
           <a:prstGeom prst="rect">
             <a:avLst/>
@@ -10340,6 +10340,74 @@
             <a:r>
               <a:rPr sz="1400" b="1">
                 <a:solidFill>
+                  <a:srgbClr val="62746D"/>
+                </a:solidFill>
+                <a:latin typeface="Apple SD Gothic Neo"/>
+              </a:rPr>
+              <a:t>측정 결과 (전 → 후)</a:t>
+            </a:r>
+          </a:p>
+        </p:txBody>
+      </p:sp>
+      <p:sp>
+        <p:nvSpPr>
+          <p:cNvPr id="13" name="TextBox 12"/>
+          <p:cNvSpPr txBox="1"/>
+          <p:nvPr/>
+        </p:nvSpPr>
+        <p:spPr>
+          <a:xfrm>
+            <a:off x="6309360" y="1645920"/>
+            <a:ext cx="5212080" cy="274320"/>
+          </a:xfrm>
+          <a:prstGeom prst="rect">
+            <a:avLst/>
+          </a:prstGeom>
+          <a:noFill/>
+        </p:spPr>
+        <p:txBody>
+          <a:bodyPr wrap="square" lIns="0" rIns="0" tIns="0" bIns="0">
+            <a:spAutoFit/>
+          </a:bodyPr>
+          <a:lstStyle/>
+          <a:p>
+            <a:r>
+              <a:rPr sz="1400" b="1">
+                <a:solidFill>
+                  <a:srgbClr val="62746D"/>
+                </a:solidFill>
+                <a:latin typeface="Apple SD Gothic Neo"/>
+              </a:rPr>
+              <a:t>기술 선택 이유와 한계</a:t>
+            </a:r>
+          </a:p>
+        </p:txBody>
+      </p:sp>
+      <p:sp>
+        <p:nvSpPr>
+          <p:cNvPr id="14" name="TextBox 13"/>
+          <p:cNvSpPr txBox="1"/>
+          <p:nvPr/>
+        </p:nvSpPr>
+        <p:spPr>
+          <a:xfrm>
+            <a:off x="640080" y="1965960"/>
+            <a:ext cx="3657600" cy="274320"/>
+          </a:xfrm>
+          <a:prstGeom prst="rect">
+            <a:avLst/>
+          </a:prstGeom>
+          <a:noFill/>
+        </p:spPr>
+        <p:txBody>
+          <a:bodyPr wrap="square" lIns="0" rIns="0" tIns="0" bIns="0">
+            <a:spAutoFit/>
+          </a:bodyPr>
+          <a:lstStyle/>
+          <a:p>
+            <a:r>
+              <a:rPr sz="1400" b="1">
+                <a:solidFill>
                   <a:srgbClr val="16785C"/>
                 </a:solidFill>
                 <a:latin typeface="Apple SD Gothic Neo"/>
@@ -10351,7 +10419,7 @@
       </p:sp>
       <p:sp>
         <p:nvSpPr>
-          <p:cNvPr id="11" name="Rounded Rectangle 10"/>
+          <p:cNvPr id="15" name="Rounded Rectangle 14"/>
           <p:cNvSpPr/>
           <p:nvPr/>
         </p:nvSpPr>
@@ -10404,7 +10472,7 @@
       </p:sp>
       <p:sp>
         <p:nvSpPr>
-          <p:cNvPr id="12" name="TextBox 11"/>
+          <p:cNvPr id="16" name="TextBox 15"/>
           <p:cNvSpPr txBox="1"/>
           <p:nvPr/>
         </p:nvSpPr>
@@ -10438,7 +10506,7 @@
       </p:sp>
       <p:sp>
         <p:nvSpPr>
-          <p:cNvPr id="13" name="Rectangle 12"/>
+          <p:cNvPr id="17" name="Rectangle 16"/>
           <p:cNvSpPr/>
           <p:nvPr/>
         </p:nvSpPr>
@@ -10482,7 +10550,7 @@
       </p:sp>
       <p:sp>
         <p:nvSpPr>
-          <p:cNvPr id="14" name="TextBox 13"/>
+          <p:cNvPr id="18" name="TextBox 17"/>
           <p:cNvSpPr txBox="1"/>
           <p:nvPr/>
         </p:nvSpPr>
@@ -10516,7 +10584,7 @@
       </p:sp>
       <p:sp>
         <p:nvSpPr>
-          <p:cNvPr id="15" name="TextBox 14"/>
+          <p:cNvPr id="19" name="TextBox 18"/>
           <p:cNvSpPr txBox="1"/>
           <p:nvPr/>
         </p:nvSpPr>
@@ -10550,7 +10618,7 @@
       </p:sp>
       <p:sp>
         <p:nvSpPr>
-          <p:cNvPr id="16" name="Rectangle 15"/>
+          <p:cNvPr id="20" name="Rectangle 19"/>
           <p:cNvSpPr/>
           <p:nvPr/>
         </p:nvSpPr>
@@ -10594,7 +10662,7 @@
       </p:sp>
       <p:sp>
         <p:nvSpPr>
-          <p:cNvPr id="17" name="TextBox 16"/>
+          <p:cNvPr id="21" name="TextBox 20"/>
           <p:cNvSpPr txBox="1"/>
           <p:nvPr/>
         </p:nvSpPr>
@@ -10628,7 +10696,7 @@
       </p:sp>
       <p:sp>
         <p:nvSpPr>
-          <p:cNvPr id="18" name="TextBox 17"/>
+          <p:cNvPr id="22" name="TextBox 21"/>
           <p:cNvSpPr txBox="1"/>
           <p:nvPr/>
         </p:nvSpPr>
@@ -10662,7 +10730,7 @@
       </p:sp>
       <p:sp>
         <p:nvSpPr>
-          <p:cNvPr id="19" name="TextBox 18"/>
+          <p:cNvPr id="23" name="TextBox 22"/>
           <p:cNvSpPr txBox="1"/>
           <p:nvPr/>
         </p:nvSpPr>
@@ -10696,7 +10764,7 @@
       </p:sp>
       <p:sp>
         <p:nvSpPr>
-          <p:cNvPr id="20" name="Rounded Rectangle 19"/>
+          <p:cNvPr id="24" name="Rounded Rectangle 23"/>
           <p:cNvSpPr/>
           <p:nvPr/>
         </p:nvSpPr>
@@ -10749,7 +10817,7 @@
       </p:sp>
       <p:sp>
         <p:nvSpPr>
-          <p:cNvPr id="21" name="TextBox 20"/>
+          <p:cNvPr id="25" name="TextBox 24"/>
           <p:cNvSpPr txBox="1"/>
           <p:nvPr/>
         </p:nvSpPr>
@@ -10783,7 +10851,7 @@
       </p:sp>
       <p:sp>
         <p:nvSpPr>
-          <p:cNvPr id="22" name="Rectangle 21"/>
+          <p:cNvPr id="26" name="Rectangle 25"/>
           <p:cNvSpPr/>
           <p:nvPr/>
         </p:nvSpPr>
@@ -10827,7 +10895,7 @@
       </p:sp>
       <p:sp>
         <p:nvSpPr>
-          <p:cNvPr id="23" name="TextBox 22"/>
+          <p:cNvPr id="27" name="TextBox 26"/>
           <p:cNvSpPr txBox="1"/>
           <p:nvPr/>
         </p:nvSpPr>
@@ -10861,7 +10929,7 @@
       </p:sp>
       <p:sp>
         <p:nvSpPr>
-          <p:cNvPr id="24" name="TextBox 23"/>
+          <p:cNvPr id="28" name="TextBox 27"/>
           <p:cNvSpPr txBox="1"/>
           <p:nvPr/>
         </p:nvSpPr>
@@ -10895,7 +10963,7 @@
       </p:sp>
       <p:sp>
         <p:nvSpPr>
-          <p:cNvPr id="25" name="Rectangle 24"/>
+          <p:cNvPr id="29" name="Rectangle 28"/>
           <p:cNvSpPr/>
           <p:nvPr/>
         </p:nvSpPr>
@@ -10939,7 +11007,7 @@
       </p:sp>
       <p:sp>
         <p:nvSpPr>
-          <p:cNvPr id="26" name="TextBox 25"/>
+          <p:cNvPr id="30" name="TextBox 29"/>
           <p:cNvSpPr txBox="1"/>
           <p:nvPr/>
         </p:nvSpPr>
@@ -10973,7 +11041,7 @@
       </p:sp>
       <p:sp>
         <p:nvSpPr>
-          <p:cNvPr id="27" name="TextBox 26"/>
+          <p:cNvPr id="31" name="TextBox 30"/>
           <p:cNvSpPr txBox="1"/>
           <p:nvPr/>
         </p:nvSpPr>
@@ -11007,7 +11075,7 @@
       </p:sp>
       <p:sp>
         <p:nvSpPr>
-          <p:cNvPr id="28" name="TextBox 27"/>
+          <p:cNvPr id="32" name="TextBox 31"/>
           <p:cNvSpPr txBox="1"/>
           <p:nvPr/>
         </p:nvSpPr>
@@ -11034,14 +11102,14 @@
                 </a:solidFill>
                 <a:latin typeface="Apple SD Gothic Neo"/>
               </a:rPr>
-              <a:t>평균 재작성 횟수</a:t>
-            </a:r>
-          </a:p>
-        </p:txBody>
-      </p:sp>
-      <p:sp>
-        <p:nvSpPr>
-          <p:cNvPr id="29" name="Rounded Rectangle 28"/>
+              <a:t>모델 분리 비용 (fast/quality)</a:t>
+            </a:r>
+          </a:p>
+        </p:txBody>
+      </p:sp>
+      <p:sp>
+        <p:nvSpPr>
+          <p:cNvPr id="33" name="Rounded Rectangle 32"/>
           <p:cNvSpPr/>
           <p:nvPr/>
         </p:nvSpPr>
@@ -11087,14 +11155,14 @@
                 </a:solidFill>
                 <a:latin typeface="Apple SD Gothic Neo"/>
               </a:rPr>
-              <a:t>50% 감소</a:t>
-            </a:r>
-          </a:p>
-        </p:txBody>
-      </p:sp>
-      <p:sp>
-        <p:nvSpPr>
-          <p:cNvPr id="30" name="TextBox 29"/>
+              <a:t>약 59% 절감</a:t>
+            </a:r>
+          </a:p>
+        </p:txBody>
+      </p:sp>
+      <p:sp>
+        <p:nvSpPr>
+          <p:cNvPr id="34" name="TextBox 33"/>
           <p:cNvSpPr txBox="1"/>
           <p:nvPr/>
         </p:nvSpPr>
@@ -11128,7 +11196,7 @@
       </p:sp>
       <p:sp>
         <p:nvSpPr>
-          <p:cNvPr id="31" name="Rectangle 30"/>
+          <p:cNvPr id="35" name="Rectangle 34"/>
           <p:cNvSpPr/>
           <p:nvPr/>
         </p:nvSpPr>
@@ -11172,7 +11240,7 @@
       </p:sp>
       <p:sp>
         <p:nvSpPr>
-          <p:cNvPr id="32" name="TextBox 31"/>
+          <p:cNvPr id="36" name="TextBox 35"/>
           <p:cNvSpPr txBox="1"/>
           <p:nvPr/>
         </p:nvSpPr>
@@ -11199,14 +11267,14 @@
                 </a:solidFill>
                 <a:latin typeface="Apple SD Gothic Neo"/>
               </a:rPr>
-              <a:t>2.0회</a:t>
-            </a:r>
-          </a:p>
-        </p:txBody>
-      </p:sp>
-      <p:sp>
-        <p:nvSpPr>
-          <p:cNvPr id="33" name="TextBox 32"/>
+              <a:t>$0.0067</a:t>
+            </a:r>
+          </a:p>
+        </p:txBody>
+      </p:sp>
+      <p:sp>
+        <p:nvSpPr>
+          <p:cNvPr id="37" name="TextBox 36"/>
           <p:cNvSpPr txBox="1"/>
           <p:nvPr/>
         </p:nvSpPr>
@@ -11240,14 +11308,14 @@
       </p:sp>
       <p:sp>
         <p:nvSpPr>
-          <p:cNvPr id="34" name="Rectangle 33"/>
+          <p:cNvPr id="38" name="Rectangle 37"/>
           <p:cNvSpPr/>
           <p:nvPr/>
         </p:nvSpPr>
         <p:spPr>
           <a:xfrm>
             <a:off x="1005840" y="5221223"/>
-            <a:ext cx="1371600" cy="274320"/>
+            <a:ext cx="1131004" cy="274320"/>
           </a:xfrm>
           <a:prstGeom prst="rect">
             <a:avLst/>
@@ -11284,13 +11352,13 @@
       </p:sp>
       <p:sp>
         <p:nvSpPr>
-          <p:cNvPr id="35" name="TextBox 34"/>
-          <p:cNvSpPr txBox="1"/>
-          <p:nvPr/>
-        </p:nvSpPr>
-        <p:spPr>
-          <a:xfrm>
-            <a:off x="2487168" y="5221223"/>
+          <p:cNvPr id="39" name="TextBox 38"/>
+          <p:cNvSpPr txBox="1"/>
+          <p:nvPr/>
+        </p:nvSpPr>
+        <p:spPr>
+          <a:xfrm>
+            <a:off x="2246572" y="5221223"/>
             <a:ext cx="1737360" cy="274320"/>
           </a:xfrm>
           <a:prstGeom prst="rect">
@@ -11311,14 +11379,14 @@
                 </a:solidFill>
                 <a:latin typeface="Apple SD Gothic Neo"/>
               </a:rPr>
-              <a:t>1.0회</a:t>
-            </a:r>
-          </a:p>
-        </p:txBody>
-      </p:sp>
-      <p:sp>
-        <p:nvSpPr>
-          <p:cNvPr id="36" name="TextBox 35"/>
+              <a:t>$0.0027</a:t>
+            </a:r>
+          </a:p>
+        </p:txBody>
+      </p:sp>
+      <p:sp>
+        <p:nvSpPr>
+          <p:cNvPr id="40" name="TextBox 39"/>
           <p:cNvSpPr txBox="1"/>
           <p:nvPr/>
         </p:nvSpPr>
@@ -11345,14 +11413,14 @@
                 </a:solidFill>
                 <a:latin typeface="Apple SD Gothic Neo"/>
               </a:rPr>
-              <a:t>비용 절감 지표 · 정확도 향상은 아님</a:t>
-            </a:r>
-          </a:p>
-        </p:txBody>
-      </p:sp>
-      <p:sp>
-        <p:nvSpPr>
-          <p:cNvPr id="37" name="Rectangle 36"/>
+              <a:t>글자 수 기반 추정 · 제공 구조 측정</a:t>
+            </a:r>
+          </a:p>
+        </p:txBody>
+      </p:sp>
+      <p:sp>
+        <p:nvSpPr>
+          <p:cNvPr id="41" name="Rectangle 40"/>
           <p:cNvSpPr/>
           <p:nvPr/>
         </p:nvSpPr>
@@ -11396,7 +11464,7 @@
       </p:sp>
       <p:sp>
         <p:nvSpPr>
-          <p:cNvPr id="38" name="TextBox 37"/>
+          <p:cNvPr id="42" name="TextBox 41"/>
           <p:cNvSpPr txBox="1"/>
           <p:nvPr/>
         </p:nvSpPr>
@@ -11430,7 +11498,7 @@
       </p:sp>
       <p:sp>
         <p:nvSpPr>
-          <p:cNvPr id="39" name="TextBox 38"/>
+          <p:cNvPr id="43" name="TextBox 42"/>
           <p:cNvSpPr txBox="1"/>
           <p:nvPr/>
         </p:nvSpPr>
@@ -11464,7 +11532,7 @@
       </p:sp>
       <p:sp>
         <p:nvSpPr>
-          <p:cNvPr id="40" name="TextBox 39"/>
+          <p:cNvPr id="44" name="TextBox 43"/>
           <p:cNvSpPr txBox="1"/>
           <p:nvPr/>
         </p:nvSpPr>
@@ -11498,7 +11566,7 @@
       </p:sp>
       <p:sp>
         <p:nvSpPr>
-          <p:cNvPr id="41" name="Rectangle 40"/>
+          <p:cNvPr id="45" name="Rectangle 44"/>
           <p:cNvSpPr/>
           <p:nvPr/>
         </p:nvSpPr>
@@ -11542,7 +11610,7 @@
       </p:sp>
       <p:sp>
         <p:nvSpPr>
-          <p:cNvPr id="42" name="TextBox 41"/>
+          <p:cNvPr id="46" name="TextBox 45"/>
           <p:cNvSpPr txBox="1"/>
           <p:nvPr/>
         </p:nvSpPr>
@@ -11576,7 +11644,7 @@
       </p:sp>
       <p:sp>
         <p:nvSpPr>
-          <p:cNvPr id="43" name="TextBox 42"/>
+          <p:cNvPr id="47" name="TextBox 46"/>
           <p:cNvSpPr txBox="1"/>
           <p:nvPr/>
         </p:nvSpPr>
@@ -11610,7 +11678,7 @@
       </p:sp>
       <p:sp>
         <p:nvSpPr>
-          <p:cNvPr id="44" name="TextBox 43"/>
+          <p:cNvPr id="48" name="TextBox 47"/>
           <p:cNvSpPr txBox="1"/>
           <p:nvPr/>
         </p:nvSpPr>
@@ -11644,7 +11712,7 @@
       </p:sp>
       <p:sp>
         <p:nvSpPr>
-          <p:cNvPr id="45" name="Rectangle 44"/>
+          <p:cNvPr id="49" name="Rectangle 48"/>
           <p:cNvSpPr/>
           <p:nvPr/>
         </p:nvSpPr>
@@ -11688,7 +11756,7 @@
       </p:sp>
       <p:sp>
         <p:nvSpPr>
-          <p:cNvPr id="46" name="TextBox 45"/>
+          <p:cNvPr id="50" name="TextBox 49"/>
           <p:cNvSpPr txBox="1"/>
           <p:nvPr/>
         </p:nvSpPr>
@@ -11722,7 +11790,7 @@
       </p:sp>
       <p:sp>
         <p:nvSpPr>
-          <p:cNvPr id="47" name="TextBox 46"/>
+          <p:cNvPr id="51" name="TextBox 50"/>
           <p:cNvSpPr txBox="1"/>
           <p:nvPr/>
         </p:nvSpPr>
@@ -11756,7 +11824,7 @@
       </p:sp>
       <p:sp>
         <p:nvSpPr>
-          <p:cNvPr id="48" name="TextBox 47"/>
+          <p:cNvPr id="52" name="TextBox 51"/>
           <p:cNvSpPr txBox="1"/>
           <p:nvPr/>
         </p:nvSpPr>
@@ -11790,7 +11858,7 @@
       </p:sp>
       <p:sp>
         <p:nvSpPr>
-          <p:cNvPr id="49" name="Rectangle 48"/>
+          <p:cNvPr id="53" name="Rectangle 52"/>
           <p:cNvSpPr/>
           <p:nvPr/>
         </p:nvSpPr>
@@ -11834,7 +11902,7 @@
       </p:sp>
       <p:sp>
         <p:nvSpPr>
-          <p:cNvPr id="50" name="TextBox 49"/>
+          <p:cNvPr id="54" name="TextBox 53"/>
           <p:cNvSpPr txBox="1"/>
           <p:nvPr/>
         </p:nvSpPr>
@@ -11868,7 +11936,7 @@
       </p:sp>
       <p:sp>
         <p:nvSpPr>
-          <p:cNvPr id="51" name="TextBox 50"/>
+          <p:cNvPr id="55" name="TextBox 54"/>
           <p:cNvSpPr txBox="1"/>
           <p:nvPr/>
         </p:nvSpPr>
@@ -11902,7 +11970,7 @@
       </p:sp>
       <p:sp>
         <p:nvSpPr>
-          <p:cNvPr id="52" name="TextBox 51"/>
+          <p:cNvPr id="56" name="TextBox 55"/>
           <p:cNvSpPr txBox="1"/>
           <p:nvPr/>
         </p:nvSpPr>
@@ -11936,7 +12004,7 @@
       </p:sp>
       <p:sp>
         <p:nvSpPr>
-          <p:cNvPr id="53" name="Rectangle 52"/>
+          <p:cNvPr id="57" name="Rectangle 56"/>
           <p:cNvSpPr/>
           <p:nvPr/>
         </p:nvSpPr>
@@ -11980,7 +12048,7 @@
       </p:sp>
       <p:sp>
         <p:nvSpPr>
-          <p:cNvPr id="54" name="TextBox 53"/>
+          <p:cNvPr id="58" name="TextBox 57"/>
           <p:cNvSpPr txBox="1"/>
           <p:nvPr/>
         </p:nvSpPr>
@@ -12014,7 +12082,7 @@
       </p:sp>
       <p:sp>
         <p:nvSpPr>
-          <p:cNvPr id="55" name="TextBox 54"/>
+          <p:cNvPr id="59" name="TextBox 58"/>
           <p:cNvSpPr txBox="1"/>
           <p:nvPr/>
         </p:nvSpPr>
@@ -12048,7 +12116,7 @@
       </p:sp>
       <p:sp>
         <p:nvSpPr>
-          <p:cNvPr id="56" name="TextBox 55"/>
+          <p:cNvPr id="60" name="TextBox 59"/>
           <p:cNvSpPr txBox="1"/>
           <p:nvPr/>
         </p:nvSpPr>
@@ -12082,7 +12150,7 @@
       </p:sp>
       <p:sp>
         <p:nvSpPr>
-          <p:cNvPr id="57" name="Rectangle 56"/>
+          <p:cNvPr id="61" name="Rectangle 60"/>
           <p:cNvSpPr/>
           <p:nvPr/>
         </p:nvSpPr>
@@ -12126,7 +12194,7 @@
       </p:sp>
       <p:sp>
         <p:nvSpPr>
-          <p:cNvPr id="58" name="Rectangle 57"/>
+          <p:cNvPr id="62" name="Rectangle 61"/>
           <p:cNvSpPr/>
           <p:nvPr/>
         </p:nvSpPr>
@@ -12170,7 +12238,7 @@
       </p:sp>
       <p:sp>
         <p:nvSpPr>
-          <p:cNvPr id="59" name="TextBox 58"/>
+          <p:cNvPr id="63" name="TextBox 62"/>
           <p:cNvSpPr txBox="1"/>
           <p:nvPr/>
         </p:nvSpPr>

--- a/submission/AI_Capstone_발표.pptx
+++ b/submission/AI_Capstone_발표.pptx
@@ -21,6 +21,7 @@
     <p:sldId id="269" r:id="rId20"/>
     <p:sldId id="270" r:id="rId21"/>
     <p:sldId id="271" r:id="rId22"/>
+    <p:sldId id="272" r:id="rId23"/>
   </p:sldIdLst>
   <p:notesMasterIdLst>
     <p:notesMasterId r:id="rId10"/>
@@ -1694,13 +1695,13 @@
           <a:lstStyle/>
           <a:p>
             <a:r>
-              <a:t>[부록] 재현을 물으면 이 쪽</a:t>
+              <a:t>[부록] 다이어그램과 구현 비교를 물으면 이 쪽</a:t>
             </a:r>
           </a:p>
           <a:p/>
           <a:p>
             <a:r>
-              <a:t>저장소 주소와 재현 방법, 근거 파일 위치입니다. 제공받은 코드는 공개하지 않아 일부 평가는 저장된 결과로 확인합니다.</a:t>
+              <a:t>전체 노드 흐름입니다. 초록색이 직접 추가하거나 변경한 노드이고, 근거 점검과 실패 종료는 새로 추가했습니다.</a:t>
             </a:r>
           </a:p>
         </p:txBody>
@@ -1954,13 +1955,13 @@
           <a:lstStyle/>
           <a:p>
             <a:r>
-              <a:t>[목표 50초] 흐름도를 왼쪽에서 오른쪽으로 따라가기, 막히면 '근거 없으면 생략, 다르면 재작성'만 강조</a:t>
+              <a:t>[목표 50초] 흐름도는 요약도(전체 노드는 부록 A-6), 왼쪽에서 오른쪽으로 따라가기, 막히면 '근거 없으면 생략, 다르면 재작성'만 강조</a:t>
             </a:r>
           </a:p>
           <a:p/>
           <a:p>
             <a:r>
-              <a:t>이어서 구조와 사용 기술입니다. 처리 흐름은 질문과 계획, 모니터링과 매뉴얼 조사, 근거 확인, 답변 작성, 수치 검증 순서입니다. 근거가 없으면 작성을 생략하고, 수치가 다르면 재작성하며, 세 번 실패하면 실패를 안내합니다. 조사는 서브그래프 두 개로 나눴고, 독립된 모델이 판단하는 구조는 아닙니다. MCP로 도구를 연결하고 검색한 매뉴얼을 답변 작성에 활용했습니다. 모듈 분리와 의존성 주입으로 테스트를 구성했고, LangSmith는 추적 확인까지만 했습니다.</a:t>
+              <a:t>이어서 구조와 사용 기술입니다. 요약한 처리 흐름은 질문과 계획, 모니터링과 매뉴얼 조사, 근거 확인, 답변 작성, 수치 검증 순서입니다. 근거가 없으면 작성을 생략하고, 수치가 다르면 재작성하며, 세 번 실패하면 실패를 안내합니다. 조사는 서브그래프 두 개로 나눴고, 독립된 모델이 판단하는 구조는 아닙니다. MCP로 도구를 연결하고 검색한 매뉴얼을 답변 작성에 활용했습니다. 모듈 분리와 의존성 주입으로 테스트를 구성했고, LangSmith는 추적 확인까지만 했습니다.</a:t>
             </a:r>
           </a:p>
         </p:txBody>
@@ -4933,6 +4934,108 @@
           </a:p>
         </p:txBody>
       </p:sp>
+      <p:sp>
+        <p:nvSpPr>
+          <p:cNvPr id="22" name="TextBox 21"/>
+          <p:cNvSpPr txBox="1"/>
+          <p:nvPr/>
+        </p:nvSpPr>
+        <p:spPr>
+          <a:xfrm>
+            <a:off x="685800" y="5989320"/>
+            <a:ext cx="822960" cy="365760"/>
+          </a:xfrm>
+          <a:prstGeom prst="rect">
+            <a:avLst/>
+          </a:prstGeom>
+          <a:noFill/>
+        </p:spPr>
+        <p:txBody>
+          <a:bodyPr wrap="square" lIns="0" rIns="0" tIns="0" bIns="0">
+            <a:spAutoFit/>
+          </a:bodyPr>
+          <a:lstStyle/>
+          <a:p>
+            <a:r>
+              <a:rPr sz="2000" b="1">
+                <a:solidFill>
+                  <a:srgbClr val="A4DAC2"/>
+                </a:solidFill>
+                <a:latin typeface="Apple SD Gothic Neo"/>
+              </a:rPr>
+              <a:t>A-6</a:t>
+            </a:r>
+          </a:p>
+        </p:txBody>
+      </p:sp>
+      <p:sp>
+        <p:nvSpPr>
+          <p:cNvPr id="23" name="TextBox 22"/>
+          <p:cNvSpPr txBox="1"/>
+          <p:nvPr/>
+        </p:nvSpPr>
+        <p:spPr>
+          <a:xfrm>
+            <a:off x="1600200" y="5989320"/>
+            <a:ext cx="4754880" cy="365760"/>
+          </a:xfrm>
+          <a:prstGeom prst="rect">
+            <a:avLst/>
+          </a:prstGeom>
+          <a:noFill/>
+        </p:spPr>
+        <p:txBody>
+          <a:bodyPr wrap="square" lIns="0" rIns="0" tIns="0" bIns="0">
+            <a:spAutoFit/>
+          </a:bodyPr>
+          <a:lstStyle/>
+          <a:p>
+            <a:r>
+              <a:rPr sz="2000" b="1">
+                <a:solidFill>
+                  <a:srgbClr val="FFFFFF"/>
+                </a:solidFill>
+                <a:latin typeface="Apple SD Gothic Neo"/>
+              </a:rPr>
+              <a:t>전체 처리 흐름 (노드 단위)</a:t>
+            </a:r>
+          </a:p>
+        </p:txBody>
+      </p:sp>
+      <p:sp>
+        <p:nvSpPr>
+          <p:cNvPr id="24" name="TextBox 23"/>
+          <p:cNvSpPr txBox="1"/>
+          <p:nvPr/>
+        </p:nvSpPr>
+        <p:spPr>
+          <a:xfrm>
+            <a:off x="6400800" y="6035040"/>
+            <a:ext cx="5120640" cy="365760"/>
+          </a:xfrm>
+          <a:prstGeom prst="rect">
+            <a:avLst/>
+          </a:prstGeom>
+          <a:noFill/>
+        </p:spPr>
+        <p:txBody>
+          <a:bodyPr wrap="square" lIns="0" rIns="0" tIns="0" bIns="0">
+            <a:spAutoFit/>
+          </a:bodyPr>
+          <a:lstStyle/>
+          <a:p>
+            <a:r>
+              <a:rPr sz="1500" b="0">
+                <a:solidFill>
+                  <a:srgbClr val="A4DAC2"/>
+                </a:solidFill>
+                <a:latin typeface="Apple SD Gothic Neo"/>
+              </a:rPr>
+              <a:t>제공 · 직접 추가 노드와 종료 경로</a:t>
+            </a:r>
+          </a:p>
+        </p:txBody>
+      </p:sp>
     </p:spTree>
   </p:cSld>
   <p:clrMapOvr>
@@ -5082,7 +5185,7 @@
                 </a:solidFill>
                 <a:latin typeface="Apple SD Gothic Neo"/>
               </a:rPr>
-              <a:t>A-1 / A-5</a:t>
+              <a:t>A-1 / A-6</a:t>
             </a:r>
           </a:p>
         </p:txBody>
@@ -7616,7 +7719,7 @@
                 </a:solidFill>
                 <a:latin typeface="Apple SD Gothic Neo"/>
               </a:rPr>
-              <a:t>A-2 / A-5</a:t>
+              <a:t>A-2 / A-6</a:t>
             </a:r>
           </a:p>
         </p:txBody>
@@ -10694,7 +10797,7 @@
                 </a:solidFill>
                 <a:latin typeface="Apple SD Gothic Neo"/>
               </a:rPr>
-              <a:t>A-3 / A-5</a:t>
+              <a:t>A-3 / A-6</a:t>
             </a:r>
           </a:p>
         </p:txBody>
@@ -12305,7 +12408,7 @@
                 </a:solidFill>
                 <a:latin typeface="Apple SD Gothic Neo"/>
               </a:rPr>
-              <a:t>A-4 / A-5</a:t>
+              <a:t>A-4 / A-6</a:t>
             </a:r>
           </a:p>
         </p:txBody>
@@ -12859,7 +12962,7 @@
                 </a:solidFill>
                 <a:latin typeface="Apple SD Gothic Neo"/>
               </a:rPr>
-              <a:t>A-5 / A-5</a:t>
+              <a:t>A-5 / A-6</a:t>
             </a:r>
           </a:p>
         </p:txBody>
@@ -14216,6 +14319,1984 @@
           <a:lstStyle/>
           <a:p>
             <a:pPr algn="ctr"/>
+          </a:p>
+        </p:txBody>
+      </p:sp>
+    </p:spTree>
+  </p:cSld>
+  <p:clrMapOvr>
+    <a:masterClrMapping/>
+  </p:clrMapOvr>
+</p:sld>
+</file>
+
+<file path=ppt/slides/slide17.xml><?xml version="1.0" encoding="utf-8"?>
+<p:sld xmlns:a="http://schemas.openxmlformats.org/drawingml/2006/main" xmlns:p="http://schemas.openxmlformats.org/presentationml/2006/main" xmlns:r="http://schemas.openxmlformats.org/officeDocument/2006/relationships">
+  <p:cSld>
+    <p:spTree>
+      <p:nvGrpSpPr>
+        <p:cNvPr id="1" name=""/>
+        <p:cNvGrpSpPr/>
+        <p:nvPr/>
+      </p:nvGrpSpPr>
+      <p:grpSpPr/>
+      <p:sp>
+        <p:nvSpPr>
+          <p:cNvPr id="2" name="TextBox 1"/>
+          <p:cNvSpPr txBox="1"/>
+          <p:nvPr/>
+        </p:nvSpPr>
+        <p:spPr>
+          <a:xfrm>
+            <a:off x="594360" y="320040"/>
+            <a:ext cx="9144000" cy="274320"/>
+          </a:xfrm>
+          <a:prstGeom prst="rect">
+            <a:avLst/>
+          </a:prstGeom>
+          <a:noFill/>
+        </p:spPr>
+        <p:txBody>
+          <a:bodyPr wrap="square" lIns="0" rIns="0" tIns="0" bIns="0">
+            <a:spAutoFit/>
+          </a:bodyPr>
+          <a:lstStyle/>
+          <a:p>
+            <a:r>
+              <a:rPr sz="1100" b="1">
+                <a:solidFill>
+                  <a:srgbClr val="16785C"/>
+                </a:solidFill>
+                <a:latin typeface="Apple SD Gothic Neo"/>
+              </a:rPr>
+              <a:t>부록 A-6  전체 처리 흐름</a:t>
+            </a:r>
+          </a:p>
+        </p:txBody>
+      </p:sp>
+      <p:sp>
+        <p:nvSpPr>
+          <p:cNvPr id="3" name="TextBox 2"/>
+          <p:cNvSpPr txBox="1"/>
+          <p:nvPr/>
+        </p:nvSpPr>
+        <p:spPr>
+          <a:xfrm>
+            <a:off x="594360" y="868680"/>
+            <a:ext cx="10972800" cy="914400"/>
+          </a:xfrm>
+          <a:prstGeom prst="rect">
+            <a:avLst/>
+          </a:prstGeom>
+          <a:noFill/>
+        </p:spPr>
+        <p:txBody>
+          <a:bodyPr wrap="square" lIns="0" rIns="0" tIns="0" bIns="0">
+            <a:spAutoFit/>
+          </a:bodyPr>
+          <a:lstStyle/>
+          <a:p>
+            <a:r>
+              <a:rPr sz="3200" b="1">
+                <a:solidFill>
+                  <a:srgbClr val="19382F"/>
+                </a:solidFill>
+                <a:latin typeface="Apple SD Gothic Neo"/>
+              </a:rPr>
+              <a:t>전체 처리 흐름 (노드 단위)</a:t>
+            </a:r>
+          </a:p>
+        </p:txBody>
+      </p:sp>
+      <p:sp>
+        <p:nvSpPr>
+          <p:cNvPr id="4" name="TextBox 3"/>
+          <p:cNvSpPr txBox="1"/>
+          <p:nvPr/>
+        </p:nvSpPr>
+        <p:spPr>
+          <a:xfrm>
+            <a:off x="594360" y="6473952"/>
+            <a:ext cx="7315200" cy="164592"/>
+          </a:xfrm>
+          <a:prstGeom prst="rect">
+            <a:avLst/>
+          </a:prstGeom>
+          <a:noFill/>
+        </p:spPr>
+        <p:txBody>
+          <a:bodyPr wrap="square" lIns="0" rIns="0" tIns="0" bIns="0">
+            <a:spAutoFit/>
+          </a:bodyPr>
+          <a:lstStyle/>
+          <a:p>
+            <a:r>
+              <a:rPr sz="900" b="0">
+                <a:solidFill>
+                  <a:srgbClr val="62746D"/>
+                </a:solidFill>
+                <a:latin typeface="Apple SD Gothic Neo"/>
+              </a:rPr>
+              <a:t>AI CAPSTONE  ·  김하연</a:t>
+            </a:r>
+          </a:p>
+        </p:txBody>
+      </p:sp>
+      <p:sp>
+        <p:nvSpPr>
+          <p:cNvPr id="5" name="TextBox 4"/>
+          <p:cNvSpPr txBox="1"/>
+          <p:nvPr/>
+        </p:nvSpPr>
+        <p:spPr>
+          <a:xfrm>
+            <a:off x="10835640" y="6473952"/>
+            <a:ext cx="777240" cy="164592"/>
+          </a:xfrm>
+          <a:prstGeom prst="rect">
+            <a:avLst/>
+          </a:prstGeom>
+          <a:noFill/>
+        </p:spPr>
+        <p:txBody>
+          <a:bodyPr wrap="square" lIns="0" rIns="0" tIns="0" bIns="0">
+            <a:spAutoFit/>
+          </a:bodyPr>
+          <a:lstStyle/>
+          <a:p>
+            <a:r>
+              <a:rPr sz="900" b="0">
+                <a:solidFill>
+                  <a:srgbClr val="62746D"/>
+                </a:solidFill>
+                <a:latin typeface="Apple SD Gothic Neo"/>
+              </a:rPr>
+              <a:t>A-6 / A-6</a:t>
+            </a:r>
+          </a:p>
+        </p:txBody>
+      </p:sp>
+      <p:sp>
+        <p:nvSpPr>
+          <p:cNvPr id="6" name="Rounded Rectangle 5"/>
+          <p:cNvSpPr/>
+          <p:nvPr/>
+        </p:nvSpPr>
+        <p:spPr>
+          <a:xfrm>
+            <a:off x="640080" y="2377440"/>
+            <a:ext cx="1600200" cy="731520"/>
+          </a:xfrm>
+          <a:prstGeom prst="roundRect">
+            <a:avLst/>
+          </a:prstGeom>
+          <a:solidFill>
+            <a:srgbClr val="EEF5F1"/>
+          </a:solidFill>
+          <a:ln>
+            <a:noFill/>
+          </a:ln>
+          <a:effectLst/>
+        </p:spPr>
+        <p:style>
+          <a:lnRef idx="1">
+            <a:schemeClr val="accent1"/>
+          </a:lnRef>
+          <a:fillRef idx="3">
+            <a:schemeClr val="accent1"/>
+          </a:fillRef>
+          <a:effectRef idx="2">
+            <a:schemeClr val="accent1"/>
+          </a:effectRef>
+          <a:fontRef idx="minor">
+            <a:schemeClr val="lt1"/>
+          </a:fontRef>
+        </p:style>
+        <p:txBody>
+          <a:bodyPr rtlCol="0" anchor="ctr" wrap="square" lIns="45720" rIns="45720" tIns="0" bIns="0"/>
+          <a:lstStyle/>
+          <a:p>
+            <a:pPr algn="ctr"/>
+            <a:r>
+              <a:rPr sz="1300" b="1">
+                <a:solidFill>
+                  <a:srgbClr val="19382F"/>
+                </a:solidFill>
+                <a:latin typeface="Apple SD Gothic Neo"/>
+              </a:rPr>
+              <a:t>route</a:t>
+            </a:r>
+          </a:p>
+          <a:p>
+            <a:pPr algn="ctr"/>
+            <a:r>
+              <a:rPr sz="1100" b="0">
+                <a:solidFill>
+                  <a:srgbClr val="19382F"/>
+                </a:solidFill>
+                <a:latin typeface="Apple SD Gothic Neo"/>
+              </a:rPr>
+              <a:t>질의 분류</a:t>
+            </a:r>
+          </a:p>
+        </p:txBody>
+      </p:sp>
+      <p:sp>
+        <p:nvSpPr>
+          <p:cNvPr id="7" name="Rounded Rectangle 6"/>
+          <p:cNvSpPr/>
+          <p:nvPr/>
+        </p:nvSpPr>
+        <p:spPr>
+          <a:xfrm>
+            <a:off x="2514600" y="2377440"/>
+            <a:ext cx="1600200" cy="731520"/>
+          </a:xfrm>
+          <a:prstGeom prst="roundRect">
+            <a:avLst/>
+          </a:prstGeom>
+          <a:solidFill>
+            <a:srgbClr val="A4DAC2"/>
+          </a:solidFill>
+          <a:ln>
+            <a:noFill/>
+          </a:ln>
+          <a:effectLst/>
+        </p:spPr>
+        <p:style>
+          <a:lnRef idx="1">
+            <a:schemeClr val="accent1"/>
+          </a:lnRef>
+          <a:fillRef idx="3">
+            <a:schemeClr val="accent1"/>
+          </a:fillRef>
+          <a:effectRef idx="2">
+            <a:schemeClr val="accent1"/>
+          </a:effectRef>
+          <a:fontRef idx="minor">
+            <a:schemeClr val="lt1"/>
+          </a:fontRef>
+        </p:style>
+        <p:txBody>
+          <a:bodyPr rtlCol="0" anchor="ctr" wrap="square" lIns="45720" rIns="45720" tIns="0" bIns="0"/>
+          <a:lstStyle/>
+          <a:p>
+            <a:pPr algn="ctr"/>
+            <a:r>
+              <a:rPr sz="1300" b="1">
+                <a:solidFill>
+                  <a:srgbClr val="19382F"/>
+                </a:solidFill>
+                <a:latin typeface="Apple SD Gothic Neo"/>
+              </a:rPr>
+              <a:t>plan</a:t>
+            </a:r>
+          </a:p>
+          <a:p>
+            <a:pPr algn="ctr"/>
+            <a:r>
+              <a:rPr sz="1100" b="0">
+                <a:solidFill>
+                  <a:srgbClr val="19382F"/>
+                </a:solidFill>
+                <a:latin typeface="Apple SD Gothic Neo"/>
+              </a:rPr>
+              <a:t>계획 · 대상 해석</a:t>
+            </a:r>
+          </a:p>
+        </p:txBody>
+      </p:sp>
+      <p:sp>
+        <p:nvSpPr>
+          <p:cNvPr id="8" name="Rounded Rectangle 7"/>
+          <p:cNvSpPr/>
+          <p:nvPr/>
+        </p:nvSpPr>
+        <p:spPr>
+          <a:xfrm>
+            <a:off x="4389120" y="2377440"/>
+            <a:ext cx="1600200" cy="731520"/>
+          </a:xfrm>
+          <a:prstGeom prst="roundRect">
+            <a:avLst/>
+          </a:prstGeom>
+          <a:solidFill>
+            <a:srgbClr val="EEF5F1"/>
+          </a:solidFill>
+          <a:ln>
+            <a:noFill/>
+          </a:ln>
+          <a:effectLst/>
+        </p:spPr>
+        <p:style>
+          <a:lnRef idx="1">
+            <a:schemeClr val="accent1"/>
+          </a:lnRef>
+          <a:fillRef idx="3">
+            <a:schemeClr val="accent1"/>
+          </a:fillRef>
+          <a:effectRef idx="2">
+            <a:schemeClr val="accent1"/>
+          </a:effectRef>
+          <a:fontRef idx="minor">
+            <a:schemeClr val="lt1"/>
+          </a:fontRef>
+        </p:style>
+        <p:txBody>
+          <a:bodyPr rtlCol="0" anchor="ctr" wrap="square" lIns="45720" rIns="45720" tIns="0" bIns="0"/>
+          <a:lstStyle/>
+          <a:p>
+            <a:pPr algn="ctr"/>
+            <a:r>
+              <a:rPr sz="1300" b="1">
+                <a:solidFill>
+                  <a:srgbClr val="19382F"/>
+                </a:solidFill>
+                <a:latin typeface="Apple SD Gothic Neo"/>
+              </a:rPr>
+              <a:t>gate</a:t>
+            </a:r>
+          </a:p>
+          <a:p>
+            <a:pPr algn="ctr"/>
+            <a:r>
+              <a:rPr sz="1100" b="0">
+                <a:solidFill>
+                  <a:srgbClr val="19382F"/>
+                </a:solidFill>
+                <a:latin typeface="Apple SD Gothic Neo"/>
+              </a:rPr>
+              <a:t>분석 설정 점검</a:t>
+            </a:r>
+          </a:p>
+        </p:txBody>
+      </p:sp>
+      <p:sp>
+        <p:nvSpPr>
+          <p:cNvPr id="9" name="Rounded Rectangle 8"/>
+          <p:cNvSpPr/>
+          <p:nvPr/>
+        </p:nvSpPr>
+        <p:spPr>
+          <a:xfrm>
+            <a:off x="6263640" y="2377440"/>
+            <a:ext cx="1600200" cy="731520"/>
+          </a:xfrm>
+          <a:prstGeom prst="roundRect">
+            <a:avLst/>
+          </a:prstGeom>
+          <a:solidFill>
+            <a:srgbClr val="A4DAC2"/>
+          </a:solidFill>
+          <a:ln>
+            <a:noFill/>
+          </a:ln>
+          <a:effectLst/>
+        </p:spPr>
+        <p:style>
+          <a:lnRef idx="1">
+            <a:schemeClr val="accent1"/>
+          </a:lnRef>
+          <a:fillRef idx="3">
+            <a:schemeClr val="accent1"/>
+          </a:fillRef>
+          <a:effectRef idx="2">
+            <a:schemeClr val="accent1"/>
+          </a:effectRef>
+          <a:fontRef idx="minor">
+            <a:schemeClr val="lt1"/>
+          </a:fontRef>
+        </p:style>
+        <p:txBody>
+          <a:bodyPr rtlCol="0" anchor="ctr" wrap="square" lIns="45720" rIns="45720" tIns="0" bIns="0"/>
+          <a:lstStyle/>
+          <a:p>
+            <a:pPr algn="ctr"/>
+            <a:r>
+              <a:rPr sz="1300" b="1">
+                <a:solidFill>
+                  <a:srgbClr val="19382F"/>
+                </a:solidFill>
+                <a:latin typeface="Apple SD Gothic Neo"/>
+              </a:rPr>
+              <a:t>research</a:t>
+            </a:r>
+          </a:p>
+          <a:p>
+            <a:pPr algn="ctr"/>
+            <a:r>
+              <a:rPr sz="1100" b="0">
+                <a:solidFill>
+                  <a:srgbClr val="19382F"/>
+                </a:solidFill>
+                <a:latin typeface="Apple SD Gothic Neo"/>
+              </a:rPr>
+              <a:t>서브에이전트 조사</a:t>
+            </a:r>
+          </a:p>
+        </p:txBody>
+      </p:sp>
+      <p:sp>
+        <p:nvSpPr>
+          <p:cNvPr id="10" name="Rounded Rectangle 9"/>
+          <p:cNvSpPr/>
+          <p:nvPr/>
+        </p:nvSpPr>
+        <p:spPr>
+          <a:xfrm>
+            <a:off x="8138159" y="2377440"/>
+            <a:ext cx="1600200" cy="731520"/>
+          </a:xfrm>
+          <a:prstGeom prst="roundRect">
+            <a:avLst/>
+          </a:prstGeom>
+          <a:solidFill>
+            <a:srgbClr val="EEF5F1"/>
+          </a:solidFill>
+          <a:ln>
+            <a:noFill/>
+          </a:ln>
+          <a:effectLst/>
+        </p:spPr>
+        <p:style>
+          <a:lnRef idx="1">
+            <a:schemeClr val="accent1"/>
+          </a:lnRef>
+          <a:fillRef idx="3">
+            <a:schemeClr val="accent1"/>
+          </a:fillRef>
+          <a:effectRef idx="2">
+            <a:schemeClr val="accent1"/>
+          </a:effectRef>
+          <a:fontRef idx="minor">
+            <a:schemeClr val="lt1"/>
+          </a:fontRef>
+        </p:style>
+        <p:txBody>
+          <a:bodyPr rtlCol="0" anchor="ctr" wrap="square" lIns="45720" rIns="45720" tIns="0" bIns="0"/>
+          <a:lstStyle/>
+          <a:p>
+            <a:pPr algn="ctr"/>
+            <a:r>
+              <a:rPr sz="1300" b="1">
+                <a:solidFill>
+                  <a:srgbClr val="19382F"/>
+                </a:solidFill>
+                <a:latin typeface="Apple SD Gothic Neo"/>
+              </a:rPr>
+              <a:t>replan_check</a:t>
+            </a:r>
+          </a:p>
+          <a:p>
+            <a:pPr algn="ctr"/>
+            <a:r>
+              <a:rPr sz="1100" b="0">
+                <a:solidFill>
+                  <a:srgbClr val="19382F"/>
+                </a:solidFill>
+                <a:latin typeface="Apple SD Gothic Neo"/>
+              </a:rPr>
+              <a:t>충분성 점검</a:t>
+            </a:r>
+          </a:p>
+        </p:txBody>
+      </p:sp>
+      <p:sp>
+        <p:nvSpPr>
+          <p:cNvPr id="11" name="Rounded Rectangle 10"/>
+          <p:cNvSpPr/>
+          <p:nvPr/>
+        </p:nvSpPr>
+        <p:spPr>
+          <a:xfrm>
+            <a:off x="10012680" y="2377440"/>
+            <a:ext cx="1600200" cy="731520"/>
+          </a:xfrm>
+          <a:prstGeom prst="roundRect">
+            <a:avLst/>
+          </a:prstGeom>
+          <a:solidFill>
+            <a:srgbClr val="EEF5F1"/>
+          </a:solidFill>
+          <a:ln>
+            <a:noFill/>
+          </a:ln>
+          <a:effectLst/>
+        </p:spPr>
+        <p:style>
+          <a:lnRef idx="1">
+            <a:schemeClr val="accent1"/>
+          </a:lnRef>
+          <a:fillRef idx="3">
+            <a:schemeClr val="accent1"/>
+          </a:fillRef>
+          <a:effectRef idx="2">
+            <a:schemeClr val="accent1"/>
+          </a:effectRef>
+          <a:fontRef idx="minor">
+            <a:schemeClr val="lt1"/>
+          </a:fontRef>
+        </p:style>
+        <p:txBody>
+          <a:bodyPr rtlCol="0" anchor="ctr" wrap="square" lIns="45720" rIns="45720" tIns="0" bIns="0"/>
+          <a:lstStyle/>
+          <a:p>
+            <a:pPr algn="ctr"/>
+            <a:r>
+              <a:rPr sz="1300" b="1">
+                <a:solidFill>
+                  <a:srgbClr val="19382F"/>
+                </a:solidFill>
+                <a:latin typeface="Apple SD Gothic Neo"/>
+              </a:rPr>
+              <a:t>analysis</a:t>
+            </a:r>
+          </a:p>
+          <a:p>
+            <a:pPr algn="ctr"/>
+            <a:r>
+              <a:rPr sz="1100" b="0">
+                <a:solidFill>
+                  <a:srgbClr val="19382F"/>
+                </a:solidFill>
+                <a:latin typeface="Apple SD Gothic Neo"/>
+              </a:rPr>
+              <a:t>데이터 분석</a:t>
+            </a:r>
+          </a:p>
+        </p:txBody>
+      </p:sp>
+      <p:sp>
+        <p:nvSpPr>
+          <p:cNvPr id="12" name="Rounded Rectangle 11"/>
+          <p:cNvSpPr/>
+          <p:nvPr/>
+        </p:nvSpPr>
+        <p:spPr>
+          <a:xfrm>
+            <a:off x="640080" y="3703320"/>
+            <a:ext cx="1600200" cy="731520"/>
+          </a:xfrm>
+          <a:prstGeom prst="roundRect">
+            <a:avLst/>
+          </a:prstGeom>
+          <a:solidFill>
+            <a:srgbClr val="EEF5F1"/>
+          </a:solidFill>
+          <a:ln>
+            <a:noFill/>
+          </a:ln>
+          <a:effectLst/>
+        </p:spPr>
+        <p:style>
+          <a:lnRef idx="1">
+            <a:schemeClr val="accent1"/>
+          </a:lnRef>
+          <a:fillRef idx="3">
+            <a:schemeClr val="accent1"/>
+          </a:fillRef>
+          <a:effectRef idx="2">
+            <a:schemeClr val="accent1"/>
+          </a:effectRef>
+          <a:fontRef idx="minor">
+            <a:schemeClr val="lt1"/>
+          </a:fontRef>
+        </p:style>
+        <p:txBody>
+          <a:bodyPr rtlCol="0" anchor="ctr" wrap="square" lIns="45720" rIns="45720" tIns="0" bIns="0"/>
+          <a:lstStyle/>
+          <a:p>
+            <a:pPr algn="ctr"/>
+            <a:r>
+              <a:rPr sz="1300" b="1">
+                <a:solidFill>
+                  <a:srgbClr val="19382F"/>
+                </a:solidFill>
+                <a:latin typeface="Apple SD Gothic Neo"/>
+              </a:rPr>
+              <a:t>chat_answer</a:t>
+            </a:r>
+          </a:p>
+          <a:p>
+            <a:pPr algn="ctr"/>
+            <a:r>
+              <a:rPr sz="1100" b="0">
+                <a:solidFill>
+                  <a:srgbClr val="19382F"/>
+                </a:solidFill>
+                <a:latin typeface="Apple SD Gothic Neo"/>
+              </a:rPr>
+              <a:t>일반 답변 → 종료</a:t>
+            </a:r>
+          </a:p>
+        </p:txBody>
+      </p:sp>
+      <p:sp>
+        <p:nvSpPr>
+          <p:cNvPr id="13" name="Rounded Rectangle 12"/>
+          <p:cNvSpPr/>
+          <p:nvPr/>
+        </p:nvSpPr>
+        <p:spPr>
+          <a:xfrm>
+            <a:off x="4389120" y="3703320"/>
+            <a:ext cx="1600200" cy="731520"/>
+          </a:xfrm>
+          <a:prstGeom prst="roundRect">
+            <a:avLst/>
+          </a:prstGeom>
+          <a:solidFill>
+            <a:srgbClr val="EEF5F1"/>
+          </a:solidFill>
+          <a:ln>
+            <a:noFill/>
+          </a:ln>
+          <a:effectLst/>
+        </p:spPr>
+        <p:style>
+          <a:lnRef idx="1">
+            <a:schemeClr val="accent1"/>
+          </a:lnRef>
+          <a:fillRef idx="3">
+            <a:schemeClr val="accent1"/>
+          </a:fillRef>
+          <a:effectRef idx="2">
+            <a:schemeClr val="accent1"/>
+          </a:effectRef>
+          <a:fontRef idx="minor">
+            <a:schemeClr val="lt1"/>
+          </a:fontRef>
+        </p:style>
+        <p:txBody>
+          <a:bodyPr rtlCol="0" anchor="ctr" wrap="square" lIns="45720" rIns="45720" tIns="0" bIns="0"/>
+          <a:lstStyle/>
+          <a:p>
+            <a:pPr algn="ctr"/>
+            <a:r>
+              <a:rPr sz="1300" b="1">
+                <a:solidFill>
+                  <a:srgbClr val="19382F"/>
+                </a:solidFill>
+                <a:latin typeface="Apple SD Gothic Neo"/>
+              </a:rPr>
+              <a:t>finalize</a:t>
+            </a:r>
+          </a:p>
+          <a:p>
+            <a:pPr algn="ctr"/>
+            <a:r>
+              <a:rPr sz="1100" b="0">
+                <a:solidFill>
+                  <a:srgbClr val="19382F"/>
+                </a:solidFill>
+                <a:latin typeface="Apple SD Gothic Neo"/>
+              </a:rPr>
+              <a:t>응답 확정 → 종료</a:t>
+            </a:r>
+          </a:p>
+        </p:txBody>
+      </p:sp>
+      <p:sp>
+        <p:nvSpPr>
+          <p:cNvPr id="14" name="Rounded Rectangle 13"/>
+          <p:cNvSpPr/>
+          <p:nvPr/>
+        </p:nvSpPr>
+        <p:spPr>
+          <a:xfrm>
+            <a:off x="6263640" y="3703320"/>
+            <a:ext cx="1600200" cy="731520"/>
+          </a:xfrm>
+          <a:prstGeom prst="roundRect">
+            <a:avLst/>
+          </a:prstGeom>
+          <a:solidFill>
+            <a:srgbClr val="A4DAC2"/>
+          </a:solidFill>
+          <a:ln>
+            <a:noFill/>
+          </a:ln>
+          <a:effectLst/>
+        </p:spPr>
+        <p:style>
+          <a:lnRef idx="1">
+            <a:schemeClr val="accent1"/>
+          </a:lnRef>
+          <a:fillRef idx="3">
+            <a:schemeClr val="accent1"/>
+          </a:fillRef>
+          <a:effectRef idx="2">
+            <a:schemeClr val="accent1"/>
+          </a:effectRef>
+          <a:fontRef idx="minor">
+            <a:schemeClr val="lt1"/>
+          </a:fontRef>
+        </p:style>
+        <p:txBody>
+          <a:bodyPr rtlCol="0" anchor="ctr" wrap="square" lIns="45720" rIns="45720" tIns="0" bIns="0"/>
+          <a:lstStyle/>
+          <a:p>
+            <a:pPr algn="ctr"/>
+            <a:r>
+              <a:rPr sz="1300" b="1">
+                <a:solidFill>
+                  <a:srgbClr val="19382F"/>
+                </a:solidFill>
+                <a:latin typeface="Apple SD Gothic Neo"/>
+              </a:rPr>
+              <a:t>validate</a:t>
+            </a:r>
+          </a:p>
+          <a:p>
+            <a:pPr algn="ctr"/>
+            <a:r>
+              <a:rPr sz="1100" b="0">
+                <a:solidFill>
+                  <a:srgbClr val="19382F"/>
+                </a:solidFill>
+                <a:latin typeface="Apple SD Gothic Neo"/>
+              </a:rPr>
+              <a:t>수치 대조</a:t>
+            </a:r>
+          </a:p>
+        </p:txBody>
+      </p:sp>
+      <p:sp>
+        <p:nvSpPr>
+          <p:cNvPr id="15" name="Rounded Rectangle 14"/>
+          <p:cNvSpPr/>
+          <p:nvPr/>
+        </p:nvSpPr>
+        <p:spPr>
+          <a:xfrm>
+            <a:off x="8138159" y="3703320"/>
+            <a:ext cx="1600200" cy="731520"/>
+          </a:xfrm>
+          <a:prstGeom prst="roundRect">
+            <a:avLst/>
+          </a:prstGeom>
+          <a:solidFill>
+            <a:srgbClr val="EEF5F1"/>
+          </a:solidFill>
+          <a:ln>
+            <a:noFill/>
+          </a:ln>
+          <a:effectLst/>
+        </p:spPr>
+        <p:style>
+          <a:lnRef idx="1">
+            <a:schemeClr val="accent1"/>
+          </a:lnRef>
+          <a:fillRef idx="3">
+            <a:schemeClr val="accent1"/>
+          </a:fillRef>
+          <a:effectRef idx="2">
+            <a:schemeClr val="accent1"/>
+          </a:effectRef>
+          <a:fontRef idx="minor">
+            <a:schemeClr val="lt1"/>
+          </a:fontRef>
+        </p:style>
+        <p:txBody>
+          <a:bodyPr rtlCol="0" anchor="ctr" wrap="square" lIns="45720" rIns="45720" tIns="0" bIns="0"/>
+          <a:lstStyle/>
+          <a:p>
+            <a:pPr algn="ctr"/>
+            <a:r>
+              <a:rPr sz="1300" b="1">
+                <a:solidFill>
+                  <a:srgbClr val="19382F"/>
+                </a:solidFill>
+                <a:latin typeface="Apple SD Gothic Neo"/>
+              </a:rPr>
+              <a:t>write</a:t>
+            </a:r>
+          </a:p>
+          <a:p>
+            <a:pPr algn="ctr"/>
+            <a:r>
+              <a:rPr sz="1100" b="0">
+                <a:solidFill>
+                  <a:srgbClr val="19382F"/>
+                </a:solidFill>
+                <a:latin typeface="Apple SD Gothic Neo"/>
+              </a:rPr>
+              <a:t>답변 작성</a:t>
+            </a:r>
+          </a:p>
+        </p:txBody>
+      </p:sp>
+      <p:sp>
+        <p:nvSpPr>
+          <p:cNvPr id="16" name="Rounded Rectangle 15"/>
+          <p:cNvSpPr/>
+          <p:nvPr/>
+        </p:nvSpPr>
+        <p:spPr>
+          <a:xfrm>
+            <a:off x="10012680" y="3703320"/>
+            <a:ext cx="1600200" cy="731520"/>
+          </a:xfrm>
+          <a:prstGeom prst="roundRect">
+            <a:avLst/>
+          </a:prstGeom>
+          <a:solidFill>
+            <a:srgbClr val="A4DAC2"/>
+          </a:solidFill>
+          <a:ln>
+            <a:noFill/>
+          </a:ln>
+          <a:effectLst/>
+        </p:spPr>
+        <p:style>
+          <a:lnRef idx="1">
+            <a:schemeClr val="accent1"/>
+          </a:lnRef>
+          <a:fillRef idx="3">
+            <a:schemeClr val="accent1"/>
+          </a:fillRef>
+          <a:effectRef idx="2">
+            <a:schemeClr val="accent1"/>
+          </a:effectRef>
+          <a:fontRef idx="minor">
+            <a:schemeClr val="lt1"/>
+          </a:fontRef>
+        </p:style>
+        <p:txBody>
+          <a:bodyPr rtlCol="0" anchor="ctr" wrap="square" lIns="45720" rIns="45720" tIns="0" bIns="0"/>
+          <a:lstStyle/>
+          <a:p>
+            <a:pPr algn="ctr"/>
+            <a:r>
+              <a:rPr sz="1300" b="1">
+                <a:solidFill>
+                  <a:srgbClr val="19382F"/>
+                </a:solidFill>
+                <a:latin typeface="Apple SD Gothic Neo"/>
+              </a:rPr>
+              <a:t>evidence_gate</a:t>
+            </a:r>
+          </a:p>
+          <a:p>
+            <a:pPr algn="ctr"/>
+            <a:r>
+              <a:rPr sz="1100" b="0">
+                <a:solidFill>
+                  <a:srgbClr val="19382F"/>
+                </a:solidFill>
+                <a:latin typeface="Apple SD Gothic Neo"/>
+              </a:rPr>
+              <a:t>근거 0건 점검</a:t>
+            </a:r>
+          </a:p>
+        </p:txBody>
+      </p:sp>
+      <p:sp>
+        <p:nvSpPr>
+          <p:cNvPr id="17" name="Rounded Rectangle 16"/>
+          <p:cNvSpPr/>
+          <p:nvPr/>
+        </p:nvSpPr>
+        <p:spPr>
+          <a:xfrm>
+            <a:off x="8138159" y="5212080"/>
+            <a:ext cx="1600200" cy="731520"/>
+          </a:xfrm>
+          <a:prstGeom prst="roundRect">
+            <a:avLst/>
+          </a:prstGeom>
+          <a:solidFill>
+            <a:srgbClr val="A4DAC2"/>
+          </a:solidFill>
+          <a:ln>
+            <a:noFill/>
+          </a:ln>
+          <a:effectLst/>
+        </p:spPr>
+        <p:style>
+          <a:lnRef idx="1">
+            <a:schemeClr val="accent1"/>
+          </a:lnRef>
+          <a:fillRef idx="3">
+            <a:schemeClr val="accent1"/>
+          </a:fillRef>
+          <a:effectRef idx="2">
+            <a:schemeClr val="accent1"/>
+          </a:effectRef>
+          <a:fontRef idx="minor">
+            <a:schemeClr val="lt1"/>
+          </a:fontRef>
+        </p:style>
+        <p:txBody>
+          <a:bodyPr rtlCol="0" anchor="ctr" wrap="square" lIns="45720" rIns="45720" tIns="0" bIns="0"/>
+          <a:lstStyle/>
+          <a:p>
+            <a:pPr algn="ctr"/>
+            <a:r>
+              <a:rPr sz="1300" b="1">
+                <a:solidFill>
+                  <a:srgbClr val="19382F"/>
+                </a:solidFill>
+                <a:latin typeface="Apple SD Gothic Neo"/>
+              </a:rPr>
+              <a:t>finalize_failed</a:t>
+            </a:r>
+          </a:p>
+          <a:p>
+            <a:pPr algn="ctr"/>
+            <a:r>
+              <a:rPr sz="1100" b="0">
+                <a:solidFill>
+                  <a:srgbClr val="19382F"/>
+                </a:solidFill>
+                <a:latin typeface="Apple SD Gothic Neo"/>
+              </a:rPr>
+              <a:t>실패 안내 → 종료</a:t>
+            </a:r>
+          </a:p>
+        </p:txBody>
+      </p:sp>
+      <p:cxnSp>
+        <p:nvCxnSpPr>
+          <p:cNvPr id="18" name="Connector 17"/>
+          <p:cNvCxnSpPr/>
+          <p:nvPr/>
+        </p:nvCxnSpPr>
+        <p:spPr>
+          <a:xfrm>
+            <a:off x="2240280" y="2743200"/>
+            <a:ext cx="274320" cy="0"/>
+          </a:xfrm>
+          <a:prstGeom prst="line">
+            <a:avLst/>
+          </a:prstGeom>
+          <a:ln w="19050">
+            <a:solidFill>
+              <a:srgbClr val="62746D"/>
+            </a:solidFill>
+            <a:tailEnd type="triangle"/>
+          </a:ln>
+        </p:spPr>
+        <p:style>
+          <a:lnRef idx="2">
+            <a:schemeClr val="accent1"/>
+          </a:lnRef>
+          <a:fillRef idx="0">
+            <a:schemeClr val="accent1"/>
+          </a:fillRef>
+          <a:effectRef idx="1">
+            <a:schemeClr val="accent1"/>
+          </a:effectRef>
+          <a:fontRef idx="minor">
+            <a:schemeClr val="tx1"/>
+          </a:fontRef>
+        </p:style>
+      </p:cxnSp>
+      <p:cxnSp>
+        <p:nvCxnSpPr>
+          <p:cNvPr id="19" name="Connector 18"/>
+          <p:cNvCxnSpPr/>
+          <p:nvPr/>
+        </p:nvCxnSpPr>
+        <p:spPr>
+          <a:xfrm>
+            <a:off x="4114800" y="2743200"/>
+            <a:ext cx="274320" cy="0"/>
+          </a:xfrm>
+          <a:prstGeom prst="line">
+            <a:avLst/>
+          </a:prstGeom>
+          <a:ln w="19050">
+            <a:solidFill>
+              <a:srgbClr val="62746D"/>
+            </a:solidFill>
+            <a:tailEnd type="triangle"/>
+          </a:ln>
+        </p:spPr>
+        <p:style>
+          <a:lnRef idx="2">
+            <a:schemeClr val="accent1"/>
+          </a:lnRef>
+          <a:fillRef idx="0">
+            <a:schemeClr val="accent1"/>
+          </a:fillRef>
+          <a:effectRef idx="1">
+            <a:schemeClr val="accent1"/>
+          </a:effectRef>
+          <a:fontRef idx="minor">
+            <a:schemeClr val="tx1"/>
+          </a:fontRef>
+        </p:style>
+      </p:cxnSp>
+      <p:cxnSp>
+        <p:nvCxnSpPr>
+          <p:cNvPr id="20" name="Connector 19"/>
+          <p:cNvCxnSpPr/>
+          <p:nvPr/>
+        </p:nvCxnSpPr>
+        <p:spPr>
+          <a:xfrm>
+            <a:off x="5989320" y="2743200"/>
+            <a:ext cx="274320" cy="0"/>
+          </a:xfrm>
+          <a:prstGeom prst="line">
+            <a:avLst/>
+          </a:prstGeom>
+          <a:ln w="19050">
+            <a:solidFill>
+              <a:srgbClr val="62746D"/>
+            </a:solidFill>
+            <a:tailEnd type="triangle"/>
+          </a:ln>
+        </p:spPr>
+        <p:style>
+          <a:lnRef idx="2">
+            <a:schemeClr val="accent1"/>
+          </a:lnRef>
+          <a:fillRef idx="0">
+            <a:schemeClr val="accent1"/>
+          </a:fillRef>
+          <a:effectRef idx="1">
+            <a:schemeClr val="accent1"/>
+          </a:effectRef>
+          <a:fontRef idx="minor">
+            <a:schemeClr val="tx1"/>
+          </a:fontRef>
+        </p:style>
+      </p:cxnSp>
+      <p:cxnSp>
+        <p:nvCxnSpPr>
+          <p:cNvPr id="21" name="Connector 20"/>
+          <p:cNvCxnSpPr/>
+          <p:nvPr/>
+        </p:nvCxnSpPr>
+        <p:spPr>
+          <a:xfrm>
+            <a:off x="7863840" y="2743200"/>
+            <a:ext cx="274319" cy="0"/>
+          </a:xfrm>
+          <a:prstGeom prst="line">
+            <a:avLst/>
+          </a:prstGeom>
+          <a:ln w="19050">
+            <a:solidFill>
+              <a:srgbClr val="62746D"/>
+            </a:solidFill>
+            <a:tailEnd type="triangle"/>
+          </a:ln>
+        </p:spPr>
+        <p:style>
+          <a:lnRef idx="2">
+            <a:schemeClr val="accent1"/>
+          </a:lnRef>
+          <a:fillRef idx="0">
+            <a:schemeClr val="accent1"/>
+          </a:fillRef>
+          <a:effectRef idx="1">
+            <a:schemeClr val="accent1"/>
+          </a:effectRef>
+          <a:fontRef idx="minor">
+            <a:schemeClr val="tx1"/>
+          </a:fontRef>
+        </p:style>
+      </p:cxnSp>
+      <p:cxnSp>
+        <p:nvCxnSpPr>
+          <p:cNvPr id="22" name="Connector 21"/>
+          <p:cNvCxnSpPr/>
+          <p:nvPr/>
+        </p:nvCxnSpPr>
+        <p:spPr>
+          <a:xfrm>
+            <a:off x="9738359" y="2743200"/>
+            <a:ext cx="274321" cy="0"/>
+          </a:xfrm>
+          <a:prstGeom prst="line">
+            <a:avLst/>
+          </a:prstGeom>
+          <a:ln w="19050">
+            <a:solidFill>
+              <a:srgbClr val="62746D"/>
+            </a:solidFill>
+            <a:tailEnd type="triangle"/>
+          </a:ln>
+        </p:spPr>
+        <p:style>
+          <a:lnRef idx="2">
+            <a:schemeClr val="accent1"/>
+          </a:lnRef>
+          <a:fillRef idx="0">
+            <a:schemeClr val="accent1"/>
+          </a:fillRef>
+          <a:effectRef idx="1">
+            <a:schemeClr val="accent1"/>
+          </a:effectRef>
+          <a:fontRef idx="minor">
+            <a:schemeClr val="tx1"/>
+          </a:fontRef>
+        </p:style>
+      </p:cxnSp>
+      <p:cxnSp>
+        <p:nvCxnSpPr>
+          <p:cNvPr id="23" name="Connector 22"/>
+          <p:cNvCxnSpPr/>
+          <p:nvPr/>
+        </p:nvCxnSpPr>
+        <p:spPr>
+          <a:xfrm>
+            <a:off x="1440180" y="3108960"/>
+            <a:ext cx="0" cy="594360"/>
+          </a:xfrm>
+          <a:prstGeom prst="line">
+            <a:avLst/>
+          </a:prstGeom>
+          <a:ln w="19050">
+            <a:solidFill>
+              <a:srgbClr val="62746D"/>
+            </a:solidFill>
+            <a:tailEnd type="triangle"/>
+          </a:ln>
+        </p:spPr>
+        <p:style>
+          <a:lnRef idx="2">
+            <a:schemeClr val="accent1"/>
+          </a:lnRef>
+          <a:fillRef idx="0">
+            <a:schemeClr val="accent1"/>
+          </a:fillRef>
+          <a:effectRef idx="1">
+            <a:schemeClr val="accent1"/>
+          </a:effectRef>
+          <a:fontRef idx="minor">
+            <a:schemeClr val="tx1"/>
+          </a:fontRef>
+        </p:style>
+      </p:cxnSp>
+      <p:sp>
+        <p:nvSpPr>
+          <p:cNvPr id="24" name="TextBox 23"/>
+          <p:cNvSpPr txBox="1"/>
+          <p:nvPr/>
+        </p:nvSpPr>
+        <p:spPr>
+          <a:xfrm>
+            <a:off x="1531620" y="3246120"/>
+            <a:ext cx="914400" cy="274320"/>
+          </a:xfrm>
+          <a:prstGeom prst="rect">
+            <a:avLst/>
+          </a:prstGeom>
+          <a:noFill/>
+        </p:spPr>
+        <p:txBody>
+          <a:bodyPr wrap="square" lIns="0" rIns="0" tIns="0" bIns="0">
+            <a:spAutoFit/>
+          </a:bodyPr>
+          <a:lstStyle/>
+          <a:p>
+            <a:r>
+              <a:rPr sz="1100" b="0">
+                <a:solidFill>
+                  <a:srgbClr val="62746D"/>
+                </a:solidFill>
+                <a:latin typeface="Apple SD Gothic Neo"/>
+              </a:rPr>
+              <a:t>일반 대화</a:t>
+            </a:r>
+          </a:p>
+        </p:txBody>
+      </p:sp>
+      <p:cxnSp>
+        <p:nvCxnSpPr>
+          <p:cNvPr id="25" name="Connector 24"/>
+          <p:cNvCxnSpPr/>
+          <p:nvPr/>
+        </p:nvCxnSpPr>
+        <p:spPr>
+          <a:xfrm>
+            <a:off x="10812780" y="3108960"/>
+            <a:ext cx="0" cy="594360"/>
+          </a:xfrm>
+          <a:prstGeom prst="line">
+            <a:avLst/>
+          </a:prstGeom>
+          <a:ln w="19050">
+            <a:solidFill>
+              <a:srgbClr val="62746D"/>
+            </a:solidFill>
+            <a:tailEnd type="triangle"/>
+          </a:ln>
+        </p:spPr>
+        <p:style>
+          <a:lnRef idx="2">
+            <a:schemeClr val="accent1"/>
+          </a:lnRef>
+          <a:fillRef idx="0">
+            <a:schemeClr val="accent1"/>
+          </a:fillRef>
+          <a:effectRef idx="1">
+            <a:schemeClr val="accent1"/>
+          </a:effectRef>
+          <a:fontRef idx="minor">
+            <a:schemeClr val="tx1"/>
+          </a:fontRef>
+        </p:style>
+      </p:cxnSp>
+      <p:cxnSp>
+        <p:nvCxnSpPr>
+          <p:cNvPr id="26" name="Connector 25"/>
+          <p:cNvCxnSpPr/>
+          <p:nvPr/>
+        </p:nvCxnSpPr>
+        <p:spPr>
+          <a:xfrm flipV="1">
+            <a:off x="8938259" y="2057400"/>
+            <a:ext cx="0" cy="320040"/>
+          </a:xfrm>
+          <a:prstGeom prst="line">
+            <a:avLst/>
+          </a:prstGeom>
+          <a:ln w="19050">
+            <a:solidFill>
+              <a:srgbClr val="16785C"/>
+            </a:solidFill>
+          </a:ln>
+        </p:spPr>
+        <p:style>
+          <a:lnRef idx="2">
+            <a:schemeClr val="accent1"/>
+          </a:lnRef>
+          <a:fillRef idx="0">
+            <a:schemeClr val="accent1"/>
+          </a:fillRef>
+          <a:effectRef idx="1">
+            <a:schemeClr val="accent1"/>
+          </a:effectRef>
+          <a:fontRef idx="minor">
+            <a:schemeClr val="tx1"/>
+          </a:fontRef>
+        </p:style>
+      </p:cxnSp>
+      <p:cxnSp>
+        <p:nvCxnSpPr>
+          <p:cNvPr id="27" name="Connector 26"/>
+          <p:cNvCxnSpPr/>
+          <p:nvPr/>
+        </p:nvCxnSpPr>
+        <p:spPr>
+          <a:xfrm flipH="1">
+            <a:off x="7063740" y="2057400"/>
+            <a:ext cx="1874519" cy="0"/>
+          </a:xfrm>
+          <a:prstGeom prst="line">
+            <a:avLst/>
+          </a:prstGeom>
+          <a:ln w="19050">
+            <a:solidFill>
+              <a:srgbClr val="16785C"/>
+            </a:solidFill>
+          </a:ln>
+        </p:spPr>
+        <p:style>
+          <a:lnRef idx="2">
+            <a:schemeClr val="accent1"/>
+          </a:lnRef>
+          <a:fillRef idx="0">
+            <a:schemeClr val="accent1"/>
+          </a:fillRef>
+          <a:effectRef idx="1">
+            <a:schemeClr val="accent1"/>
+          </a:effectRef>
+          <a:fontRef idx="minor">
+            <a:schemeClr val="tx1"/>
+          </a:fontRef>
+        </p:style>
+      </p:cxnSp>
+      <p:cxnSp>
+        <p:nvCxnSpPr>
+          <p:cNvPr id="28" name="Connector 27"/>
+          <p:cNvCxnSpPr/>
+          <p:nvPr/>
+        </p:nvCxnSpPr>
+        <p:spPr>
+          <a:xfrm>
+            <a:off x="7063740" y="2057400"/>
+            <a:ext cx="0" cy="320040"/>
+          </a:xfrm>
+          <a:prstGeom prst="line">
+            <a:avLst/>
+          </a:prstGeom>
+          <a:ln w="19050">
+            <a:solidFill>
+              <a:srgbClr val="16785C"/>
+            </a:solidFill>
+            <a:tailEnd type="triangle"/>
+          </a:ln>
+        </p:spPr>
+        <p:style>
+          <a:lnRef idx="2">
+            <a:schemeClr val="accent1"/>
+          </a:lnRef>
+          <a:fillRef idx="0">
+            <a:schemeClr val="accent1"/>
+          </a:fillRef>
+          <a:effectRef idx="1">
+            <a:schemeClr val="accent1"/>
+          </a:effectRef>
+          <a:fontRef idx="minor">
+            <a:schemeClr val="tx1"/>
+          </a:fontRef>
+        </p:style>
+      </p:cxnSp>
+      <p:sp>
+        <p:nvSpPr>
+          <p:cNvPr id="29" name="TextBox 28"/>
+          <p:cNvSpPr txBox="1"/>
+          <p:nvPr/>
+        </p:nvSpPr>
+        <p:spPr>
+          <a:xfrm>
+            <a:off x="7063740" y="1691640"/>
+            <a:ext cx="1874519" cy="274320"/>
+          </a:xfrm>
+          <a:prstGeom prst="rect">
+            <a:avLst/>
+          </a:prstGeom>
+          <a:noFill/>
+        </p:spPr>
+        <p:txBody>
+          <a:bodyPr wrap="square" lIns="0" rIns="0" tIns="0" bIns="0">
+            <a:spAutoFit/>
+          </a:bodyPr>
+          <a:lstStyle/>
+          <a:p>
+            <a:pPr algn="ctr"/>
+            <a:r>
+              <a:rPr sz="1100" b="1">
+                <a:solidFill>
+                  <a:srgbClr val="16785C"/>
+                </a:solidFill>
+                <a:latin typeface="Apple SD Gothic Neo"/>
+              </a:rPr>
+              <a:t>부족 시 재조사 (최대 1회)</a:t>
+            </a:r>
+          </a:p>
+        </p:txBody>
+      </p:sp>
+      <p:cxnSp>
+        <p:nvCxnSpPr>
+          <p:cNvPr id="30" name="Connector 29"/>
+          <p:cNvCxnSpPr/>
+          <p:nvPr/>
+        </p:nvCxnSpPr>
+        <p:spPr>
+          <a:xfrm flipH="1">
+            <a:off x="9738359" y="3931920"/>
+            <a:ext cx="274321" cy="0"/>
+          </a:xfrm>
+          <a:prstGeom prst="line">
+            <a:avLst/>
+          </a:prstGeom>
+          <a:ln w="19050">
+            <a:solidFill>
+              <a:srgbClr val="62746D"/>
+            </a:solidFill>
+            <a:tailEnd type="triangle"/>
+          </a:ln>
+        </p:spPr>
+        <p:style>
+          <a:lnRef idx="2">
+            <a:schemeClr val="accent1"/>
+          </a:lnRef>
+          <a:fillRef idx="0">
+            <a:schemeClr val="accent1"/>
+          </a:fillRef>
+          <a:effectRef idx="1">
+            <a:schemeClr val="accent1"/>
+          </a:effectRef>
+          <a:fontRef idx="minor">
+            <a:schemeClr val="tx1"/>
+          </a:fontRef>
+        </p:style>
+      </p:cxnSp>
+      <p:cxnSp>
+        <p:nvCxnSpPr>
+          <p:cNvPr id="31" name="Connector 30"/>
+          <p:cNvCxnSpPr/>
+          <p:nvPr/>
+        </p:nvCxnSpPr>
+        <p:spPr>
+          <a:xfrm flipH="1">
+            <a:off x="7863840" y="3931920"/>
+            <a:ext cx="274319" cy="0"/>
+          </a:xfrm>
+          <a:prstGeom prst="line">
+            <a:avLst/>
+          </a:prstGeom>
+          <a:ln w="19050">
+            <a:solidFill>
+              <a:srgbClr val="62746D"/>
+            </a:solidFill>
+            <a:tailEnd type="triangle"/>
+          </a:ln>
+        </p:spPr>
+        <p:style>
+          <a:lnRef idx="2">
+            <a:schemeClr val="accent1"/>
+          </a:lnRef>
+          <a:fillRef idx="0">
+            <a:schemeClr val="accent1"/>
+          </a:fillRef>
+          <a:effectRef idx="1">
+            <a:schemeClr val="accent1"/>
+          </a:effectRef>
+          <a:fontRef idx="minor">
+            <a:schemeClr val="tx1"/>
+          </a:fontRef>
+        </p:style>
+      </p:cxnSp>
+      <p:cxnSp>
+        <p:nvCxnSpPr>
+          <p:cNvPr id="32" name="Connector 31"/>
+          <p:cNvCxnSpPr/>
+          <p:nvPr/>
+        </p:nvCxnSpPr>
+        <p:spPr>
+          <a:xfrm>
+            <a:off x="7863840" y="4251960"/>
+            <a:ext cx="274319" cy="0"/>
+          </a:xfrm>
+          <a:prstGeom prst="line">
+            <a:avLst/>
+          </a:prstGeom>
+          <a:ln w="19050">
+            <a:solidFill>
+              <a:srgbClr val="16785C"/>
+            </a:solidFill>
+            <a:tailEnd type="triangle"/>
+          </a:ln>
+        </p:spPr>
+        <p:style>
+          <a:lnRef idx="2">
+            <a:schemeClr val="accent1"/>
+          </a:lnRef>
+          <a:fillRef idx="0">
+            <a:schemeClr val="accent1"/>
+          </a:fillRef>
+          <a:effectRef idx="1">
+            <a:schemeClr val="accent1"/>
+          </a:effectRef>
+          <a:fontRef idx="minor">
+            <a:schemeClr val="tx1"/>
+          </a:fontRef>
+        </p:style>
+      </p:cxnSp>
+      <p:cxnSp>
+        <p:nvCxnSpPr>
+          <p:cNvPr id="33" name="Connector 32"/>
+          <p:cNvCxnSpPr/>
+          <p:nvPr/>
+        </p:nvCxnSpPr>
+        <p:spPr>
+          <a:xfrm flipH="1">
+            <a:off x="5989320" y="4069080"/>
+            <a:ext cx="274320" cy="0"/>
+          </a:xfrm>
+          <a:prstGeom prst="line">
+            <a:avLst/>
+          </a:prstGeom>
+          <a:ln w="19050">
+            <a:solidFill>
+              <a:srgbClr val="16785C"/>
+            </a:solidFill>
+            <a:tailEnd type="triangle"/>
+          </a:ln>
+        </p:spPr>
+        <p:style>
+          <a:lnRef idx="2">
+            <a:schemeClr val="accent1"/>
+          </a:lnRef>
+          <a:fillRef idx="0">
+            <a:schemeClr val="accent1"/>
+          </a:fillRef>
+          <a:effectRef idx="1">
+            <a:schemeClr val="accent1"/>
+          </a:effectRef>
+          <a:fontRef idx="minor">
+            <a:schemeClr val="tx1"/>
+          </a:fontRef>
+        </p:style>
+      </p:cxnSp>
+      <p:sp>
+        <p:nvSpPr>
+          <p:cNvPr id="34" name="TextBox 33"/>
+          <p:cNvSpPr txBox="1"/>
+          <p:nvPr/>
+        </p:nvSpPr>
+        <p:spPr>
+          <a:xfrm>
+            <a:off x="5852159" y="3410712"/>
+            <a:ext cx="731520" cy="228600"/>
+          </a:xfrm>
+          <a:prstGeom prst="rect">
+            <a:avLst/>
+          </a:prstGeom>
+          <a:noFill/>
+        </p:spPr>
+        <p:txBody>
+          <a:bodyPr wrap="square" lIns="0" rIns="0" tIns="0" bIns="0">
+            <a:spAutoFit/>
+          </a:bodyPr>
+          <a:lstStyle/>
+          <a:p>
+            <a:r>
+              <a:rPr sz="1100" b="1">
+                <a:solidFill>
+                  <a:srgbClr val="16785C"/>
+                </a:solidFill>
+                <a:latin typeface="Apple SD Gothic Neo"/>
+              </a:rPr>
+              <a:t>통과</a:t>
+            </a:r>
+          </a:p>
+        </p:txBody>
+      </p:sp>
+      <p:sp>
+        <p:nvSpPr>
+          <p:cNvPr id="35" name="TextBox 34"/>
+          <p:cNvSpPr txBox="1"/>
+          <p:nvPr/>
+        </p:nvSpPr>
+        <p:spPr>
+          <a:xfrm>
+            <a:off x="7543800" y="4498848"/>
+            <a:ext cx="1463040" cy="228600"/>
+          </a:xfrm>
+          <a:prstGeom prst="rect">
+            <a:avLst/>
+          </a:prstGeom>
+          <a:noFill/>
+        </p:spPr>
+        <p:txBody>
+          <a:bodyPr wrap="square" lIns="0" rIns="0" tIns="0" bIns="0">
+            <a:spAutoFit/>
+          </a:bodyPr>
+          <a:lstStyle/>
+          <a:p>
+            <a:pPr algn="ctr"/>
+            <a:r>
+              <a:rPr sz="1100" b="1">
+                <a:solidFill>
+                  <a:srgbClr val="16785C"/>
+                </a:solidFill>
+                <a:latin typeface="Apple SD Gothic Neo"/>
+              </a:rPr>
+              <a:t>반려 → 재작성</a:t>
+            </a:r>
+          </a:p>
+        </p:txBody>
+      </p:sp>
+      <p:cxnSp>
+        <p:nvCxnSpPr>
+          <p:cNvPr id="36" name="Connector 35"/>
+          <p:cNvCxnSpPr/>
+          <p:nvPr/>
+        </p:nvCxnSpPr>
+        <p:spPr>
+          <a:xfrm>
+            <a:off x="7063740" y="4434840"/>
+            <a:ext cx="0" cy="1143000"/>
+          </a:xfrm>
+          <a:prstGeom prst="line">
+            <a:avLst/>
+          </a:prstGeom>
+          <a:ln w="19050">
+            <a:solidFill>
+              <a:srgbClr val="B6503E"/>
+            </a:solidFill>
+          </a:ln>
+        </p:spPr>
+        <p:style>
+          <a:lnRef idx="2">
+            <a:schemeClr val="accent1"/>
+          </a:lnRef>
+          <a:fillRef idx="0">
+            <a:schemeClr val="accent1"/>
+          </a:fillRef>
+          <a:effectRef idx="1">
+            <a:schemeClr val="accent1"/>
+          </a:effectRef>
+          <a:fontRef idx="minor">
+            <a:schemeClr val="tx1"/>
+          </a:fontRef>
+        </p:style>
+      </p:cxnSp>
+      <p:cxnSp>
+        <p:nvCxnSpPr>
+          <p:cNvPr id="37" name="Connector 36"/>
+          <p:cNvCxnSpPr/>
+          <p:nvPr/>
+        </p:nvCxnSpPr>
+        <p:spPr>
+          <a:xfrm>
+            <a:off x="7063740" y="5577840"/>
+            <a:ext cx="1074419" cy="0"/>
+          </a:xfrm>
+          <a:prstGeom prst="line">
+            <a:avLst/>
+          </a:prstGeom>
+          <a:ln w="19050">
+            <a:solidFill>
+              <a:srgbClr val="B6503E"/>
+            </a:solidFill>
+            <a:tailEnd type="triangle"/>
+          </a:ln>
+        </p:spPr>
+        <p:style>
+          <a:lnRef idx="2">
+            <a:schemeClr val="accent1"/>
+          </a:lnRef>
+          <a:fillRef idx="0">
+            <a:schemeClr val="accent1"/>
+          </a:fillRef>
+          <a:effectRef idx="1">
+            <a:schemeClr val="accent1"/>
+          </a:effectRef>
+          <a:fontRef idx="minor">
+            <a:schemeClr val="tx1"/>
+          </a:fontRef>
+        </p:style>
+      </p:cxnSp>
+      <p:cxnSp>
+        <p:nvCxnSpPr>
+          <p:cNvPr id="38" name="Connector 37"/>
+          <p:cNvCxnSpPr/>
+          <p:nvPr/>
+        </p:nvCxnSpPr>
+        <p:spPr>
+          <a:xfrm>
+            <a:off x="10812780" y="4434840"/>
+            <a:ext cx="0" cy="1143000"/>
+          </a:xfrm>
+          <a:prstGeom prst="line">
+            <a:avLst/>
+          </a:prstGeom>
+          <a:ln w="19050">
+            <a:solidFill>
+              <a:srgbClr val="B6503E"/>
+            </a:solidFill>
+          </a:ln>
+        </p:spPr>
+        <p:style>
+          <a:lnRef idx="2">
+            <a:schemeClr val="accent1"/>
+          </a:lnRef>
+          <a:fillRef idx="0">
+            <a:schemeClr val="accent1"/>
+          </a:fillRef>
+          <a:effectRef idx="1">
+            <a:schemeClr val="accent1"/>
+          </a:effectRef>
+          <a:fontRef idx="minor">
+            <a:schemeClr val="tx1"/>
+          </a:fontRef>
+        </p:style>
+      </p:cxnSp>
+      <p:cxnSp>
+        <p:nvCxnSpPr>
+          <p:cNvPr id="39" name="Connector 38"/>
+          <p:cNvCxnSpPr/>
+          <p:nvPr/>
+        </p:nvCxnSpPr>
+        <p:spPr>
+          <a:xfrm flipH="1">
+            <a:off x="9738359" y="5577840"/>
+            <a:ext cx="1074421" cy="0"/>
+          </a:xfrm>
+          <a:prstGeom prst="line">
+            <a:avLst/>
+          </a:prstGeom>
+          <a:ln w="19050">
+            <a:solidFill>
+              <a:srgbClr val="B6503E"/>
+            </a:solidFill>
+            <a:tailEnd type="triangle"/>
+          </a:ln>
+        </p:spPr>
+        <p:style>
+          <a:lnRef idx="2">
+            <a:schemeClr val="accent1"/>
+          </a:lnRef>
+          <a:fillRef idx="0">
+            <a:schemeClr val="accent1"/>
+          </a:fillRef>
+          <a:effectRef idx="1">
+            <a:schemeClr val="accent1"/>
+          </a:effectRef>
+          <a:fontRef idx="minor">
+            <a:schemeClr val="tx1"/>
+          </a:fontRef>
+        </p:style>
+      </p:cxnSp>
+      <p:sp>
+        <p:nvSpPr>
+          <p:cNvPr id="40" name="TextBox 39"/>
+          <p:cNvSpPr txBox="1"/>
+          <p:nvPr/>
+        </p:nvSpPr>
+        <p:spPr>
+          <a:xfrm>
+            <a:off x="7155179" y="4846320"/>
+            <a:ext cx="1280160" cy="228600"/>
+          </a:xfrm>
+          <a:prstGeom prst="rect">
+            <a:avLst/>
+          </a:prstGeom>
+          <a:noFill/>
+        </p:spPr>
+        <p:txBody>
+          <a:bodyPr wrap="square" lIns="0" rIns="0" tIns="0" bIns="0">
+            <a:spAutoFit/>
+          </a:bodyPr>
+          <a:lstStyle/>
+          <a:p>
+            <a:r>
+              <a:rPr sz="1100" b="1">
+                <a:solidFill>
+                  <a:srgbClr val="B6503E"/>
+                </a:solidFill>
+                <a:latin typeface="Apple SD Gothic Neo"/>
+              </a:rPr>
+              <a:t>3회 불일치</a:t>
+            </a:r>
+          </a:p>
+        </p:txBody>
+      </p:sp>
+      <p:sp>
+        <p:nvSpPr>
+          <p:cNvPr id="41" name="TextBox 40"/>
+          <p:cNvSpPr txBox="1"/>
+          <p:nvPr/>
+        </p:nvSpPr>
+        <p:spPr>
+          <a:xfrm>
+            <a:off x="10904219" y="4846320"/>
+            <a:ext cx="914400" cy="228600"/>
+          </a:xfrm>
+          <a:prstGeom prst="rect">
+            <a:avLst/>
+          </a:prstGeom>
+          <a:noFill/>
+        </p:spPr>
+        <p:txBody>
+          <a:bodyPr wrap="square" lIns="0" rIns="0" tIns="0" bIns="0">
+            <a:spAutoFit/>
+          </a:bodyPr>
+          <a:lstStyle/>
+          <a:p>
+            <a:r>
+              <a:rPr sz="1100" b="1">
+                <a:solidFill>
+                  <a:srgbClr val="B6503E"/>
+                </a:solidFill>
+                <a:latin typeface="Apple SD Gothic Neo"/>
+              </a:rPr>
+              <a:t>근거 0건</a:t>
+            </a:r>
+          </a:p>
+        </p:txBody>
+      </p:sp>
+      <p:sp>
+        <p:nvSpPr>
+          <p:cNvPr id="42" name="Rounded Rectangle 41"/>
+          <p:cNvSpPr/>
+          <p:nvPr/>
+        </p:nvSpPr>
+        <p:spPr>
+          <a:xfrm>
+            <a:off x="640080" y="6053328"/>
+            <a:ext cx="320040" cy="201168"/>
+          </a:xfrm>
+          <a:prstGeom prst="roundRect">
+            <a:avLst/>
+          </a:prstGeom>
+          <a:solidFill>
+            <a:srgbClr val="A4DAC2"/>
+          </a:solidFill>
+          <a:ln>
+            <a:solidFill>
+              <a:srgbClr val="B7C4BE"/>
+            </a:solidFill>
+          </a:ln>
+          <a:effectLst/>
+        </p:spPr>
+        <p:style>
+          <a:lnRef idx="1">
+            <a:schemeClr val="accent1"/>
+          </a:lnRef>
+          <a:fillRef idx="3">
+            <a:schemeClr val="accent1"/>
+          </a:fillRef>
+          <a:effectRef idx="2">
+            <a:schemeClr val="accent1"/>
+          </a:effectRef>
+          <a:fontRef idx="minor">
+            <a:schemeClr val="lt1"/>
+          </a:fontRef>
+        </p:style>
+        <p:txBody>
+          <a:bodyPr rtlCol="0" anchor="ctr"/>
+          <a:lstStyle/>
+          <a:p>
+            <a:pPr algn="ctr"/>
+          </a:p>
+        </p:txBody>
+      </p:sp>
+      <p:sp>
+        <p:nvSpPr>
+          <p:cNvPr id="43" name="TextBox 42"/>
+          <p:cNvSpPr txBox="1"/>
+          <p:nvPr/>
+        </p:nvSpPr>
+        <p:spPr>
+          <a:xfrm>
+            <a:off x="1051560" y="6035040"/>
+            <a:ext cx="2194560" cy="237744"/>
+          </a:xfrm>
+          <a:prstGeom prst="rect">
+            <a:avLst/>
+          </a:prstGeom>
+          <a:noFill/>
+        </p:spPr>
+        <p:txBody>
+          <a:bodyPr wrap="square" lIns="0" rIns="0" tIns="0" bIns="0">
+            <a:spAutoFit/>
+          </a:bodyPr>
+          <a:lstStyle/>
+          <a:p>
+            <a:r>
+              <a:rPr sz="1200" b="0">
+                <a:solidFill>
+                  <a:srgbClr val="19382F"/>
+                </a:solidFill>
+                <a:latin typeface="Apple SD Gothic Neo"/>
+              </a:rPr>
+              <a:t>직접 추가 · 변경한 노드</a:t>
+            </a:r>
+          </a:p>
+        </p:txBody>
+      </p:sp>
+      <p:sp>
+        <p:nvSpPr>
+          <p:cNvPr id="44" name="Rounded Rectangle 43"/>
+          <p:cNvSpPr/>
+          <p:nvPr/>
+        </p:nvSpPr>
+        <p:spPr>
+          <a:xfrm>
+            <a:off x="3291839" y="6053328"/>
+            <a:ext cx="320040" cy="201168"/>
+          </a:xfrm>
+          <a:prstGeom prst="roundRect">
+            <a:avLst/>
+          </a:prstGeom>
+          <a:solidFill>
+            <a:srgbClr val="EEF5F1"/>
+          </a:solidFill>
+          <a:ln>
+            <a:solidFill>
+              <a:srgbClr val="B7C4BE"/>
+            </a:solidFill>
+          </a:ln>
+          <a:effectLst/>
+        </p:spPr>
+        <p:style>
+          <a:lnRef idx="1">
+            <a:schemeClr val="accent1"/>
+          </a:lnRef>
+          <a:fillRef idx="3">
+            <a:schemeClr val="accent1"/>
+          </a:fillRef>
+          <a:effectRef idx="2">
+            <a:schemeClr val="accent1"/>
+          </a:effectRef>
+          <a:fontRef idx="minor">
+            <a:schemeClr val="lt1"/>
+          </a:fontRef>
+        </p:style>
+        <p:txBody>
+          <a:bodyPr rtlCol="0" anchor="ctr"/>
+          <a:lstStyle/>
+          <a:p>
+            <a:pPr algn="ctr"/>
+          </a:p>
+        </p:txBody>
+      </p:sp>
+      <p:sp>
+        <p:nvSpPr>
+          <p:cNvPr id="45" name="TextBox 44"/>
+          <p:cNvSpPr txBox="1"/>
+          <p:nvPr/>
+        </p:nvSpPr>
+        <p:spPr>
+          <a:xfrm>
+            <a:off x="3703320" y="6035040"/>
+            <a:ext cx="2194560" cy="237744"/>
+          </a:xfrm>
+          <a:prstGeom prst="rect">
+            <a:avLst/>
+          </a:prstGeom>
+          <a:noFill/>
+        </p:spPr>
+        <p:txBody>
+          <a:bodyPr wrap="square" lIns="0" rIns="0" tIns="0" bIns="0">
+            <a:spAutoFit/>
+          </a:bodyPr>
+          <a:lstStyle/>
+          <a:p>
+            <a:r>
+              <a:rPr sz="1200" b="0">
+                <a:solidFill>
+                  <a:srgbClr val="19382F"/>
+                </a:solidFill>
+                <a:latin typeface="Apple SD Gothic Neo"/>
+              </a:rPr>
+              <a:t>제공받은 노드</a:t>
+            </a:r>
+          </a:p>
+        </p:txBody>
+      </p:sp>
+      <p:sp>
+        <p:nvSpPr>
+          <p:cNvPr id="46" name="TextBox 45"/>
+          <p:cNvSpPr txBox="1"/>
+          <p:nvPr/>
+        </p:nvSpPr>
+        <p:spPr>
+          <a:xfrm>
+            <a:off x="6035040" y="6035040"/>
+            <a:ext cx="5486400" cy="237744"/>
+          </a:xfrm>
+          <a:prstGeom prst="rect">
+            <a:avLst/>
+          </a:prstGeom>
+          <a:noFill/>
+        </p:spPr>
+        <p:txBody>
+          <a:bodyPr wrap="square" lIns="0" rIns="0" tIns="0" bIns="0">
+            <a:spAutoFit/>
+          </a:bodyPr>
+          <a:lstStyle/>
+          <a:p>
+            <a:r>
+              <a:rPr sz="1200" b="0">
+                <a:solidFill>
+                  <a:srgbClr val="62746D"/>
+                </a:solidFill>
+                <a:latin typeface="Apple SD Gothic Neo"/>
+              </a:rPr>
+              <a:t>research 내부: monitoring_agent · runbook_agent 서브그래프</a:t>
+            </a:r>
           </a:p>
         </p:txBody>
       </p:sp>
@@ -17596,6 +19677,40 @@
               <a:t>제공 기반: LangGraph·서버·세션  |  직접 개선: 조사 분리·검색·검증·실패 분기  |  LangSmith: 실행 추적만 확인</a:t>
             </a:r>
             <a:endParaRPr lang="en-US" sz="1000" dirty="0"/>
+          </a:p>
+        </p:txBody>
+      </p:sp>
+      <p:sp>
+        <p:nvSpPr>
+          <p:cNvPr id="46" name="TextBox 45"/>
+          <p:cNvSpPr txBox="1"/>
+          <p:nvPr/>
+        </p:nvSpPr>
+        <p:spPr>
+          <a:xfrm>
+            <a:off x="685800" y="6272784"/>
+            <a:ext cx="10881360" cy="182880"/>
+          </a:xfrm>
+          <a:prstGeom prst="rect">
+            <a:avLst/>
+          </a:prstGeom>
+          <a:noFill/>
+        </p:spPr>
+        <p:txBody>
+          <a:bodyPr wrap="square" lIns="0" rIns="0" tIns="0" bIns="0">
+            <a:spAutoFit/>
+          </a:bodyPr>
+          <a:lstStyle/>
+          <a:p>
+            <a:r>
+              <a:rPr sz="1100" b="0">
+                <a:solidFill>
+                  <a:srgbClr val="62746D"/>
+                </a:solidFill>
+                <a:latin typeface="Apple SD Gothic Neo"/>
+              </a:rPr>
+              <a:t>요약도: route · gate · replan_check · analysis · finalize 생략 (전체 노드는 부록 A-6)</a:t>
+            </a:r>
           </a:p>
         </p:txBody>
       </p:sp>

--- a/submission/AI_Capstone_발표.pptx
+++ b/submission/AI_Capstone_발표.pptx
@@ -1955,13 +1955,13 @@
           <a:lstStyle/>
           <a:p>
             <a:r>
-              <a:t>[목표 50초] 흐름도는 요약도(전체 노드는 부록 A-6), 왼쪽에서 오른쪽으로 따라가기, 막히면 '근거 없으면 생략, 다르면 재작성'만 강조</a:t>
+              <a:t>[목표 65초] 그림을 왼쪽에서 오른쪽으로 따라가기. 근거 확인(초록) → 아래 빨간 경로 → 수치 검증(초록) → 되돌아가는 화살표 순서로 가리키기, 마지막에 아래 세 항목을 훑기</a:t>
             </a:r>
           </a:p>
           <a:p/>
           <a:p>
             <a:r>
-              <a:t>이어서 구조와 사용 기술입니다. 요약한 처리 흐름은 질문과 계획, 모니터링과 매뉴얼 조사, 근거 확인, 답변 작성, 수치 검증 순서입니다. 근거가 없으면 작성을 생략하고, 수치가 다르면 재작성하며, 세 번 실패하면 실패를 안내합니다. 조사는 서브그래프 두 개로 나눴고, 독립된 모델이 판단하는 구조는 아닙니다. MCP로 도구를 연결하고 검색한 매뉴얼을 답변 작성에 활용했습니다. 모듈 분리와 의존성 주입으로 테스트를 구성했고, LangSmith는 추적 확인까지만 했습니다.</a:t>
+              <a:t>이어서 구조와 사용 기술입니다. 그림은 요약한 흐름이며 전체 노드는 부록에 있습니다. 질문을 받아 계획한 뒤, 모니터링과 매뉴얼 검색 두 조사를 서브에이전트로 나눠 동시에 진행합니다. 근거 확인 단계에서 모니터링 자료가 하나도 없으면 작성 모델을 호출하지 않고 자료 부족으로 끝냅니다. 근거가 있으면 답변을 작성하고, 수치 검증에서 조회값과 대조해 다르면 다시 쓰게 합니다. 최초 작성 포함 세 번 실패하면 실패를 안내합니다. 기술로는 MCP로 도구를 연결하고, 검색한 매뉴얼을 답변에 활용하는 RAG를 적용했습니다. 서브에이전트는 모델이 판단하는 구조가 아니라 도구를 호출하는 작업자이며, 의존성 주입으로 테스트에서 도구를 바꿔 끼울 수 있게 했습니다.</a:t>
             </a:r>
           </a:p>
         </p:txBody>

--- a/submission/AI_Capstone_발표.pptx
+++ b/submission/AI_Capstone_발표.pptx
@@ -1955,13 +1955,13 @@
           <a:lstStyle/>
           <a:p>
             <a:r>
-              <a:t>[목표 65초] 그림을 왼쪽에서 오른쪽으로 따라가기. 근거 확인(초록) → 아래 빨간 경로 → 수치 검증(초록) → 되돌아가는 화살표 순서로 가리키기, 마지막에 아래 세 항목을 훑기</a:t>
+              <a:t>[목표 70초] 그림을 왼쪽에서 오른쪽으로 따라가기. 근거 확인(초록) → 아래 빨간 경로 → 수치 검증(초록) → 되돌아가는 화살표 순서로 가리키기, 마지막에 아래 세 항목을 훑기</a:t>
             </a:r>
           </a:p>
           <a:p/>
           <a:p>
             <a:r>
-              <a:t>이어서 구조와 사용 기술입니다. 그림은 요약한 흐름이며 전체 노드는 부록에 있습니다. 질문을 받아 계획한 뒤, 모니터링과 매뉴얼 검색 두 조사를 서브에이전트로 나눠 동시에 진행합니다. 근거 확인 단계에서 모니터링 자료가 하나도 없으면 작성 모델을 호출하지 않고 자료 부족으로 끝냅니다. 근거가 있으면 답변을 작성하고, 수치 검증에서 조회값과 대조해 다르면 다시 쓰게 합니다. 최초 작성 포함 세 번 실패하면 실패를 안내합니다. 기술로는 MCP로 도구를 연결하고, 검색한 매뉴얼을 답변에 활용하는 RAG를 적용했습니다. 서브에이전트는 모델이 판단하는 구조가 아니라 도구를 호출하는 작업자이며, 의존성 주입으로 테스트에서 도구를 바꿔 끼울 수 있게 했습니다.</a:t>
+              <a:t>이어서 구조와 사용 기술입니다. 그림은 요약한 흐름이며, 전체 노드는 부록에 있습니다. 먼저 질문을 받아 계획하고, 모니터링과 매뉴얼 검색을 서브에이전트 두 개로 나눠 동시에 조사합니다. 이어지는 근거 확인에서 모니터링 자료가 하나도 없으면, 작성 모델을 호출하지 않고 자료 부족으로 종료합니다. 근거가 있으면 답변을 쓰고, 수치 검증에서 수집값과 대조합니다. 다르면 사유를 알려 다시 쓰게 하고, 최초 작성 포함 세 번 실패하면 실패를 안내합니다. 사용 기술은 세 가지입니다. MCP로 모니터링과 매뉴얼 도구를 연결했고, 검색한 매뉴얼을 답변에 활용하는 RAG를 적용했습니다. 서브에이전트는 모델이 판단하는 구조가 아니라 도구를 호출하는 작업자입니다. 마지막으로 의존성 주입을 적용해, 테스트에서 도구를 쉽게 바꿔 끼울 수 있습니다.</a:t>
             </a:r>
           </a:p>
         </p:txBody>
